--- a/docs/intro.pptx
+++ b/docs/intro.pptx
@@ -1,6 +1,6 @@
 
 <file path=ppt/presentation.xml><?xml version="1.0" encoding="utf-8"?>
-<p:presentation xmlns:a="http://schemas.openxmlformats.org/drawingml/2006/main" xmlns:r="http://schemas.openxmlformats.org/officeDocument/2006/relationships" xmlns:p="http://schemas.openxmlformats.org/presentationml/2006/main" saveSubsetFonts="1" autoCompressPictures="0">
+<p:presentation xmlns:a="http://schemas.openxmlformats.org/drawingml/2006/main" xmlns:r="http://schemas.openxmlformats.org/officeDocument/2006/relationships" xmlns:p="http://schemas.openxmlformats.org/presentationml/2006/main" saveSubsetFonts="1">
   <p:sldMasterIdLst>
     <p:sldMasterId id="2147483648" r:id="rId1"/>
   </p:sldMasterIdLst>
@@ -8,13 +8,13 @@
     <p:sldId id="256" r:id="rId2"/>
     <p:sldId id="257" r:id="rId3"/>
   </p:sldIdLst>
-  <p:sldSz cx="9144000" cy="6858000" type="screen4x3"/>
+  <p:sldSz cx="12192000" cy="6858000"/>
   <p:notesSz cx="6858000" cy="9144000"/>
   <p:defaultTextStyle>
     <a:defPPr>
       <a:defRPr lang="en-US"/>
     </a:defPPr>
-    <a:lvl1pPr marL="0" algn="l" defTabSz="457200" rtl="0" eaLnBrk="1" latinLnBrk="0" hangingPunct="1">
+    <a:lvl1pPr marL="0" algn="l" defTabSz="914400" rtl="0" eaLnBrk="1" latinLnBrk="0" hangingPunct="1">
       <a:defRPr sz="1800" kern="1200">
         <a:solidFill>
           <a:schemeClr val="tx1"/>
@@ -24,7 +24,7 @@
         <a:cs typeface="+mn-cs"/>
       </a:defRPr>
     </a:lvl1pPr>
-    <a:lvl2pPr marL="457200" algn="l" defTabSz="457200" rtl="0" eaLnBrk="1" latinLnBrk="0" hangingPunct="1">
+    <a:lvl2pPr marL="457200" algn="l" defTabSz="914400" rtl="0" eaLnBrk="1" latinLnBrk="0" hangingPunct="1">
       <a:defRPr sz="1800" kern="1200">
         <a:solidFill>
           <a:schemeClr val="tx1"/>
@@ -34,7 +34,7 @@
         <a:cs typeface="+mn-cs"/>
       </a:defRPr>
     </a:lvl2pPr>
-    <a:lvl3pPr marL="914400" algn="l" defTabSz="457200" rtl="0" eaLnBrk="1" latinLnBrk="0" hangingPunct="1">
+    <a:lvl3pPr marL="914400" algn="l" defTabSz="914400" rtl="0" eaLnBrk="1" latinLnBrk="0" hangingPunct="1">
       <a:defRPr sz="1800" kern="1200">
         <a:solidFill>
           <a:schemeClr val="tx1"/>
@@ -44,7 +44,7 @@
         <a:cs typeface="+mn-cs"/>
       </a:defRPr>
     </a:lvl3pPr>
-    <a:lvl4pPr marL="1371600" algn="l" defTabSz="457200" rtl="0" eaLnBrk="1" latinLnBrk="0" hangingPunct="1">
+    <a:lvl4pPr marL="1371600" algn="l" defTabSz="914400" rtl="0" eaLnBrk="1" latinLnBrk="0" hangingPunct="1">
       <a:defRPr sz="1800" kern="1200">
         <a:solidFill>
           <a:schemeClr val="tx1"/>
@@ -54,7 +54,7 @@
         <a:cs typeface="+mn-cs"/>
       </a:defRPr>
     </a:lvl4pPr>
-    <a:lvl5pPr marL="1828800" algn="l" defTabSz="457200" rtl="0" eaLnBrk="1" latinLnBrk="0" hangingPunct="1">
+    <a:lvl5pPr marL="1828800" algn="l" defTabSz="914400" rtl="0" eaLnBrk="1" latinLnBrk="0" hangingPunct="1">
       <a:defRPr sz="1800" kern="1200">
         <a:solidFill>
           <a:schemeClr val="tx1"/>
@@ -64,7 +64,7 @@
         <a:cs typeface="+mn-cs"/>
       </a:defRPr>
     </a:lvl5pPr>
-    <a:lvl6pPr marL="2286000" algn="l" defTabSz="457200" rtl="0" eaLnBrk="1" latinLnBrk="0" hangingPunct="1">
+    <a:lvl6pPr marL="2286000" algn="l" defTabSz="914400" rtl="0" eaLnBrk="1" latinLnBrk="0" hangingPunct="1">
       <a:defRPr sz="1800" kern="1200">
         <a:solidFill>
           <a:schemeClr val="tx1"/>
@@ -74,7 +74,7 @@
         <a:cs typeface="+mn-cs"/>
       </a:defRPr>
     </a:lvl6pPr>
-    <a:lvl7pPr marL="2743200" algn="l" defTabSz="457200" rtl="0" eaLnBrk="1" latinLnBrk="0" hangingPunct="1">
+    <a:lvl7pPr marL="2743200" algn="l" defTabSz="914400" rtl="0" eaLnBrk="1" latinLnBrk="0" hangingPunct="1">
       <a:defRPr sz="1800" kern="1200">
         <a:solidFill>
           <a:schemeClr val="tx1"/>
@@ -84,7 +84,7 @@
         <a:cs typeface="+mn-cs"/>
       </a:defRPr>
     </a:lvl7pPr>
-    <a:lvl8pPr marL="3200400" algn="l" defTabSz="457200" rtl="0" eaLnBrk="1" latinLnBrk="0" hangingPunct="1">
+    <a:lvl8pPr marL="3200400" algn="l" defTabSz="914400" rtl="0" eaLnBrk="1" latinLnBrk="0" hangingPunct="1">
       <a:defRPr sz="1800" kern="1200">
         <a:solidFill>
           <a:schemeClr val="tx1"/>
@@ -94,7 +94,7 @@
         <a:cs typeface="+mn-cs"/>
       </a:defRPr>
     </a:lvl8pPr>
-    <a:lvl9pPr marL="3657600" algn="l" defTabSz="457200" rtl="0" eaLnBrk="1" latinLnBrk="0" hangingPunct="1">
+    <a:lvl9pPr marL="3657600" algn="l" defTabSz="914400" rtl="0" eaLnBrk="1" latinLnBrk="0" hangingPunct="1">
       <a:defRPr sz="1800" kern="1200">
         <a:solidFill>
           <a:schemeClr val="tx1"/>
@@ -105,22 +105,6 @@
       </a:defRPr>
     </a:lvl9pPr>
   </p:defaultTextStyle>
-  <p:extLst>
-    <p:ext uri="{EFAFB233-063F-42B5-8137-9DF3F51BA10A}">
-      <p15:sldGuideLst xmlns:p15="http://schemas.microsoft.com/office/powerpoint/2012/main">
-        <p15:guide id="1" orient="horz" pos="2160">
-          <p15:clr>
-            <a:srgbClr val="A4A3A4"/>
-          </p15:clr>
-        </p15:guide>
-        <p15:guide id="2" pos="2880">
-          <p15:clr>
-            <a:srgbClr val="A4A3A4"/>
-          </p15:clr>
-        </p15:guide>
-      </p15:sldGuideLst>
-    </p:ext>
-  </p:extLst>
 </p:presentation>
 </file>
 
@@ -143,7 +127,13 @@
       </p:grpSpPr>
       <p:sp>
         <p:nvSpPr>
-          <p:cNvPr id="2" name="Title 1"/>
+          <p:cNvPr id="2" name="Title 1">
+            <a:extLst>
+              <a:ext uri="{FF2B5EF4-FFF2-40B4-BE49-F238E27FC236}">
+                <a16:creationId xmlns:a16="http://schemas.microsoft.com/office/drawing/2014/main" id="{8474F2C1-7887-3BC7-C7F4-32CB6153D0CF}"/>
+              </a:ext>
+            </a:extLst>
+          </p:cNvPr>
           <p:cNvSpPr>
             <a:spLocks noGrp="1"/>
           </p:cNvSpPr>
@@ -153,13 +143,17 @@
         </p:nvSpPr>
         <p:spPr>
           <a:xfrm>
-            <a:off x="685800" y="2130425"/>
-            <a:ext cx="7772400" cy="1470025"/>
+            <a:off x="1524000" y="1122363"/>
+            <a:ext cx="9144000" cy="2387600"/>
           </a:xfrm>
         </p:spPr>
         <p:txBody>
-          <a:bodyPr/>
-          <a:lstStyle/>
+          <a:bodyPr anchor="b"/>
+          <a:lstStyle>
+            <a:lvl1pPr algn="ctr">
+              <a:defRPr sz="6000"/>
+            </a:lvl1pPr>
+          </a:lstStyle>
           <a:p>
             <a:r>
               <a:rPr lang="en-US"/>
@@ -170,7 +164,13 @@
       </p:sp>
       <p:sp>
         <p:nvSpPr>
-          <p:cNvPr id="3" name="Subtitle 2"/>
+          <p:cNvPr id="3" name="Subtitle 2">
+            <a:extLst>
+              <a:ext uri="{FF2B5EF4-FFF2-40B4-BE49-F238E27FC236}">
+                <a16:creationId xmlns:a16="http://schemas.microsoft.com/office/drawing/2014/main" id="{6CC3A5F9-1EC2-9DB8-718D-5B6FE1E1E402}"/>
+              </a:ext>
+            </a:extLst>
+          </p:cNvPr>
           <p:cNvSpPr>
             <a:spLocks noGrp="1"/>
           </p:cNvSpPr>
@@ -180,8 +180,8 @@
         </p:nvSpPr>
         <p:spPr>
           <a:xfrm>
-            <a:off x="1371600" y="3886200"/>
-            <a:ext cx="6400800" cy="1752600"/>
+            <a:off x="1524000" y="3602038"/>
+            <a:ext cx="9144000" cy="1655762"/>
           </a:xfrm>
         </p:spPr>
         <p:txBody>
@@ -189,93 +189,39 @@
           <a:lstStyle>
             <a:lvl1pPr marL="0" indent="0" algn="ctr">
               <a:buNone/>
-              <a:defRPr>
-                <a:solidFill>
-                  <a:schemeClr val="tx1">
-                    <a:tint val="75000"/>
-                  </a:schemeClr>
-                </a:solidFill>
-              </a:defRPr>
+              <a:defRPr sz="2400"/>
             </a:lvl1pPr>
             <a:lvl2pPr marL="457200" indent="0" algn="ctr">
               <a:buNone/>
-              <a:defRPr>
-                <a:solidFill>
-                  <a:schemeClr val="tx1">
-                    <a:tint val="75000"/>
-                  </a:schemeClr>
-                </a:solidFill>
-              </a:defRPr>
+              <a:defRPr sz="2000"/>
             </a:lvl2pPr>
             <a:lvl3pPr marL="914400" indent="0" algn="ctr">
               <a:buNone/>
-              <a:defRPr>
-                <a:solidFill>
-                  <a:schemeClr val="tx1">
-                    <a:tint val="75000"/>
-                  </a:schemeClr>
-                </a:solidFill>
-              </a:defRPr>
+              <a:defRPr sz="1800"/>
             </a:lvl3pPr>
             <a:lvl4pPr marL="1371600" indent="0" algn="ctr">
               <a:buNone/>
-              <a:defRPr>
-                <a:solidFill>
-                  <a:schemeClr val="tx1">
-                    <a:tint val="75000"/>
-                  </a:schemeClr>
-                </a:solidFill>
-              </a:defRPr>
+              <a:defRPr sz="1600"/>
             </a:lvl4pPr>
             <a:lvl5pPr marL="1828800" indent="0" algn="ctr">
               <a:buNone/>
-              <a:defRPr>
-                <a:solidFill>
-                  <a:schemeClr val="tx1">
-                    <a:tint val="75000"/>
-                  </a:schemeClr>
-                </a:solidFill>
-              </a:defRPr>
+              <a:defRPr sz="1600"/>
             </a:lvl5pPr>
             <a:lvl6pPr marL="2286000" indent="0" algn="ctr">
               <a:buNone/>
-              <a:defRPr>
-                <a:solidFill>
-                  <a:schemeClr val="tx1">
-                    <a:tint val="75000"/>
-                  </a:schemeClr>
-                </a:solidFill>
-              </a:defRPr>
+              <a:defRPr sz="1600"/>
             </a:lvl6pPr>
             <a:lvl7pPr marL="2743200" indent="0" algn="ctr">
               <a:buNone/>
-              <a:defRPr>
-                <a:solidFill>
-                  <a:schemeClr val="tx1">
-                    <a:tint val="75000"/>
-                  </a:schemeClr>
-                </a:solidFill>
-              </a:defRPr>
+              <a:defRPr sz="1600"/>
             </a:lvl7pPr>
             <a:lvl8pPr marL="3200400" indent="0" algn="ctr">
               <a:buNone/>
-              <a:defRPr>
-                <a:solidFill>
-                  <a:schemeClr val="tx1">
-                    <a:tint val="75000"/>
-                  </a:schemeClr>
-                </a:solidFill>
-              </a:defRPr>
+              <a:defRPr sz="1600"/>
             </a:lvl8pPr>
             <a:lvl9pPr marL="3657600" indent="0" algn="ctr">
               <a:buNone/>
-              <a:defRPr>
-                <a:solidFill>
-                  <a:schemeClr val="tx1">
-                    <a:tint val="75000"/>
-                  </a:schemeClr>
-                </a:solidFill>
-              </a:defRPr>
+              <a:defRPr sz="1600"/>
             </a:lvl9pPr>
           </a:lstStyle>
           <a:p>
@@ -288,7 +234,13 @@
       </p:sp>
       <p:sp>
         <p:nvSpPr>
-          <p:cNvPr id="4" name="Date Placeholder 3"/>
+          <p:cNvPr id="4" name="Date Placeholder 3">
+            <a:extLst>
+              <a:ext uri="{FF2B5EF4-FFF2-40B4-BE49-F238E27FC236}">
+                <a16:creationId xmlns:a16="http://schemas.microsoft.com/office/drawing/2014/main" id="{991F8985-A9D0-3657-335C-5C7CC12BACCD}"/>
+              </a:ext>
+            </a:extLst>
+          </p:cNvPr>
           <p:cNvSpPr>
             <a:spLocks noGrp="1"/>
           </p:cNvSpPr>
@@ -301,7 +253,7 @@
           <a:bodyPr/>
           <a:lstStyle/>
           <a:p>
-            <a:fld id="{5BCAD085-E8A6-8845-BD4E-CB4CCA059FC4}" type="datetimeFigureOut">
+            <a:fld id="{8558E3C9-D613-4CEE-BBBF-192C1F40DF69}" type="datetimeFigureOut">
               <a:rPr lang="en-US" smtClean="0"/>
               <a:t>5/19/2026</a:t>
             </a:fld>
@@ -311,7 +263,13 @@
       </p:sp>
       <p:sp>
         <p:nvSpPr>
-          <p:cNvPr id="5" name="Footer Placeholder 4"/>
+          <p:cNvPr id="5" name="Footer Placeholder 4">
+            <a:extLst>
+              <a:ext uri="{FF2B5EF4-FFF2-40B4-BE49-F238E27FC236}">
+                <a16:creationId xmlns:a16="http://schemas.microsoft.com/office/drawing/2014/main" id="{47366855-5618-7D5E-2954-0D9AA5B14C92}"/>
+              </a:ext>
+            </a:extLst>
+          </p:cNvPr>
           <p:cNvSpPr>
             <a:spLocks noGrp="1"/>
           </p:cNvSpPr>
@@ -330,7 +288,13 @@
       </p:sp>
       <p:sp>
         <p:nvSpPr>
-          <p:cNvPr id="6" name="Slide Number Placeholder 5"/>
+          <p:cNvPr id="6" name="Slide Number Placeholder 5">
+            <a:extLst>
+              <a:ext uri="{FF2B5EF4-FFF2-40B4-BE49-F238E27FC236}">
+                <a16:creationId xmlns:a16="http://schemas.microsoft.com/office/drawing/2014/main" id="{6C8709C9-CFC6-4A2F-C297-6FC47C3D4FE6}"/>
+              </a:ext>
+            </a:extLst>
+          </p:cNvPr>
           <p:cNvSpPr>
             <a:spLocks noGrp="1"/>
           </p:cNvSpPr>
@@ -343,7 +307,7 @@
           <a:bodyPr/>
           <a:lstStyle/>
           <a:p>
-            <a:fld id="{C1FF6DA9-008F-8B48-92A6-B652298478BF}" type="slidenum">
+            <a:fld id="{EBE2A570-D620-4D74-B044-28AC27C05278}" type="slidenum">
               <a:rPr lang="en-US" smtClean="0"/>
               <a:t>‹#›</a:t>
             </a:fld>
@@ -354,7 +318,7 @@
     </p:spTree>
     <p:extLst>
       <p:ext uri="{BB962C8B-B14F-4D97-AF65-F5344CB8AC3E}">
-        <p14:creationId xmlns:p14="http://schemas.microsoft.com/office/powerpoint/2010/main" val="3168075583"/>
+        <p14:creationId xmlns:p14="http://schemas.microsoft.com/office/powerpoint/2010/main" val="113579252"/>
       </p:ext>
     </p:extLst>
   </p:cSld>
@@ -383,7 +347,13 @@
       </p:grpSpPr>
       <p:sp>
         <p:nvSpPr>
-          <p:cNvPr id="2" name="Title 1"/>
+          <p:cNvPr id="2" name="Title 1">
+            <a:extLst>
+              <a:ext uri="{FF2B5EF4-FFF2-40B4-BE49-F238E27FC236}">
+                <a16:creationId xmlns:a16="http://schemas.microsoft.com/office/drawing/2014/main" id="{77DF5F14-1B27-149D-93B5-F794DA3C5509}"/>
+              </a:ext>
+            </a:extLst>
+          </p:cNvPr>
           <p:cNvSpPr>
             <a:spLocks noGrp="1"/>
           </p:cNvSpPr>
@@ -405,7 +375,13 @@
       </p:sp>
       <p:sp>
         <p:nvSpPr>
-          <p:cNvPr id="3" name="Vertical Text Placeholder 2"/>
+          <p:cNvPr id="3" name="Vertical Text Placeholder 2">
+            <a:extLst>
+              <a:ext uri="{FF2B5EF4-FFF2-40B4-BE49-F238E27FC236}">
+                <a16:creationId xmlns:a16="http://schemas.microsoft.com/office/drawing/2014/main" id="{23D1B88B-9CCD-C404-3F49-6567CFAFE823}"/>
+              </a:ext>
+            </a:extLst>
+          </p:cNvPr>
           <p:cNvSpPr>
             <a:spLocks noGrp="1"/>
           </p:cNvSpPr>
@@ -456,7 +432,13 @@
       </p:sp>
       <p:sp>
         <p:nvSpPr>
-          <p:cNvPr id="4" name="Date Placeholder 3"/>
+          <p:cNvPr id="4" name="Date Placeholder 3">
+            <a:extLst>
+              <a:ext uri="{FF2B5EF4-FFF2-40B4-BE49-F238E27FC236}">
+                <a16:creationId xmlns:a16="http://schemas.microsoft.com/office/drawing/2014/main" id="{D9408553-D20A-F470-6E4C-6A89C3745A77}"/>
+              </a:ext>
+            </a:extLst>
+          </p:cNvPr>
           <p:cNvSpPr>
             <a:spLocks noGrp="1"/>
           </p:cNvSpPr>
@@ -469,7 +451,7 @@
           <a:bodyPr/>
           <a:lstStyle/>
           <a:p>
-            <a:fld id="{5BCAD085-E8A6-8845-BD4E-CB4CCA059FC4}" type="datetimeFigureOut">
+            <a:fld id="{8558E3C9-D613-4CEE-BBBF-192C1F40DF69}" type="datetimeFigureOut">
               <a:rPr lang="en-US" smtClean="0"/>
               <a:t>5/19/2026</a:t>
             </a:fld>
@@ -479,7 +461,13 @@
       </p:sp>
       <p:sp>
         <p:nvSpPr>
-          <p:cNvPr id="5" name="Footer Placeholder 4"/>
+          <p:cNvPr id="5" name="Footer Placeholder 4">
+            <a:extLst>
+              <a:ext uri="{FF2B5EF4-FFF2-40B4-BE49-F238E27FC236}">
+                <a16:creationId xmlns:a16="http://schemas.microsoft.com/office/drawing/2014/main" id="{1561000E-9984-9798-CCCA-CFC79097049A}"/>
+              </a:ext>
+            </a:extLst>
+          </p:cNvPr>
           <p:cNvSpPr>
             <a:spLocks noGrp="1"/>
           </p:cNvSpPr>
@@ -498,7 +486,13 @@
       </p:sp>
       <p:sp>
         <p:nvSpPr>
-          <p:cNvPr id="6" name="Slide Number Placeholder 5"/>
+          <p:cNvPr id="6" name="Slide Number Placeholder 5">
+            <a:extLst>
+              <a:ext uri="{FF2B5EF4-FFF2-40B4-BE49-F238E27FC236}">
+                <a16:creationId xmlns:a16="http://schemas.microsoft.com/office/drawing/2014/main" id="{DE87A446-E51D-DE13-D15A-9C6379B984AC}"/>
+              </a:ext>
+            </a:extLst>
+          </p:cNvPr>
           <p:cNvSpPr>
             <a:spLocks noGrp="1"/>
           </p:cNvSpPr>
@@ -511,7 +505,7 @@
           <a:bodyPr/>
           <a:lstStyle/>
           <a:p>
-            <a:fld id="{C1FF6DA9-008F-8B48-92A6-B652298478BF}" type="slidenum">
+            <a:fld id="{EBE2A570-D620-4D74-B044-28AC27C05278}" type="slidenum">
               <a:rPr lang="en-US" smtClean="0"/>
               <a:t>‹#›</a:t>
             </a:fld>
@@ -522,7 +516,7 @@
     </p:spTree>
     <p:extLst>
       <p:ext uri="{BB962C8B-B14F-4D97-AF65-F5344CB8AC3E}">
-        <p14:creationId xmlns:p14="http://schemas.microsoft.com/office/powerpoint/2010/main" val="2910927964"/>
+        <p14:creationId xmlns:p14="http://schemas.microsoft.com/office/powerpoint/2010/main" val="2731917239"/>
       </p:ext>
     </p:extLst>
   </p:cSld>
@@ -551,7 +545,13 @@
       </p:grpSpPr>
       <p:sp>
         <p:nvSpPr>
-          <p:cNvPr id="2" name="Vertical Title 1"/>
+          <p:cNvPr id="2" name="Vertical Title 1">
+            <a:extLst>
+              <a:ext uri="{FF2B5EF4-FFF2-40B4-BE49-F238E27FC236}">
+                <a16:creationId xmlns:a16="http://schemas.microsoft.com/office/drawing/2014/main" id="{A2B13328-43CA-A971-E75B-4CF33B678F95}"/>
+              </a:ext>
+            </a:extLst>
+          </p:cNvPr>
           <p:cNvSpPr>
             <a:spLocks noGrp="1"/>
           </p:cNvSpPr>
@@ -561,8 +561,8 @@
         </p:nvSpPr>
         <p:spPr>
           <a:xfrm>
-            <a:off x="6629400" y="274638"/>
-            <a:ext cx="2057400" cy="5851525"/>
+            <a:off x="8724900" y="365125"/>
+            <a:ext cx="2628900" cy="5811838"/>
           </a:xfrm>
         </p:spPr>
         <p:txBody>
@@ -578,7 +578,13 @@
       </p:sp>
       <p:sp>
         <p:nvSpPr>
-          <p:cNvPr id="3" name="Vertical Text Placeholder 2"/>
+          <p:cNvPr id="3" name="Vertical Text Placeholder 2">
+            <a:extLst>
+              <a:ext uri="{FF2B5EF4-FFF2-40B4-BE49-F238E27FC236}">
+                <a16:creationId xmlns:a16="http://schemas.microsoft.com/office/drawing/2014/main" id="{627D1269-180F-1A6A-3115-C26E61C34B98}"/>
+              </a:ext>
+            </a:extLst>
+          </p:cNvPr>
           <p:cNvSpPr>
             <a:spLocks noGrp="1"/>
           </p:cNvSpPr>
@@ -588,8 +594,8 @@
         </p:nvSpPr>
         <p:spPr>
           <a:xfrm>
-            <a:off x="457200" y="274638"/>
-            <a:ext cx="6019800" cy="5851525"/>
+            <a:off x="838200" y="365125"/>
+            <a:ext cx="7734300" cy="5811838"/>
           </a:xfrm>
         </p:spPr>
         <p:txBody>
@@ -634,7 +640,13 @@
       </p:sp>
       <p:sp>
         <p:nvSpPr>
-          <p:cNvPr id="4" name="Date Placeholder 3"/>
+          <p:cNvPr id="4" name="Date Placeholder 3">
+            <a:extLst>
+              <a:ext uri="{FF2B5EF4-FFF2-40B4-BE49-F238E27FC236}">
+                <a16:creationId xmlns:a16="http://schemas.microsoft.com/office/drawing/2014/main" id="{7D3A83CE-9E5E-DD36-F216-390F504E4C4B}"/>
+              </a:ext>
+            </a:extLst>
+          </p:cNvPr>
           <p:cNvSpPr>
             <a:spLocks noGrp="1"/>
           </p:cNvSpPr>
@@ -647,7 +659,7 @@
           <a:bodyPr/>
           <a:lstStyle/>
           <a:p>
-            <a:fld id="{5BCAD085-E8A6-8845-BD4E-CB4CCA059FC4}" type="datetimeFigureOut">
+            <a:fld id="{8558E3C9-D613-4CEE-BBBF-192C1F40DF69}" type="datetimeFigureOut">
               <a:rPr lang="en-US" smtClean="0"/>
               <a:t>5/19/2026</a:t>
             </a:fld>
@@ -657,7 +669,13 @@
       </p:sp>
       <p:sp>
         <p:nvSpPr>
-          <p:cNvPr id="5" name="Footer Placeholder 4"/>
+          <p:cNvPr id="5" name="Footer Placeholder 4">
+            <a:extLst>
+              <a:ext uri="{FF2B5EF4-FFF2-40B4-BE49-F238E27FC236}">
+                <a16:creationId xmlns:a16="http://schemas.microsoft.com/office/drawing/2014/main" id="{F261014F-095A-AEC3-249E-B6BEFDA4340C}"/>
+              </a:ext>
+            </a:extLst>
+          </p:cNvPr>
           <p:cNvSpPr>
             <a:spLocks noGrp="1"/>
           </p:cNvSpPr>
@@ -676,7 +694,13 @@
       </p:sp>
       <p:sp>
         <p:nvSpPr>
-          <p:cNvPr id="6" name="Slide Number Placeholder 5"/>
+          <p:cNvPr id="6" name="Slide Number Placeholder 5">
+            <a:extLst>
+              <a:ext uri="{FF2B5EF4-FFF2-40B4-BE49-F238E27FC236}">
+                <a16:creationId xmlns:a16="http://schemas.microsoft.com/office/drawing/2014/main" id="{E60B8320-2036-9CE8-E11A-A810B397241F}"/>
+              </a:ext>
+            </a:extLst>
+          </p:cNvPr>
           <p:cNvSpPr>
             <a:spLocks noGrp="1"/>
           </p:cNvSpPr>
@@ -689,7 +713,7 @@
           <a:bodyPr/>
           <a:lstStyle/>
           <a:p>
-            <a:fld id="{C1FF6DA9-008F-8B48-92A6-B652298478BF}" type="slidenum">
+            <a:fld id="{EBE2A570-D620-4D74-B044-28AC27C05278}" type="slidenum">
               <a:rPr lang="en-US" smtClean="0"/>
               <a:t>‹#›</a:t>
             </a:fld>
@@ -700,7 +724,7 @@
     </p:spTree>
     <p:extLst>
       <p:ext uri="{BB962C8B-B14F-4D97-AF65-F5344CB8AC3E}">
-        <p14:creationId xmlns:p14="http://schemas.microsoft.com/office/powerpoint/2010/main" val="3612223792"/>
+        <p14:creationId xmlns:p14="http://schemas.microsoft.com/office/powerpoint/2010/main" val="4162692732"/>
       </p:ext>
     </p:extLst>
   </p:cSld>
@@ -729,7 +753,13 @@
       </p:grpSpPr>
       <p:sp>
         <p:nvSpPr>
-          <p:cNvPr id="2" name="Title 1"/>
+          <p:cNvPr id="2" name="Title 1">
+            <a:extLst>
+              <a:ext uri="{FF2B5EF4-FFF2-40B4-BE49-F238E27FC236}">
+                <a16:creationId xmlns:a16="http://schemas.microsoft.com/office/drawing/2014/main" id="{336858ED-4B9D-E3D4-1CBE-0A9A01F76C93}"/>
+              </a:ext>
+            </a:extLst>
+          </p:cNvPr>
           <p:cNvSpPr>
             <a:spLocks noGrp="1"/>
           </p:cNvSpPr>
@@ -751,7 +781,13 @@
       </p:sp>
       <p:sp>
         <p:nvSpPr>
-          <p:cNvPr id="3" name="Content Placeholder 2"/>
+          <p:cNvPr id="3" name="Content Placeholder 2">
+            <a:extLst>
+              <a:ext uri="{FF2B5EF4-FFF2-40B4-BE49-F238E27FC236}">
+                <a16:creationId xmlns:a16="http://schemas.microsoft.com/office/drawing/2014/main" id="{9C408EE8-7FA3-326F-FA4B-F5B01DFD55C1}"/>
+              </a:ext>
+            </a:extLst>
+          </p:cNvPr>
           <p:cNvSpPr>
             <a:spLocks noGrp="1"/>
           </p:cNvSpPr>
@@ -802,7 +838,13 @@
       </p:sp>
       <p:sp>
         <p:nvSpPr>
-          <p:cNvPr id="4" name="Date Placeholder 3"/>
+          <p:cNvPr id="4" name="Date Placeholder 3">
+            <a:extLst>
+              <a:ext uri="{FF2B5EF4-FFF2-40B4-BE49-F238E27FC236}">
+                <a16:creationId xmlns:a16="http://schemas.microsoft.com/office/drawing/2014/main" id="{110C277E-D431-2441-2DD3-C4CD311813E7}"/>
+              </a:ext>
+            </a:extLst>
+          </p:cNvPr>
           <p:cNvSpPr>
             <a:spLocks noGrp="1"/>
           </p:cNvSpPr>
@@ -815,7 +857,7 @@
           <a:bodyPr/>
           <a:lstStyle/>
           <a:p>
-            <a:fld id="{5BCAD085-E8A6-8845-BD4E-CB4CCA059FC4}" type="datetimeFigureOut">
+            <a:fld id="{8558E3C9-D613-4CEE-BBBF-192C1F40DF69}" type="datetimeFigureOut">
               <a:rPr lang="en-US" smtClean="0"/>
               <a:t>5/19/2026</a:t>
             </a:fld>
@@ -825,7 +867,13 @@
       </p:sp>
       <p:sp>
         <p:nvSpPr>
-          <p:cNvPr id="5" name="Footer Placeholder 4"/>
+          <p:cNvPr id="5" name="Footer Placeholder 4">
+            <a:extLst>
+              <a:ext uri="{FF2B5EF4-FFF2-40B4-BE49-F238E27FC236}">
+                <a16:creationId xmlns:a16="http://schemas.microsoft.com/office/drawing/2014/main" id="{53360D07-1C8E-D2D9-533C-B4C6BE261E5B}"/>
+              </a:ext>
+            </a:extLst>
+          </p:cNvPr>
           <p:cNvSpPr>
             <a:spLocks noGrp="1"/>
           </p:cNvSpPr>
@@ -844,7 +892,13 @@
       </p:sp>
       <p:sp>
         <p:nvSpPr>
-          <p:cNvPr id="6" name="Slide Number Placeholder 5"/>
+          <p:cNvPr id="6" name="Slide Number Placeholder 5">
+            <a:extLst>
+              <a:ext uri="{FF2B5EF4-FFF2-40B4-BE49-F238E27FC236}">
+                <a16:creationId xmlns:a16="http://schemas.microsoft.com/office/drawing/2014/main" id="{FB72F3D4-BF7F-4570-63A6-06207A7746B1}"/>
+              </a:ext>
+            </a:extLst>
+          </p:cNvPr>
           <p:cNvSpPr>
             <a:spLocks noGrp="1"/>
           </p:cNvSpPr>
@@ -857,7 +911,7 @@
           <a:bodyPr/>
           <a:lstStyle/>
           <a:p>
-            <a:fld id="{C1FF6DA9-008F-8B48-92A6-B652298478BF}" type="slidenum">
+            <a:fld id="{EBE2A570-D620-4D74-B044-28AC27C05278}" type="slidenum">
               <a:rPr lang="en-US" smtClean="0"/>
               <a:t>‹#›</a:t>
             </a:fld>
@@ -868,7 +922,7 @@
     </p:spTree>
     <p:extLst>
       <p:ext uri="{BB962C8B-B14F-4D97-AF65-F5344CB8AC3E}">
-        <p14:creationId xmlns:p14="http://schemas.microsoft.com/office/powerpoint/2010/main" val="2614314258"/>
+        <p14:creationId xmlns:p14="http://schemas.microsoft.com/office/powerpoint/2010/main" val="769894777"/>
       </p:ext>
     </p:extLst>
   </p:cSld>
@@ -897,7 +951,13 @@
       </p:grpSpPr>
       <p:sp>
         <p:nvSpPr>
-          <p:cNvPr id="2" name="Title 1"/>
+          <p:cNvPr id="2" name="Title 1">
+            <a:extLst>
+              <a:ext uri="{FF2B5EF4-FFF2-40B4-BE49-F238E27FC236}">
+                <a16:creationId xmlns:a16="http://schemas.microsoft.com/office/drawing/2014/main" id="{0E210E2A-7ADF-7300-63E9-DA6B300C2C20}"/>
+              </a:ext>
+            </a:extLst>
+          </p:cNvPr>
           <p:cNvSpPr>
             <a:spLocks noGrp="1"/>
           </p:cNvSpPr>
@@ -907,15 +967,15 @@
         </p:nvSpPr>
         <p:spPr>
           <a:xfrm>
-            <a:off x="722313" y="4406900"/>
-            <a:ext cx="7772400" cy="1362075"/>
+            <a:off x="831850" y="1709738"/>
+            <a:ext cx="10515600" cy="2852737"/>
           </a:xfrm>
         </p:spPr>
         <p:txBody>
-          <a:bodyPr anchor="t"/>
+          <a:bodyPr anchor="b"/>
           <a:lstStyle>
-            <a:lvl1pPr algn="l">
-              <a:defRPr sz="4000" b="1" cap="all"/>
+            <a:lvl1pPr>
+              <a:defRPr sz="6000"/>
             </a:lvl1pPr>
           </a:lstStyle>
           <a:p>
@@ -928,7 +988,13 @@
       </p:sp>
       <p:sp>
         <p:nvSpPr>
-          <p:cNvPr id="3" name="Text Placeholder 2"/>
+          <p:cNvPr id="3" name="Text Placeholder 2">
+            <a:extLst>
+              <a:ext uri="{FF2B5EF4-FFF2-40B4-BE49-F238E27FC236}">
+                <a16:creationId xmlns:a16="http://schemas.microsoft.com/office/drawing/2014/main" id="{BC7C78D4-901D-9AB8-91C6-B78DA7F6CF2E}"/>
+              </a:ext>
+            </a:extLst>
+          </p:cNvPr>
           <p:cNvSpPr>
             <a:spLocks noGrp="1"/>
           </p:cNvSpPr>
@@ -938,99 +1004,99 @@
         </p:nvSpPr>
         <p:spPr>
           <a:xfrm>
-            <a:off x="722313" y="2906713"/>
-            <a:ext cx="7772400" cy="1500187"/>
+            <a:off x="831850" y="4589463"/>
+            <a:ext cx="10515600" cy="1500187"/>
           </a:xfrm>
         </p:spPr>
         <p:txBody>
-          <a:bodyPr anchor="b"/>
+          <a:bodyPr/>
           <a:lstStyle>
             <a:lvl1pPr marL="0" indent="0">
               <a:buNone/>
-              <a:defRPr sz="2000">
+              <a:defRPr sz="2400">
                 <a:solidFill>
                   <a:schemeClr val="tx1">
-                    <a:tint val="75000"/>
+                    <a:tint val="82000"/>
                   </a:schemeClr>
                 </a:solidFill>
               </a:defRPr>
             </a:lvl1pPr>
             <a:lvl2pPr marL="457200" indent="0">
               <a:buNone/>
-              <a:defRPr sz="1800">
+              <a:defRPr sz="2000">
                 <a:solidFill>
                   <a:schemeClr val="tx1">
-                    <a:tint val="75000"/>
+                    <a:tint val="82000"/>
                   </a:schemeClr>
                 </a:solidFill>
               </a:defRPr>
             </a:lvl2pPr>
             <a:lvl3pPr marL="914400" indent="0">
               <a:buNone/>
-              <a:defRPr sz="1600">
+              <a:defRPr sz="1800">
                 <a:solidFill>
                   <a:schemeClr val="tx1">
-                    <a:tint val="75000"/>
+                    <a:tint val="82000"/>
                   </a:schemeClr>
                 </a:solidFill>
               </a:defRPr>
             </a:lvl3pPr>
             <a:lvl4pPr marL="1371600" indent="0">
               <a:buNone/>
-              <a:defRPr sz="1400">
+              <a:defRPr sz="1600">
                 <a:solidFill>
                   <a:schemeClr val="tx1">
-                    <a:tint val="75000"/>
+                    <a:tint val="82000"/>
                   </a:schemeClr>
                 </a:solidFill>
               </a:defRPr>
             </a:lvl4pPr>
             <a:lvl5pPr marL="1828800" indent="0">
               <a:buNone/>
-              <a:defRPr sz="1400">
+              <a:defRPr sz="1600">
                 <a:solidFill>
                   <a:schemeClr val="tx1">
-                    <a:tint val="75000"/>
+                    <a:tint val="82000"/>
                   </a:schemeClr>
                 </a:solidFill>
               </a:defRPr>
             </a:lvl5pPr>
             <a:lvl6pPr marL="2286000" indent="0">
               <a:buNone/>
-              <a:defRPr sz="1400">
+              <a:defRPr sz="1600">
                 <a:solidFill>
                   <a:schemeClr val="tx1">
-                    <a:tint val="75000"/>
+                    <a:tint val="82000"/>
                   </a:schemeClr>
                 </a:solidFill>
               </a:defRPr>
             </a:lvl6pPr>
             <a:lvl7pPr marL="2743200" indent="0">
               <a:buNone/>
-              <a:defRPr sz="1400">
+              <a:defRPr sz="1600">
                 <a:solidFill>
                   <a:schemeClr val="tx1">
-                    <a:tint val="75000"/>
+                    <a:tint val="82000"/>
                   </a:schemeClr>
                 </a:solidFill>
               </a:defRPr>
             </a:lvl7pPr>
             <a:lvl8pPr marL="3200400" indent="0">
               <a:buNone/>
-              <a:defRPr sz="1400">
+              <a:defRPr sz="1600">
                 <a:solidFill>
                   <a:schemeClr val="tx1">
-                    <a:tint val="75000"/>
+                    <a:tint val="82000"/>
                   </a:schemeClr>
                 </a:solidFill>
               </a:defRPr>
             </a:lvl8pPr>
             <a:lvl9pPr marL="3657600" indent="0">
               <a:buNone/>
-              <a:defRPr sz="1400">
+              <a:defRPr sz="1600">
                 <a:solidFill>
                   <a:schemeClr val="tx1">
-                    <a:tint val="75000"/>
+                    <a:tint val="82000"/>
                   </a:schemeClr>
                 </a:solidFill>
               </a:defRPr>
@@ -1047,7 +1113,13 @@
       </p:sp>
       <p:sp>
         <p:nvSpPr>
-          <p:cNvPr id="4" name="Date Placeholder 3"/>
+          <p:cNvPr id="4" name="Date Placeholder 3">
+            <a:extLst>
+              <a:ext uri="{FF2B5EF4-FFF2-40B4-BE49-F238E27FC236}">
+                <a16:creationId xmlns:a16="http://schemas.microsoft.com/office/drawing/2014/main" id="{7B3782B7-C015-EB01-00B0-B38ABA0E9F1F}"/>
+              </a:ext>
+            </a:extLst>
+          </p:cNvPr>
           <p:cNvSpPr>
             <a:spLocks noGrp="1"/>
           </p:cNvSpPr>
@@ -1060,7 +1132,7 @@
           <a:bodyPr/>
           <a:lstStyle/>
           <a:p>
-            <a:fld id="{5BCAD085-E8A6-8845-BD4E-CB4CCA059FC4}" type="datetimeFigureOut">
+            <a:fld id="{8558E3C9-D613-4CEE-BBBF-192C1F40DF69}" type="datetimeFigureOut">
               <a:rPr lang="en-US" smtClean="0"/>
               <a:t>5/19/2026</a:t>
             </a:fld>
@@ -1070,7 +1142,13 @@
       </p:sp>
       <p:sp>
         <p:nvSpPr>
-          <p:cNvPr id="5" name="Footer Placeholder 4"/>
+          <p:cNvPr id="5" name="Footer Placeholder 4">
+            <a:extLst>
+              <a:ext uri="{FF2B5EF4-FFF2-40B4-BE49-F238E27FC236}">
+                <a16:creationId xmlns:a16="http://schemas.microsoft.com/office/drawing/2014/main" id="{F4B27D0D-7D2D-D754-46F2-0D39732C1F8B}"/>
+              </a:ext>
+            </a:extLst>
+          </p:cNvPr>
           <p:cNvSpPr>
             <a:spLocks noGrp="1"/>
           </p:cNvSpPr>
@@ -1089,7 +1167,13 @@
       </p:sp>
       <p:sp>
         <p:nvSpPr>
-          <p:cNvPr id="6" name="Slide Number Placeholder 5"/>
+          <p:cNvPr id="6" name="Slide Number Placeholder 5">
+            <a:extLst>
+              <a:ext uri="{FF2B5EF4-FFF2-40B4-BE49-F238E27FC236}">
+                <a16:creationId xmlns:a16="http://schemas.microsoft.com/office/drawing/2014/main" id="{E1442E20-DA12-B9A8-3092-7FC37667BD85}"/>
+              </a:ext>
+            </a:extLst>
+          </p:cNvPr>
           <p:cNvSpPr>
             <a:spLocks noGrp="1"/>
           </p:cNvSpPr>
@@ -1102,7 +1186,7 @@
           <a:bodyPr/>
           <a:lstStyle/>
           <a:p>
-            <a:fld id="{C1FF6DA9-008F-8B48-92A6-B652298478BF}" type="slidenum">
+            <a:fld id="{EBE2A570-D620-4D74-B044-28AC27C05278}" type="slidenum">
               <a:rPr lang="en-US" smtClean="0"/>
               <a:t>‹#›</a:t>
             </a:fld>
@@ -1113,7 +1197,7 @@
     </p:spTree>
     <p:extLst>
       <p:ext uri="{BB962C8B-B14F-4D97-AF65-F5344CB8AC3E}">
-        <p14:creationId xmlns:p14="http://schemas.microsoft.com/office/powerpoint/2010/main" val="960648375"/>
+        <p14:creationId xmlns:p14="http://schemas.microsoft.com/office/powerpoint/2010/main" val="1366312268"/>
       </p:ext>
     </p:extLst>
   </p:cSld>
@@ -1142,7 +1226,13 @@
       </p:grpSpPr>
       <p:sp>
         <p:nvSpPr>
-          <p:cNvPr id="2" name="Title 1"/>
+          <p:cNvPr id="2" name="Title 1">
+            <a:extLst>
+              <a:ext uri="{FF2B5EF4-FFF2-40B4-BE49-F238E27FC236}">
+                <a16:creationId xmlns:a16="http://schemas.microsoft.com/office/drawing/2014/main" id="{BED8C1C9-70D1-A3C3-21BF-AF3C7079F890}"/>
+              </a:ext>
+            </a:extLst>
+          </p:cNvPr>
           <p:cNvSpPr>
             <a:spLocks noGrp="1"/>
           </p:cNvSpPr>
@@ -1164,7 +1254,13 @@
       </p:sp>
       <p:sp>
         <p:nvSpPr>
-          <p:cNvPr id="3" name="Content Placeholder 2"/>
+          <p:cNvPr id="3" name="Content Placeholder 2">
+            <a:extLst>
+              <a:ext uri="{FF2B5EF4-FFF2-40B4-BE49-F238E27FC236}">
+                <a16:creationId xmlns:a16="http://schemas.microsoft.com/office/drawing/2014/main" id="{14ECB427-459D-4E82-E333-B809ADB13A6A}"/>
+              </a:ext>
+            </a:extLst>
+          </p:cNvPr>
           <p:cNvSpPr>
             <a:spLocks noGrp="1"/>
           </p:cNvSpPr>
@@ -1174,41 +1270,13 @@
         </p:nvSpPr>
         <p:spPr>
           <a:xfrm>
-            <a:off x="457200" y="1600200"/>
-            <a:ext cx="4038600" cy="4525963"/>
+            <a:off x="838200" y="1825625"/>
+            <a:ext cx="5181600" cy="4351338"/>
           </a:xfrm>
         </p:spPr>
         <p:txBody>
           <a:bodyPr/>
-          <a:lstStyle>
-            <a:lvl1pPr>
-              <a:defRPr sz="2800"/>
-            </a:lvl1pPr>
-            <a:lvl2pPr>
-              <a:defRPr sz="2400"/>
-            </a:lvl2pPr>
-            <a:lvl3pPr>
-              <a:defRPr sz="2000"/>
-            </a:lvl3pPr>
-            <a:lvl4pPr>
-              <a:defRPr sz="1800"/>
-            </a:lvl4pPr>
-            <a:lvl5pPr>
-              <a:defRPr sz="1800"/>
-            </a:lvl5pPr>
-            <a:lvl6pPr>
-              <a:defRPr sz="1800"/>
-            </a:lvl6pPr>
-            <a:lvl7pPr>
-              <a:defRPr sz="1800"/>
-            </a:lvl7pPr>
-            <a:lvl8pPr>
-              <a:defRPr sz="1800"/>
-            </a:lvl8pPr>
-            <a:lvl9pPr>
-              <a:defRPr sz="1800"/>
-            </a:lvl9pPr>
-          </a:lstStyle>
+          <a:lstStyle/>
           <a:p>
             <a:pPr lvl="0"/>
             <a:r>
@@ -1248,7 +1316,13 @@
       </p:sp>
       <p:sp>
         <p:nvSpPr>
-          <p:cNvPr id="4" name="Content Placeholder 3"/>
+          <p:cNvPr id="4" name="Content Placeholder 3">
+            <a:extLst>
+              <a:ext uri="{FF2B5EF4-FFF2-40B4-BE49-F238E27FC236}">
+                <a16:creationId xmlns:a16="http://schemas.microsoft.com/office/drawing/2014/main" id="{29A884C1-F6AD-9078-95A8-5DEA93B864E1}"/>
+              </a:ext>
+            </a:extLst>
+          </p:cNvPr>
           <p:cNvSpPr>
             <a:spLocks noGrp="1"/>
           </p:cNvSpPr>
@@ -1258,41 +1332,13 @@
         </p:nvSpPr>
         <p:spPr>
           <a:xfrm>
-            <a:off x="4648200" y="1600200"/>
-            <a:ext cx="4038600" cy="4525963"/>
+            <a:off x="6172200" y="1825625"/>
+            <a:ext cx="5181600" cy="4351338"/>
           </a:xfrm>
         </p:spPr>
         <p:txBody>
           <a:bodyPr/>
-          <a:lstStyle>
-            <a:lvl1pPr>
-              <a:defRPr sz="2800"/>
-            </a:lvl1pPr>
-            <a:lvl2pPr>
-              <a:defRPr sz="2400"/>
-            </a:lvl2pPr>
-            <a:lvl3pPr>
-              <a:defRPr sz="2000"/>
-            </a:lvl3pPr>
-            <a:lvl4pPr>
-              <a:defRPr sz="1800"/>
-            </a:lvl4pPr>
-            <a:lvl5pPr>
-              <a:defRPr sz="1800"/>
-            </a:lvl5pPr>
-            <a:lvl6pPr>
-              <a:defRPr sz="1800"/>
-            </a:lvl6pPr>
-            <a:lvl7pPr>
-              <a:defRPr sz="1800"/>
-            </a:lvl7pPr>
-            <a:lvl8pPr>
-              <a:defRPr sz="1800"/>
-            </a:lvl8pPr>
-            <a:lvl9pPr>
-              <a:defRPr sz="1800"/>
-            </a:lvl9pPr>
-          </a:lstStyle>
+          <a:lstStyle/>
           <a:p>
             <a:pPr lvl="0"/>
             <a:r>
@@ -1332,7 +1378,13 @@
       </p:sp>
       <p:sp>
         <p:nvSpPr>
-          <p:cNvPr id="5" name="Date Placeholder 4"/>
+          <p:cNvPr id="5" name="Date Placeholder 4">
+            <a:extLst>
+              <a:ext uri="{FF2B5EF4-FFF2-40B4-BE49-F238E27FC236}">
+                <a16:creationId xmlns:a16="http://schemas.microsoft.com/office/drawing/2014/main" id="{3453748A-5E70-EB15-C881-B148C666422C}"/>
+              </a:ext>
+            </a:extLst>
+          </p:cNvPr>
           <p:cNvSpPr>
             <a:spLocks noGrp="1"/>
           </p:cNvSpPr>
@@ -1345,7 +1397,7 @@
           <a:bodyPr/>
           <a:lstStyle/>
           <a:p>
-            <a:fld id="{5BCAD085-E8A6-8845-BD4E-CB4CCA059FC4}" type="datetimeFigureOut">
+            <a:fld id="{8558E3C9-D613-4CEE-BBBF-192C1F40DF69}" type="datetimeFigureOut">
               <a:rPr lang="en-US" smtClean="0"/>
               <a:t>5/19/2026</a:t>
             </a:fld>
@@ -1355,7 +1407,13 @@
       </p:sp>
       <p:sp>
         <p:nvSpPr>
-          <p:cNvPr id="6" name="Footer Placeholder 5"/>
+          <p:cNvPr id="6" name="Footer Placeholder 5">
+            <a:extLst>
+              <a:ext uri="{FF2B5EF4-FFF2-40B4-BE49-F238E27FC236}">
+                <a16:creationId xmlns:a16="http://schemas.microsoft.com/office/drawing/2014/main" id="{5A9098AE-2F11-2680-53F6-2E3F10F8711C}"/>
+              </a:ext>
+            </a:extLst>
+          </p:cNvPr>
           <p:cNvSpPr>
             <a:spLocks noGrp="1"/>
           </p:cNvSpPr>
@@ -1374,7 +1432,13 @@
       </p:sp>
       <p:sp>
         <p:nvSpPr>
-          <p:cNvPr id="7" name="Slide Number Placeholder 6"/>
+          <p:cNvPr id="7" name="Slide Number Placeholder 6">
+            <a:extLst>
+              <a:ext uri="{FF2B5EF4-FFF2-40B4-BE49-F238E27FC236}">
+                <a16:creationId xmlns:a16="http://schemas.microsoft.com/office/drawing/2014/main" id="{836EAC18-E39B-B95C-BA8F-542281604BFE}"/>
+              </a:ext>
+            </a:extLst>
+          </p:cNvPr>
           <p:cNvSpPr>
             <a:spLocks noGrp="1"/>
           </p:cNvSpPr>
@@ -1387,7 +1451,7 @@
           <a:bodyPr/>
           <a:lstStyle/>
           <a:p>
-            <a:fld id="{C1FF6DA9-008F-8B48-92A6-B652298478BF}" type="slidenum">
+            <a:fld id="{EBE2A570-D620-4D74-B044-28AC27C05278}" type="slidenum">
               <a:rPr lang="en-US" smtClean="0"/>
               <a:t>‹#›</a:t>
             </a:fld>
@@ -1398,7 +1462,7 @@
     </p:spTree>
     <p:extLst>
       <p:ext uri="{BB962C8B-B14F-4D97-AF65-F5344CB8AC3E}">
-        <p14:creationId xmlns:p14="http://schemas.microsoft.com/office/powerpoint/2010/main" val="2782244947"/>
+        <p14:creationId xmlns:p14="http://schemas.microsoft.com/office/powerpoint/2010/main" val="1351197996"/>
       </p:ext>
     </p:extLst>
   </p:cSld>
@@ -1427,44 +1491,57 @@
       </p:grpSpPr>
       <p:sp>
         <p:nvSpPr>
-          <p:cNvPr id="2" name="Title 1"/>
+          <p:cNvPr id="2" name="Title 1">
+            <a:extLst>
+              <a:ext uri="{FF2B5EF4-FFF2-40B4-BE49-F238E27FC236}">
+                <a16:creationId xmlns:a16="http://schemas.microsoft.com/office/drawing/2014/main" id="{01DFF583-AD01-B42D-73AD-E3C80BB88260}"/>
+              </a:ext>
+            </a:extLst>
+          </p:cNvPr>
           <p:cNvSpPr>
             <a:spLocks noGrp="1"/>
           </p:cNvSpPr>
           <p:nvPr>
             <p:ph type="title"/>
-          </p:nvPr>
-        </p:nvSpPr>
-        <p:spPr/>
-        <p:txBody>
-          <a:bodyPr/>
-          <a:lstStyle>
-            <a:lvl1pPr>
-              <a:defRPr/>
-            </a:lvl1pPr>
-          </a:lstStyle>
-          <a:p>
-            <a:r>
-              <a:rPr lang="en-US"/>
-              <a:t>Click to edit Master title style</a:t>
-            </a:r>
-          </a:p>
-        </p:txBody>
-      </p:sp>
-      <p:sp>
-        <p:nvSpPr>
-          <p:cNvPr id="3" name="Text Placeholder 2"/>
-          <p:cNvSpPr>
-            <a:spLocks noGrp="1"/>
-          </p:cNvSpPr>
-          <p:nvPr>
-            <p:ph type="body" idx="1"/>
           </p:nvPr>
         </p:nvSpPr>
         <p:spPr>
           <a:xfrm>
-            <a:off x="457200" y="1535113"/>
-            <a:ext cx="4040188" cy="639762"/>
+            <a:off x="839788" y="365125"/>
+            <a:ext cx="10515600" cy="1325563"/>
+          </a:xfrm>
+        </p:spPr>
+        <p:txBody>
+          <a:bodyPr/>
+          <a:lstStyle/>
+          <a:p>
+            <a:r>
+              <a:rPr lang="en-US"/>
+              <a:t>Click to edit Master title style</a:t>
+            </a:r>
+          </a:p>
+        </p:txBody>
+      </p:sp>
+      <p:sp>
+        <p:nvSpPr>
+          <p:cNvPr id="3" name="Text Placeholder 2">
+            <a:extLst>
+              <a:ext uri="{FF2B5EF4-FFF2-40B4-BE49-F238E27FC236}">
+                <a16:creationId xmlns:a16="http://schemas.microsoft.com/office/drawing/2014/main" id="{B02096EC-67B8-4DF4-3DEA-2CE2054C7BEF}"/>
+              </a:ext>
+            </a:extLst>
+          </p:cNvPr>
+          <p:cNvSpPr>
+            <a:spLocks noGrp="1"/>
+          </p:cNvSpPr>
+          <p:nvPr>
+            <p:ph type="body" idx="1"/>
+          </p:nvPr>
+        </p:nvSpPr>
+        <p:spPr>
+          <a:xfrm>
+            <a:off x="839788" y="1681163"/>
+            <a:ext cx="5157787" cy="823912"/>
           </a:xfrm>
         </p:spPr>
         <p:txBody>
@@ -1518,7 +1595,13 @@
       </p:sp>
       <p:sp>
         <p:nvSpPr>
-          <p:cNvPr id="4" name="Content Placeholder 3"/>
+          <p:cNvPr id="4" name="Content Placeholder 3">
+            <a:extLst>
+              <a:ext uri="{FF2B5EF4-FFF2-40B4-BE49-F238E27FC236}">
+                <a16:creationId xmlns:a16="http://schemas.microsoft.com/office/drawing/2014/main" id="{E56F6B32-B0CC-3476-7DA8-3D0A4E2E16F4}"/>
+              </a:ext>
+            </a:extLst>
+          </p:cNvPr>
           <p:cNvSpPr>
             <a:spLocks noGrp="1"/>
           </p:cNvSpPr>
@@ -1528,41 +1611,13 @@
         </p:nvSpPr>
         <p:spPr>
           <a:xfrm>
-            <a:off x="457200" y="2174875"/>
-            <a:ext cx="4040188" cy="3951288"/>
+            <a:off x="839788" y="2505075"/>
+            <a:ext cx="5157787" cy="3684588"/>
           </a:xfrm>
         </p:spPr>
         <p:txBody>
           <a:bodyPr/>
-          <a:lstStyle>
-            <a:lvl1pPr>
-              <a:defRPr sz="2400"/>
-            </a:lvl1pPr>
-            <a:lvl2pPr>
-              <a:defRPr sz="2000"/>
-            </a:lvl2pPr>
-            <a:lvl3pPr>
-              <a:defRPr sz="1800"/>
-            </a:lvl3pPr>
-            <a:lvl4pPr>
-              <a:defRPr sz="1600"/>
-            </a:lvl4pPr>
-            <a:lvl5pPr>
-              <a:defRPr sz="1600"/>
-            </a:lvl5pPr>
-            <a:lvl6pPr>
-              <a:defRPr sz="1600"/>
-            </a:lvl6pPr>
-            <a:lvl7pPr>
-              <a:defRPr sz="1600"/>
-            </a:lvl7pPr>
-            <a:lvl8pPr>
-              <a:defRPr sz="1600"/>
-            </a:lvl8pPr>
-            <a:lvl9pPr>
-              <a:defRPr sz="1600"/>
-            </a:lvl9pPr>
-          </a:lstStyle>
+          <a:lstStyle/>
           <a:p>
             <a:pPr lvl="0"/>
             <a:r>
@@ -1602,7 +1657,13 @@
       </p:sp>
       <p:sp>
         <p:nvSpPr>
-          <p:cNvPr id="5" name="Text Placeholder 4"/>
+          <p:cNvPr id="5" name="Text Placeholder 4">
+            <a:extLst>
+              <a:ext uri="{FF2B5EF4-FFF2-40B4-BE49-F238E27FC236}">
+                <a16:creationId xmlns:a16="http://schemas.microsoft.com/office/drawing/2014/main" id="{4B46F9A9-5833-AC94-5D9D-74B55090CE4B}"/>
+              </a:ext>
+            </a:extLst>
+          </p:cNvPr>
           <p:cNvSpPr>
             <a:spLocks noGrp="1"/>
           </p:cNvSpPr>
@@ -1612,8 +1673,8 @@
         </p:nvSpPr>
         <p:spPr>
           <a:xfrm>
-            <a:off x="4645025" y="1535113"/>
-            <a:ext cx="4041775" cy="639762"/>
+            <a:off x="6172200" y="1681163"/>
+            <a:ext cx="5183188" cy="823912"/>
           </a:xfrm>
         </p:spPr>
         <p:txBody>
@@ -1667,7 +1728,13 @@
       </p:sp>
       <p:sp>
         <p:nvSpPr>
-          <p:cNvPr id="6" name="Content Placeholder 5"/>
+          <p:cNvPr id="6" name="Content Placeholder 5">
+            <a:extLst>
+              <a:ext uri="{FF2B5EF4-FFF2-40B4-BE49-F238E27FC236}">
+                <a16:creationId xmlns:a16="http://schemas.microsoft.com/office/drawing/2014/main" id="{9D802853-5DB8-1173-8EB9-09BA6197FC4E}"/>
+              </a:ext>
+            </a:extLst>
+          </p:cNvPr>
           <p:cNvSpPr>
             <a:spLocks noGrp="1"/>
           </p:cNvSpPr>
@@ -1677,41 +1744,13 @@
         </p:nvSpPr>
         <p:spPr>
           <a:xfrm>
-            <a:off x="4645025" y="2174875"/>
-            <a:ext cx="4041775" cy="3951288"/>
+            <a:off x="6172200" y="2505075"/>
+            <a:ext cx="5183188" cy="3684588"/>
           </a:xfrm>
         </p:spPr>
         <p:txBody>
           <a:bodyPr/>
-          <a:lstStyle>
-            <a:lvl1pPr>
-              <a:defRPr sz="2400"/>
-            </a:lvl1pPr>
-            <a:lvl2pPr>
-              <a:defRPr sz="2000"/>
-            </a:lvl2pPr>
-            <a:lvl3pPr>
-              <a:defRPr sz="1800"/>
-            </a:lvl3pPr>
-            <a:lvl4pPr>
-              <a:defRPr sz="1600"/>
-            </a:lvl4pPr>
-            <a:lvl5pPr>
-              <a:defRPr sz="1600"/>
-            </a:lvl5pPr>
-            <a:lvl6pPr>
-              <a:defRPr sz="1600"/>
-            </a:lvl6pPr>
-            <a:lvl7pPr>
-              <a:defRPr sz="1600"/>
-            </a:lvl7pPr>
-            <a:lvl8pPr>
-              <a:defRPr sz="1600"/>
-            </a:lvl8pPr>
-            <a:lvl9pPr>
-              <a:defRPr sz="1600"/>
-            </a:lvl9pPr>
-          </a:lstStyle>
+          <a:lstStyle/>
           <a:p>
             <a:pPr lvl="0"/>
             <a:r>
@@ -1751,7 +1790,13 @@
       </p:sp>
       <p:sp>
         <p:nvSpPr>
-          <p:cNvPr id="7" name="Date Placeholder 6"/>
+          <p:cNvPr id="7" name="Date Placeholder 6">
+            <a:extLst>
+              <a:ext uri="{FF2B5EF4-FFF2-40B4-BE49-F238E27FC236}">
+                <a16:creationId xmlns:a16="http://schemas.microsoft.com/office/drawing/2014/main" id="{FF181E33-ED2A-E2F6-9B79-3446EE55A61C}"/>
+              </a:ext>
+            </a:extLst>
+          </p:cNvPr>
           <p:cNvSpPr>
             <a:spLocks noGrp="1"/>
           </p:cNvSpPr>
@@ -1764,7 +1809,7 @@
           <a:bodyPr/>
           <a:lstStyle/>
           <a:p>
-            <a:fld id="{5BCAD085-E8A6-8845-BD4E-CB4CCA059FC4}" type="datetimeFigureOut">
+            <a:fld id="{8558E3C9-D613-4CEE-BBBF-192C1F40DF69}" type="datetimeFigureOut">
               <a:rPr lang="en-US" smtClean="0"/>
               <a:t>5/19/2026</a:t>
             </a:fld>
@@ -1774,7 +1819,13 @@
       </p:sp>
       <p:sp>
         <p:nvSpPr>
-          <p:cNvPr id="8" name="Footer Placeholder 7"/>
+          <p:cNvPr id="8" name="Footer Placeholder 7">
+            <a:extLst>
+              <a:ext uri="{FF2B5EF4-FFF2-40B4-BE49-F238E27FC236}">
+                <a16:creationId xmlns:a16="http://schemas.microsoft.com/office/drawing/2014/main" id="{95F953E6-6F86-63AD-6AE8-5726BFC4B71C}"/>
+              </a:ext>
+            </a:extLst>
+          </p:cNvPr>
           <p:cNvSpPr>
             <a:spLocks noGrp="1"/>
           </p:cNvSpPr>
@@ -1793,7 +1844,13 @@
       </p:sp>
       <p:sp>
         <p:nvSpPr>
-          <p:cNvPr id="9" name="Slide Number Placeholder 8"/>
+          <p:cNvPr id="9" name="Slide Number Placeholder 8">
+            <a:extLst>
+              <a:ext uri="{FF2B5EF4-FFF2-40B4-BE49-F238E27FC236}">
+                <a16:creationId xmlns:a16="http://schemas.microsoft.com/office/drawing/2014/main" id="{98D55A4A-FF60-44DD-8D80-58F729D24904}"/>
+              </a:ext>
+            </a:extLst>
+          </p:cNvPr>
           <p:cNvSpPr>
             <a:spLocks noGrp="1"/>
           </p:cNvSpPr>
@@ -1806,7 +1863,7 @@
           <a:bodyPr/>
           <a:lstStyle/>
           <a:p>
-            <a:fld id="{C1FF6DA9-008F-8B48-92A6-B652298478BF}" type="slidenum">
+            <a:fld id="{EBE2A570-D620-4D74-B044-28AC27C05278}" type="slidenum">
               <a:rPr lang="en-US" smtClean="0"/>
               <a:t>‹#›</a:t>
             </a:fld>
@@ -1817,7 +1874,7 @@
     </p:spTree>
     <p:extLst>
       <p:ext uri="{BB962C8B-B14F-4D97-AF65-F5344CB8AC3E}">
-        <p14:creationId xmlns:p14="http://schemas.microsoft.com/office/powerpoint/2010/main" val="990158736"/>
+        <p14:creationId xmlns:p14="http://schemas.microsoft.com/office/powerpoint/2010/main" val="1342292683"/>
       </p:ext>
     </p:extLst>
   </p:cSld>
@@ -1846,7 +1903,13 @@
       </p:grpSpPr>
       <p:sp>
         <p:nvSpPr>
-          <p:cNvPr id="2" name="Title 1"/>
+          <p:cNvPr id="2" name="Title 1">
+            <a:extLst>
+              <a:ext uri="{FF2B5EF4-FFF2-40B4-BE49-F238E27FC236}">
+                <a16:creationId xmlns:a16="http://schemas.microsoft.com/office/drawing/2014/main" id="{5F73D076-1828-0798-66D4-CF7FA1CFED51}"/>
+              </a:ext>
+            </a:extLst>
+          </p:cNvPr>
           <p:cNvSpPr>
             <a:spLocks noGrp="1"/>
           </p:cNvSpPr>
@@ -1868,7 +1931,13 @@
       </p:sp>
       <p:sp>
         <p:nvSpPr>
-          <p:cNvPr id="3" name="Date Placeholder 2"/>
+          <p:cNvPr id="3" name="Date Placeholder 2">
+            <a:extLst>
+              <a:ext uri="{FF2B5EF4-FFF2-40B4-BE49-F238E27FC236}">
+                <a16:creationId xmlns:a16="http://schemas.microsoft.com/office/drawing/2014/main" id="{F80DE68A-C2EB-0EFC-C943-C955B1027795}"/>
+              </a:ext>
+            </a:extLst>
+          </p:cNvPr>
           <p:cNvSpPr>
             <a:spLocks noGrp="1"/>
           </p:cNvSpPr>
@@ -1881,7 +1950,7 @@
           <a:bodyPr/>
           <a:lstStyle/>
           <a:p>
-            <a:fld id="{5BCAD085-E8A6-8845-BD4E-CB4CCA059FC4}" type="datetimeFigureOut">
+            <a:fld id="{8558E3C9-D613-4CEE-BBBF-192C1F40DF69}" type="datetimeFigureOut">
               <a:rPr lang="en-US" smtClean="0"/>
               <a:t>5/19/2026</a:t>
             </a:fld>
@@ -1891,7 +1960,13 @@
       </p:sp>
       <p:sp>
         <p:nvSpPr>
-          <p:cNvPr id="4" name="Footer Placeholder 3"/>
+          <p:cNvPr id="4" name="Footer Placeholder 3">
+            <a:extLst>
+              <a:ext uri="{FF2B5EF4-FFF2-40B4-BE49-F238E27FC236}">
+                <a16:creationId xmlns:a16="http://schemas.microsoft.com/office/drawing/2014/main" id="{D22051DB-131D-9184-EE2D-CDE9F30AC2F7}"/>
+              </a:ext>
+            </a:extLst>
+          </p:cNvPr>
           <p:cNvSpPr>
             <a:spLocks noGrp="1"/>
           </p:cNvSpPr>
@@ -1910,7 +1985,13 @@
       </p:sp>
       <p:sp>
         <p:nvSpPr>
-          <p:cNvPr id="5" name="Slide Number Placeholder 4"/>
+          <p:cNvPr id="5" name="Slide Number Placeholder 4">
+            <a:extLst>
+              <a:ext uri="{FF2B5EF4-FFF2-40B4-BE49-F238E27FC236}">
+                <a16:creationId xmlns:a16="http://schemas.microsoft.com/office/drawing/2014/main" id="{5FDF9358-1991-EC27-DAD3-9E74CA43D34F}"/>
+              </a:ext>
+            </a:extLst>
+          </p:cNvPr>
           <p:cNvSpPr>
             <a:spLocks noGrp="1"/>
           </p:cNvSpPr>
@@ -1923,7 +2004,7 @@
           <a:bodyPr/>
           <a:lstStyle/>
           <a:p>
-            <a:fld id="{C1FF6DA9-008F-8B48-92A6-B652298478BF}" type="slidenum">
+            <a:fld id="{EBE2A570-D620-4D74-B044-28AC27C05278}" type="slidenum">
               <a:rPr lang="en-US" smtClean="0"/>
               <a:t>‹#›</a:t>
             </a:fld>
@@ -1934,7 +2015,7 @@
     </p:spTree>
     <p:extLst>
       <p:ext uri="{BB962C8B-B14F-4D97-AF65-F5344CB8AC3E}">
-        <p14:creationId xmlns:p14="http://schemas.microsoft.com/office/powerpoint/2010/main" val="727027711"/>
+        <p14:creationId xmlns:p14="http://schemas.microsoft.com/office/powerpoint/2010/main" val="1137046388"/>
       </p:ext>
     </p:extLst>
   </p:cSld>
@@ -1963,7 +2044,13 @@
       </p:grpSpPr>
       <p:sp>
         <p:nvSpPr>
-          <p:cNvPr id="2" name="Date Placeholder 1"/>
+          <p:cNvPr id="2" name="Date Placeholder 1">
+            <a:extLst>
+              <a:ext uri="{FF2B5EF4-FFF2-40B4-BE49-F238E27FC236}">
+                <a16:creationId xmlns:a16="http://schemas.microsoft.com/office/drawing/2014/main" id="{55EE5EDE-7822-A6EB-3E16-42BEE79DB86B}"/>
+              </a:ext>
+            </a:extLst>
+          </p:cNvPr>
           <p:cNvSpPr>
             <a:spLocks noGrp="1"/>
           </p:cNvSpPr>
@@ -1976,7 +2063,7 @@
           <a:bodyPr/>
           <a:lstStyle/>
           <a:p>
-            <a:fld id="{5BCAD085-E8A6-8845-BD4E-CB4CCA059FC4}" type="datetimeFigureOut">
+            <a:fld id="{8558E3C9-D613-4CEE-BBBF-192C1F40DF69}" type="datetimeFigureOut">
               <a:rPr lang="en-US" smtClean="0"/>
               <a:t>5/19/2026</a:t>
             </a:fld>
@@ -1986,7 +2073,13 @@
       </p:sp>
       <p:sp>
         <p:nvSpPr>
-          <p:cNvPr id="3" name="Footer Placeholder 2"/>
+          <p:cNvPr id="3" name="Footer Placeholder 2">
+            <a:extLst>
+              <a:ext uri="{FF2B5EF4-FFF2-40B4-BE49-F238E27FC236}">
+                <a16:creationId xmlns:a16="http://schemas.microsoft.com/office/drawing/2014/main" id="{EC5733FA-80FB-5EFB-195C-5414A06F82E8}"/>
+              </a:ext>
+            </a:extLst>
+          </p:cNvPr>
           <p:cNvSpPr>
             <a:spLocks noGrp="1"/>
           </p:cNvSpPr>
@@ -2005,7 +2098,13 @@
       </p:sp>
       <p:sp>
         <p:nvSpPr>
-          <p:cNvPr id="4" name="Slide Number Placeholder 3"/>
+          <p:cNvPr id="4" name="Slide Number Placeholder 3">
+            <a:extLst>
+              <a:ext uri="{FF2B5EF4-FFF2-40B4-BE49-F238E27FC236}">
+                <a16:creationId xmlns:a16="http://schemas.microsoft.com/office/drawing/2014/main" id="{01DC0628-A297-40C7-1E37-CEC58AACAA6A}"/>
+              </a:ext>
+            </a:extLst>
+          </p:cNvPr>
           <p:cNvSpPr>
             <a:spLocks noGrp="1"/>
           </p:cNvSpPr>
@@ -2018,7 +2117,7 @@
           <a:bodyPr/>
           <a:lstStyle/>
           <a:p>
-            <a:fld id="{C1FF6DA9-008F-8B48-92A6-B652298478BF}" type="slidenum">
+            <a:fld id="{EBE2A570-D620-4D74-B044-28AC27C05278}" type="slidenum">
               <a:rPr lang="en-US" smtClean="0"/>
               <a:t>‹#›</a:t>
             </a:fld>
@@ -2029,7 +2128,7 @@
     </p:spTree>
     <p:extLst>
       <p:ext uri="{BB962C8B-B14F-4D97-AF65-F5344CB8AC3E}">
-        <p14:creationId xmlns:p14="http://schemas.microsoft.com/office/powerpoint/2010/main" val="1212999818"/>
+        <p14:creationId xmlns:p14="http://schemas.microsoft.com/office/powerpoint/2010/main" val="3341315361"/>
       </p:ext>
     </p:extLst>
   </p:cSld>
@@ -2058,7 +2157,13 @@
       </p:grpSpPr>
       <p:sp>
         <p:nvSpPr>
-          <p:cNvPr id="2" name="Title 1"/>
+          <p:cNvPr id="2" name="Title 1">
+            <a:extLst>
+              <a:ext uri="{FF2B5EF4-FFF2-40B4-BE49-F238E27FC236}">
+                <a16:creationId xmlns:a16="http://schemas.microsoft.com/office/drawing/2014/main" id="{1FF1FDBD-2714-B5D4-12AE-033F1E12D72E}"/>
+              </a:ext>
+            </a:extLst>
+          </p:cNvPr>
           <p:cNvSpPr>
             <a:spLocks noGrp="1"/>
           </p:cNvSpPr>
@@ -2068,15 +2173,15 @@
         </p:nvSpPr>
         <p:spPr>
           <a:xfrm>
-            <a:off x="457200" y="273050"/>
-            <a:ext cx="3008313" cy="1162050"/>
+            <a:off x="839788" y="457200"/>
+            <a:ext cx="3932237" cy="1600200"/>
           </a:xfrm>
         </p:spPr>
         <p:txBody>
           <a:bodyPr anchor="b"/>
           <a:lstStyle>
-            <a:lvl1pPr algn="l">
-              <a:defRPr sz="2000" b="1"/>
+            <a:lvl1pPr>
+              <a:defRPr sz="3200"/>
             </a:lvl1pPr>
           </a:lstStyle>
           <a:p>
@@ -2089,7 +2194,13 @@
       </p:sp>
       <p:sp>
         <p:nvSpPr>
-          <p:cNvPr id="3" name="Content Placeholder 2"/>
+          <p:cNvPr id="3" name="Content Placeholder 2">
+            <a:extLst>
+              <a:ext uri="{FF2B5EF4-FFF2-40B4-BE49-F238E27FC236}">
+                <a16:creationId xmlns:a16="http://schemas.microsoft.com/office/drawing/2014/main" id="{90402837-657E-A0AA-46AC-98CE248EE5EC}"/>
+              </a:ext>
+            </a:extLst>
+          </p:cNvPr>
           <p:cNvSpPr>
             <a:spLocks noGrp="1"/>
           </p:cNvSpPr>
@@ -2099,8 +2210,8 @@
         </p:nvSpPr>
         <p:spPr>
           <a:xfrm>
-            <a:off x="3575050" y="273050"/>
-            <a:ext cx="5111750" cy="5853113"/>
+            <a:off x="5183188" y="987425"/>
+            <a:ext cx="6172200" cy="4873625"/>
           </a:xfrm>
         </p:spPr>
         <p:txBody>
@@ -2173,7 +2284,13 @@
       </p:sp>
       <p:sp>
         <p:nvSpPr>
-          <p:cNvPr id="4" name="Text Placeholder 3"/>
+          <p:cNvPr id="4" name="Text Placeholder 3">
+            <a:extLst>
+              <a:ext uri="{FF2B5EF4-FFF2-40B4-BE49-F238E27FC236}">
+                <a16:creationId xmlns:a16="http://schemas.microsoft.com/office/drawing/2014/main" id="{8D8F37E0-BA60-3066-9983-268F5B8E4868}"/>
+              </a:ext>
+            </a:extLst>
+          </p:cNvPr>
           <p:cNvSpPr>
             <a:spLocks noGrp="1"/>
           </p:cNvSpPr>
@@ -2183,8 +2300,8 @@
         </p:nvSpPr>
         <p:spPr>
           <a:xfrm>
-            <a:off x="457200" y="1435100"/>
-            <a:ext cx="3008313" cy="4691063"/>
+            <a:off x="839788" y="2057400"/>
+            <a:ext cx="3932237" cy="3811588"/>
           </a:xfrm>
         </p:spPr>
         <p:txBody>
@@ -2192,39 +2309,39 @@
           <a:lstStyle>
             <a:lvl1pPr marL="0" indent="0">
               <a:buNone/>
-              <a:defRPr sz="1400"/>
+              <a:defRPr sz="1600"/>
             </a:lvl1pPr>
             <a:lvl2pPr marL="457200" indent="0">
               <a:buNone/>
-              <a:defRPr sz="1200"/>
+              <a:defRPr sz="1400"/>
             </a:lvl2pPr>
             <a:lvl3pPr marL="914400" indent="0">
               <a:buNone/>
-              <a:defRPr sz="1000"/>
+              <a:defRPr sz="1200"/>
             </a:lvl3pPr>
             <a:lvl4pPr marL="1371600" indent="0">
               <a:buNone/>
-              <a:defRPr sz="900"/>
+              <a:defRPr sz="1000"/>
             </a:lvl4pPr>
             <a:lvl5pPr marL="1828800" indent="0">
               <a:buNone/>
-              <a:defRPr sz="900"/>
+              <a:defRPr sz="1000"/>
             </a:lvl5pPr>
             <a:lvl6pPr marL="2286000" indent="0">
               <a:buNone/>
-              <a:defRPr sz="900"/>
+              <a:defRPr sz="1000"/>
             </a:lvl6pPr>
             <a:lvl7pPr marL="2743200" indent="0">
               <a:buNone/>
-              <a:defRPr sz="900"/>
+              <a:defRPr sz="1000"/>
             </a:lvl7pPr>
             <a:lvl8pPr marL="3200400" indent="0">
               <a:buNone/>
-              <a:defRPr sz="900"/>
+              <a:defRPr sz="1000"/>
             </a:lvl8pPr>
             <a:lvl9pPr marL="3657600" indent="0">
               <a:buNone/>
-              <a:defRPr sz="900"/>
+              <a:defRPr sz="1000"/>
             </a:lvl9pPr>
           </a:lstStyle>
           <a:p>
@@ -2238,7 +2355,13 @@
       </p:sp>
       <p:sp>
         <p:nvSpPr>
-          <p:cNvPr id="5" name="Date Placeholder 4"/>
+          <p:cNvPr id="5" name="Date Placeholder 4">
+            <a:extLst>
+              <a:ext uri="{FF2B5EF4-FFF2-40B4-BE49-F238E27FC236}">
+                <a16:creationId xmlns:a16="http://schemas.microsoft.com/office/drawing/2014/main" id="{A64550EC-E6FC-9972-9F04-333EEC9DF077}"/>
+              </a:ext>
+            </a:extLst>
+          </p:cNvPr>
           <p:cNvSpPr>
             <a:spLocks noGrp="1"/>
           </p:cNvSpPr>
@@ -2251,7 +2374,7 @@
           <a:bodyPr/>
           <a:lstStyle/>
           <a:p>
-            <a:fld id="{5BCAD085-E8A6-8845-BD4E-CB4CCA059FC4}" type="datetimeFigureOut">
+            <a:fld id="{8558E3C9-D613-4CEE-BBBF-192C1F40DF69}" type="datetimeFigureOut">
               <a:rPr lang="en-US" smtClean="0"/>
               <a:t>5/19/2026</a:t>
             </a:fld>
@@ -2261,7 +2384,13 @@
       </p:sp>
       <p:sp>
         <p:nvSpPr>
-          <p:cNvPr id="6" name="Footer Placeholder 5"/>
+          <p:cNvPr id="6" name="Footer Placeholder 5">
+            <a:extLst>
+              <a:ext uri="{FF2B5EF4-FFF2-40B4-BE49-F238E27FC236}">
+                <a16:creationId xmlns:a16="http://schemas.microsoft.com/office/drawing/2014/main" id="{0445BC65-0E2E-4869-E23F-DC99CA278F30}"/>
+              </a:ext>
+            </a:extLst>
+          </p:cNvPr>
           <p:cNvSpPr>
             <a:spLocks noGrp="1"/>
           </p:cNvSpPr>
@@ -2280,7 +2409,13 @@
       </p:sp>
       <p:sp>
         <p:nvSpPr>
-          <p:cNvPr id="7" name="Slide Number Placeholder 6"/>
+          <p:cNvPr id="7" name="Slide Number Placeholder 6">
+            <a:extLst>
+              <a:ext uri="{FF2B5EF4-FFF2-40B4-BE49-F238E27FC236}">
+                <a16:creationId xmlns:a16="http://schemas.microsoft.com/office/drawing/2014/main" id="{9EE08B81-651F-1EBA-528C-DD239A6E2F8E}"/>
+              </a:ext>
+            </a:extLst>
+          </p:cNvPr>
           <p:cNvSpPr>
             <a:spLocks noGrp="1"/>
           </p:cNvSpPr>
@@ -2293,7 +2428,7 @@
           <a:bodyPr/>
           <a:lstStyle/>
           <a:p>
-            <a:fld id="{C1FF6DA9-008F-8B48-92A6-B652298478BF}" type="slidenum">
+            <a:fld id="{EBE2A570-D620-4D74-B044-28AC27C05278}" type="slidenum">
               <a:rPr lang="en-US" smtClean="0"/>
               <a:t>‹#›</a:t>
             </a:fld>
@@ -2304,7 +2439,7 @@
     </p:spTree>
     <p:extLst>
       <p:ext uri="{BB962C8B-B14F-4D97-AF65-F5344CB8AC3E}">
-        <p14:creationId xmlns:p14="http://schemas.microsoft.com/office/powerpoint/2010/main" val="1840726560"/>
+        <p14:creationId xmlns:p14="http://schemas.microsoft.com/office/powerpoint/2010/main" val="2814541617"/>
       </p:ext>
     </p:extLst>
   </p:cSld>
@@ -2333,7 +2468,13 @@
       </p:grpSpPr>
       <p:sp>
         <p:nvSpPr>
-          <p:cNvPr id="2" name="Title 1"/>
+          <p:cNvPr id="2" name="Title 1">
+            <a:extLst>
+              <a:ext uri="{FF2B5EF4-FFF2-40B4-BE49-F238E27FC236}">
+                <a16:creationId xmlns:a16="http://schemas.microsoft.com/office/drawing/2014/main" id="{F57C46BD-EFA1-F408-2727-CB344B0DC43F}"/>
+              </a:ext>
+            </a:extLst>
+          </p:cNvPr>
           <p:cNvSpPr>
             <a:spLocks noGrp="1"/>
           </p:cNvSpPr>
@@ -2343,15 +2484,15 @@
         </p:nvSpPr>
         <p:spPr>
           <a:xfrm>
-            <a:off x="1792288" y="4800600"/>
-            <a:ext cx="5486400" cy="566738"/>
+            <a:off x="839788" y="457200"/>
+            <a:ext cx="3932237" cy="1600200"/>
           </a:xfrm>
         </p:spPr>
         <p:txBody>
           <a:bodyPr anchor="b"/>
           <a:lstStyle>
-            <a:lvl1pPr algn="l">
-              <a:defRPr sz="2000" b="1"/>
+            <a:lvl1pPr>
+              <a:defRPr sz="3200"/>
             </a:lvl1pPr>
           </a:lstStyle>
           <a:p>
@@ -2364,7 +2505,13 @@
       </p:sp>
       <p:sp>
         <p:nvSpPr>
-          <p:cNvPr id="3" name="Picture Placeholder 2"/>
+          <p:cNvPr id="3" name="Picture Placeholder 2">
+            <a:extLst>
+              <a:ext uri="{FF2B5EF4-FFF2-40B4-BE49-F238E27FC236}">
+                <a16:creationId xmlns:a16="http://schemas.microsoft.com/office/drawing/2014/main" id="{358BE7E6-9F35-080E-B0C3-73A1047AC97C}"/>
+              </a:ext>
+            </a:extLst>
+          </p:cNvPr>
           <p:cNvSpPr>
             <a:spLocks noGrp="1"/>
           </p:cNvSpPr>
@@ -2374,8 +2521,8 @@
         </p:nvSpPr>
         <p:spPr>
           <a:xfrm>
-            <a:off x="1792288" y="612775"/>
-            <a:ext cx="5486400" cy="4114800"/>
+            <a:off x="5183188" y="987425"/>
+            <a:ext cx="6172200" cy="4873625"/>
           </a:xfrm>
         </p:spPr>
         <p:txBody>
@@ -2425,7 +2572,13 @@
       </p:sp>
       <p:sp>
         <p:nvSpPr>
-          <p:cNvPr id="4" name="Text Placeholder 3"/>
+          <p:cNvPr id="4" name="Text Placeholder 3">
+            <a:extLst>
+              <a:ext uri="{FF2B5EF4-FFF2-40B4-BE49-F238E27FC236}">
+                <a16:creationId xmlns:a16="http://schemas.microsoft.com/office/drawing/2014/main" id="{0689F201-7F37-C293-079B-7BC741C70540}"/>
+              </a:ext>
+            </a:extLst>
+          </p:cNvPr>
           <p:cNvSpPr>
             <a:spLocks noGrp="1"/>
           </p:cNvSpPr>
@@ -2435,8 +2588,8 @@
         </p:nvSpPr>
         <p:spPr>
           <a:xfrm>
-            <a:off x="1792288" y="5367338"/>
-            <a:ext cx="5486400" cy="804862"/>
+            <a:off x="839788" y="2057400"/>
+            <a:ext cx="3932237" cy="3811588"/>
           </a:xfrm>
         </p:spPr>
         <p:txBody>
@@ -2444,39 +2597,39 @@
           <a:lstStyle>
             <a:lvl1pPr marL="0" indent="0">
               <a:buNone/>
-              <a:defRPr sz="1400"/>
+              <a:defRPr sz="1600"/>
             </a:lvl1pPr>
             <a:lvl2pPr marL="457200" indent="0">
               <a:buNone/>
-              <a:defRPr sz="1200"/>
+              <a:defRPr sz="1400"/>
             </a:lvl2pPr>
             <a:lvl3pPr marL="914400" indent="0">
               <a:buNone/>
-              <a:defRPr sz="1000"/>
+              <a:defRPr sz="1200"/>
             </a:lvl3pPr>
             <a:lvl4pPr marL="1371600" indent="0">
               <a:buNone/>
-              <a:defRPr sz="900"/>
+              <a:defRPr sz="1000"/>
             </a:lvl4pPr>
             <a:lvl5pPr marL="1828800" indent="0">
               <a:buNone/>
-              <a:defRPr sz="900"/>
+              <a:defRPr sz="1000"/>
             </a:lvl5pPr>
             <a:lvl6pPr marL="2286000" indent="0">
               <a:buNone/>
-              <a:defRPr sz="900"/>
+              <a:defRPr sz="1000"/>
             </a:lvl6pPr>
             <a:lvl7pPr marL="2743200" indent="0">
               <a:buNone/>
-              <a:defRPr sz="900"/>
+              <a:defRPr sz="1000"/>
             </a:lvl7pPr>
             <a:lvl8pPr marL="3200400" indent="0">
               <a:buNone/>
-              <a:defRPr sz="900"/>
+              <a:defRPr sz="1000"/>
             </a:lvl8pPr>
             <a:lvl9pPr marL="3657600" indent="0">
               <a:buNone/>
-              <a:defRPr sz="900"/>
+              <a:defRPr sz="1000"/>
             </a:lvl9pPr>
           </a:lstStyle>
           <a:p>
@@ -2490,7 +2643,13 @@
       </p:sp>
       <p:sp>
         <p:nvSpPr>
-          <p:cNvPr id="5" name="Date Placeholder 4"/>
+          <p:cNvPr id="5" name="Date Placeholder 4">
+            <a:extLst>
+              <a:ext uri="{FF2B5EF4-FFF2-40B4-BE49-F238E27FC236}">
+                <a16:creationId xmlns:a16="http://schemas.microsoft.com/office/drawing/2014/main" id="{0AE27F25-F0ED-5E33-8758-B5193FCC1D70}"/>
+              </a:ext>
+            </a:extLst>
+          </p:cNvPr>
           <p:cNvSpPr>
             <a:spLocks noGrp="1"/>
           </p:cNvSpPr>
@@ -2503,7 +2662,7 @@
           <a:bodyPr/>
           <a:lstStyle/>
           <a:p>
-            <a:fld id="{5BCAD085-E8A6-8845-BD4E-CB4CCA059FC4}" type="datetimeFigureOut">
+            <a:fld id="{8558E3C9-D613-4CEE-BBBF-192C1F40DF69}" type="datetimeFigureOut">
               <a:rPr lang="en-US" smtClean="0"/>
               <a:t>5/19/2026</a:t>
             </a:fld>
@@ -2513,7 +2672,13 @@
       </p:sp>
       <p:sp>
         <p:nvSpPr>
-          <p:cNvPr id="6" name="Footer Placeholder 5"/>
+          <p:cNvPr id="6" name="Footer Placeholder 5">
+            <a:extLst>
+              <a:ext uri="{FF2B5EF4-FFF2-40B4-BE49-F238E27FC236}">
+                <a16:creationId xmlns:a16="http://schemas.microsoft.com/office/drawing/2014/main" id="{BF9D4B15-3A09-B570-6A72-5FAA66A8B1F1}"/>
+              </a:ext>
+            </a:extLst>
+          </p:cNvPr>
           <p:cNvSpPr>
             <a:spLocks noGrp="1"/>
           </p:cNvSpPr>
@@ -2532,7 +2697,13 @@
       </p:sp>
       <p:sp>
         <p:nvSpPr>
-          <p:cNvPr id="7" name="Slide Number Placeholder 6"/>
+          <p:cNvPr id="7" name="Slide Number Placeholder 6">
+            <a:extLst>
+              <a:ext uri="{FF2B5EF4-FFF2-40B4-BE49-F238E27FC236}">
+                <a16:creationId xmlns:a16="http://schemas.microsoft.com/office/drawing/2014/main" id="{C3105491-6FD0-0237-46C0-CE41EBC66F85}"/>
+              </a:ext>
+            </a:extLst>
+          </p:cNvPr>
           <p:cNvSpPr>
             <a:spLocks noGrp="1"/>
           </p:cNvSpPr>
@@ -2545,7 +2716,7 @@
           <a:bodyPr/>
           <a:lstStyle/>
           <a:p>
-            <a:fld id="{C1FF6DA9-008F-8B48-92A6-B652298478BF}" type="slidenum">
+            <a:fld id="{EBE2A570-D620-4D74-B044-28AC27C05278}" type="slidenum">
               <a:rPr lang="en-US" smtClean="0"/>
               <a:t>‹#›</a:t>
             </a:fld>
@@ -2556,7 +2727,7 @@
     </p:spTree>
     <p:extLst>
       <p:ext uri="{BB962C8B-B14F-4D97-AF65-F5344CB8AC3E}">
-        <p14:creationId xmlns:p14="http://schemas.microsoft.com/office/powerpoint/2010/main" val="3889236939"/>
+        <p14:creationId xmlns:p14="http://schemas.microsoft.com/office/powerpoint/2010/main" val="1044255792"/>
       </p:ext>
     </p:extLst>
   </p:cSld>
@@ -2590,7 +2761,13 @@
       </p:grpSpPr>
       <p:sp>
         <p:nvSpPr>
-          <p:cNvPr id="2" name="Title Placeholder 1"/>
+          <p:cNvPr id="2" name="Title Placeholder 1">
+            <a:extLst>
+              <a:ext uri="{FF2B5EF4-FFF2-40B4-BE49-F238E27FC236}">
+                <a16:creationId xmlns:a16="http://schemas.microsoft.com/office/drawing/2014/main" id="{89471283-4A4B-7FED-6203-7744F7FF96A7}"/>
+              </a:ext>
+            </a:extLst>
+          </p:cNvPr>
           <p:cNvSpPr>
             <a:spLocks noGrp="1"/>
           </p:cNvSpPr>
@@ -2600,8 +2777,8 @@
         </p:nvSpPr>
         <p:spPr>
           <a:xfrm>
-            <a:off x="457200" y="274638"/>
-            <a:ext cx="8229600" cy="1143000"/>
+            <a:off x="838200" y="365125"/>
+            <a:ext cx="10515600" cy="1325563"/>
           </a:xfrm>
           <a:prstGeom prst="rect">
             <a:avLst/>
@@ -2622,7 +2799,13 @@
       </p:sp>
       <p:sp>
         <p:nvSpPr>
-          <p:cNvPr id="3" name="Text Placeholder 2"/>
+          <p:cNvPr id="3" name="Text Placeholder 2">
+            <a:extLst>
+              <a:ext uri="{FF2B5EF4-FFF2-40B4-BE49-F238E27FC236}">
+                <a16:creationId xmlns:a16="http://schemas.microsoft.com/office/drawing/2014/main" id="{9FAC1CCC-B4A0-2120-6215-2F796F54F16B}"/>
+              </a:ext>
+            </a:extLst>
+          </p:cNvPr>
           <p:cNvSpPr>
             <a:spLocks noGrp="1"/>
           </p:cNvSpPr>
@@ -2632,8 +2815,8 @@
         </p:nvSpPr>
         <p:spPr>
           <a:xfrm>
-            <a:off x="457200" y="1600200"/>
-            <a:ext cx="8229600" cy="4525963"/>
+            <a:off x="838200" y="1825625"/>
+            <a:ext cx="10515600" cy="4351338"/>
           </a:xfrm>
           <a:prstGeom prst="rect">
             <a:avLst/>
@@ -2683,7 +2866,13 @@
       </p:sp>
       <p:sp>
         <p:nvSpPr>
-          <p:cNvPr id="4" name="Date Placeholder 3"/>
+          <p:cNvPr id="4" name="Date Placeholder 3">
+            <a:extLst>
+              <a:ext uri="{FF2B5EF4-FFF2-40B4-BE49-F238E27FC236}">
+                <a16:creationId xmlns:a16="http://schemas.microsoft.com/office/drawing/2014/main" id="{9DC3A461-D397-08F3-4616-1A522ED919DF}"/>
+              </a:ext>
+            </a:extLst>
+          </p:cNvPr>
           <p:cNvSpPr>
             <a:spLocks noGrp="1"/>
           </p:cNvSpPr>
@@ -2693,8 +2882,8 @@
         </p:nvSpPr>
         <p:spPr>
           <a:xfrm>
-            <a:off x="457200" y="6356350"/>
-            <a:ext cx="2133600" cy="365125"/>
+            <a:off x="838200" y="6356350"/>
+            <a:ext cx="2743200" cy="365125"/>
           </a:xfrm>
           <a:prstGeom prst="rect">
             <a:avLst/>
@@ -2707,14 +2896,14 @@
               <a:defRPr sz="1200">
                 <a:solidFill>
                   <a:schemeClr val="tx1">
-                    <a:tint val="75000"/>
+                    <a:tint val="82000"/>
                   </a:schemeClr>
                 </a:solidFill>
               </a:defRPr>
             </a:lvl1pPr>
           </a:lstStyle>
           <a:p>
-            <a:fld id="{5BCAD085-E8A6-8845-BD4E-CB4CCA059FC4}" type="datetimeFigureOut">
+            <a:fld id="{8558E3C9-D613-4CEE-BBBF-192C1F40DF69}" type="datetimeFigureOut">
               <a:rPr lang="en-US" smtClean="0"/>
               <a:t>5/19/2026</a:t>
             </a:fld>
@@ -2724,7 +2913,13 @@
       </p:sp>
       <p:sp>
         <p:nvSpPr>
-          <p:cNvPr id="5" name="Footer Placeholder 4"/>
+          <p:cNvPr id="5" name="Footer Placeholder 4">
+            <a:extLst>
+              <a:ext uri="{FF2B5EF4-FFF2-40B4-BE49-F238E27FC236}">
+                <a16:creationId xmlns:a16="http://schemas.microsoft.com/office/drawing/2014/main" id="{7C677881-B858-E4D3-FE56-8B7B806491AD}"/>
+              </a:ext>
+            </a:extLst>
+          </p:cNvPr>
           <p:cNvSpPr>
             <a:spLocks noGrp="1"/>
           </p:cNvSpPr>
@@ -2734,8 +2929,8 @@
         </p:nvSpPr>
         <p:spPr>
           <a:xfrm>
-            <a:off x="3124200" y="6356350"/>
-            <a:ext cx="2895600" cy="365125"/>
+            <a:off x="4038600" y="6356350"/>
+            <a:ext cx="4114800" cy="365125"/>
           </a:xfrm>
           <a:prstGeom prst="rect">
             <a:avLst/>
@@ -2748,7 +2943,7 @@
               <a:defRPr sz="1200">
                 <a:solidFill>
                   <a:schemeClr val="tx1">
-                    <a:tint val="75000"/>
+                    <a:tint val="82000"/>
                   </a:schemeClr>
                 </a:solidFill>
               </a:defRPr>
@@ -2761,7 +2956,13 @@
       </p:sp>
       <p:sp>
         <p:nvSpPr>
-          <p:cNvPr id="6" name="Slide Number Placeholder 5"/>
+          <p:cNvPr id="6" name="Slide Number Placeholder 5">
+            <a:extLst>
+              <a:ext uri="{FF2B5EF4-FFF2-40B4-BE49-F238E27FC236}">
+                <a16:creationId xmlns:a16="http://schemas.microsoft.com/office/drawing/2014/main" id="{5D163F01-F0CD-6ADE-8AEF-970B0F4FDDDC}"/>
+              </a:ext>
+            </a:extLst>
+          </p:cNvPr>
           <p:cNvSpPr>
             <a:spLocks noGrp="1"/>
           </p:cNvSpPr>
@@ -2771,8 +2972,8 @@
         </p:nvSpPr>
         <p:spPr>
           <a:xfrm>
-            <a:off x="6553200" y="6356350"/>
-            <a:ext cx="2133600" cy="365125"/>
+            <a:off x="8610600" y="6356350"/>
+            <a:ext cx="2743200" cy="365125"/>
           </a:xfrm>
           <a:prstGeom prst="rect">
             <a:avLst/>
@@ -2785,14 +2986,14 @@
               <a:defRPr sz="1200">
                 <a:solidFill>
                   <a:schemeClr val="tx1">
-                    <a:tint val="75000"/>
+                    <a:tint val="82000"/>
                   </a:schemeClr>
                 </a:solidFill>
               </a:defRPr>
             </a:lvl1pPr>
           </a:lstStyle>
           <a:p>
-            <a:fld id="{C1FF6DA9-008F-8B48-92A6-B652298478BF}" type="slidenum">
+            <a:fld id="{EBE2A570-D620-4D74-B044-28AC27C05278}" type="slidenum">
               <a:rPr lang="en-US" smtClean="0"/>
               <a:t>‹#›</a:t>
             </a:fld>
@@ -2803,7 +3004,7 @@
     </p:spTree>
     <p:extLst>
       <p:ext uri="{BB962C8B-B14F-4D97-AF65-F5344CB8AC3E}">
-        <p14:creationId xmlns:p14="http://schemas.microsoft.com/office/powerpoint/2010/main" val="2209977519"/>
+        <p14:creationId xmlns:p14="http://schemas.microsoft.com/office/powerpoint/2010/main" val="4041174609"/>
       </p:ext>
     </p:extLst>
   </p:cSld>
@@ -2823,7 +3024,10 @@
   </p:sldLayoutIdLst>
   <p:txStyles>
     <p:titleStyle>
-      <a:lvl1pPr algn="ctr" defTabSz="457200" rtl="0" eaLnBrk="1" latinLnBrk="0" hangingPunct="1">
+      <a:lvl1pPr algn="l" defTabSz="914400" rtl="0" eaLnBrk="1" latinLnBrk="0" hangingPunct="1">
+        <a:lnSpc>
+          <a:spcPct val="90000"/>
+        </a:lnSpc>
         <a:spcBef>
           <a:spcPct val="0"/>
         </a:spcBef>
@@ -2839,13 +3043,16 @@
       </a:lvl1pPr>
     </p:titleStyle>
     <p:bodyStyle>
-      <a:lvl1pPr marL="342900" indent="-342900" algn="l" defTabSz="457200" rtl="0" eaLnBrk="1" latinLnBrk="0" hangingPunct="1">
+      <a:lvl1pPr marL="228600" indent="-228600" algn="l" defTabSz="914400" rtl="0" eaLnBrk="1" latinLnBrk="0" hangingPunct="1">
+        <a:lnSpc>
+          <a:spcPct val="90000"/>
+        </a:lnSpc>
         <a:spcBef>
-          <a:spcPct val="20000"/>
+          <a:spcPts val="1000"/>
         </a:spcBef>
-        <a:buFont typeface="Arial"/>
+        <a:buFont typeface="Arial" panose="020B0604020202020204" pitchFamily="34" charset="0"/>
         <a:buChar char="•"/>
-        <a:defRPr sz="3200" kern="1200">
+        <a:defRPr sz="2800" kern="1200">
           <a:solidFill>
             <a:schemeClr val="tx1"/>
           </a:solidFill>
@@ -2854,26 +3061,14 @@
           <a:cs typeface="+mn-cs"/>
         </a:defRPr>
       </a:lvl1pPr>
-      <a:lvl2pPr marL="742950" indent="-285750" algn="l" defTabSz="457200" rtl="0" eaLnBrk="1" latinLnBrk="0" hangingPunct="1">
+      <a:lvl2pPr marL="685800" indent="-228600" algn="l" defTabSz="914400" rtl="0" eaLnBrk="1" latinLnBrk="0" hangingPunct="1">
+        <a:lnSpc>
+          <a:spcPct val="90000"/>
+        </a:lnSpc>
         <a:spcBef>
-          <a:spcPct val="20000"/>
+          <a:spcPts val="500"/>
         </a:spcBef>
-        <a:buFont typeface="Arial"/>
-        <a:buChar char="–"/>
-        <a:defRPr sz="2800" kern="1200">
-          <a:solidFill>
-            <a:schemeClr val="tx1"/>
-          </a:solidFill>
-          <a:latin typeface="+mn-lt"/>
-          <a:ea typeface="+mn-ea"/>
-          <a:cs typeface="+mn-cs"/>
-        </a:defRPr>
-      </a:lvl2pPr>
-      <a:lvl3pPr marL="1143000" indent="-228600" algn="l" defTabSz="457200" rtl="0" eaLnBrk="1" latinLnBrk="0" hangingPunct="1">
-        <a:spcBef>
-          <a:spcPct val="20000"/>
-        </a:spcBef>
-        <a:buFont typeface="Arial"/>
+        <a:buFont typeface="Arial" panose="020B0604020202020204" pitchFamily="34" charset="0"/>
         <a:buChar char="•"/>
         <a:defRPr sz="2400" kern="1200">
           <a:solidFill>
@@ -2883,42 +3078,15 @@
           <a:ea typeface="+mn-ea"/>
           <a:cs typeface="+mn-cs"/>
         </a:defRPr>
-      </a:lvl3pPr>
-      <a:lvl4pPr marL="1600200" indent="-228600" algn="l" defTabSz="457200" rtl="0" eaLnBrk="1" latinLnBrk="0" hangingPunct="1">
+      </a:lvl2pPr>
+      <a:lvl3pPr marL="1143000" indent="-228600" algn="l" defTabSz="914400" rtl="0" eaLnBrk="1" latinLnBrk="0" hangingPunct="1">
+        <a:lnSpc>
+          <a:spcPct val="90000"/>
+        </a:lnSpc>
         <a:spcBef>
-          <a:spcPct val="20000"/>
+          <a:spcPts val="500"/>
         </a:spcBef>
-        <a:buFont typeface="Arial"/>
-        <a:buChar char="–"/>
-        <a:defRPr sz="2000" kern="1200">
-          <a:solidFill>
-            <a:schemeClr val="tx1"/>
-          </a:solidFill>
-          <a:latin typeface="+mn-lt"/>
-          <a:ea typeface="+mn-ea"/>
-          <a:cs typeface="+mn-cs"/>
-        </a:defRPr>
-      </a:lvl4pPr>
-      <a:lvl5pPr marL="2057400" indent="-228600" algn="l" defTabSz="457200" rtl="0" eaLnBrk="1" latinLnBrk="0" hangingPunct="1">
-        <a:spcBef>
-          <a:spcPct val="20000"/>
-        </a:spcBef>
-        <a:buFont typeface="Arial"/>
-        <a:buChar char="»"/>
-        <a:defRPr sz="2000" kern="1200">
-          <a:solidFill>
-            <a:schemeClr val="tx1"/>
-          </a:solidFill>
-          <a:latin typeface="+mn-lt"/>
-          <a:ea typeface="+mn-ea"/>
-          <a:cs typeface="+mn-cs"/>
-        </a:defRPr>
-      </a:lvl5pPr>
-      <a:lvl6pPr marL="2514600" indent="-228600" algn="l" defTabSz="457200" rtl="0" eaLnBrk="1" latinLnBrk="0" hangingPunct="1">
-        <a:spcBef>
-          <a:spcPct val="20000"/>
-        </a:spcBef>
-        <a:buFont typeface="Arial"/>
+        <a:buFont typeface="Arial" panose="020B0604020202020204" pitchFamily="34" charset="0"/>
         <a:buChar char="•"/>
         <a:defRPr sz="2000" kern="1200">
           <a:solidFill>
@@ -2928,14 +3096,71 @@
           <a:ea typeface="+mn-ea"/>
           <a:cs typeface="+mn-cs"/>
         </a:defRPr>
+      </a:lvl3pPr>
+      <a:lvl4pPr marL="1600200" indent="-228600" algn="l" defTabSz="914400" rtl="0" eaLnBrk="1" latinLnBrk="0" hangingPunct="1">
+        <a:lnSpc>
+          <a:spcPct val="90000"/>
+        </a:lnSpc>
+        <a:spcBef>
+          <a:spcPts val="500"/>
+        </a:spcBef>
+        <a:buFont typeface="Arial" panose="020B0604020202020204" pitchFamily="34" charset="0"/>
+        <a:buChar char="•"/>
+        <a:defRPr sz="1800" kern="1200">
+          <a:solidFill>
+            <a:schemeClr val="tx1"/>
+          </a:solidFill>
+          <a:latin typeface="+mn-lt"/>
+          <a:ea typeface="+mn-ea"/>
+          <a:cs typeface="+mn-cs"/>
+        </a:defRPr>
+      </a:lvl4pPr>
+      <a:lvl5pPr marL="2057400" indent="-228600" algn="l" defTabSz="914400" rtl="0" eaLnBrk="1" latinLnBrk="0" hangingPunct="1">
+        <a:lnSpc>
+          <a:spcPct val="90000"/>
+        </a:lnSpc>
+        <a:spcBef>
+          <a:spcPts val="500"/>
+        </a:spcBef>
+        <a:buFont typeface="Arial" panose="020B0604020202020204" pitchFamily="34" charset="0"/>
+        <a:buChar char="•"/>
+        <a:defRPr sz="1800" kern="1200">
+          <a:solidFill>
+            <a:schemeClr val="tx1"/>
+          </a:solidFill>
+          <a:latin typeface="+mn-lt"/>
+          <a:ea typeface="+mn-ea"/>
+          <a:cs typeface="+mn-cs"/>
+        </a:defRPr>
+      </a:lvl5pPr>
+      <a:lvl6pPr marL="2514600" indent="-228600" algn="l" defTabSz="914400" rtl="0" eaLnBrk="1" latinLnBrk="0" hangingPunct="1">
+        <a:lnSpc>
+          <a:spcPct val="90000"/>
+        </a:lnSpc>
+        <a:spcBef>
+          <a:spcPts val="500"/>
+        </a:spcBef>
+        <a:buFont typeface="Arial" panose="020B0604020202020204" pitchFamily="34" charset="0"/>
+        <a:buChar char="•"/>
+        <a:defRPr sz="1800" kern="1200">
+          <a:solidFill>
+            <a:schemeClr val="tx1"/>
+          </a:solidFill>
+          <a:latin typeface="+mn-lt"/>
+          <a:ea typeface="+mn-ea"/>
+          <a:cs typeface="+mn-cs"/>
+        </a:defRPr>
       </a:lvl6pPr>
-      <a:lvl7pPr marL="2971800" indent="-228600" algn="l" defTabSz="457200" rtl="0" eaLnBrk="1" latinLnBrk="0" hangingPunct="1">
+      <a:lvl7pPr marL="2971800" indent="-228600" algn="l" defTabSz="914400" rtl="0" eaLnBrk="1" latinLnBrk="0" hangingPunct="1">
+        <a:lnSpc>
+          <a:spcPct val="90000"/>
+        </a:lnSpc>
         <a:spcBef>
-          <a:spcPct val="20000"/>
+          <a:spcPts val="500"/>
         </a:spcBef>
-        <a:buFont typeface="Arial"/>
+        <a:buFont typeface="Arial" panose="020B0604020202020204" pitchFamily="34" charset="0"/>
         <a:buChar char="•"/>
-        <a:defRPr sz="2000" kern="1200">
+        <a:defRPr sz="1800" kern="1200">
           <a:solidFill>
             <a:schemeClr val="tx1"/>
           </a:solidFill>
@@ -2944,13 +3169,16 @@
           <a:cs typeface="+mn-cs"/>
         </a:defRPr>
       </a:lvl7pPr>
-      <a:lvl8pPr marL="3429000" indent="-228600" algn="l" defTabSz="457200" rtl="0" eaLnBrk="1" latinLnBrk="0" hangingPunct="1">
+      <a:lvl8pPr marL="3429000" indent="-228600" algn="l" defTabSz="914400" rtl="0" eaLnBrk="1" latinLnBrk="0" hangingPunct="1">
+        <a:lnSpc>
+          <a:spcPct val="90000"/>
+        </a:lnSpc>
         <a:spcBef>
-          <a:spcPct val="20000"/>
+          <a:spcPts val="500"/>
         </a:spcBef>
-        <a:buFont typeface="Arial"/>
+        <a:buFont typeface="Arial" panose="020B0604020202020204" pitchFamily="34" charset="0"/>
         <a:buChar char="•"/>
-        <a:defRPr sz="2000" kern="1200">
+        <a:defRPr sz="1800" kern="1200">
           <a:solidFill>
             <a:schemeClr val="tx1"/>
           </a:solidFill>
@@ -2959,13 +3187,16 @@
           <a:cs typeface="+mn-cs"/>
         </a:defRPr>
       </a:lvl8pPr>
-      <a:lvl9pPr marL="3886200" indent="-228600" algn="l" defTabSz="457200" rtl="0" eaLnBrk="1" latinLnBrk="0" hangingPunct="1">
+      <a:lvl9pPr marL="3886200" indent="-228600" algn="l" defTabSz="914400" rtl="0" eaLnBrk="1" latinLnBrk="0" hangingPunct="1">
+        <a:lnSpc>
+          <a:spcPct val="90000"/>
+        </a:lnSpc>
         <a:spcBef>
-          <a:spcPct val="20000"/>
+          <a:spcPts val="500"/>
         </a:spcBef>
-        <a:buFont typeface="Arial"/>
+        <a:buFont typeface="Arial" panose="020B0604020202020204" pitchFamily="34" charset="0"/>
         <a:buChar char="•"/>
-        <a:defRPr sz="2000" kern="1200">
+        <a:defRPr sz="1800" kern="1200">
           <a:solidFill>
             <a:schemeClr val="tx1"/>
           </a:solidFill>
@@ -2979,7 +3210,7 @@
       <a:defPPr>
         <a:defRPr lang="en-US"/>
       </a:defPPr>
-      <a:lvl1pPr marL="0" algn="l" defTabSz="457200" rtl="0" eaLnBrk="1" latinLnBrk="0" hangingPunct="1">
+      <a:lvl1pPr marL="0" algn="l" defTabSz="914400" rtl="0" eaLnBrk="1" latinLnBrk="0" hangingPunct="1">
         <a:defRPr sz="1800" kern="1200">
           <a:solidFill>
             <a:schemeClr val="tx1"/>
@@ -2989,7 +3220,7 @@
           <a:cs typeface="+mn-cs"/>
         </a:defRPr>
       </a:lvl1pPr>
-      <a:lvl2pPr marL="457200" algn="l" defTabSz="457200" rtl="0" eaLnBrk="1" latinLnBrk="0" hangingPunct="1">
+      <a:lvl2pPr marL="457200" algn="l" defTabSz="914400" rtl="0" eaLnBrk="1" latinLnBrk="0" hangingPunct="1">
         <a:defRPr sz="1800" kern="1200">
           <a:solidFill>
             <a:schemeClr val="tx1"/>
@@ -2999,7 +3230,7 @@
           <a:cs typeface="+mn-cs"/>
         </a:defRPr>
       </a:lvl2pPr>
-      <a:lvl3pPr marL="914400" algn="l" defTabSz="457200" rtl="0" eaLnBrk="1" latinLnBrk="0" hangingPunct="1">
+      <a:lvl3pPr marL="914400" algn="l" defTabSz="914400" rtl="0" eaLnBrk="1" latinLnBrk="0" hangingPunct="1">
         <a:defRPr sz="1800" kern="1200">
           <a:solidFill>
             <a:schemeClr val="tx1"/>
@@ -3009,7 +3240,7 @@
           <a:cs typeface="+mn-cs"/>
         </a:defRPr>
       </a:lvl3pPr>
-      <a:lvl4pPr marL="1371600" algn="l" defTabSz="457200" rtl="0" eaLnBrk="1" latinLnBrk="0" hangingPunct="1">
+      <a:lvl4pPr marL="1371600" algn="l" defTabSz="914400" rtl="0" eaLnBrk="1" latinLnBrk="0" hangingPunct="1">
         <a:defRPr sz="1800" kern="1200">
           <a:solidFill>
             <a:schemeClr val="tx1"/>
@@ -3019,7 +3250,7 @@
           <a:cs typeface="+mn-cs"/>
         </a:defRPr>
       </a:lvl4pPr>
-      <a:lvl5pPr marL="1828800" algn="l" defTabSz="457200" rtl="0" eaLnBrk="1" latinLnBrk="0" hangingPunct="1">
+      <a:lvl5pPr marL="1828800" algn="l" defTabSz="914400" rtl="0" eaLnBrk="1" latinLnBrk="0" hangingPunct="1">
         <a:defRPr sz="1800" kern="1200">
           <a:solidFill>
             <a:schemeClr val="tx1"/>
@@ -3029,7 +3260,7 @@
           <a:cs typeface="+mn-cs"/>
         </a:defRPr>
       </a:lvl5pPr>
-      <a:lvl6pPr marL="2286000" algn="l" defTabSz="457200" rtl="0" eaLnBrk="1" latinLnBrk="0" hangingPunct="1">
+      <a:lvl6pPr marL="2286000" algn="l" defTabSz="914400" rtl="0" eaLnBrk="1" latinLnBrk="0" hangingPunct="1">
         <a:defRPr sz="1800" kern="1200">
           <a:solidFill>
             <a:schemeClr val="tx1"/>
@@ -3039,7 +3270,7 @@
           <a:cs typeface="+mn-cs"/>
         </a:defRPr>
       </a:lvl6pPr>
-      <a:lvl7pPr marL="2743200" algn="l" defTabSz="457200" rtl="0" eaLnBrk="1" latinLnBrk="0" hangingPunct="1">
+      <a:lvl7pPr marL="2743200" algn="l" defTabSz="914400" rtl="0" eaLnBrk="1" latinLnBrk="0" hangingPunct="1">
         <a:defRPr sz="1800" kern="1200">
           <a:solidFill>
             <a:schemeClr val="tx1"/>
@@ -3049,7 +3280,7 @@
           <a:cs typeface="+mn-cs"/>
         </a:defRPr>
       </a:lvl7pPr>
-      <a:lvl8pPr marL="3200400" algn="l" defTabSz="457200" rtl="0" eaLnBrk="1" latinLnBrk="0" hangingPunct="1">
+      <a:lvl8pPr marL="3200400" algn="l" defTabSz="914400" rtl="0" eaLnBrk="1" latinLnBrk="0" hangingPunct="1">
         <a:defRPr sz="1800" kern="1200">
           <a:solidFill>
             <a:schemeClr val="tx1"/>
@@ -3059,7 +3290,7 @@
           <a:cs typeface="+mn-cs"/>
         </a:defRPr>
       </a:lvl8pPr>
-      <a:lvl9pPr marL="3657600" algn="l" defTabSz="457200" rtl="0" eaLnBrk="1" latinLnBrk="0" hangingPunct="1">
+      <a:lvl9pPr marL="3657600" algn="l" defTabSz="914400" rtl="0" eaLnBrk="1" latinLnBrk="0" hangingPunct="1">
         <a:defRPr sz="1800" kern="1200">
           <a:solidFill>
             <a:schemeClr val="tx1"/>
@@ -3093,171 +3324,109 @@
       </p:grpSpPr>
       <p:sp>
         <p:nvSpPr>
-          <p:cNvPr id="2" name="Rectangle 1"/>
-          <p:cNvSpPr/>
-          <p:nvPr/>
+          <p:cNvPr id="2" name="Title 1">
+            <a:extLst>
+              <a:ext uri="{FF2B5EF4-FFF2-40B4-BE49-F238E27FC236}">
+                <a16:creationId xmlns:a16="http://schemas.microsoft.com/office/drawing/2014/main" id="{271C8CDA-0A94-52A6-B5BF-5E6FE93DACEB}"/>
+              </a:ext>
+            </a:extLst>
+          </p:cNvPr>
+          <p:cNvSpPr>
+            <a:spLocks noGrp="1"/>
+          </p:cNvSpPr>
+          <p:nvPr>
+            <p:ph type="ctrTitle"/>
+          </p:nvPr>
+        </p:nvSpPr>
+        <p:spPr/>
+        <p:txBody>
+          <a:bodyPr>
+            <a:normAutofit fontScale="90000"/>
+          </a:bodyPr>
+          <a:lstStyle/>
+          <a:p>
+            <a:r>
+              <a:rPr lang="en-US" dirty="0"/>
+              <a:t>Nine Ways to Inherit in Rust</a:t>
+            </a:r>
+            <a:br>
+              <a:rPr lang="en-US" dirty="0"/>
+            </a:br>
+            <a:r>
+              <a:rPr lang="en-US" dirty="0"/>
+              <a:t>a Language without Inheritance</a:t>
+            </a:r>
+          </a:p>
+        </p:txBody>
+      </p:sp>
+      <p:sp>
+        <p:nvSpPr>
+          <p:cNvPr id="3" name="Subtitle 2">
+            <a:extLst>
+              <a:ext uri="{FF2B5EF4-FFF2-40B4-BE49-F238E27FC236}">
+                <a16:creationId xmlns:a16="http://schemas.microsoft.com/office/drawing/2014/main" id="{53DACCAE-E40C-0B05-154A-6C2C8FC90DE7}"/>
+              </a:ext>
+            </a:extLst>
+          </p:cNvPr>
+          <p:cNvSpPr>
+            <a:spLocks noGrp="1"/>
+          </p:cNvSpPr>
+          <p:nvPr>
+            <p:ph type="subTitle" idx="1"/>
+          </p:nvPr>
         </p:nvSpPr>
         <p:spPr>
           <a:xfrm>
-            <a:off x="0" y="0"/>
-            <a:ext cx="9144000" cy="6858000"/>
+            <a:off x="1524000" y="5876143"/>
+            <a:ext cx="9144000" cy="565879"/>
           </a:xfrm>
-          <a:prstGeom prst="rect">
-            <a:avLst/>
-          </a:prstGeom>
-          <a:solidFill>
-            <a:srgbClr val="000000"/>
-          </a:solidFill>
-          <a:ln>
-            <a:noFill/>
-          </a:ln>
         </p:spPr>
-        <p:style>
-          <a:lnRef idx="1">
-            <a:schemeClr val="accent1"/>
-          </a:lnRef>
-          <a:fillRef idx="3">
-            <a:schemeClr val="accent1"/>
-          </a:fillRef>
-          <a:effectRef idx="2">
-            <a:schemeClr val="accent1"/>
-          </a:effectRef>
-          <a:fontRef idx="minor">
-            <a:schemeClr val="lt1"/>
-          </a:fontRef>
-        </p:style>
-        <p:txBody>
-          <a:bodyPr rtlCol="0" anchor="ctr"/>
-          <a:lstStyle/>
-          <a:p>
-            <a:pPr algn="ctr"/>
-            <a:endParaRPr/>
-          </a:p>
-        </p:txBody>
-      </p:sp>
-      <p:sp>
-        <p:nvSpPr>
-          <p:cNvPr id="3" name="Rectangle 2"/>
-          <p:cNvSpPr/>
-          <p:nvPr/>
-        </p:nvSpPr>
-        <p:spPr>
-          <a:xfrm>
-            <a:off x="7543800" y="0"/>
-            <a:ext cx="1600200" cy="6858000"/>
-          </a:xfrm>
-          <a:prstGeom prst="rect">
-            <a:avLst/>
-          </a:prstGeom>
-          <a:solidFill>
-            <a:srgbClr val="FAFAFA"/>
-          </a:solidFill>
-          <a:ln w="9525">
-            <a:solidFill>
-              <a:srgbClr val="DCDCDC"/>
-            </a:solidFill>
-          </a:ln>
-        </p:spPr>
-        <p:style>
-          <a:lnRef idx="1">
-            <a:schemeClr val="accent1"/>
-          </a:lnRef>
-          <a:fillRef idx="3">
-            <a:schemeClr val="accent1"/>
-          </a:fillRef>
-          <a:effectRef idx="2">
-            <a:schemeClr val="accent1"/>
-          </a:effectRef>
-          <a:fontRef idx="minor">
-            <a:schemeClr val="lt1"/>
-          </a:fontRef>
-        </p:style>
-        <p:txBody>
-          <a:bodyPr rtlCol="0" anchor="ctr"/>
-          <a:lstStyle/>
-          <a:p>
-            <a:pPr algn="ctr"/>
-            <a:endParaRPr/>
-          </a:p>
-        </p:txBody>
-      </p:sp>
-      <p:sp>
-        <p:nvSpPr>
-          <p:cNvPr id="4" name="TextBox 3"/>
-          <p:cNvSpPr txBox="1"/>
-          <p:nvPr/>
-        </p:nvSpPr>
-        <p:spPr>
-          <a:xfrm rot="16200000">
-            <a:off x="7616952" y="274320"/>
-            <a:ext cx="1453896" cy="6309360"/>
-          </a:xfrm>
-          <a:prstGeom prst="rect">
-            <a:avLst/>
-          </a:prstGeom>
-          <a:noFill/>
-        </p:spPr>
-        <p:txBody>
-          <a:bodyPr wrap="square" anchor="ctr">
-            <a:spAutoFit/>
-          </a:bodyPr>
-          <a:lstStyle/>
-          <a:p>
-            <a:pPr>
-              <a:defRPr sz="2600">
+        <p:txBody>
+          <a:bodyPr/>
+          <a:lstStyle/>
+          <a:p>
+            <a:r>
+              <a:rPr lang="en-US" dirty="0">
                 <a:solidFill>
-                  <a:srgbClr val="141414"/>
+                  <a:schemeClr val="bg1">
+                    <a:lumMod val="50000"/>
+                  </a:schemeClr>
                 </a:solidFill>
-                <a:latin typeface="Aptos"/>
-              </a:defRPr>
-            </a:pPr>
-            <a:r>
-              <a:t>Puzzle 9</a:t>
-            </a:r>
-          </a:p>
-        </p:txBody>
-      </p:sp>
-      <p:sp>
-        <p:nvSpPr>
-          <p:cNvPr id="5" name="TextBox 4"/>
-          <p:cNvSpPr txBox="1"/>
-          <p:nvPr/>
-        </p:nvSpPr>
-        <p:spPr>
-          <a:xfrm>
-            <a:off x="731520" y="502920"/>
-            <a:ext cx="6446520" cy="338554"/>
-          </a:xfrm>
-          <a:prstGeom prst="rect">
-            <a:avLst/>
-          </a:prstGeom>
-          <a:noFill/>
-        </p:spPr>
-        <p:txBody>
-          <a:bodyPr wrap="square">
-            <a:spAutoFit/>
-          </a:bodyPr>
-          <a:lstStyle/>
-          <a:p>
-            <a:r>
-              <a:rPr lang="en-US" sz="1600" dirty="0">
+              </a:rPr>
+              <a:t>Carl Kadie · github.com/</a:t>
+            </a:r>
+            <a:r>
+              <a:rPr lang="en-US" dirty="0" err="1">
                 <a:solidFill>
-                  <a:srgbClr val="E6E6E6"/>
+                  <a:schemeClr val="bg1">
+                    <a:lumMod val="50000"/>
+                  </a:schemeClr>
                 </a:solidFill>
-                <a:latin typeface="Aptos"/>
               </a:rPr>
-              <a:t>Intro</a:t>
-            </a:r>
-            <a:endParaRPr sz="1600" dirty="0">
-              <a:solidFill>
-                <a:srgbClr val="E6E6E6"/>
-              </a:solidFill>
-              <a:latin typeface="Aptos"/>
-            </a:endParaRPr>
+              <a:t>CarlKCarlK</a:t>
+            </a:r>
+            <a:r>
+              <a:rPr lang="en-US" dirty="0">
+                <a:solidFill>
+                  <a:schemeClr val="bg1">
+                    <a:lumMod val="50000"/>
+                  </a:schemeClr>
+                </a:solidFill>
+              </a:rPr>
+              <a:t>/rust-inherit</a:t>
+            </a:r>
+          </a:p>
+          <a:p>
+            <a:endParaRPr lang="en-US" dirty="0"/>
           </a:p>
         </p:txBody>
       </p:sp>
     </p:spTree>
+    <p:extLst>
+      <p:ext uri="{BB962C8B-B14F-4D97-AF65-F5344CB8AC3E}">
+        <p14:creationId xmlns:p14="http://schemas.microsoft.com/office/powerpoint/2010/main" val="2042718336"/>
+      </p:ext>
+    </p:extLst>
   </p:cSld>
   <p:clrMapOvr>
     <a:masterClrMapping/>
@@ -3284,100 +3453,124 @@
       </p:grpSpPr>
       <p:sp>
         <p:nvSpPr>
-          <p:cNvPr id="2" name="Rectangle 1"/>
-          <p:cNvSpPr/>
-          <p:nvPr/>
-        </p:nvSpPr>
-        <p:spPr>
-          <a:xfrm>
-            <a:off x="0" y="0"/>
-            <a:ext cx="9144000" cy="6858000"/>
-          </a:xfrm>
-          <a:prstGeom prst="rect">
-            <a:avLst/>
-          </a:prstGeom>
-          <a:solidFill>
-            <a:srgbClr val="000000"/>
-          </a:solidFill>
-          <a:ln>
-            <a:noFill/>
-          </a:ln>
-        </p:spPr>
-        <p:style>
-          <a:lnRef idx="1">
-            <a:schemeClr val="accent1"/>
-          </a:lnRef>
-          <a:fillRef idx="3">
-            <a:schemeClr val="accent1"/>
-          </a:fillRef>
-          <a:effectRef idx="2">
-            <a:schemeClr val="accent1"/>
-          </a:effectRef>
-          <a:fontRef idx="minor">
-            <a:schemeClr val="lt1"/>
-          </a:fontRef>
-        </p:style>
-        <p:txBody>
-          <a:bodyPr rtlCol="0" anchor="ctr"/>
+          <p:cNvPr id="2" name="Title 1">
+            <a:extLst>
+              <a:ext uri="{FF2B5EF4-FFF2-40B4-BE49-F238E27FC236}">
+                <a16:creationId xmlns:a16="http://schemas.microsoft.com/office/drawing/2014/main" id="{72C61BC1-F091-430C-6359-552E573742C1}"/>
+              </a:ext>
+            </a:extLst>
+          </p:cNvPr>
+          <p:cNvSpPr>
+            <a:spLocks noGrp="1"/>
+          </p:cNvSpPr>
+          <p:nvPr>
+            <p:ph type="title"/>
+          </p:nvPr>
+        </p:nvSpPr>
+        <p:spPr/>
+        <p:txBody>
+          <a:bodyPr/>
           <a:lstStyle/>
           <a:p>
             <a:pPr algn="ctr"/>
-            <a:endParaRPr/>
-          </a:p>
-        </p:txBody>
-      </p:sp>
-      <p:sp>
-        <p:nvSpPr>
-          <p:cNvPr id="3" name="TextBox 2"/>
-          <p:cNvSpPr txBox="1"/>
-          <p:nvPr/>
-        </p:nvSpPr>
-        <p:spPr>
-          <a:xfrm>
-            <a:off x="164592" y="109728"/>
-            <a:ext cx="8814816" cy="6638544"/>
-          </a:xfrm>
-          <a:prstGeom prst="rect">
-            <a:avLst/>
-          </a:prstGeom>
-          <a:noFill/>
-        </p:spPr>
-        <p:txBody>
-          <a:bodyPr wrap="square">
-            <a:noAutofit/>
-          </a:bodyPr>
-          <a:lstStyle/>
-          <a:p>
-            <a:pPr>
-              <a:lnSpc>
-                <a:spcPct val="95000"/>
-              </a:lnSpc>
-              <a:spcBef>
-                <a:spcPts val="0"/>
-              </a:spcBef>
-              <a:spcAft>
-                <a:spcPts val="0"/>
-              </a:spcAft>
+            <a:r>
+              <a:rPr lang="en-US" dirty="0"/>
+              <a:t>Introduction</a:t>
+            </a:r>
+          </a:p>
+        </p:txBody>
+      </p:sp>
+      <p:sp>
+        <p:nvSpPr>
+          <p:cNvPr id="3" name="Content Placeholder 2">
+            <a:extLst>
+              <a:ext uri="{FF2B5EF4-FFF2-40B4-BE49-F238E27FC236}">
+                <a16:creationId xmlns:a16="http://schemas.microsoft.com/office/drawing/2014/main" id="{B1CBE78B-2493-C37F-4EB5-71E816AF6934}"/>
+              </a:ext>
+            </a:extLst>
+          </p:cNvPr>
+          <p:cNvSpPr>
+            <a:spLocks noGrp="1"/>
+          </p:cNvSpPr>
+          <p:nvPr>
+            <p:ph idx="1"/>
+          </p:nvPr>
+        </p:nvSpPr>
+        <p:spPr/>
+        <p:txBody>
+          <a:bodyPr/>
+          <a:lstStyle/>
+          <a:p>
+            <a:r>
+              <a:rPr lang="en-US" dirty="0"/>
+              <a:t>Rust has </a:t>
+            </a:r>
+            <a:r>
+              <a:rPr lang="en-US" b="1" dirty="0"/>
+              <a:t>objects</a:t>
+            </a:r>
+            <a:r>
+              <a:rPr lang="en-US" dirty="0"/>
+              <a:t>, but not class </a:t>
+            </a:r>
+            <a:r>
+              <a:rPr lang="en-US" b="1" dirty="0"/>
+              <a:t>inheritance</a:t>
+            </a:r>
+          </a:p>
+          <a:p>
+            <a:r>
+              <a:rPr lang="en-US" dirty="0"/>
+              <a:t>Defining “object-oriented” is controversial</a:t>
+            </a:r>
+          </a:p>
+          <a:p>
+            <a:pPr lvl="1"/>
+            <a:r>
+              <a:rPr lang="en-US" dirty="0"/>
+              <a:t>Skip that debate</a:t>
+            </a:r>
+          </a:p>
+          <a:p>
+            <a:pPr lvl="1"/>
+            <a:r>
+              <a:rPr lang="en-US" dirty="0"/>
+              <a:t>How do we share behavior across related types?</a:t>
+            </a:r>
+          </a:p>
+          <a:p>
+            <a:r>
+              <a:rPr lang="en-US" dirty="0"/>
+              <a:t>Credentials: C++, C#, Python*, Smalltalk</a:t>
+            </a:r>
+          </a:p>
+          <a:p>
+            <a:r>
+              <a:rPr lang="en-US" dirty="0"/>
+              <a:t>Format: 9 puzzles &amp; Rust solutions</a:t>
+            </a:r>
+          </a:p>
+          <a:p>
+            <a:pPr lvl="1"/>
+            <a:r>
+              <a:rPr lang="en-US" dirty="0"/>
+              <a:t>inspired by real code</a:t>
+            </a:r>
+          </a:p>
+          <a:p>
+            <a:pPr marL="0" indent="0">
+              <a:buNone/>
             </a:pPr>
-            <a:r>
-              <a:rPr lang="en-US" sz="1600" dirty="0">
-                <a:solidFill>
-                  <a:srgbClr val="BAC2DE"/>
-                </a:solidFill>
-                <a:latin typeface="Consolas"/>
-              </a:rPr>
-              <a:t>intro2</a:t>
-            </a:r>
-            <a:endParaRPr sz="1600" dirty="0">
-              <a:solidFill>
-                <a:srgbClr val="BAC2DE"/>
-              </a:solidFill>
-              <a:latin typeface="Consolas"/>
-            </a:endParaRPr>
+            <a:endParaRPr lang="en-US" dirty="0"/>
           </a:p>
         </p:txBody>
       </p:sp>
     </p:spTree>
+    <p:extLst>
+      <p:ext uri="{BB962C8B-B14F-4D97-AF65-F5344CB8AC3E}">
+        <p14:creationId xmlns:p14="http://schemas.microsoft.com/office/powerpoint/2010/main" val="38038"/>
+      </p:ext>
+    </p:extLst>
   </p:cSld>
   <p:clrMapOvr>
     <a:masterClrMapping/>
@@ -3396,44 +3589,44 @@
         <a:sysClr val="window" lastClr="FFFFFF"/>
       </a:lt1>
       <a:dk2>
-        <a:srgbClr val="1F497D"/>
+        <a:srgbClr val="0E2841"/>
       </a:dk2>
       <a:lt2>
-        <a:srgbClr val="EEECE1"/>
+        <a:srgbClr val="E8E8E8"/>
       </a:lt2>
       <a:accent1>
-        <a:srgbClr val="4F81BD"/>
+        <a:srgbClr val="156082"/>
       </a:accent1>
       <a:accent2>
-        <a:srgbClr val="C0504D"/>
+        <a:srgbClr val="E97132"/>
       </a:accent2>
       <a:accent3>
-        <a:srgbClr val="9BBB59"/>
+        <a:srgbClr val="196B24"/>
       </a:accent3>
       <a:accent4>
-        <a:srgbClr val="8064A2"/>
+        <a:srgbClr val="0F9ED5"/>
       </a:accent4>
       <a:accent5>
-        <a:srgbClr val="4BACC6"/>
+        <a:srgbClr val="A02B93"/>
       </a:accent5>
       <a:accent6>
-        <a:srgbClr val="F79646"/>
+        <a:srgbClr val="4EA72E"/>
       </a:accent6>
       <a:hlink>
-        <a:srgbClr val="0000FF"/>
+        <a:srgbClr val="467886"/>
       </a:hlink>
       <a:folHlink>
-        <a:srgbClr val="800080"/>
+        <a:srgbClr val="96607D"/>
       </a:folHlink>
     </a:clrScheme>
     <a:fontScheme name="Office">
       <a:majorFont>
-        <a:latin typeface="Calibri"/>
+        <a:latin typeface="Aptos Display" panose="02110004020202020204"/>
         <a:ea typeface=""/>
         <a:cs typeface=""/>
-        <a:font script="Jpan" typeface="ＭＳ Ｐゴシック"/>
+        <a:font script="Jpan" typeface="游ゴシック Light"/>
         <a:font script="Hang" typeface="맑은 고딕"/>
-        <a:font script="Hans" typeface="宋体"/>
+        <a:font script="Hans" typeface="等线 Light"/>
         <a:font script="Hant" typeface="新細明體"/>
         <a:font script="Arab" typeface="Times New Roman"/>
         <a:font script="Hebr" typeface="Times New Roman"/>
@@ -3461,14 +3654,31 @@
         <a:font script="Viet" typeface="Times New Roman"/>
         <a:font script="Uigh" typeface="Microsoft Uighur"/>
         <a:font script="Geor" typeface="Sylfaen"/>
+        <a:font script="Armn" typeface="Arial"/>
+        <a:font script="Bugi" typeface="Leelawadee UI"/>
+        <a:font script="Bopo" typeface="Microsoft JhengHei"/>
+        <a:font script="Java" typeface="Javanese Text"/>
+        <a:font script="Lisu" typeface="Segoe UI"/>
+        <a:font script="Mymr" typeface="Myanmar Text"/>
+        <a:font script="Nkoo" typeface="Ebrima"/>
+        <a:font script="Olck" typeface="Nirmala UI"/>
+        <a:font script="Osma" typeface="Ebrima"/>
+        <a:font script="Phag" typeface="Phagspa"/>
+        <a:font script="Syrn" typeface="Estrangelo Edessa"/>
+        <a:font script="Syrj" typeface="Estrangelo Edessa"/>
+        <a:font script="Syre" typeface="Estrangelo Edessa"/>
+        <a:font script="Sora" typeface="Nirmala UI"/>
+        <a:font script="Tale" typeface="Microsoft Tai Le"/>
+        <a:font script="Talu" typeface="Microsoft New Tai Lue"/>
+        <a:font script="Tfng" typeface="Ebrima"/>
       </a:majorFont>
       <a:minorFont>
-        <a:latin typeface="Calibri"/>
+        <a:latin typeface="Aptos" panose="02110004020202020204"/>
         <a:ea typeface=""/>
         <a:cs typeface=""/>
-        <a:font script="Jpan" typeface="ＭＳ Ｐゴシック"/>
+        <a:font script="Jpan" typeface="游ゴシック"/>
         <a:font script="Hang" typeface="맑은 고딕"/>
-        <a:font script="Hans" typeface="宋体"/>
+        <a:font script="Hans" typeface="等线"/>
         <a:font script="Hant" typeface="新細明體"/>
         <a:font script="Arab" typeface="Arial"/>
         <a:font script="Hebr" typeface="Arial"/>
@@ -3496,6 +3706,23 @@
         <a:font script="Viet" typeface="Arial"/>
         <a:font script="Uigh" typeface="Microsoft Uighur"/>
         <a:font script="Geor" typeface="Sylfaen"/>
+        <a:font script="Armn" typeface="Arial"/>
+        <a:font script="Bugi" typeface="Leelawadee UI"/>
+        <a:font script="Bopo" typeface="Microsoft JhengHei"/>
+        <a:font script="Java" typeface="Javanese Text"/>
+        <a:font script="Lisu" typeface="Segoe UI"/>
+        <a:font script="Mymr" typeface="Myanmar Text"/>
+        <a:font script="Nkoo" typeface="Ebrima"/>
+        <a:font script="Olck" typeface="Nirmala UI"/>
+        <a:font script="Osma" typeface="Ebrima"/>
+        <a:font script="Phag" typeface="Phagspa"/>
+        <a:font script="Syrn" typeface="Estrangelo Edessa"/>
+        <a:font script="Syrj" typeface="Estrangelo Edessa"/>
+        <a:font script="Syre" typeface="Estrangelo Edessa"/>
+        <a:font script="Sora" typeface="Nirmala UI"/>
+        <a:font script="Tale" typeface="Microsoft Tai Le"/>
+        <a:font script="Talu" typeface="Microsoft New Tai Lue"/>
+        <a:font script="Tfng" typeface="Ebrima"/>
       </a:minorFont>
     </a:fontScheme>
     <a:fmtScheme name="Office">
@@ -3507,180 +3734,136 @@
           <a:gsLst>
             <a:gs pos="0">
               <a:schemeClr val="phClr">
-                <a:tint val="50000"/>
-                <a:satMod val="300000"/>
+                <a:lumMod val="110000"/>
+                <a:satMod val="105000"/>
+                <a:tint val="67000"/>
               </a:schemeClr>
             </a:gs>
-            <a:gs pos="35000">
+            <a:gs pos="50000">
               <a:schemeClr val="phClr">
-                <a:tint val="37000"/>
-                <a:satMod val="300000"/>
+                <a:lumMod val="105000"/>
+                <a:satMod val="103000"/>
+                <a:tint val="73000"/>
               </a:schemeClr>
             </a:gs>
             <a:gs pos="100000">
               <a:schemeClr val="phClr">
-                <a:tint val="15000"/>
-                <a:satMod val="350000"/>
+                <a:lumMod val="105000"/>
+                <a:satMod val="109000"/>
+                <a:tint val="81000"/>
               </a:schemeClr>
             </a:gs>
           </a:gsLst>
-          <a:lin ang="16200000" scaled="1"/>
+          <a:lin ang="5400000" scaled="0"/>
         </a:gradFill>
         <a:gradFill rotWithShape="1">
           <a:gsLst>
             <a:gs pos="0">
               <a:schemeClr val="phClr">
-                <a:tint val="100000"/>
+                <a:satMod val="103000"/>
+                <a:lumMod val="102000"/>
+                <a:tint val="94000"/>
+              </a:schemeClr>
+            </a:gs>
+            <a:gs pos="50000">
+              <a:schemeClr val="phClr">
+                <a:satMod val="110000"/>
+                <a:lumMod val="100000"/>
                 <a:shade val="100000"/>
-                <a:satMod val="130000"/>
               </a:schemeClr>
             </a:gs>
             <a:gs pos="100000">
               <a:schemeClr val="phClr">
-                <a:tint val="50000"/>
-                <a:shade val="100000"/>
-                <a:satMod val="350000"/>
+                <a:lumMod val="99000"/>
+                <a:satMod val="120000"/>
+                <a:shade val="78000"/>
               </a:schemeClr>
             </a:gs>
           </a:gsLst>
-          <a:lin ang="16200000" scaled="0"/>
+          <a:lin ang="5400000" scaled="0"/>
         </a:gradFill>
       </a:fillStyleLst>
       <a:lnStyleLst>
-        <a:ln w="9525" cap="flat" cmpd="sng" algn="ctr">
+        <a:ln w="12700" cap="flat" cmpd="sng" algn="ctr">
           <a:solidFill>
-            <a:schemeClr val="phClr">
-              <a:shade val="95000"/>
-              <a:satMod val="105000"/>
-            </a:schemeClr>
+            <a:schemeClr val="phClr"/>
           </a:solidFill>
           <a:prstDash val="solid"/>
+          <a:miter lim="800000"/>
+        </a:ln>
+        <a:ln w="19050" cap="flat" cmpd="sng" algn="ctr">
+          <a:solidFill>
+            <a:schemeClr val="phClr"/>
+          </a:solidFill>
+          <a:prstDash val="solid"/>
+          <a:miter lim="800000"/>
         </a:ln>
         <a:ln w="25400" cap="flat" cmpd="sng" algn="ctr">
           <a:solidFill>
             <a:schemeClr val="phClr"/>
           </a:solidFill>
           <a:prstDash val="solid"/>
-        </a:ln>
-        <a:ln w="38100" cap="flat" cmpd="sng" algn="ctr">
-          <a:solidFill>
-            <a:schemeClr val="phClr"/>
-          </a:solidFill>
-          <a:prstDash val="solid"/>
+          <a:miter lim="800000"/>
         </a:ln>
       </a:lnStyleLst>
       <a:effectStyleLst>
         <a:effectStyle>
+          <a:effectLst/>
+        </a:effectStyle>
+        <a:effectStyle>
+          <a:effectLst/>
+        </a:effectStyle>
+        <a:effectStyle>
           <a:effectLst>
-            <a:outerShdw blurRad="40000" dist="20000" dir="5400000" rotWithShape="0">
+            <a:outerShdw blurRad="57150" dist="19050" dir="5400000" algn="ctr" rotWithShape="0">
               <a:srgbClr val="000000">
-                <a:alpha val="38000"/>
+                <a:alpha val="63000"/>
               </a:srgbClr>
             </a:outerShdw>
           </a:effectLst>
-        </a:effectStyle>
-        <a:effectStyle>
-          <a:effectLst>
-            <a:outerShdw blurRad="40000" dist="23000" dir="5400000" rotWithShape="0">
-              <a:srgbClr val="000000">
-                <a:alpha val="35000"/>
-              </a:srgbClr>
-            </a:outerShdw>
-          </a:effectLst>
-        </a:effectStyle>
-        <a:effectStyle>
-          <a:effectLst>
-            <a:outerShdw blurRad="40000" dist="23000" dir="5400000" rotWithShape="0">
-              <a:srgbClr val="000000">
-                <a:alpha val="35000"/>
-              </a:srgbClr>
-            </a:outerShdw>
-          </a:effectLst>
-          <a:scene3d>
-            <a:camera prst="orthographicFront">
-              <a:rot lat="0" lon="0" rev="0"/>
-            </a:camera>
-            <a:lightRig rig="threePt" dir="t">
-              <a:rot lat="0" lon="0" rev="1200000"/>
-            </a:lightRig>
-          </a:scene3d>
-          <a:sp3d>
-            <a:bevelT w="63500" h="25400"/>
-          </a:sp3d>
         </a:effectStyle>
       </a:effectStyleLst>
       <a:bgFillStyleLst>
         <a:solidFill>
           <a:schemeClr val="phClr"/>
         </a:solidFill>
+        <a:solidFill>
+          <a:schemeClr val="phClr">
+            <a:tint val="95000"/>
+            <a:satMod val="170000"/>
+          </a:schemeClr>
+        </a:solidFill>
         <a:gradFill rotWithShape="1">
           <a:gsLst>
             <a:gs pos="0">
               <a:schemeClr val="phClr">
-                <a:tint val="40000"/>
-                <a:satMod val="350000"/>
+                <a:tint val="93000"/>
+                <a:satMod val="150000"/>
+                <a:shade val="98000"/>
+                <a:lumMod val="102000"/>
               </a:schemeClr>
             </a:gs>
-            <a:gs pos="40000">
+            <a:gs pos="50000">
               <a:schemeClr val="phClr">
-                <a:tint val="45000"/>
-                <a:shade val="99000"/>
-                <a:satMod val="350000"/>
+                <a:tint val="98000"/>
+                <a:satMod val="130000"/>
+                <a:shade val="90000"/>
+                <a:lumMod val="103000"/>
               </a:schemeClr>
             </a:gs>
             <a:gs pos="100000">
               <a:schemeClr val="phClr">
-                <a:shade val="20000"/>
-                <a:satMod val="255000"/>
+                <a:shade val="63000"/>
+                <a:satMod val="120000"/>
               </a:schemeClr>
             </a:gs>
           </a:gsLst>
-          <a:path path="circle">
-            <a:fillToRect l="50000" t="-80000" r="50000" b="180000"/>
-          </a:path>
-        </a:gradFill>
-        <a:gradFill rotWithShape="1">
-          <a:gsLst>
-            <a:gs pos="0">
-              <a:schemeClr val="phClr">
-                <a:tint val="80000"/>
-                <a:satMod val="300000"/>
-              </a:schemeClr>
-            </a:gs>
-            <a:gs pos="100000">
-              <a:schemeClr val="phClr">
-                <a:shade val="30000"/>
-                <a:satMod val="200000"/>
-              </a:schemeClr>
-            </a:gs>
-          </a:gsLst>
-          <a:path path="circle">
-            <a:fillToRect l="50000" t="50000" r="50000" b="50000"/>
-          </a:path>
+          <a:lin ang="5400000" scaled="0"/>
         </a:gradFill>
       </a:bgFillStyleLst>
     </a:fmtScheme>
   </a:themeElements>
   <a:objectDefaults>
-    <a:spDef>
-      <a:spPr/>
-      <a:bodyPr/>
-      <a:lstStyle/>
-      <a:style>
-        <a:lnRef idx="1">
-          <a:schemeClr val="accent1"/>
-        </a:lnRef>
-        <a:fillRef idx="3">
-          <a:schemeClr val="accent1"/>
-        </a:fillRef>
-        <a:effectRef idx="2">
-          <a:schemeClr val="accent1"/>
-        </a:effectRef>
-        <a:fontRef idx="minor">
-          <a:schemeClr val="lt1"/>
-        </a:fontRef>
-      </a:style>
-    </a:spDef>
     <a:lnDef>
       <a:spPr/>
       <a:bodyPr/>
@@ -3702,5 +3885,10 @@
     </a:lnDef>
   </a:objectDefaults>
   <a:extraClrSchemeLst/>
+  <a:extLst>
+    <a:ext uri="{05A4C25C-085E-4340-85A3-A5531E510DB2}">
+      <thm15:themeFamily xmlns:thm15="http://schemas.microsoft.com/office/thememl/2012/main" name="Office Theme" id="{2E142A2C-CD16-42D6-873A-C26D2A0506FA}" vid="{1BDDFF52-6CD6-40A5-AB3C-68EB2F1E4D0A}"/>
+    </a:ext>
+  </a:extLst>
 </a:theme>
 </file>
--- a/docs/intro.pptx
+++ b/docs/intro.pptx
@@ -3338,7 +3338,12 @@
             <p:ph type="ctrTitle"/>
           </p:nvPr>
         </p:nvSpPr>
-        <p:spPr/>
+        <p:spPr>
+          <a:xfrm>
+            <a:off x="1524000" y="1122363"/>
+            <a:ext cx="10363200" cy="2387600"/>
+          </a:xfrm>
+        </p:spPr>
         <p:txBody>
           <a:bodyPr>
             <a:normAutofit fontScale="90000"/>
@@ -3347,7 +3352,7 @@
           <a:p>
             <a:r>
               <a:rPr lang="en-US" dirty="0"/>
-              <a:t>Nine Ways to Inherit in Rust</a:t>
+              <a:t>Nine Ways to do Inheritance in Rust,</a:t>
             </a:r>
             <a:br>
               <a:rPr lang="en-US" dirty="0"/>
@@ -3406,15 +3411,22 @@
               <a:t>CarlKCarlK</a:t>
             </a:r>
             <a:r>
-              <a:rPr lang="en-US" dirty="0">
+              <a:rPr lang="en-US">
                 <a:solidFill>
                   <a:schemeClr val="bg1">
                     <a:lumMod val="50000"/>
                   </a:schemeClr>
                 </a:solidFill>
               </a:rPr>
-              <a:t>/rust-inherit</a:t>
-            </a:r>
+              <a:t>/inherit</a:t>
+            </a:r>
+            <a:endParaRPr lang="en-US" dirty="0">
+              <a:solidFill>
+                <a:schemeClr val="bg1">
+                  <a:lumMod val="50000"/>
+                </a:schemeClr>
+              </a:solidFill>
+            </a:endParaRPr>
           </a:p>
           <a:p>
             <a:endParaRPr lang="en-US" dirty="0"/>
@@ -3555,6 +3567,13 @@
             <a:r>
               <a:rPr lang="en-US" dirty="0"/>
               <a:t>inspired by real code</a:t>
+            </a:r>
+          </a:p>
+          <a:p>
+            <a:pPr lvl="1"/>
+            <a:r>
+              <a:rPr lang="en-US" dirty="0"/>
+              <a:t>discussion welcome</a:t>
             </a:r>
           </a:p>
           <a:p>

--- a/docs/intro.pptx
+++ b/docs/intro.pptx
@@ -3411,7 +3411,7 @@
               <a:t>CarlKCarlK</a:t>
             </a:r>
             <a:r>
-              <a:rPr lang="en-US">
+              <a:rPr lang="en-US" dirty="0">
                 <a:solidFill>
                   <a:schemeClr val="bg1">
                     <a:lumMod val="50000"/>
@@ -3420,13 +3420,6 @@
               </a:rPr>
               <a:t>/inherit</a:t>
             </a:r>
-            <a:endParaRPr lang="en-US" dirty="0">
-              <a:solidFill>
-                <a:schemeClr val="bg1">
-                  <a:lumMod val="50000"/>
-                </a:schemeClr>
-              </a:solidFill>
-            </a:endParaRPr>
           </a:p>
           <a:p>
             <a:endParaRPr lang="en-US" dirty="0"/>
@@ -3548,6 +3541,13 @@
             <a:r>
               <a:rPr lang="en-US" dirty="0"/>
               <a:t>How do we share behavior across related types?</a:t>
+            </a:r>
+          </a:p>
+          <a:p>
+            <a:pPr lvl="1"/>
+            <a:r>
+              <a:rPr lang="en-US" dirty="0"/>
+              <a:t>How can different types share the same role?</a:t>
             </a:r>
           </a:p>
           <a:p>

--- a/docs/intro.pptx
+++ b/docs/intro.pptx
@@ -6,7 +6,8 @@
   </p:sldMasterIdLst>
   <p:sldIdLst>
     <p:sldId id="256" r:id="rId2"/>
-    <p:sldId id="257" r:id="rId3"/>
+    <p:sldId id="258" r:id="rId3"/>
+    <p:sldId id="257" r:id="rId4"/>
   </p:sldIdLst>
   <p:sldSz cx="12192000" cy="6858000"/>
   <p:notesSz cx="6858000" cy="9144000"/>
@@ -105,7 +106,6913 @@
       </a:defRPr>
     </a:lvl9pPr>
   </p:defaultTextStyle>
+  <p:extLst>
+    <p:ext uri="{EFAFB233-063F-42B5-8137-9DF3F51BA10A}">
+      <p15:sldGuideLst xmlns:p15="http://schemas.microsoft.com/office/powerpoint/2012/main"/>
+    </p:ext>
+  </p:extLst>
 </p:presentation>
+</file>
+
+<file path=ppt/diagrams/colors1.xml><?xml version="1.0" encoding="utf-8"?>
+<dgm:colorsDef xmlns:dgm="http://schemas.openxmlformats.org/drawingml/2006/diagram" xmlns:a="http://schemas.openxmlformats.org/drawingml/2006/main" uniqueId="urn:microsoft.com/office/officeart/2005/8/colors/colorful5">
+  <dgm:title val=""/>
+  <dgm:desc val=""/>
+  <dgm:catLst>
+    <dgm:cat type="colorful" pri="10500"/>
+  </dgm:catLst>
+  <dgm:styleLbl name="node0">
+    <dgm:fillClrLst meth="repeat">
+      <a:schemeClr val="accent4"/>
+    </dgm:fillClrLst>
+    <dgm:linClrLst meth="repeat">
+      <a:schemeClr val="lt1"/>
+    </dgm:linClrLst>
+    <dgm:effectClrLst/>
+    <dgm:txLinClrLst/>
+    <dgm:txFillClrLst/>
+    <dgm:txEffectClrLst/>
+  </dgm:styleLbl>
+  <dgm:styleLbl name="node1">
+    <dgm:fillClrLst>
+      <a:schemeClr val="accent5"/>
+      <a:schemeClr val="accent6"/>
+    </dgm:fillClrLst>
+    <dgm:linClrLst meth="repeat">
+      <a:schemeClr val="lt1"/>
+    </dgm:linClrLst>
+    <dgm:effectClrLst/>
+    <dgm:txLinClrLst/>
+    <dgm:txFillClrLst/>
+    <dgm:txEffectClrLst/>
+  </dgm:styleLbl>
+  <dgm:styleLbl name="alignNode1">
+    <dgm:fillClrLst>
+      <a:schemeClr val="accent5"/>
+      <a:schemeClr val="accent6"/>
+    </dgm:fillClrLst>
+    <dgm:linClrLst>
+      <a:schemeClr val="accent5"/>
+      <a:schemeClr val="accent6"/>
+    </dgm:linClrLst>
+    <dgm:effectClrLst/>
+    <dgm:txLinClrLst/>
+    <dgm:txFillClrLst/>
+    <dgm:txEffectClrLst/>
+  </dgm:styleLbl>
+  <dgm:styleLbl name="lnNode1">
+    <dgm:fillClrLst>
+      <a:schemeClr val="accent5"/>
+      <a:schemeClr val="accent6"/>
+    </dgm:fillClrLst>
+    <dgm:linClrLst meth="repeat">
+      <a:schemeClr val="lt1"/>
+    </dgm:linClrLst>
+    <dgm:effectClrLst/>
+    <dgm:txLinClrLst/>
+    <dgm:txFillClrLst/>
+    <dgm:txEffectClrLst/>
+  </dgm:styleLbl>
+  <dgm:styleLbl name="vennNode1">
+    <dgm:fillClrLst>
+      <a:schemeClr val="accent5">
+        <a:alpha val="50000"/>
+      </a:schemeClr>
+      <a:schemeClr val="accent6">
+        <a:alpha val="50000"/>
+      </a:schemeClr>
+    </dgm:fillClrLst>
+    <dgm:linClrLst meth="repeat">
+      <a:schemeClr val="lt1"/>
+    </dgm:linClrLst>
+    <dgm:effectClrLst/>
+    <dgm:txLinClrLst/>
+    <dgm:txFillClrLst/>
+    <dgm:txEffectClrLst/>
+  </dgm:styleLbl>
+  <dgm:styleLbl name="node2">
+    <dgm:fillClrLst>
+      <a:schemeClr val="accent6"/>
+    </dgm:fillClrLst>
+    <dgm:linClrLst meth="repeat">
+      <a:schemeClr val="lt1"/>
+    </dgm:linClrLst>
+    <dgm:effectClrLst/>
+    <dgm:txLinClrLst/>
+    <dgm:txFillClrLst/>
+    <dgm:txEffectClrLst/>
+  </dgm:styleLbl>
+  <dgm:styleLbl name="node3">
+    <dgm:fillClrLst>
+      <a:schemeClr val="accent1"/>
+    </dgm:fillClrLst>
+    <dgm:linClrLst meth="repeat">
+      <a:schemeClr val="lt1"/>
+    </dgm:linClrLst>
+    <dgm:effectClrLst/>
+    <dgm:txLinClrLst/>
+    <dgm:txFillClrLst/>
+    <dgm:txEffectClrLst/>
+  </dgm:styleLbl>
+  <dgm:styleLbl name="node4">
+    <dgm:fillClrLst>
+      <a:schemeClr val="accent2"/>
+    </dgm:fillClrLst>
+    <dgm:linClrLst meth="repeat">
+      <a:schemeClr val="lt1"/>
+    </dgm:linClrLst>
+    <dgm:effectClrLst/>
+    <dgm:txLinClrLst/>
+    <dgm:txFillClrLst/>
+    <dgm:txEffectClrLst/>
+  </dgm:styleLbl>
+  <dgm:styleLbl name="fgImgPlace1">
+    <dgm:fillClrLst>
+      <a:schemeClr val="accent5">
+        <a:tint val="50000"/>
+      </a:schemeClr>
+      <a:schemeClr val="accent6">
+        <a:tint val="50000"/>
+      </a:schemeClr>
+    </dgm:fillClrLst>
+    <dgm:linClrLst meth="repeat">
+      <a:schemeClr val="lt1"/>
+    </dgm:linClrLst>
+    <dgm:effectClrLst/>
+    <dgm:txLinClrLst/>
+    <dgm:txFillClrLst meth="repeat">
+      <a:schemeClr val="lt1"/>
+    </dgm:txFillClrLst>
+    <dgm:txEffectClrLst/>
+  </dgm:styleLbl>
+  <dgm:styleLbl name="alignImgPlace1">
+    <dgm:fillClrLst>
+      <a:schemeClr val="accent5">
+        <a:tint val="50000"/>
+      </a:schemeClr>
+      <a:schemeClr val="accent6">
+        <a:tint val="20000"/>
+      </a:schemeClr>
+    </dgm:fillClrLst>
+    <dgm:linClrLst meth="repeat">
+      <a:schemeClr val="lt1"/>
+    </dgm:linClrLst>
+    <dgm:effectClrLst/>
+    <dgm:txLinClrLst/>
+    <dgm:txFillClrLst meth="repeat">
+      <a:schemeClr val="lt1"/>
+    </dgm:txFillClrLst>
+    <dgm:txEffectClrLst/>
+  </dgm:styleLbl>
+  <dgm:styleLbl name="bgImgPlace1">
+    <dgm:fillClrLst>
+      <a:schemeClr val="accent5">
+        <a:tint val="50000"/>
+      </a:schemeClr>
+      <a:schemeClr val="accent6">
+        <a:tint val="20000"/>
+      </a:schemeClr>
+    </dgm:fillClrLst>
+    <dgm:linClrLst meth="repeat">
+      <a:schemeClr val="lt1"/>
+    </dgm:linClrLst>
+    <dgm:effectClrLst/>
+    <dgm:txLinClrLst/>
+    <dgm:txFillClrLst meth="repeat">
+      <a:schemeClr val="lt1"/>
+    </dgm:txFillClrLst>
+    <dgm:txEffectClrLst/>
+  </dgm:styleLbl>
+  <dgm:styleLbl name="sibTrans2D1">
+    <dgm:fillClrLst>
+      <a:schemeClr val="accent5"/>
+      <a:schemeClr val="accent6"/>
+    </dgm:fillClrLst>
+    <dgm:linClrLst meth="repeat">
+      <a:schemeClr val="lt1"/>
+    </dgm:linClrLst>
+    <dgm:effectClrLst/>
+    <dgm:txLinClrLst/>
+    <dgm:txFillClrLst/>
+    <dgm:txEffectClrLst/>
+  </dgm:styleLbl>
+  <dgm:styleLbl name="fgSibTrans2D1">
+    <dgm:fillClrLst>
+      <a:schemeClr val="accent5"/>
+      <a:schemeClr val="accent6"/>
+    </dgm:fillClrLst>
+    <dgm:linClrLst meth="repeat">
+      <a:schemeClr val="lt1"/>
+    </dgm:linClrLst>
+    <dgm:effectClrLst/>
+    <dgm:txLinClrLst/>
+    <dgm:txFillClrLst meth="repeat">
+      <a:schemeClr val="lt1"/>
+    </dgm:txFillClrLst>
+    <dgm:txEffectClrLst/>
+  </dgm:styleLbl>
+  <dgm:styleLbl name="bgSibTrans2D1">
+    <dgm:fillClrLst>
+      <a:schemeClr val="accent5"/>
+      <a:schemeClr val="accent6"/>
+    </dgm:fillClrLst>
+    <dgm:linClrLst meth="repeat">
+      <a:schemeClr val="lt1"/>
+    </dgm:linClrLst>
+    <dgm:effectClrLst/>
+    <dgm:txLinClrLst/>
+    <dgm:txFillClrLst meth="repeat">
+      <a:schemeClr val="lt1"/>
+    </dgm:txFillClrLst>
+    <dgm:txEffectClrLst/>
+  </dgm:styleLbl>
+  <dgm:styleLbl name="sibTrans1D1">
+    <dgm:fillClrLst/>
+    <dgm:linClrLst>
+      <a:schemeClr val="accent5"/>
+      <a:schemeClr val="accent6"/>
+    </dgm:linClrLst>
+    <dgm:effectClrLst/>
+    <dgm:txLinClrLst/>
+    <dgm:txFillClrLst meth="repeat">
+      <a:schemeClr val="tx1"/>
+    </dgm:txFillClrLst>
+    <dgm:txEffectClrLst/>
+  </dgm:styleLbl>
+  <dgm:styleLbl name="callout">
+    <dgm:fillClrLst meth="repeat">
+      <a:schemeClr val="accent5"/>
+    </dgm:fillClrLst>
+    <dgm:linClrLst meth="repeat">
+      <a:schemeClr val="accent5">
+        <a:tint val="50000"/>
+      </a:schemeClr>
+    </dgm:linClrLst>
+    <dgm:effectClrLst/>
+    <dgm:txLinClrLst/>
+    <dgm:txFillClrLst meth="repeat">
+      <a:schemeClr val="tx1"/>
+    </dgm:txFillClrLst>
+    <dgm:txEffectClrLst/>
+  </dgm:styleLbl>
+  <dgm:styleLbl name="asst0">
+    <dgm:fillClrLst meth="repeat">
+      <a:schemeClr val="accent5"/>
+    </dgm:fillClrLst>
+    <dgm:linClrLst meth="repeat">
+      <a:schemeClr val="lt1">
+        <a:shade val="80000"/>
+      </a:schemeClr>
+    </dgm:linClrLst>
+    <dgm:effectClrLst/>
+    <dgm:txLinClrLst/>
+    <dgm:txFillClrLst/>
+    <dgm:txEffectClrLst/>
+  </dgm:styleLbl>
+  <dgm:styleLbl name="asst1">
+    <dgm:fillClrLst meth="repeat">
+      <a:schemeClr val="accent6"/>
+    </dgm:fillClrLst>
+    <dgm:linClrLst meth="repeat">
+      <a:schemeClr val="lt1">
+        <a:shade val="80000"/>
+      </a:schemeClr>
+    </dgm:linClrLst>
+    <dgm:effectClrLst/>
+    <dgm:txLinClrLst/>
+    <dgm:txFillClrLst/>
+    <dgm:txEffectClrLst/>
+  </dgm:styleLbl>
+  <dgm:styleLbl name="asst2">
+    <dgm:fillClrLst>
+      <a:schemeClr val="accent1"/>
+    </dgm:fillClrLst>
+    <dgm:linClrLst meth="repeat">
+      <a:schemeClr val="lt1"/>
+    </dgm:linClrLst>
+    <dgm:effectClrLst/>
+    <dgm:txLinClrLst/>
+    <dgm:txFillClrLst/>
+    <dgm:txEffectClrLst/>
+  </dgm:styleLbl>
+  <dgm:styleLbl name="asst3">
+    <dgm:fillClrLst>
+      <a:schemeClr val="accent2"/>
+    </dgm:fillClrLst>
+    <dgm:linClrLst meth="repeat">
+      <a:schemeClr val="lt1"/>
+    </dgm:linClrLst>
+    <dgm:effectClrLst/>
+    <dgm:txLinClrLst/>
+    <dgm:txFillClrLst/>
+    <dgm:txEffectClrLst/>
+  </dgm:styleLbl>
+  <dgm:styleLbl name="asst4">
+    <dgm:fillClrLst>
+      <a:schemeClr val="accent3"/>
+    </dgm:fillClrLst>
+    <dgm:linClrLst meth="repeat">
+      <a:schemeClr val="lt1"/>
+    </dgm:linClrLst>
+    <dgm:effectClrLst/>
+    <dgm:txLinClrLst/>
+    <dgm:txFillClrLst/>
+    <dgm:txEffectClrLst/>
+  </dgm:styleLbl>
+  <dgm:styleLbl name="parChTrans2D1">
+    <dgm:fillClrLst meth="repeat">
+      <a:schemeClr val="accent5"/>
+    </dgm:fillClrLst>
+    <dgm:linClrLst meth="repeat">
+      <a:schemeClr val="lt1"/>
+    </dgm:linClrLst>
+    <dgm:effectClrLst/>
+    <dgm:txLinClrLst/>
+    <dgm:txFillClrLst meth="repeat">
+      <a:schemeClr val="lt1"/>
+    </dgm:txFillClrLst>
+    <dgm:txEffectClrLst/>
+  </dgm:styleLbl>
+  <dgm:styleLbl name="parChTrans2D2">
+    <dgm:fillClrLst meth="repeat">
+      <a:schemeClr val="accent6"/>
+    </dgm:fillClrLst>
+    <dgm:linClrLst meth="repeat">
+      <a:schemeClr val="lt1"/>
+    </dgm:linClrLst>
+    <dgm:effectClrLst/>
+    <dgm:txLinClrLst/>
+    <dgm:txFillClrLst/>
+    <dgm:txEffectClrLst/>
+  </dgm:styleLbl>
+  <dgm:styleLbl name="parChTrans2D3">
+    <dgm:fillClrLst meth="repeat">
+      <a:schemeClr val="accent6"/>
+    </dgm:fillClrLst>
+    <dgm:linClrLst meth="repeat">
+      <a:schemeClr val="lt1"/>
+    </dgm:linClrLst>
+    <dgm:effectClrLst/>
+    <dgm:txLinClrLst/>
+    <dgm:txFillClrLst/>
+    <dgm:txEffectClrLst/>
+  </dgm:styleLbl>
+  <dgm:styleLbl name="parChTrans2D4">
+    <dgm:fillClrLst meth="repeat">
+      <a:schemeClr val="accent1"/>
+    </dgm:fillClrLst>
+    <dgm:linClrLst meth="repeat">
+      <a:schemeClr val="lt1"/>
+    </dgm:linClrLst>
+    <dgm:effectClrLst/>
+    <dgm:txLinClrLst/>
+    <dgm:txFillClrLst meth="repeat">
+      <a:schemeClr val="lt1"/>
+    </dgm:txFillClrLst>
+    <dgm:txEffectClrLst/>
+  </dgm:styleLbl>
+  <dgm:styleLbl name="parChTrans1D1">
+    <dgm:fillClrLst meth="repeat">
+      <a:schemeClr val="accent5"/>
+    </dgm:fillClrLst>
+    <dgm:linClrLst meth="repeat">
+      <a:schemeClr val="accent5"/>
+    </dgm:linClrLst>
+    <dgm:effectClrLst/>
+    <dgm:txLinClrLst/>
+    <dgm:txFillClrLst meth="repeat">
+      <a:schemeClr val="tx1"/>
+    </dgm:txFillClrLst>
+    <dgm:txEffectClrLst/>
+  </dgm:styleLbl>
+  <dgm:styleLbl name="parChTrans1D2">
+    <dgm:fillClrLst meth="repeat">
+      <a:schemeClr val="accent6">
+        <a:tint val="90000"/>
+      </a:schemeClr>
+    </dgm:fillClrLst>
+    <dgm:linClrLst meth="repeat">
+      <a:schemeClr val="accent6"/>
+    </dgm:linClrLst>
+    <dgm:effectClrLst/>
+    <dgm:txLinClrLst/>
+    <dgm:txFillClrLst meth="repeat">
+      <a:schemeClr val="tx1"/>
+    </dgm:txFillClrLst>
+    <dgm:txEffectClrLst/>
+  </dgm:styleLbl>
+  <dgm:styleLbl name="parChTrans1D3">
+    <dgm:fillClrLst meth="repeat">
+      <a:schemeClr val="accent6">
+        <a:tint val="70000"/>
+      </a:schemeClr>
+    </dgm:fillClrLst>
+    <dgm:linClrLst meth="repeat">
+      <a:schemeClr val="accent1"/>
+    </dgm:linClrLst>
+    <dgm:effectClrLst/>
+    <dgm:txLinClrLst/>
+    <dgm:txFillClrLst meth="repeat">
+      <a:schemeClr val="tx1"/>
+    </dgm:txFillClrLst>
+    <dgm:txEffectClrLst/>
+  </dgm:styleLbl>
+  <dgm:styleLbl name="parChTrans1D4">
+    <dgm:fillClrLst meth="repeat">
+      <a:schemeClr val="accent6">
+        <a:tint val="50000"/>
+      </a:schemeClr>
+    </dgm:fillClrLst>
+    <dgm:linClrLst meth="repeat">
+      <a:schemeClr val="accent2"/>
+    </dgm:linClrLst>
+    <dgm:effectClrLst/>
+    <dgm:txLinClrLst/>
+    <dgm:txFillClrLst meth="repeat">
+      <a:schemeClr val="tx1"/>
+    </dgm:txFillClrLst>
+    <dgm:txEffectClrLst/>
+  </dgm:styleLbl>
+  <dgm:styleLbl name="fgAcc1">
+    <dgm:fillClrLst meth="repeat">
+      <a:schemeClr val="lt1">
+        <a:alpha val="90000"/>
+      </a:schemeClr>
+    </dgm:fillClrLst>
+    <dgm:linClrLst>
+      <a:schemeClr val="accent5"/>
+      <a:schemeClr val="accent6"/>
+    </dgm:linClrLst>
+    <dgm:effectClrLst/>
+    <dgm:txLinClrLst/>
+    <dgm:txFillClrLst meth="repeat">
+      <a:schemeClr val="dk1"/>
+    </dgm:txFillClrLst>
+    <dgm:txEffectClrLst/>
+  </dgm:styleLbl>
+  <dgm:styleLbl name="conFgAcc1">
+    <dgm:fillClrLst meth="repeat">
+      <a:schemeClr val="lt1">
+        <a:alpha val="90000"/>
+      </a:schemeClr>
+    </dgm:fillClrLst>
+    <dgm:linClrLst>
+      <a:schemeClr val="accent5"/>
+      <a:schemeClr val="accent6"/>
+    </dgm:linClrLst>
+    <dgm:effectClrLst/>
+    <dgm:txLinClrLst/>
+    <dgm:txFillClrLst meth="repeat">
+      <a:schemeClr val="dk1"/>
+    </dgm:txFillClrLst>
+    <dgm:txEffectClrLst/>
+  </dgm:styleLbl>
+  <dgm:styleLbl name="alignAcc1">
+    <dgm:fillClrLst meth="repeat">
+      <a:schemeClr val="lt1">
+        <a:alpha val="90000"/>
+      </a:schemeClr>
+    </dgm:fillClrLst>
+    <dgm:linClrLst>
+      <a:schemeClr val="accent5"/>
+      <a:schemeClr val="accent6"/>
+    </dgm:linClrLst>
+    <dgm:effectClrLst/>
+    <dgm:txLinClrLst/>
+    <dgm:txFillClrLst meth="repeat">
+      <a:schemeClr val="dk1"/>
+    </dgm:txFillClrLst>
+    <dgm:txEffectClrLst/>
+  </dgm:styleLbl>
+  <dgm:styleLbl name="trAlignAcc1">
+    <dgm:fillClrLst meth="repeat">
+      <a:schemeClr val="lt1">
+        <a:alpha val="40000"/>
+      </a:schemeClr>
+    </dgm:fillClrLst>
+    <dgm:linClrLst meth="repeat">
+      <a:schemeClr val="accent5"/>
+    </dgm:linClrLst>
+    <dgm:effectClrLst/>
+    <dgm:txLinClrLst/>
+    <dgm:txFillClrLst meth="repeat">
+      <a:schemeClr val="dk1"/>
+    </dgm:txFillClrLst>
+    <dgm:txEffectClrLst/>
+  </dgm:styleLbl>
+  <dgm:styleLbl name="bgAcc1">
+    <dgm:fillClrLst meth="repeat">
+      <a:schemeClr val="lt1">
+        <a:alpha val="90000"/>
+      </a:schemeClr>
+    </dgm:fillClrLst>
+    <dgm:linClrLst>
+      <a:schemeClr val="accent5"/>
+      <a:schemeClr val="accent6"/>
+    </dgm:linClrLst>
+    <dgm:effectClrLst/>
+    <dgm:txLinClrLst/>
+    <dgm:txFillClrLst meth="repeat">
+      <a:schemeClr val="dk1"/>
+    </dgm:txFillClrLst>
+    <dgm:txEffectClrLst/>
+  </dgm:styleLbl>
+  <dgm:styleLbl name="solidFgAcc1">
+    <dgm:fillClrLst meth="repeat">
+      <a:schemeClr val="lt1"/>
+    </dgm:fillClrLst>
+    <dgm:linClrLst>
+      <a:schemeClr val="accent5"/>
+      <a:schemeClr val="accent6"/>
+    </dgm:linClrLst>
+    <dgm:effectClrLst/>
+    <dgm:txLinClrLst/>
+    <dgm:txFillClrLst meth="repeat">
+      <a:schemeClr val="dk1"/>
+    </dgm:txFillClrLst>
+    <dgm:txEffectClrLst/>
+  </dgm:styleLbl>
+  <dgm:styleLbl name="solidAlignAcc1">
+    <dgm:fillClrLst meth="repeat">
+      <a:schemeClr val="lt1"/>
+    </dgm:fillClrLst>
+    <dgm:linClrLst>
+      <a:schemeClr val="accent5"/>
+      <a:schemeClr val="accent6"/>
+    </dgm:linClrLst>
+    <dgm:effectClrLst/>
+    <dgm:txLinClrLst/>
+    <dgm:txFillClrLst meth="repeat">
+      <a:schemeClr val="dk1"/>
+    </dgm:txFillClrLst>
+    <dgm:txEffectClrLst/>
+  </dgm:styleLbl>
+  <dgm:styleLbl name="solidBgAcc1">
+    <dgm:fillClrLst meth="repeat">
+      <a:schemeClr val="lt1"/>
+    </dgm:fillClrLst>
+    <dgm:linClrLst>
+      <a:schemeClr val="accent5"/>
+      <a:schemeClr val="accent6"/>
+    </dgm:linClrLst>
+    <dgm:effectClrLst/>
+    <dgm:txLinClrLst/>
+    <dgm:txFillClrLst meth="repeat">
+      <a:schemeClr val="dk1"/>
+    </dgm:txFillClrLst>
+    <dgm:txEffectClrLst/>
+  </dgm:styleLbl>
+  <dgm:styleLbl name="fgAccFollowNode1">
+    <dgm:fillClrLst>
+      <a:schemeClr val="accent5">
+        <a:tint val="40000"/>
+        <a:alpha val="90000"/>
+      </a:schemeClr>
+      <a:schemeClr val="accent6">
+        <a:tint val="40000"/>
+        <a:alpha val="90000"/>
+      </a:schemeClr>
+    </dgm:fillClrLst>
+    <dgm:linClrLst>
+      <a:schemeClr val="accent5">
+        <a:tint val="40000"/>
+        <a:alpha val="90000"/>
+      </a:schemeClr>
+      <a:schemeClr val="accent5">
+        <a:tint val="40000"/>
+        <a:alpha val="90000"/>
+      </a:schemeClr>
+    </dgm:linClrLst>
+    <dgm:effectClrLst/>
+    <dgm:txLinClrLst/>
+    <dgm:txFillClrLst meth="repeat">
+      <a:schemeClr val="dk1"/>
+    </dgm:txFillClrLst>
+    <dgm:txEffectClrLst/>
+  </dgm:styleLbl>
+  <dgm:styleLbl name="alignAccFollowNode1">
+    <dgm:fillClrLst>
+      <a:schemeClr val="accent5">
+        <a:tint val="40000"/>
+        <a:alpha val="90000"/>
+      </a:schemeClr>
+      <a:schemeClr val="accent6">
+        <a:tint val="40000"/>
+        <a:alpha val="90000"/>
+      </a:schemeClr>
+    </dgm:fillClrLst>
+    <dgm:linClrLst>
+      <a:schemeClr val="accent5">
+        <a:tint val="40000"/>
+        <a:alpha val="90000"/>
+      </a:schemeClr>
+      <a:schemeClr val="accent6">
+        <a:tint val="40000"/>
+        <a:alpha val="90000"/>
+      </a:schemeClr>
+    </dgm:linClrLst>
+    <dgm:effectClrLst/>
+    <dgm:txLinClrLst/>
+    <dgm:txFillClrLst meth="repeat">
+      <a:schemeClr val="dk1"/>
+    </dgm:txFillClrLst>
+    <dgm:txEffectClrLst/>
+  </dgm:styleLbl>
+  <dgm:styleLbl name="bgAccFollowNode1">
+    <dgm:fillClrLst>
+      <a:schemeClr val="accent5">
+        <a:tint val="40000"/>
+        <a:alpha val="90000"/>
+      </a:schemeClr>
+      <a:schemeClr val="accent6">
+        <a:tint val="40000"/>
+        <a:alpha val="90000"/>
+      </a:schemeClr>
+    </dgm:fillClrLst>
+    <dgm:linClrLst>
+      <a:schemeClr val="accent5">
+        <a:tint val="40000"/>
+        <a:alpha val="90000"/>
+      </a:schemeClr>
+      <a:schemeClr val="accent6">
+        <a:tint val="40000"/>
+        <a:alpha val="90000"/>
+      </a:schemeClr>
+    </dgm:linClrLst>
+    <dgm:effectClrLst/>
+    <dgm:txLinClrLst/>
+    <dgm:txFillClrLst meth="repeat">
+      <a:schemeClr val="dk1"/>
+    </dgm:txFillClrLst>
+    <dgm:txEffectClrLst/>
+  </dgm:styleLbl>
+  <dgm:styleLbl name="fgAcc0">
+    <dgm:fillClrLst meth="repeat">
+      <a:schemeClr val="lt1">
+        <a:alpha val="90000"/>
+      </a:schemeClr>
+    </dgm:fillClrLst>
+    <dgm:linClrLst>
+      <a:schemeClr val="accent4"/>
+    </dgm:linClrLst>
+    <dgm:effectClrLst/>
+    <dgm:txLinClrLst/>
+    <dgm:txFillClrLst meth="repeat">
+      <a:schemeClr val="dk1"/>
+    </dgm:txFillClrLst>
+    <dgm:txEffectClrLst/>
+  </dgm:styleLbl>
+  <dgm:styleLbl name="fgAcc2">
+    <dgm:fillClrLst meth="repeat">
+      <a:schemeClr val="lt1">
+        <a:alpha val="90000"/>
+      </a:schemeClr>
+    </dgm:fillClrLst>
+    <dgm:linClrLst>
+      <a:schemeClr val="accent6"/>
+    </dgm:linClrLst>
+    <dgm:effectClrLst/>
+    <dgm:txLinClrLst/>
+    <dgm:txFillClrLst meth="repeat">
+      <a:schemeClr val="dk1"/>
+    </dgm:txFillClrLst>
+    <dgm:txEffectClrLst/>
+  </dgm:styleLbl>
+  <dgm:styleLbl name="fgAcc3">
+    <dgm:fillClrLst meth="repeat">
+      <a:schemeClr val="lt1">
+        <a:alpha val="90000"/>
+      </a:schemeClr>
+    </dgm:fillClrLst>
+    <dgm:linClrLst>
+      <a:schemeClr val="accent1"/>
+    </dgm:linClrLst>
+    <dgm:effectClrLst/>
+    <dgm:txLinClrLst/>
+    <dgm:txFillClrLst meth="repeat">
+      <a:schemeClr val="dk1"/>
+    </dgm:txFillClrLst>
+    <dgm:txEffectClrLst/>
+  </dgm:styleLbl>
+  <dgm:styleLbl name="fgAcc4">
+    <dgm:fillClrLst meth="repeat">
+      <a:schemeClr val="lt1">
+        <a:alpha val="90000"/>
+      </a:schemeClr>
+    </dgm:fillClrLst>
+    <dgm:linClrLst>
+      <a:schemeClr val="accent2"/>
+    </dgm:linClrLst>
+    <dgm:effectClrLst/>
+    <dgm:txLinClrLst/>
+    <dgm:txFillClrLst meth="repeat">
+      <a:schemeClr val="dk1"/>
+    </dgm:txFillClrLst>
+    <dgm:txEffectClrLst/>
+  </dgm:styleLbl>
+  <dgm:styleLbl name="bgShp">
+    <dgm:fillClrLst meth="repeat">
+      <a:schemeClr val="accent5">
+        <a:tint val="40000"/>
+      </a:schemeClr>
+    </dgm:fillClrLst>
+    <dgm:linClrLst meth="repeat">
+      <a:schemeClr val="dk1"/>
+    </dgm:linClrLst>
+    <dgm:effectClrLst/>
+    <dgm:txLinClrLst/>
+    <dgm:txFillClrLst meth="repeat">
+      <a:schemeClr val="dk1"/>
+    </dgm:txFillClrLst>
+    <dgm:txEffectClrLst/>
+  </dgm:styleLbl>
+  <dgm:styleLbl name="dkBgShp">
+    <dgm:fillClrLst meth="repeat">
+      <a:schemeClr val="accent5">
+        <a:shade val="90000"/>
+      </a:schemeClr>
+    </dgm:fillClrLst>
+    <dgm:linClrLst meth="repeat">
+      <a:schemeClr val="dk1"/>
+    </dgm:linClrLst>
+    <dgm:effectClrLst/>
+    <dgm:txLinClrLst/>
+    <dgm:txFillClrLst meth="repeat">
+      <a:schemeClr val="lt1"/>
+    </dgm:txFillClrLst>
+    <dgm:txEffectClrLst/>
+  </dgm:styleLbl>
+  <dgm:styleLbl name="trBgShp">
+    <dgm:fillClrLst meth="repeat">
+      <a:schemeClr val="accent5">
+        <a:tint val="50000"/>
+        <a:alpha val="40000"/>
+      </a:schemeClr>
+    </dgm:fillClrLst>
+    <dgm:linClrLst meth="repeat">
+      <a:schemeClr val="accent5"/>
+    </dgm:linClrLst>
+    <dgm:effectClrLst/>
+    <dgm:txLinClrLst/>
+    <dgm:txFillClrLst meth="repeat">
+      <a:schemeClr val="lt1"/>
+    </dgm:txFillClrLst>
+    <dgm:txEffectClrLst/>
+  </dgm:styleLbl>
+  <dgm:styleLbl name="fgShp">
+    <dgm:fillClrLst meth="repeat">
+      <a:schemeClr val="accent5">
+        <a:tint val="40000"/>
+      </a:schemeClr>
+    </dgm:fillClrLst>
+    <dgm:linClrLst meth="repeat">
+      <a:schemeClr val="lt1"/>
+    </dgm:linClrLst>
+    <dgm:effectClrLst/>
+    <dgm:txLinClrLst/>
+    <dgm:txFillClrLst meth="repeat">
+      <a:schemeClr val="dk1"/>
+    </dgm:txFillClrLst>
+    <dgm:txEffectClrLst/>
+  </dgm:styleLbl>
+  <dgm:styleLbl name="revTx">
+    <dgm:fillClrLst meth="repeat">
+      <a:schemeClr val="lt1">
+        <a:alpha val="0"/>
+      </a:schemeClr>
+    </dgm:fillClrLst>
+    <dgm:linClrLst meth="repeat">
+      <a:schemeClr val="dk1">
+        <a:alpha val="0"/>
+      </a:schemeClr>
+    </dgm:linClrLst>
+    <dgm:effectClrLst/>
+    <dgm:txLinClrLst/>
+    <dgm:txFillClrLst meth="repeat">
+      <a:schemeClr val="tx1"/>
+    </dgm:txFillClrLst>
+    <dgm:txEffectClrLst/>
+  </dgm:styleLbl>
+</dgm:colorsDef>
+</file>
+
+<file path=ppt/diagrams/colors2.xml><?xml version="1.0" encoding="utf-8"?>
+<dgm:colorsDef xmlns:dgm="http://schemas.openxmlformats.org/drawingml/2006/diagram" xmlns:a="http://schemas.openxmlformats.org/drawingml/2006/main" uniqueId="urn:microsoft.com/office/officeart/2005/8/colors/colorful2">
+  <dgm:title val=""/>
+  <dgm:desc val=""/>
+  <dgm:catLst>
+    <dgm:cat type="colorful" pri="10200"/>
+  </dgm:catLst>
+  <dgm:styleLbl name="node0">
+    <dgm:fillClrLst meth="repeat">
+      <a:schemeClr val="accent1"/>
+    </dgm:fillClrLst>
+    <dgm:linClrLst meth="repeat">
+      <a:schemeClr val="lt1"/>
+    </dgm:linClrLst>
+    <dgm:effectClrLst/>
+    <dgm:txLinClrLst/>
+    <dgm:txFillClrLst/>
+    <dgm:txEffectClrLst/>
+  </dgm:styleLbl>
+  <dgm:styleLbl name="node1">
+    <dgm:fillClrLst>
+      <a:schemeClr val="accent2"/>
+      <a:schemeClr val="accent3"/>
+    </dgm:fillClrLst>
+    <dgm:linClrLst meth="repeat">
+      <a:schemeClr val="lt1"/>
+    </dgm:linClrLst>
+    <dgm:effectClrLst/>
+    <dgm:txLinClrLst/>
+    <dgm:txFillClrLst/>
+    <dgm:txEffectClrLst/>
+  </dgm:styleLbl>
+  <dgm:styleLbl name="alignNode1">
+    <dgm:fillClrLst>
+      <a:schemeClr val="accent2"/>
+      <a:schemeClr val="accent3"/>
+    </dgm:fillClrLst>
+    <dgm:linClrLst>
+      <a:schemeClr val="accent2"/>
+      <a:schemeClr val="accent3"/>
+    </dgm:linClrLst>
+    <dgm:effectClrLst/>
+    <dgm:txLinClrLst/>
+    <dgm:txFillClrLst/>
+    <dgm:txEffectClrLst/>
+  </dgm:styleLbl>
+  <dgm:styleLbl name="lnNode1">
+    <dgm:fillClrLst>
+      <a:schemeClr val="accent2"/>
+      <a:schemeClr val="accent3"/>
+    </dgm:fillClrLst>
+    <dgm:linClrLst meth="repeat">
+      <a:schemeClr val="lt1"/>
+    </dgm:linClrLst>
+    <dgm:effectClrLst/>
+    <dgm:txLinClrLst/>
+    <dgm:txFillClrLst/>
+    <dgm:txEffectClrLst/>
+  </dgm:styleLbl>
+  <dgm:styleLbl name="vennNode1">
+    <dgm:fillClrLst>
+      <a:schemeClr val="accent2">
+        <a:alpha val="50000"/>
+      </a:schemeClr>
+      <a:schemeClr val="accent3">
+        <a:alpha val="50000"/>
+      </a:schemeClr>
+    </dgm:fillClrLst>
+    <dgm:linClrLst meth="repeat">
+      <a:schemeClr val="lt1"/>
+    </dgm:linClrLst>
+    <dgm:effectClrLst/>
+    <dgm:txLinClrLst/>
+    <dgm:txFillClrLst/>
+    <dgm:txEffectClrLst/>
+  </dgm:styleLbl>
+  <dgm:styleLbl name="node2">
+    <dgm:fillClrLst>
+      <a:schemeClr val="accent3"/>
+    </dgm:fillClrLst>
+    <dgm:linClrLst meth="repeat">
+      <a:schemeClr val="lt1"/>
+    </dgm:linClrLst>
+    <dgm:effectClrLst/>
+    <dgm:txLinClrLst/>
+    <dgm:txFillClrLst/>
+    <dgm:txEffectClrLst/>
+  </dgm:styleLbl>
+  <dgm:styleLbl name="node3">
+    <dgm:fillClrLst>
+      <a:schemeClr val="accent4"/>
+    </dgm:fillClrLst>
+    <dgm:linClrLst meth="repeat">
+      <a:schemeClr val="lt1"/>
+    </dgm:linClrLst>
+    <dgm:effectClrLst/>
+    <dgm:txLinClrLst/>
+    <dgm:txFillClrLst/>
+    <dgm:txEffectClrLst/>
+  </dgm:styleLbl>
+  <dgm:styleLbl name="node4">
+    <dgm:fillClrLst>
+      <a:schemeClr val="accent5"/>
+    </dgm:fillClrLst>
+    <dgm:linClrLst meth="repeat">
+      <a:schemeClr val="lt1"/>
+    </dgm:linClrLst>
+    <dgm:effectClrLst/>
+    <dgm:txLinClrLst/>
+    <dgm:txFillClrLst/>
+    <dgm:txEffectClrLst/>
+  </dgm:styleLbl>
+  <dgm:styleLbl name="fgImgPlace1">
+    <dgm:fillClrLst>
+      <a:schemeClr val="accent2">
+        <a:tint val="50000"/>
+      </a:schemeClr>
+      <a:schemeClr val="accent3">
+        <a:tint val="50000"/>
+      </a:schemeClr>
+    </dgm:fillClrLst>
+    <dgm:linClrLst meth="repeat">
+      <a:schemeClr val="lt1"/>
+    </dgm:linClrLst>
+    <dgm:effectClrLst/>
+    <dgm:txLinClrLst/>
+    <dgm:txFillClrLst meth="repeat">
+      <a:schemeClr val="lt1"/>
+    </dgm:txFillClrLst>
+    <dgm:txEffectClrLst/>
+  </dgm:styleLbl>
+  <dgm:styleLbl name="alignImgPlace1">
+    <dgm:fillClrLst>
+      <a:schemeClr val="accent2">
+        <a:tint val="50000"/>
+      </a:schemeClr>
+      <a:schemeClr val="accent3">
+        <a:tint val="20000"/>
+      </a:schemeClr>
+    </dgm:fillClrLst>
+    <dgm:linClrLst meth="repeat">
+      <a:schemeClr val="lt1"/>
+    </dgm:linClrLst>
+    <dgm:effectClrLst/>
+    <dgm:txLinClrLst/>
+    <dgm:txFillClrLst meth="repeat">
+      <a:schemeClr val="lt1"/>
+    </dgm:txFillClrLst>
+    <dgm:txEffectClrLst/>
+  </dgm:styleLbl>
+  <dgm:styleLbl name="bgImgPlace1">
+    <dgm:fillClrLst>
+      <a:schemeClr val="accent2">
+        <a:tint val="50000"/>
+      </a:schemeClr>
+      <a:schemeClr val="accent3">
+        <a:tint val="20000"/>
+      </a:schemeClr>
+    </dgm:fillClrLst>
+    <dgm:linClrLst meth="repeat">
+      <a:schemeClr val="lt1"/>
+    </dgm:linClrLst>
+    <dgm:effectClrLst/>
+    <dgm:txLinClrLst/>
+    <dgm:txFillClrLst meth="repeat">
+      <a:schemeClr val="lt1"/>
+    </dgm:txFillClrLst>
+    <dgm:txEffectClrLst/>
+  </dgm:styleLbl>
+  <dgm:styleLbl name="sibTrans2D1">
+    <dgm:fillClrLst>
+      <a:schemeClr val="accent2"/>
+      <a:schemeClr val="accent3"/>
+    </dgm:fillClrLst>
+    <dgm:linClrLst meth="repeat">
+      <a:schemeClr val="lt1"/>
+    </dgm:linClrLst>
+    <dgm:effectClrLst/>
+    <dgm:txLinClrLst/>
+    <dgm:txFillClrLst/>
+    <dgm:txEffectClrLst/>
+  </dgm:styleLbl>
+  <dgm:styleLbl name="fgSibTrans2D1">
+    <dgm:fillClrLst>
+      <a:schemeClr val="accent2"/>
+      <a:schemeClr val="accent3"/>
+    </dgm:fillClrLst>
+    <dgm:linClrLst meth="repeat">
+      <a:schemeClr val="lt1"/>
+    </dgm:linClrLst>
+    <dgm:effectClrLst/>
+    <dgm:txLinClrLst/>
+    <dgm:txFillClrLst meth="repeat">
+      <a:schemeClr val="lt1"/>
+    </dgm:txFillClrLst>
+    <dgm:txEffectClrLst/>
+  </dgm:styleLbl>
+  <dgm:styleLbl name="bgSibTrans2D1">
+    <dgm:fillClrLst>
+      <a:schemeClr val="accent2"/>
+      <a:schemeClr val="accent3"/>
+    </dgm:fillClrLst>
+    <dgm:linClrLst meth="repeat">
+      <a:schemeClr val="lt1"/>
+    </dgm:linClrLst>
+    <dgm:effectClrLst/>
+    <dgm:txLinClrLst/>
+    <dgm:txFillClrLst meth="repeat">
+      <a:schemeClr val="lt1"/>
+    </dgm:txFillClrLst>
+    <dgm:txEffectClrLst/>
+  </dgm:styleLbl>
+  <dgm:styleLbl name="sibTrans1D1">
+    <dgm:fillClrLst/>
+    <dgm:linClrLst>
+      <a:schemeClr val="accent2"/>
+      <a:schemeClr val="accent3"/>
+    </dgm:linClrLst>
+    <dgm:effectClrLst/>
+    <dgm:txLinClrLst/>
+    <dgm:txFillClrLst meth="repeat">
+      <a:schemeClr val="tx1"/>
+    </dgm:txFillClrLst>
+    <dgm:txEffectClrLst/>
+  </dgm:styleLbl>
+  <dgm:styleLbl name="callout">
+    <dgm:fillClrLst meth="repeat">
+      <a:schemeClr val="accent2"/>
+    </dgm:fillClrLst>
+    <dgm:linClrLst meth="repeat">
+      <a:schemeClr val="accent2">
+        <a:tint val="50000"/>
+      </a:schemeClr>
+    </dgm:linClrLst>
+    <dgm:effectClrLst/>
+    <dgm:txLinClrLst/>
+    <dgm:txFillClrLst meth="repeat">
+      <a:schemeClr val="tx1"/>
+    </dgm:txFillClrLst>
+    <dgm:txEffectClrLst/>
+  </dgm:styleLbl>
+  <dgm:styleLbl name="asst0">
+    <dgm:fillClrLst meth="repeat">
+      <a:schemeClr val="accent2"/>
+    </dgm:fillClrLst>
+    <dgm:linClrLst meth="repeat">
+      <a:schemeClr val="lt1">
+        <a:shade val="80000"/>
+      </a:schemeClr>
+    </dgm:linClrLst>
+    <dgm:effectClrLst/>
+    <dgm:txLinClrLst/>
+    <dgm:txFillClrLst/>
+    <dgm:txEffectClrLst/>
+  </dgm:styleLbl>
+  <dgm:styleLbl name="asst1">
+    <dgm:fillClrLst meth="repeat">
+      <a:schemeClr val="accent3"/>
+    </dgm:fillClrLst>
+    <dgm:linClrLst meth="repeat">
+      <a:schemeClr val="lt1">
+        <a:shade val="80000"/>
+      </a:schemeClr>
+    </dgm:linClrLst>
+    <dgm:effectClrLst/>
+    <dgm:txLinClrLst/>
+    <dgm:txFillClrLst/>
+    <dgm:txEffectClrLst/>
+  </dgm:styleLbl>
+  <dgm:styleLbl name="asst2">
+    <dgm:fillClrLst>
+      <a:schemeClr val="accent4"/>
+    </dgm:fillClrLst>
+    <dgm:linClrLst meth="repeat">
+      <a:schemeClr val="lt1"/>
+    </dgm:linClrLst>
+    <dgm:effectClrLst/>
+    <dgm:txLinClrLst/>
+    <dgm:txFillClrLst/>
+    <dgm:txEffectClrLst/>
+  </dgm:styleLbl>
+  <dgm:styleLbl name="asst3">
+    <dgm:fillClrLst>
+      <a:schemeClr val="accent5"/>
+    </dgm:fillClrLst>
+    <dgm:linClrLst meth="repeat">
+      <a:schemeClr val="lt1"/>
+    </dgm:linClrLst>
+    <dgm:effectClrLst/>
+    <dgm:txLinClrLst/>
+    <dgm:txFillClrLst/>
+    <dgm:txEffectClrLst/>
+  </dgm:styleLbl>
+  <dgm:styleLbl name="asst4">
+    <dgm:fillClrLst>
+      <a:schemeClr val="accent6"/>
+    </dgm:fillClrLst>
+    <dgm:linClrLst meth="repeat">
+      <a:schemeClr val="lt1"/>
+    </dgm:linClrLst>
+    <dgm:effectClrLst/>
+    <dgm:txLinClrLst/>
+    <dgm:txFillClrLst/>
+    <dgm:txEffectClrLst/>
+  </dgm:styleLbl>
+  <dgm:styleLbl name="parChTrans2D1">
+    <dgm:fillClrLst meth="repeat">
+      <a:schemeClr val="accent2"/>
+    </dgm:fillClrLst>
+    <dgm:linClrLst meth="repeat">
+      <a:schemeClr val="lt1"/>
+    </dgm:linClrLst>
+    <dgm:effectClrLst/>
+    <dgm:txLinClrLst/>
+    <dgm:txFillClrLst meth="repeat">
+      <a:schemeClr val="lt1"/>
+    </dgm:txFillClrLst>
+    <dgm:txEffectClrLst/>
+  </dgm:styleLbl>
+  <dgm:styleLbl name="parChTrans2D2">
+    <dgm:fillClrLst meth="repeat">
+      <a:schemeClr val="accent3"/>
+    </dgm:fillClrLst>
+    <dgm:linClrLst meth="repeat">
+      <a:schemeClr val="lt1"/>
+    </dgm:linClrLst>
+    <dgm:effectClrLst/>
+    <dgm:txLinClrLst/>
+    <dgm:txFillClrLst/>
+    <dgm:txEffectClrLst/>
+  </dgm:styleLbl>
+  <dgm:styleLbl name="parChTrans2D3">
+    <dgm:fillClrLst meth="repeat">
+      <a:schemeClr val="accent4"/>
+    </dgm:fillClrLst>
+    <dgm:linClrLst meth="repeat">
+      <a:schemeClr val="lt1"/>
+    </dgm:linClrLst>
+    <dgm:effectClrLst/>
+    <dgm:txLinClrLst/>
+    <dgm:txFillClrLst/>
+    <dgm:txEffectClrLst/>
+  </dgm:styleLbl>
+  <dgm:styleLbl name="parChTrans2D4">
+    <dgm:fillClrLst meth="repeat">
+      <a:schemeClr val="accent5"/>
+    </dgm:fillClrLst>
+    <dgm:linClrLst meth="repeat">
+      <a:schemeClr val="lt1"/>
+    </dgm:linClrLst>
+    <dgm:effectClrLst/>
+    <dgm:txLinClrLst/>
+    <dgm:txFillClrLst meth="repeat">
+      <a:schemeClr val="lt1"/>
+    </dgm:txFillClrLst>
+    <dgm:txEffectClrLst/>
+  </dgm:styleLbl>
+  <dgm:styleLbl name="parChTrans1D1">
+    <dgm:fillClrLst meth="repeat">
+      <a:schemeClr val="accent2"/>
+    </dgm:fillClrLst>
+    <dgm:linClrLst meth="repeat">
+      <a:schemeClr val="accent2"/>
+    </dgm:linClrLst>
+    <dgm:effectClrLst/>
+    <dgm:txLinClrLst/>
+    <dgm:txFillClrLst meth="repeat">
+      <a:schemeClr val="tx1"/>
+    </dgm:txFillClrLst>
+    <dgm:txEffectClrLst/>
+  </dgm:styleLbl>
+  <dgm:styleLbl name="parChTrans1D2">
+    <dgm:fillClrLst meth="repeat">
+      <a:schemeClr val="accent2">
+        <a:tint val="90000"/>
+      </a:schemeClr>
+    </dgm:fillClrLst>
+    <dgm:linClrLst meth="repeat">
+      <a:schemeClr val="accent3"/>
+    </dgm:linClrLst>
+    <dgm:effectClrLst/>
+    <dgm:txLinClrLst/>
+    <dgm:txFillClrLst meth="repeat">
+      <a:schemeClr val="tx1"/>
+    </dgm:txFillClrLst>
+    <dgm:txEffectClrLst/>
+  </dgm:styleLbl>
+  <dgm:styleLbl name="parChTrans1D3">
+    <dgm:fillClrLst meth="repeat">
+      <a:schemeClr val="accent2">
+        <a:tint val="70000"/>
+      </a:schemeClr>
+    </dgm:fillClrLst>
+    <dgm:linClrLst meth="repeat">
+      <a:schemeClr val="accent4"/>
+    </dgm:linClrLst>
+    <dgm:effectClrLst/>
+    <dgm:txLinClrLst/>
+    <dgm:txFillClrLst meth="repeat">
+      <a:schemeClr val="tx1"/>
+    </dgm:txFillClrLst>
+    <dgm:txEffectClrLst/>
+  </dgm:styleLbl>
+  <dgm:styleLbl name="parChTrans1D4">
+    <dgm:fillClrLst meth="repeat">
+      <a:schemeClr val="accent2">
+        <a:tint val="50000"/>
+      </a:schemeClr>
+    </dgm:fillClrLst>
+    <dgm:linClrLst meth="repeat">
+      <a:schemeClr val="accent5"/>
+    </dgm:linClrLst>
+    <dgm:effectClrLst/>
+    <dgm:txLinClrLst/>
+    <dgm:txFillClrLst meth="repeat">
+      <a:schemeClr val="tx1"/>
+    </dgm:txFillClrLst>
+    <dgm:txEffectClrLst/>
+  </dgm:styleLbl>
+  <dgm:styleLbl name="fgAcc1">
+    <dgm:fillClrLst meth="repeat">
+      <a:schemeClr val="lt1">
+        <a:alpha val="90000"/>
+      </a:schemeClr>
+    </dgm:fillClrLst>
+    <dgm:linClrLst>
+      <a:schemeClr val="accent2"/>
+      <a:schemeClr val="accent3"/>
+    </dgm:linClrLst>
+    <dgm:effectClrLst/>
+    <dgm:txLinClrLst/>
+    <dgm:txFillClrLst meth="repeat">
+      <a:schemeClr val="dk1"/>
+    </dgm:txFillClrLst>
+    <dgm:txEffectClrLst/>
+  </dgm:styleLbl>
+  <dgm:styleLbl name="conFgAcc1">
+    <dgm:fillClrLst meth="repeat">
+      <a:schemeClr val="lt1">
+        <a:alpha val="90000"/>
+      </a:schemeClr>
+    </dgm:fillClrLst>
+    <dgm:linClrLst>
+      <a:schemeClr val="accent2"/>
+      <a:schemeClr val="accent3"/>
+    </dgm:linClrLst>
+    <dgm:effectClrLst/>
+    <dgm:txLinClrLst/>
+    <dgm:txFillClrLst meth="repeat">
+      <a:schemeClr val="dk1"/>
+    </dgm:txFillClrLst>
+    <dgm:txEffectClrLst/>
+  </dgm:styleLbl>
+  <dgm:styleLbl name="alignAcc1">
+    <dgm:fillClrLst meth="repeat">
+      <a:schemeClr val="lt1">
+        <a:alpha val="90000"/>
+      </a:schemeClr>
+    </dgm:fillClrLst>
+    <dgm:linClrLst>
+      <a:schemeClr val="accent2"/>
+      <a:schemeClr val="accent3"/>
+    </dgm:linClrLst>
+    <dgm:effectClrLst/>
+    <dgm:txLinClrLst/>
+    <dgm:txFillClrLst meth="repeat">
+      <a:schemeClr val="dk1"/>
+    </dgm:txFillClrLst>
+    <dgm:txEffectClrLst/>
+  </dgm:styleLbl>
+  <dgm:styleLbl name="trAlignAcc1">
+    <dgm:fillClrLst meth="repeat">
+      <a:schemeClr val="lt1">
+        <a:alpha val="40000"/>
+      </a:schemeClr>
+    </dgm:fillClrLst>
+    <dgm:linClrLst meth="repeat">
+      <a:schemeClr val="accent2"/>
+    </dgm:linClrLst>
+    <dgm:effectClrLst/>
+    <dgm:txLinClrLst/>
+    <dgm:txFillClrLst meth="repeat">
+      <a:schemeClr val="dk1"/>
+    </dgm:txFillClrLst>
+    <dgm:txEffectClrLst/>
+  </dgm:styleLbl>
+  <dgm:styleLbl name="bgAcc1">
+    <dgm:fillClrLst meth="repeat">
+      <a:schemeClr val="lt1">
+        <a:alpha val="90000"/>
+      </a:schemeClr>
+    </dgm:fillClrLst>
+    <dgm:linClrLst>
+      <a:schemeClr val="accent2"/>
+      <a:schemeClr val="accent3"/>
+    </dgm:linClrLst>
+    <dgm:effectClrLst/>
+    <dgm:txLinClrLst/>
+    <dgm:txFillClrLst meth="repeat">
+      <a:schemeClr val="dk1"/>
+    </dgm:txFillClrLst>
+    <dgm:txEffectClrLst/>
+  </dgm:styleLbl>
+  <dgm:styleLbl name="solidFgAcc1">
+    <dgm:fillClrLst meth="repeat">
+      <a:schemeClr val="lt1"/>
+    </dgm:fillClrLst>
+    <dgm:linClrLst>
+      <a:schemeClr val="accent2"/>
+      <a:schemeClr val="accent3"/>
+    </dgm:linClrLst>
+    <dgm:effectClrLst/>
+    <dgm:txLinClrLst/>
+    <dgm:txFillClrLst meth="repeat">
+      <a:schemeClr val="dk1"/>
+    </dgm:txFillClrLst>
+    <dgm:txEffectClrLst/>
+  </dgm:styleLbl>
+  <dgm:styleLbl name="solidAlignAcc1">
+    <dgm:fillClrLst meth="repeat">
+      <a:schemeClr val="lt1"/>
+    </dgm:fillClrLst>
+    <dgm:linClrLst>
+      <a:schemeClr val="accent2"/>
+      <a:schemeClr val="accent3"/>
+    </dgm:linClrLst>
+    <dgm:effectClrLst/>
+    <dgm:txLinClrLst/>
+    <dgm:txFillClrLst meth="repeat">
+      <a:schemeClr val="dk1"/>
+    </dgm:txFillClrLst>
+    <dgm:txEffectClrLst/>
+  </dgm:styleLbl>
+  <dgm:styleLbl name="solidBgAcc1">
+    <dgm:fillClrLst meth="repeat">
+      <a:schemeClr val="lt1"/>
+    </dgm:fillClrLst>
+    <dgm:linClrLst>
+      <a:schemeClr val="accent2"/>
+      <a:schemeClr val="accent3"/>
+    </dgm:linClrLst>
+    <dgm:effectClrLst/>
+    <dgm:txLinClrLst/>
+    <dgm:txFillClrLst meth="repeat">
+      <a:schemeClr val="dk1"/>
+    </dgm:txFillClrLst>
+    <dgm:txEffectClrLst/>
+  </dgm:styleLbl>
+  <dgm:styleLbl name="fgAccFollowNode1">
+    <dgm:fillClrLst>
+      <a:schemeClr val="accent2">
+        <a:tint val="40000"/>
+        <a:alpha val="90000"/>
+      </a:schemeClr>
+      <a:schemeClr val="accent3">
+        <a:tint val="40000"/>
+        <a:alpha val="90000"/>
+      </a:schemeClr>
+    </dgm:fillClrLst>
+    <dgm:linClrLst>
+      <a:schemeClr val="accent2">
+        <a:tint val="40000"/>
+        <a:alpha val="90000"/>
+      </a:schemeClr>
+      <a:schemeClr val="accent3">
+        <a:tint val="40000"/>
+        <a:alpha val="90000"/>
+      </a:schemeClr>
+    </dgm:linClrLst>
+    <dgm:effectClrLst/>
+    <dgm:txLinClrLst/>
+    <dgm:txFillClrLst meth="repeat">
+      <a:schemeClr val="dk1"/>
+    </dgm:txFillClrLst>
+    <dgm:txEffectClrLst/>
+  </dgm:styleLbl>
+  <dgm:styleLbl name="alignAccFollowNode1">
+    <dgm:fillClrLst>
+      <a:schemeClr val="accent2">
+        <a:tint val="40000"/>
+        <a:alpha val="90000"/>
+      </a:schemeClr>
+      <a:schemeClr val="accent3">
+        <a:tint val="40000"/>
+        <a:alpha val="90000"/>
+      </a:schemeClr>
+    </dgm:fillClrLst>
+    <dgm:linClrLst>
+      <a:schemeClr val="accent2">
+        <a:tint val="40000"/>
+        <a:alpha val="90000"/>
+      </a:schemeClr>
+      <a:schemeClr val="accent3">
+        <a:tint val="40000"/>
+        <a:alpha val="90000"/>
+      </a:schemeClr>
+    </dgm:linClrLst>
+    <dgm:effectClrLst/>
+    <dgm:txLinClrLst/>
+    <dgm:txFillClrLst meth="repeat">
+      <a:schemeClr val="dk1"/>
+    </dgm:txFillClrLst>
+    <dgm:txEffectClrLst/>
+  </dgm:styleLbl>
+  <dgm:styleLbl name="bgAccFollowNode1">
+    <dgm:fillClrLst>
+      <a:schemeClr val="accent2">
+        <a:tint val="40000"/>
+        <a:alpha val="90000"/>
+      </a:schemeClr>
+      <a:schemeClr val="accent3">
+        <a:tint val="40000"/>
+        <a:alpha val="90000"/>
+      </a:schemeClr>
+    </dgm:fillClrLst>
+    <dgm:linClrLst>
+      <a:schemeClr val="accent2">
+        <a:tint val="40000"/>
+        <a:alpha val="90000"/>
+      </a:schemeClr>
+      <a:schemeClr val="accent3">
+        <a:tint val="40000"/>
+        <a:alpha val="90000"/>
+      </a:schemeClr>
+    </dgm:linClrLst>
+    <dgm:effectClrLst/>
+    <dgm:txLinClrLst/>
+    <dgm:txFillClrLst meth="repeat">
+      <a:schemeClr val="dk1"/>
+    </dgm:txFillClrLst>
+    <dgm:txEffectClrLst/>
+  </dgm:styleLbl>
+  <dgm:styleLbl name="fgAcc0">
+    <dgm:fillClrLst meth="repeat">
+      <a:schemeClr val="lt1">
+        <a:alpha val="90000"/>
+      </a:schemeClr>
+    </dgm:fillClrLst>
+    <dgm:linClrLst>
+      <a:schemeClr val="accent1"/>
+    </dgm:linClrLst>
+    <dgm:effectClrLst/>
+    <dgm:txLinClrLst/>
+    <dgm:txFillClrLst meth="repeat">
+      <a:schemeClr val="dk1"/>
+    </dgm:txFillClrLst>
+    <dgm:txEffectClrLst/>
+  </dgm:styleLbl>
+  <dgm:styleLbl name="fgAcc2">
+    <dgm:fillClrLst meth="repeat">
+      <a:schemeClr val="lt1">
+        <a:alpha val="90000"/>
+      </a:schemeClr>
+    </dgm:fillClrLst>
+    <dgm:linClrLst>
+      <a:schemeClr val="accent3"/>
+    </dgm:linClrLst>
+    <dgm:effectClrLst/>
+    <dgm:txLinClrLst/>
+    <dgm:txFillClrLst meth="repeat">
+      <a:schemeClr val="dk1"/>
+    </dgm:txFillClrLst>
+    <dgm:txEffectClrLst/>
+  </dgm:styleLbl>
+  <dgm:styleLbl name="fgAcc3">
+    <dgm:fillClrLst meth="repeat">
+      <a:schemeClr val="lt1">
+        <a:alpha val="90000"/>
+      </a:schemeClr>
+    </dgm:fillClrLst>
+    <dgm:linClrLst>
+      <a:schemeClr val="accent4"/>
+    </dgm:linClrLst>
+    <dgm:effectClrLst/>
+    <dgm:txLinClrLst/>
+    <dgm:txFillClrLst meth="repeat">
+      <a:schemeClr val="dk1"/>
+    </dgm:txFillClrLst>
+    <dgm:txEffectClrLst/>
+  </dgm:styleLbl>
+  <dgm:styleLbl name="fgAcc4">
+    <dgm:fillClrLst meth="repeat">
+      <a:schemeClr val="lt1">
+        <a:alpha val="90000"/>
+      </a:schemeClr>
+    </dgm:fillClrLst>
+    <dgm:linClrLst>
+      <a:schemeClr val="accent5"/>
+    </dgm:linClrLst>
+    <dgm:effectClrLst/>
+    <dgm:txLinClrLst/>
+    <dgm:txFillClrLst meth="repeat">
+      <a:schemeClr val="dk1"/>
+    </dgm:txFillClrLst>
+    <dgm:txEffectClrLst/>
+  </dgm:styleLbl>
+  <dgm:styleLbl name="bgShp">
+    <dgm:fillClrLst meth="repeat">
+      <a:schemeClr val="accent2">
+        <a:tint val="40000"/>
+      </a:schemeClr>
+    </dgm:fillClrLst>
+    <dgm:linClrLst meth="repeat">
+      <a:schemeClr val="dk1"/>
+    </dgm:linClrLst>
+    <dgm:effectClrLst/>
+    <dgm:txLinClrLst/>
+    <dgm:txFillClrLst meth="repeat">
+      <a:schemeClr val="dk1"/>
+    </dgm:txFillClrLst>
+    <dgm:txEffectClrLst/>
+  </dgm:styleLbl>
+  <dgm:styleLbl name="dkBgShp">
+    <dgm:fillClrLst meth="repeat">
+      <a:schemeClr val="accent2">
+        <a:shade val="90000"/>
+      </a:schemeClr>
+    </dgm:fillClrLst>
+    <dgm:linClrLst meth="repeat">
+      <a:schemeClr val="dk1"/>
+    </dgm:linClrLst>
+    <dgm:effectClrLst/>
+    <dgm:txLinClrLst/>
+    <dgm:txFillClrLst meth="repeat">
+      <a:schemeClr val="lt1"/>
+    </dgm:txFillClrLst>
+    <dgm:txEffectClrLst/>
+  </dgm:styleLbl>
+  <dgm:styleLbl name="trBgShp">
+    <dgm:fillClrLst meth="repeat">
+      <a:schemeClr val="accent2">
+        <a:tint val="50000"/>
+        <a:alpha val="40000"/>
+      </a:schemeClr>
+    </dgm:fillClrLst>
+    <dgm:linClrLst meth="repeat">
+      <a:schemeClr val="accent2"/>
+    </dgm:linClrLst>
+    <dgm:effectClrLst/>
+    <dgm:txLinClrLst/>
+    <dgm:txFillClrLst meth="repeat">
+      <a:schemeClr val="lt1"/>
+    </dgm:txFillClrLst>
+    <dgm:txEffectClrLst/>
+  </dgm:styleLbl>
+  <dgm:styleLbl name="fgShp">
+    <dgm:fillClrLst meth="repeat">
+      <a:schemeClr val="accent2">
+        <a:tint val="40000"/>
+      </a:schemeClr>
+    </dgm:fillClrLst>
+    <dgm:linClrLst meth="repeat">
+      <a:schemeClr val="lt1"/>
+    </dgm:linClrLst>
+    <dgm:effectClrLst/>
+    <dgm:txLinClrLst/>
+    <dgm:txFillClrLst meth="repeat">
+      <a:schemeClr val="dk1"/>
+    </dgm:txFillClrLst>
+    <dgm:txEffectClrLst/>
+  </dgm:styleLbl>
+  <dgm:styleLbl name="revTx">
+    <dgm:fillClrLst meth="repeat">
+      <a:schemeClr val="lt1">
+        <a:alpha val="0"/>
+      </a:schemeClr>
+    </dgm:fillClrLst>
+    <dgm:linClrLst meth="repeat">
+      <a:schemeClr val="dk1">
+        <a:alpha val="0"/>
+      </a:schemeClr>
+    </dgm:linClrLst>
+    <dgm:effectClrLst/>
+    <dgm:txLinClrLst/>
+    <dgm:txFillClrLst meth="repeat">
+      <a:schemeClr val="tx1"/>
+    </dgm:txFillClrLst>
+    <dgm:txEffectClrLst/>
+  </dgm:styleLbl>
+</dgm:colorsDef>
+</file>
+
+<file path=ppt/diagrams/data1.xml><?xml version="1.0" encoding="utf-8"?>
+<dgm:dataModel xmlns:dgm="http://schemas.openxmlformats.org/drawingml/2006/diagram" xmlns:a="http://schemas.openxmlformats.org/drawingml/2006/main">
+  <dgm:ptLst>
+    <dgm:pt modelId="{ABDD7871-7EB2-4343-AF06-E1A496A91DA3}" type="doc">
+      <dgm:prSet loTypeId="urn:microsoft.com/office/officeart/2005/8/layout/list1" loCatId="list" qsTypeId="urn:microsoft.com/office/officeart/2005/8/quickstyle/simple4" qsCatId="simple" csTypeId="urn:microsoft.com/office/officeart/2005/8/colors/colorful5" csCatId="colorful" phldr="1"/>
+      <dgm:spPr/>
+      <dgm:t>
+        <a:bodyPr/>
+        <a:lstStyle/>
+        <a:p>
+          <a:endParaRPr lang="en-US"/>
+        </a:p>
+      </dgm:t>
+    </dgm:pt>
+    <dgm:pt modelId="{41944C90-BC8E-4F65-ACC5-D36AB518C45B}">
+      <dgm:prSet/>
+      <dgm:spPr/>
+      <dgm:t>
+        <a:bodyPr/>
+        <a:lstStyle/>
+        <a:p>
+          <a:r>
+            <a:rPr lang="en-US"/>
+            <a:t>In class-based OO, a subtype can inherit:</a:t>
+          </a:r>
+        </a:p>
+      </dgm:t>
+    </dgm:pt>
+    <dgm:pt modelId="{F17A0F34-221A-486B-B040-14440CD4149D}" type="parTrans" cxnId="{A29B3F1E-94DD-4083-93F7-AB679B959C78}">
+      <dgm:prSet/>
+      <dgm:spPr/>
+      <dgm:t>
+        <a:bodyPr/>
+        <a:lstStyle/>
+        <a:p>
+          <a:endParaRPr lang="en-US"/>
+        </a:p>
+      </dgm:t>
+    </dgm:pt>
+    <dgm:pt modelId="{85D42ABE-472E-4FAF-8028-743E6E8A6770}" type="sibTrans" cxnId="{A29B3F1E-94DD-4083-93F7-AB679B959C78}">
+      <dgm:prSet/>
+      <dgm:spPr/>
+      <dgm:t>
+        <a:bodyPr/>
+        <a:lstStyle/>
+        <a:p>
+          <a:endParaRPr lang="en-US"/>
+        </a:p>
+      </dgm:t>
+    </dgm:pt>
+    <dgm:pt modelId="{656F0765-A834-4E31-9FF9-78128E990E99}">
+      <dgm:prSet/>
+      <dgm:spPr/>
+      <dgm:t>
+        <a:bodyPr/>
+        <a:lstStyle/>
+        <a:p>
+          <a:r>
+            <a:rPr lang="en-US" dirty="0"/>
+            <a:t>an interface</a:t>
+          </a:r>
+        </a:p>
+      </dgm:t>
+    </dgm:pt>
+    <dgm:pt modelId="{7D2960B8-31AD-4CC9-BA28-DDE68958901D}" type="parTrans" cxnId="{69CBCFCF-D91B-4D65-9C2E-2C1C9151A55D}">
+      <dgm:prSet/>
+      <dgm:spPr/>
+      <dgm:t>
+        <a:bodyPr/>
+        <a:lstStyle/>
+        <a:p>
+          <a:endParaRPr lang="en-US"/>
+        </a:p>
+      </dgm:t>
+    </dgm:pt>
+    <dgm:pt modelId="{3280C243-44DA-475D-B225-F525D812AF4B}" type="sibTrans" cxnId="{69CBCFCF-D91B-4D65-9C2E-2C1C9151A55D}">
+      <dgm:prSet/>
+      <dgm:spPr/>
+      <dgm:t>
+        <a:bodyPr/>
+        <a:lstStyle/>
+        <a:p>
+          <a:endParaRPr lang="en-US"/>
+        </a:p>
+      </dgm:t>
+    </dgm:pt>
+    <dgm:pt modelId="{E92E434C-C423-4B91-A47D-9C880ED6431A}">
+      <dgm:prSet/>
+      <dgm:spPr/>
+      <dgm:t>
+        <a:bodyPr/>
+        <a:lstStyle/>
+        <a:p>
+          <a:r>
+            <a:rPr lang="en-US" dirty="0"/>
+            <a:t>method implementations</a:t>
+          </a:r>
+        </a:p>
+      </dgm:t>
+    </dgm:pt>
+    <dgm:pt modelId="{BCA5444F-6B34-4FB0-BE43-F02E1A8B6796}" type="parTrans" cxnId="{8E2FDF84-E937-4FF8-ADC4-A2ACA163F57C}">
+      <dgm:prSet/>
+      <dgm:spPr/>
+      <dgm:t>
+        <a:bodyPr/>
+        <a:lstStyle/>
+        <a:p>
+          <a:endParaRPr lang="en-US"/>
+        </a:p>
+      </dgm:t>
+    </dgm:pt>
+    <dgm:pt modelId="{F4F0D00F-F2F2-4B5E-BB24-CF3C6A2493C1}" type="sibTrans" cxnId="{8E2FDF84-E937-4FF8-ADC4-A2ACA163F57C}">
+      <dgm:prSet/>
+      <dgm:spPr/>
+      <dgm:t>
+        <a:bodyPr/>
+        <a:lstStyle/>
+        <a:p>
+          <a:endParaRPr lang="en-US"/>
+        </a:p>
+      </dgm:t>
+    </dgm:pt>
+    <dgm:pt modelId="{B9FA7985-BB6E-4980-A68C-74B9031BC9D3}">
+      <dgm:prSet/>
+      <dgm:spPr/>
+      <dgm:t>
+        <a:bodyPr/>
+        <a:lstStyle/>
+        <a:p>
+          <a:r>
+            <a:rPr lang="en-US" dirty="0"/>
+            <a:t>sometimes fields/state </a:t>
+          </a:r>
+        </a:p>
+      </dgm:t>
+    </dgm:pt>
+    <dgm:pt modelId="{C098BD5F-36EB-4EF8-8BFC-38BD4C1ECE67}" type="parTrans" cxnId="{A79FCA53-D0C9-4C5F-A603-131F55877345}">
+      <dgm:prSet/>
+      <dgm:spPr/>
+      <dgm:t>
+        <a:bodyPr/>
+        <a:lstStyle/>
+        <a:p>
+          <a:endParaRPr lang="en-US"/>
+        </a:p>
+      </dgm:t>
+    </dgm:pt>
+    <dgm:pt modelId="{5E550112-FD0E-4EC9-A663-2D1D4EA4F429}" type="sibTrans" cxnId="{A79FCA53-D0C9-4C5F-A603-131F55877345}">
+      <dgm:prSet/>
+      <dgm:spPr/>
+      <dgm:t>
+        <a:bodyPr/>
+        <a:lstStyle/>
+        <a:p>
+          <a:endParaRPr lang="en-US"/>
+        </a:p>
+      </dgm:t>
+    </dgm:pt>
+    <dgm:pt modelId="{56068D82-27C2-46B0-AF4D-728C3D8FF961}">
+      <dgm:prSet/>
+      <dgm:spPr/>
+      <dgm:t>
+        <a:bodyPr/>
+        <a:lstStyle/>
+        <a:p>
+          <a:r>
+            <a:rPr lang="en-US"/>
+            <a:t>Rust does </a:t>
+          </a:r>
+          <a:r>
+            <a:rPr lang="en-US" b="1"/>
+            <a:t>not</a:t>
+          </a:r>
+          <a:r>
+            <a:rPr lang="en-US"/>
+            <a:t> have class inheritance</a:t>
+          </a:r>
+        </a:p>
+      </dgm:t>
+    </dgm:pt>
+    <dgm:pt modelId="{9E2735B4-F4D7-442A-81C5-D33786182F2C}" type="parTrans" cxnId="{F029F879-69AA-4FE2-BF06-215B0D3F72EE}">
+      <dgm:prSet/>
+      <dgm:spPr/>
+      <dgm:t>
+        <a:bodyPr/>
+        <a:lstStyle/>
+        <a:p>
+          <a:endParaRPr lang="en-US"/>
+        </a:p>
+      </dgm:t>
+    </dgm:pt>
+    <dgm:pt modelId="{0DD47556-0BEF-4669-9F1D-D0387E37C449}" type="sibTrans" cxnId="{F029F879-69AA-4FE2-BF06-215B0D3F72EE}">
+      <dgm:prSet/>
+      <dgm:spPr/>
+      <dgm:t>
+        <a:bodyPr/>
+        <a:lstStyle/>
+        <a:p>
+          <a:endParaRPr lang="en-US"/>
+        </a:p>
+      </dgm:t>
+    </dgm:pt>
+    <dgm:pt modelId="{E04C350D-2BBB-4961-A491-6D31B2FF4B3D}">
+      <dgm:prSet/>
+      <dgm:spPr/>
+      <dgm:t>
+        <a:bodyPr/>
+        <a:lstStyle/>
+        <a:p>
+          <a:r>
+            <a:rPr lang="en-US"/>
+            <a:t>But Rust has tools for the first two:</a:t>
+          </a:r>
+        </a:p>
+      </dgm:t>
+    </dgm:pt>
+    <dgm:pt modelId="{30532AAE-3E20-48CE-A10F-F7F2C23228E0}" type="parTrans" cxnId="{3D8B238D-E392-4F4C-9B8E-8B702E002E52}">
+      <dgm:prSet/>
+      <dgm:spPr/>
+      <dgm:t>
+        <a:bodyPr/>
+        <a:lstStyle/>
+        <a:p>
+          <a:endParaRPr lang="en-US"/>
+        </a:p>
+      </dgm:t>
+    </dgm:pt>
+    <dgm:pt modelId="{C61FC4C8-AB02-4C25-AD5D-CAD9D876C339}" type="sibTrans" cxnId="{3D8B238D-E392-4F4C-9B8E-8B702E002E52}">
+      <dgm:prSet/>
+      <dgm:spPr/>
+      <dgm:t>
+        <a:bodyPr/>
+        <a:lstStyle/>
+        <a:p>
+          <a:endParaRPr lang="en-US"/>
+        </a:p>
+      </dgm:t>
+    </dgm:pt>
+    <dgm:pt modelId="{12F7F38D-A684-4154-8893-4C1AD8D3714B}">
+      <dgm:prSet/>
+      <dgm:spPr/>
+      <dgm:t>
+        <a:bodyPr/>
+        <a:lstStyle/>
+        <a:p>
+          <a:r>
+            <a:rPr lang="en-US"/>
+            <a:t>shared interfaces </a:t>
+          </a:r>
+        </a:p>
+      </dgm:t>
+    </dgm:pt>
+    <dgm:pt modelId="{89603AA2-36B6-45CD-B2AF-3DC25A82F0E4}" type="parTrans" cxnId="{AA84BD61-81C2-45AA-ACB6-3F6ADA00B8C9}">
+      <dgm:prSet/>
+      <dgm:spPr/>
+      <dgm:t>
+        <a:bodyPr/>
+        <a:lstStyle/>
+        <a:p>
+          <a:endParaRPr lang="en-US"/>
+        </a:p>
+      </dgm:t>
+    </dgm:pt>
+    <dgm:pt modelId="{B34D1966-0562-404F-AF39-7327340EAA16}" type="sibTrans" cxnId="{AA84BD61-81C2-45AA-ACB6-3F6ADA00B8C9}">
+      <dgm:prSet/>
+      <dgm:spPr/>
+      <dgm:t>
+        <a:bodyPr/>
+        <a:lstStyle/>
+        <a:p>
+          <a:endParaRPr lang="en-US"/>
+        </a:p>
+      </dgm:t>
+    </dgm:pt>
+    <dgm:pt modelId="{62B44517-6559-4C27-A0A1-CCEC8B74E653}">
+      <dgm:prSet/>
+      <dgm:spPr/>
+      <dgm:t>
+        <a:bodyPr/>
+        <a:lstStyle/>
+        <a:p>
+          <a:r>
+            <a:rPr lang="en-US"/>
+            <a:t>shared behavior </a:t>
+          </a:r>
+        </a:p>
+      </dgm:t>
+    </dgm:pt>
+    <dgm:pt modelId="{870CDE93-DBA8-4E32-8EAB-CBBFA801F5F3}" type="parTrans" cxnId="{D1E9E38D-56F4-496D-8E9B-38AF8EC550E7}">
+      <dgm:prSet/>
+      <dgm:spPr/>
+      <dgm:t>
+        <a:bodyPr/>
+        <a:lstStyle/>
+        <a:p>
+          <a:endParaRPr lang="en-US"/>
+        </a:p>
+      </dgm:t>
+    </dgm:pt>
+    <dgm:pt modelId="{54BB0D46-8E98-40C4-A355-C9B5B55E1064}" type="sibTrans" cxnId="{D1E9E38D-56F4-496D-8E9B-38AF8EC550E7}">
+      <dgm:prSet/>
+      <dgm:spPr/>
+      <dgm:t>
+        <a:bodyPr/>
+        <a:lstStyle/>
+        <a:p>
+          <a:endParaRPr lang="en-US"/>
+        </a:p>
+      </dgm:t>
+    </dgm:pt>
+    <dgm:pt modelId="{F2E5C064-2246-46D4-8586-6902DDC591B0}">
+      <dgm:prSet/>
+      <dgm:spPr/>
+      <dgm:t>
+        <a:bodyPr/>
+        <a:lstStyle/>
+        <a:p>
+          <a:r>
+            <a:rPr lang="en-US"/>
+            <a:t>This talk is about those tools</a:t>
+          </a:r>
+        </a:p>
+      </dgm:t>
+    </dgm:pt>
+    <dgm:pt modelId="{AC7268FE-069B-4304-817F-71E1E10B26BA}" type="parTrans" cxnId="{546C45FA-BFCC-4412-A740-42DB81C78443}">
+      <dgm:prSet/>
+      <dgm:spPr/>
+      <dgm:t>
+        <a:bodyPr/>
+        <a:lstStyle/>
+        <a:p>
+          <a:endParaRPr lang="en-US"/>
+        </a:p>
+      </dgm:t>
+    </dgm:pt>
+    <dgm:pt modelId="{276ED42D-CB2F-4E4A-9114-A009E5527D4A}" type="sibTrans" cxnId="{546C45FA-BFCC-4412-A740-42DB81C78443}">
+      <dgm:prSet/>
+      <dgm:spPr/>
+      <dgm:t>
+        <a:bodyPr/>
+        <a:lstStyle/>
+        <a:p>
+          <a:endParaRPr lang="en-US"/>
+        </a:p>
+      </dgm:t>
+    </dgm:pt>
+    <dgm:pt modelId="{242775AF-F0E9-4355-9709-081ADD501FCE}">
+      <dgm:prSet/>
+      <dgm:spPr/>
+      <dgm:t>
+        <a:bodyPr/>
+        <a:lstStyle/>
+        <a:p>
+          <a:pPr>
+            <a:buFont typeface="Arial" panose="020B0604020202020204" pitchFamily="34" charset="0"/>
+            <a:buChar char="•"/>
+          </a:pPr>
+          <a:r>
+            <a:rPr lang="en-US" dirty="0"/>
+            <a:t>If two types implement the same interface, either can be used where interface is required.</a:t>
+          </a:r>
+        </a:p>
+      </dgm:t>
+    </dgm:pt>
+    <dgm:pt modelId="{20CC0279-80A8-4F73-AC41-82BECF72B208}" type="parTrans" cxnId="{7F13F3AC-2B74-4836-8EA5-0CFEB25D7941}">
+      <dgm:prSet/>
+      <dgm:spPr/>
+      <dgm:t>
+        <a:bodyPr/>
+        <a:lstStyle/>
+        <a:p>
+          <a:endParaRPr lang="en-US"/>
+        </a:p>
+      </dgm:t>
+    </dgm:pt>
+    <dgm:pt modelId="{5CCEDE49-1B8D-4A3C-A455-54899792347F}" type="sibTrans" cxnId="{7F13F3AC-2B74-4836-8EA5-0CFEB25D7941}">
+      <dgm:prSet/>
+      <dgm:spPr/>
+      <dgm:t>
+        <a:bodyPr/>
+        <a:lstStyle/>
+        <a:p>
+          <a:endParaRPr lang="en-US"/>
+        </a:p>
+      </dgm:t>
+    </dgm:pt>
+    <dgm:pt modelId="{B5401CC3-B47E-40DE-9DF7-2F0D06FB3AF8}">
+      <dgm:prSet/>
+      <dgm:spPr/>
+      <dgm:t>
+        <a:bodyPr/>
+        <a:lstStyle/>
+        <a:p>
+          <a:r>
+            <a:rPr lang="en-US" dirty="0"/>
+            <a:t>Shared code supplied once, used by many implementing types</a:t>
+          </a:r>
+        </a:p>
+      </dgm:t>
+    </dgm:pt>
+    <dgm:pt modelId="{33DA7E23-B033-423A-ABBA-9842F4D8665D}" type="parTrans" cxnId="{414950B8-675A-494B-805C-EA2CBF909E42}">
+      <dgm:prSet/>
+      <dgm:spPr/>
+      <dgm:t>
+        <a:bodyPr/>
+        <a:lstStyle/>
+        <a:p>
+          <a:endParaRPr lang="en-US"/>
+        </a:p>
+      </dgm:t>
+    </dgm:pt>
+    <dgm:pt modelId="{482BCF77-8E3A-4A4F-84D8-42E79A511E1E}" type="sibTrans" cxnId="{414950B8-675A-494B-805C-EA2CBF909E42}">
+      <dgm:prSet/>
+      <dgm:spPr/>
+      <dgm:t>
+        <a:bodyPr/>
+        <a:lstStyle/>
+        <a:p>
+          <a:endParaRPr lang="en-US"/>
+        </a:p>
+      </dgm:t>
+    </dgm:pt>
+    <dgm:pt modelId="{FC48F97F-BAFC-486C-9E95-982597C92C7F}" type="pres">
+      <dgm:prSet presAssocID="{ABDD7871-7EB2-4343-AF06-E1A496A91DA3}" presName="linear" presStyleCnt="0">
+        <dgm:presLayoutVars>
+          <dgm:dir/>
+          <dgm:animLvl val="lvl"/>
+          <dgm:resizeHandles val="exact"/>
+        </dgm:presLayoutVars>
+      </dgm:prSet>
+      <dgm:spPr/>
+    </dgm:pt>
+    <dgm:pt modelId="{20465DEF-B768-4AD7-80D8-10629693A114}" type="pres">
+      <dgm:prSet presAssocID="{41944C90-BC8E-4F65-ACC5-D36AB518C45B}" presName="parentLin" presStyleCnt="0"/>
+      <dgm:spPr/>
+    </dgm:pt>
+    <dgm:pt modelId="{76CDAE44-CCC2-48FE-971D-611C642E1F79}" type="pres">
+      <dgm:prSet presAssocID="{41944C90-BC8E-4F65-ACC5-D36AB518C45B}" presName="parentLeftMargin" presStyleLbl="node1" presStyleIdx="0" presStyleCnt="4"/>
+      <dgm:spPr/>
+    </dgm:pt>
+    <dgm:pt modelId="{A46C64D2-EEB2-4DD2-A65C-70AB3978633D}" type="pres">
+      <dgm:prSet presAssocID="{41944C90-BC8E-4F65-ACC5-D36AB518C45B}" presName="parentText" presStyleLbl="node1" presStyleIdx="0" presStyleCnt="4">
+        <dgm:presLayoutVars>
+          <dgm:chMax val="0"/>
+          <dgm:bulletEnabled val="1"/>
+        </dgm:presLayoutVars>
+      </dgm:prSet>
+      <dgm:spPr/>
+    </dgm:pt>
+    <dgm:pt modelId="{7DE7A80A-7172-4D34-8481-F5DC18A46E41}" type="pres">
+      <dgm:prSet presAssocID="{41944C90-BC8E-4F65-ACC5-D36AB518C45B}" presName="negativeSpace" presStyleCnt="0"/>
+      <dgm:spPr/>
+    </dgm:pt>
+    <dgm:pt modelId="{1425C4F1-76BE-4343-A86C-B62999DAFA3C}" type="pres">
+      <dgm:prSet presAssocID="{41944C90-BC8E-4F65-ACC5-D36AB518C45B}" presName="childText" presStyleLbl="conFgAcc1" presStyleIdx="0" presStyleCnt="4">
+        <dgm:presLayoutVars>
+          <dgm:bulletEnabled val="1"/>
+        </dgm:presLayoutVars>
+      </dgm:prSet>
+      <dgm:spPr/>
+    </dgm:pt>
+    <dgm:pt modelId="{71DAF9FA-15D2-4BE7-93B2-CE11D5D2A745}" type="pres">
+      <dgm:prSet presAssocID="{85D42ABE-472E-4FAF-8028-743E6E8A6770}" presName="spaceBetweenRectangles" presStyleCnt="0"/>
+      <dgm:spPr/>
+    </dgm:pt>
+    <dgm:pt modelId="{EB7D260B-02CE-45E5-9C7D-7E5ABC05F848}" type="pres">
+      <dgm:prSet presAssocID="{56068D82-27C2-46B0-AF4D-728C3D8FF961}" presName="parentLin" presStyleCnt="0"/>
+      <dgm:spPr/>
+    </dgm:pt>
+    <dgm:pt modelId="{975CF81F-683A-483D-A27B-B0B4E9D91002}" type="pres">
+      <dgm:prSet presAssocID="{56068D82-27C2-46B0-AF4D-728C3D8FF961}" presName="parentLeftMargin" presStyleLbl="node1" presStyleIdx="0" presStyleCnt="4"/>
+      <dgm:spPr/>
+    </dgm:pt>
+    <dgm:pt modelId="{8AA0CD7E-F5A1-44AE-90CB-4EDF724FE801}" type="pres">
+      <dgm:prSet presAssocID="{56068D82-27C2-46B0-AF4D-728C3D8FF961}" presName="parentText" presStyleLbl="node1" presStyleIdx="1" presStyleCnt="4">
+        <dgm:presLayoutVars>
+          <dgm:chMax val="0"/>
+          <dgm:bulletEnabled val="1"/>
+        </dgm:presLayoutVars>
+      </dgm:prSet>
+      <dgm:spPr/>
+    </dgm:pt>
+    <dgm:pt modelId="{260B0CD4-4FB6-42C3-A9F4-6072C2B00CC6}" type="pres">
+      <dgm:prSet presAssocID="{56068D82-27C2-46B0-AF4D-728C3D8FF961}" presName="negativeSpace" presStyleCnt="0"/>
+      <dgm:spPr/>
+    </dgm:pt>
+    <dgm:pt modelId="{F5C8A4A8-BE15-484F-9406-7BCE258C17E5}" type="pres">
+      <dgm:prSet presAssocID="{56068D82-27C2-46B0-AF4D-728C3D8FF961}" presName="childText" presStyleLbl="conFgAcc1" presStyleIdx="1" presStyleCnt="4">
+        <dgm:presLayoutVars>
+          <dgm:bulletEnabled val="1"/>
+        </dgm:presLayoutVars>
+      </dgm:prSet>
+      <dgm:spPr/>
+    </dgm:pt>
+    <dgm:pt modelId="{21DEF26C-16FE-46DC-955B-60AB5902FB17}" type="pres">
+      <dgm:prSet presAssocID="{0DD47556-0BEF-4669-9F1D-D0387E37C449}" presName="spaceBetweenRectangles" presStyleCnt="0"/>
+      <dgm:spPr/>
+    </dgm:pt>
+    <dgm:pt modelId="{5D1633CA-C42F-474A-AF5A-F9F8F177C072}" type="pres">
+      <dgm:prSet presAssocID="{E04C350D-2BBB-4961-A491-6D31B2FF4B3D}" presName="parentLin" presStyleCnt="0"/>
+      <dgm:spPr/>
+    </dgm:pt>
+    <dgm:pt modelId="{558380EB-B399-4AD6-AA43-0FD2127144AC}" type="pres">
+      <dgm:prSet presAssocID="{E04C350D-2BBB-4961-A491-6D31B2FF4B3D}" presName="parentLeftMargin" presStyleLbl="node1" presStyleIdx="1" presStyleCnt="4"/>
+      <dgm:spPr/>
+    </dgm:pt>
+    <dgm:pt modelId="{10009CDD-02B3-4725-BA4F-B411A2947E2B}" type="pres">
+      <dgm:prSet presAssocID="{E04C350D-2BBB-4961-A491-6D31B2FF4B3D}" presName="parentText" presStyleLbl="node1" presStyleIdx="2" presStyleCnt="4">
+        <dgm:presLayoutVars>
+          <dgm:chMax val="0"/>
+          <dgm:bulletEnabled val="1"/>
+        </dgm:presLayoutVars>
+      </dgm:prSet>
+      <dgm:spPr/>
+    </dgm:pt>
+    <dgm:pt modelId="{A0F8D4AF-6D5D-49C8-803C-C2D58AB87835}" type="pres">
+      <dgm:prSet presAssocID="{E04C350D-2BBB-4961-A491-6D31B2FF4B3D}" presName="negativeSpace" presStyleCnt="0"/>
+      <dgm:spPr/>
+    </dgm:pt>
+    <dgm:pt modelId="{EEEF16EE-977C-425F-85B9-63D7E9C19DF1}" type="pres">
+      <dgm:prSet presAssocID="{E04C350D-2BBB-4961-A491-6D31B2FF4B3D}" presName="childText" presStyleLbl="conFgAcc1" presStyleIdx="2" presStyleCnt="4">
+        <dgm:presLayoutVars>
+          <dgm:bulletEnabled val="1"/>
+        </dgm:presLayoutVars>
+      </dgm:prSet>
+      <dgm:spPr/>
+    </dgm:pt>
+    <dgm:pt modelId="{9A472A71-C832-4C74-8D9F-09032EAB65AC}" type="pres">
+      <dgm:prSet presAssocID="{C61FC4C8-AB02-4C25-AD5D-CAD9D876C339}" presName="spaceBetweenRectangles" presStyleCnt="0"/>
+      <dgm:spPr/>
+    </dgm:pt>
+    <dgm:pt modelId="{C76ED763-481E-4ECF-8DE4-473ECEBA0067}" type="pres">
+      <dgm:prSet presAssocID="{F2E5C064-2246-46D4-8586-6902DDC591B0}" presName="parentLin" presStyleCnt="0"/>
+      <dgm:spPr/>
+    </dgm:pt>
+    <dgm:pt modelId="{C426A8F6-920E-47B4-992C-B22B084694C1}" type="pres">
+      <dgm:prSet presAssocID="{F2E5C064-2246-46D4-8586-6902DDC591B0}" presName="parentLeftMargin" presStyleLbl="node1" presStyleIdx="2" presStyleCnt="4"/>
+      <dgm:spPr/>
+    </dgm:pt>
+    <dgm:pt modelId="{0F569956-D6CE-4FC0-A616-CDDD73C1CF37}" type="pres">
+      <dgm:prSet presAssocID="{F2E5C064-2246-46D4-8586-6902DDC591B0}" presName="parentText" presStyleLbl="node1" presStyleIdx="3" presStyleCnt="4">
+        <dgm:presLayoutVars>
+          <dgm:chMax val="0"/>
+          <dgm:bulletEnabled val="1"/>
+        </dgm:presLayoutVars>
+      </dgm:prSet>
+      <dgm:spPr/>
+    </dgm:pt>
+    <dgm:pt modelId="{5797A105-BE46-4FCD-9AC0-B79194A05372}" type="pres">
+      <dgm:prSet presAssocID="{F2E5C064-2246-46D4-8586-6902DDC591B0}" presName="negativeSpace" presStyleCnt="0"/>
+      <dgm:spPr/>
+    </dgm:pt>
+    <dgm:pt modelId="{9CA8C7E0-A033-4140-8F89-D390D6922867}" type="pres">
+      <dgm:prSet presAssocID="{F2E5C064-2246-46D4-8586-6902DDC591B0}" presName="childText" presStyleLbl="conFgAcc1" presStyleIdx="3" presStyleCnt="4">
+        <dgm:presLayoutVars>
+          <dgm:bulletEnabled val="1"/>
+        </dgm:presLayoutVars>
+      </dgm:prSet>
+      <dgm:spPr/>
+    </dgm:pt>
+  </dgm:ptLst>
+  <dgm:cxnLst>
+    <dgm:cxn modelId="{A29B3F1E-94DD-4083-93F7-AB679B959C78}" srcId="{ABDD7871-7EB2-4343-AF06-E1A496A91DA3}" destId="{41944C90-BC8E-4F65-ACC5-D36AB518C45B}" srcOrd="0" destOrd="0" parTransId="{F17A0F34-221A-486B-B040-14440CD4149D}" sibTransId="{85D42ABE-472E-4FAF-8028-743E6E8A6770}"/>
+    <dgm:cxn modelId="{E77A6F33-FE8F-421C-A793-3A3EB2C3A74B}" type="presOf" srcId="{12F7F38D-A684-4154-8893-4C1AD8D3714B}" destId="{EEEF16EE-977C-425F-85B9-63D7E9C19DF1}" srcOrd="0" destOrd="0" presId="urn:microsoft.com/office/officeart/2005/8/layout/list1"/>
+    <dgm:cxn modelId="{79C4C840-B2B6-4FED-A025-15D3E49329F1}" type="presOf" srcId="{B5401CC3-B47E-40DE-9DF7-2F0D06FB3AF8}" destId="{1425C4F1-76BE-4343-A86C-B62999DAFA3C}" srcOrd="0" destOrd="3" presId="urn:microsoft.com/office/officeart/2005/8/layout/list1"/>
+    <dgm:cxn modelId="{209AB15B-4764-4944-BA62-C6DA3F28C434}" type="presOf" srcId="{B9FA7985-BB6E-4980-A68C-74B9031BC9D3}" destId="{1425C4F1-76BE-4343-A86C-B62999DAFA3C}" srcOrd="0" destOrd="4" presId="urn:microsoft.com/office/officeart/2005/8/layout/list1"/>
+    <dgm:cxn modelId="{AA84BD61-81C2-45AA-ACB6-3F6ADA00B8C9}" srcId="{E04C350D-2BBB-4961-A491-6D31B2FF4B3D}" destId="{12F7F38D-A684-4154-8893-4C1AD8D3714B}" srcOrd="0" destOrd="0" parTransId="{89603AA2-36B6-45CD-B2AF-3DC25A82F0E4}" sibTransId="{B34D1966-0562-404F-AF39-7327340EAA16}"/>
+    <dgm:cxn modelId="{485F8246-DAEA-4A04-833B-84CAA75674F4}" type="presOf" srcId="{656F0765-A834-4E31-9FF9-78128E990E99}" destId="{1425C4F1-76BE-4343-A86C-B62999DAFA3C}" srcOrd="0" destOrd="0" presId="urn:microsoft.com/office/officeart/2005/8/layout/list1"/>
+    <dgm:cxn modelId="{D9B2A348-07C9-426F-8C89-AA1F5C2F6FB8}" type="presOf" srcId="{ABDD7871-7EB2-4343-AF06-E1A496A91DA3}" destId="{FC48F97F-BAFC-486C-9E95-982597C92C7F}" srcOrd="0" destOrd="0" presId="urn:microsoft.com/office/officeart/2005/8/layout/list1"/>
+    <dgm:cxn modelId="{E7CEDA4B-1E2D-4EA7-8F29-C593D348532D}" type="presOf" srcId="{62B44517-6559-4C27-A0A1-CCEC8B74E653}" destId="{EEEF16EE-977C-425F-85B9-63D7E9C19DF1}" srcOrd="0" destOrd="1" presId="urn:microsoft.com/office/officeart/2005/8/layout/list1"/>
+    <dgm:cxn modelId="{A79FCA53-D0C9-4C5F-A603-131F55877345}" srcId="{41944C90-BC8E-4F65-ACC5-D36AB518C45B}" destId="{B9FA7985-BB6E-4980-A68C-74B9031BC9D3}" srcOrd="2" destOrd="0" parTransId="{C098BD5F-36EB-4EF8-8BFC-38BD4C1ECE67}" sibTransId="{5E550112-FD0E-4EC9-A663-2D1D4EA4F429}"/>
+    <dgm:cxn modelId="{F029F879-69AA-4FE2-BF06-215B0D3F72EE}" srcId="{ABDD7871-7EB2-4343-AF06-E1A496A91DA3}" destId="{56068D82-27C2-46B0-AF4D-728C3D8FF961}" srcOrd="1" destOrd="0" parTransId="{9E2735B4-F4D7-442A-81C5-D33786182F2C}" sibTransId="{0DD47556-0BEF-4669-9F1D-D0387E37C449}"/>
+    <dgm:cxn modelId="{8E2FDF84-E937-4FF8-ADC4-A2ACA163F57C}" srcId="{41944C90-BC8E-4F65-ACC5-D36AB518C45B}" destId="{E92E434C-C423-4B91-A47D-9C880ED6431A}" srcOrd="1" destOrd="0" parTransId="{BCA5444F-6B34-4FB0-BE43-F02E1A8B6796}" sibTransId="{F4F0D00F-F2F2-4B5E-BB24-CF3C6A2493C1}"/>
+    <dgm:cxn modelId="{3D8B238D-E392-4F4C-9B8E-8B702E002E52}" srcId="{ABDD7871-7EB2-4343-AF06-E1A496A91DA3}" destId="{E04C350D-2BBB-4961-A491-6D31B2FF4B3D}" srcOrd="2" destOrd="0" parTransId="{30532AAE-3E20-48CE-A10F-F7F2C23228E0}" sibTransId="{C61FC4C8-AB02-4C25-AD5D-CAD9D876C339}"/>
+    <dgm:cxn modelId="{D1E9E38D-56F4-496D-8E9B-38AF8EC550E7}" srcId="{E04C350D-2BBB-4961-A491-6D31B2FF4B3D}" destId="{62B44517-6559-4C27-A0A1-CCEC8B74E653}" srcOrd="1" destOrd="0" parTransId="{870CDE93-DBA8-4E32-8EAB-CBBFA801F5F3}" sibTransId="{54BB0D46-8E98-40C4-A355-C9B5B55E1064}"/>
+    <dgm:cxn modelId="{229DE991-BCA4-4CF3-B04B-FE54E4F2ABAF}" type="presOf" srcId="{56068D82-27C2-46B0-AF4D-728C3D8FF961}" destId="{8AA0CD7E-F5A1-44AE-90CB-4EDF724FE801}" srcOrd="1" destOrd="0" presId="urn:microsoft.com/office/officeart/2005/8/layout/list1"/>
+    <dgm:cxn modelId="{56F7009B-17ED-4ABC-955D-6C2808F24330}" type="presOf" srcId="{242775AF-F0E9-4355-9709-081ADD501FCE}" destId="{1425C4F1-76BE-4343-A86C-B62999DAFA3C}" srcOrd="0" destOrd="1" presId="urn:microsoft.com/office/officeart/2005/8/layout/list1"/>
+    <dgm:cxn modelId="{9B1A92A6-F609-4A36-A0AE-6CE613132644}" type="presOf" srcId="{41944C90-BC8E-4F65-ACC5-D36AB518C45B}" destId="{A46C64D2-EEB2-4DD2-A65C-70AB3978633D}" srcOrd="1" destOrd="0" presId="urn:microsoft.com/office/officeart/2005/8/layout/list1"/>
+    <dgm:cxn modelId="{77B037AB-2DEC-4B4B-A120-7B697B784D6D}" type="presOf" srcId="{56068D82-27C2-46B0-AF4D-728C3D8FF961}" destId="{975CF81F-683A-483D-A27B-B0B4E9D91002}" srcOrd="0" destOrd="0" presId="urn:microsoft.com/office/officeart/2005/8/layout/list1"/>
+    <dgm:cxn modelId="{7F13F3AC-2B74-4836-8EA5-0CFEB25D7941}" srcId="{656F0765-A834-4E31-9FF9-78128E990E99}" destId="{242775AF-F0E9-4355-9709-081ADD501FCE}" srcOrd="0" destOrd="0" parTransId="{20CC0279-80A8-4F73-AC41-82BECF72B208}" sibTransId="{5CCEDE49-1B8D-4A3C-A455-54899792347F}"/>
+    <dgm:cxn modelId="{A8B0CAB1-A796-4D79-AAF0-D9183D852F40}" type="presOf" srcId="{F2E5C064-2246-46D4-8586-6902DDC591B0}" destId="{0F569956-D6CE-4FC0-A616-CDDD73C1CF37}" srcOrd="1" destOrd="0" presId="urn:microsoft.com/office/officeart/2005/8/layout/list1"/>
+    <dgm:cxn modelId="{BD9756B2-1EEF-44CE-974D-900C151E09C6}" type="presOf" srcId="{E04C350D-2BBB-4961-A491-6D31B2FF4B3D}" destId="{558380EB-B399-4AD6-AA43-0FD2127144AC}" srcOrd="0" destOrd="0" presId="urn:microsoft.com/office/officeart/2005/8/layout/list1"/>
+    <dgm:cxn modelId="{8DBB70B4-3ABB-4AEC-8F07-A7B245300DFB}" type="presOf" srcId="{F2E5C064-2246-46D4-8586-6902DDC591B0}" destId="{C426A8F6-920E-47B4-992C-B22B084694C1}" srcOrd="0" destOrd="0" presId="urn:microsoft.com/office/officeart/2005/8/layout/list1"/>
+    <dgm:cxn modelId="{414950B8-675A-494B-805C-EA2CBF909E42}" srcId="{E92E434C-C423-4B91-A47D-9C880ED6431A}" destId="{B5401CC3-B47E-40DE-9DF7-2F0D06FB3AF8}" srcOrd="0" destOrd="0" parTransId="{33DA7E23-B033-423A-ABBA-9842F4D8665D}" sibTransId="{482BCF77-8E3A-4A4F-84D8-42E79A511E1E}"/>
+    <dgm:cxn modelId="{B89E72BD-58D7-4A86-B670-D0E66A49CF28}" type="presOf" srcId="{41944C90-BC8E-4F65-ACC5-D36AB518C45B}" destId="{76CDAE44-CCC2-48FE-971D-611C642E1F79}" srcOrd="0" destOrd="0" presId="urn:microsoft.com/office/officeart/2005/8/layout/list1"/>
+    <dgm:cxn modelId="{69CBCFCF-D91B-4D65-9C2E-2C1C9151A55D}" srcId="{41944C90-BC8E-4F65-ACC5-D36AB518C45B}" destId="{656F0765-A834-4E31-9FF9-78128E990E99}" srcOrd="0" destOrd="0" parTransId="{7D2960B8-31AD-4CC9-BA28-DDE68958901D}" sibTransId="{3280C243-44DA-475D-B225-F525D812AF4B}"/>
+    <dgm:cxn modelId="{FC07E6D2-0D20-4FAA-80C3-36AF424B9DE6}" type="presOf" srcId="{E92E434C-C423-4B91-A47D-9C880ED6431A}" destId="{1425C4F1-76BE-4343-A86C-B62999DAFA3C}" srcOrd="0" destOrd="2" presId="urn:microsoft.com/office/officeart/2005/8/layout/list1"/>
+    <dgm:cxn modelId="{AECE1BF0-042E-4100-B85D-B1302907D565}" type="presOf" srcId="{E04C350D-2BBB-4961-A491-6D31B2FF4B3D}" destId="{10009CDD-02B3-4725-BA4F-B411A2947E2B}" srcOrd="1" destOrd="0" presId="urn:microsoft.com/office/officeart/2005/8/layout/list1"/>
+    <dgm:cxn modelId="{546C45FA-BFCC-4412-A740-42DB81C78443}" srcId="{ABDD7871-7EB2-4343-AF06-E1A496A91DA3}" destId="{F2E5C064-2246-46D4-8586-6902DDC591B0}" srcOrd="3" destOrd="0" parTransId="{AC7268FE-069B-4304-817F-71E1E10B26BA}" sibTransId="{276ED42D-CB2F-4E4A-9114-A009E5527D4A}"/>
+    <dgm:cxn modelId="{AB1559F4-691A-431C-BC5E-E0C8E4CC67E7}" type="presParOf" srcId="{FC48F97F-BAFC-486C-9E95-982597C92C7F}" destId="{20465DEF-B768-4AD7-80D8-10629693A114}" srcOrd="0" destOrd="0" presId="urn:microsoft.com/office/officeart/2005/8/layout/list1"/>
+    <dgm:cxn modelId="{2149CE0C-E75D-4E12-81DF-917563E4BB34}" type="presParOf" srcId="{20465DEF-B768-4AD7-80D8-10629693A114}" destId="{76CDAE44-CCC2-48FE-971D-611C642E1F79}" srcOrd="0" destOrd="0" presId="urn:microsoft.com/office/officeart/2005/8/layout/list1"/>
+    <dgm:cxn modelId="{FD78D496-C5AC-41B1-8910-E7306D5EB764}" type="presParOf" srcId="{20465DEF-B768-4AD7-80D8-10629693A114}" destId="{A46C64D2-EEB2-4DD2-A65C-70AB3978633D}" srcOrd="1" destOrd="0" presId="urn:microsoft.com/office/officeart/2005/8/layout/list1"/>
+    <dgm:cxn modelId="{01758E0B-585D-4C90-A086-E4B9EFB0F8C6}" type="presParOf" srcId="{FC48F97F-BAFC-486C-9E95-982597C92C7F}" destId="{7DE7A80A-7172-4D34-8481-F5DC18A46E41}" srcOrd="1" destOrd="0" presId="urn:microsoft.com/office/officeart/2005/8/layout/list1"/>
+    <dgm:cxn modelId="{4537DA9B-F14C-4871-B0EE-7B2AB7B137C1}" type="presParOf" srcId="{FC48F97F-BAFC-486C-9E95-982597C92C7F}" destId="{1425C4F1-76BE-4343-A86C-B62999DAFA3C}" srcOrd="2" destOrd="0" presId="urn:microsoft.com/office/officeart/2005/8/layout/list1"/>
+    <dgm:cxn modelId="{D89FD9F6-66D7-4DB0-9E19-2306E68182C4}" type="presParOf" srcId="{FC48F97F-BAFC-486C-9E95-982597C92C7F}" destId="{71DAF9FA-15D2-4BE7-93B2-CE11D5D2A745}" srcOrd="3" destOrd="0" presId="urn:microsoft.com/office/officeart/2005/8/layout/list1"/>
+    <dgm:cxn modelId="{B25D7B90-EEE9-44E7-9F0B-D0AF1C152B7C}" type="presParOf" srcId="{FC48F97F-BAFC-486C-9E95-982597C92C7F}" destId="{EB7D260B-02CE-45E5-9C7D-7E5ABC05F848}" srcOrd="4" destOrd="0" presId="urn:microsoft.com/office/officeart/2005/8/layout/list1"/>
+    <dgm:cxn modelId="{857BDC6D-4732-4C19-9764-C7E621634FA7}" type="presParOf" srcId="{EB7D260B-02CE-45E5-9C7D-7E5ABC05F848}" destId="{975CF81F-683A-483D-A27B-B0B4E9D91002}" srcOrd="0" destOrd="0" presId="urn:microsoft.com/office/officeart/2005/8/layout/list1"/>
+    <dgm:cxn modelId="{D03A4B71-7418-4C83-AC10-C3EF0BCB4271}" type="presParOf" srcId="{EB7D260B-02CE-45E5-9C7D-7E5ABC05F848}" destId="{8AA0CD7E-F5A1-44AE-90CB-4EDF724FE801}" srcOrd="1" destOrd="0" presId="urn:microsoft.com/office/officeart/2005/8/layout/list1"/>
+    <dgm:cxn modelId="{356FF0CA-E435-4433-90B1-E1F74E321E70}" type="presParOf" srcId="{FC48F97F-BAFC-486C-9E95-982597C92C7F}" destId="{260B0CD4-4FB6-42C3-A9F4-6072C2B00CC6}" srcOrd="5" destOrd="0" presId="urn:microsoft.com/office/officeart/2005/8/layout/list1"/>
+    <dgm:cxn modelId="{6930E6FE-01E3-4FBC-9D35-3F96DD76A576}" type="presParOf" srcId="{FC48F97F-BAFC-486C-9E95-982597C92C7F}" destId="{F5C8A4A8-BE15-484F-9406-7BCE258C17E5}" srcOrd="6" destOrd="0" presId="urn:microsoft.com/office/officeart/2005/8/layout/list1"/>
+    <dgm:cxn modelId="{BC305024-68DC-4A23-AF18-14A5BF56D506}" type="presParOf" srcId="{FC48F97F-BAFC-486C-9E95-982597C92C7F}" destId="{21DEF26C-16FE-46DC-955B-60AB5902FB17}" srcOrd="7" destOrd="0" presId="urn:microsoft.com/office/officeart/2005/8/layout/list1"/>
+    <dgm:cxn modelId="{611093E3-06A6-4316-82DC-9A6E2722D8E0}" type="presParOf" srcId="{FC48F97F-BAFC-486C-9E95-982597C92C7F}" destId="{5D1633CA-C42F-474A-AF5A-F9F8F177C072}" srcOrd="8" destOrd="0" presId="urn:microsoft.com/office/officeart/2005/8/layout/list1"/>
+    <dgm:cxn modelId="{DAF87B4C-8B0F-4533-8A0A-D16B3AD07699}" type="presParOf" srcId="{5D1633CA-C42F-474A-AF5A-F9F8F177C072}" destId="{558380EB-B399-4AD6-AA43-0FD2127144AC}" srcOrd="0" destOrd="0" presId="urn:microsoft.com/office/officeart/2005/8/layout/list1"/>
+    <dgm:cxn modelId="{EFAF5887-3D75-49D8-8FFF-37AF822E7EAE}" type="presParOf" srcId="{5D1633CA-C42F-474A-AF5A-F9F8F177C072}" destId="{10009CDD-02B3-4725-BA4F-B411A2947E2B}" srcOrd="1" destOrd="0" presId="urn:microsoft.com/office/officeart/2005/8/layout/list1"/>
+    <dgm:cxn modelId="{6AAD5E3D-C68B-4FE1-BA1F-F3DFED05F74A}" type="presParOf" srcId="{FC48F97F-BAFC-486C-9E95-982597C92C7F}" destId="{A0F8D4AF-6D5D-49C8-803C-C2D58AB87835}" srcOrd="9" destOrd="0" presId="urn:microsoft.com/office/officeart/2005/8/layout/list1"/>
+    <dgm:cxn modelId="{95A80F64-9123-493A-B71B-CF01E2D43E05}" type="presParOf" srcId="{FC48F97F-BAFC-486C-9E95-982597C92C7F}" destId="{EEEF16EE-977C-425F-85B9-63D7E9C19DF1}" srcOrd="10" destOrd="0" presId="urn:microsoft.com/office/officeart/2005/8/layout/list1"/>
+    <dgm:cxn modelId="{8974F9AF-3E7F-456B-BB1E-1699ECAF67BF}" type="presParOf" srcId="{FC48F97F-BAFC-486C-9E95-982597C92C7F}" destId="{9A472A71-C832-4C74-8D9F-09032EAB65AC}" srcOrd="11" destOrd="0" presId="urn:microsoft.com/office/officeart/2005/8/layout/list1"/>
+    <dgm:cxn modelId="{7C0B2DC4-2907-4222-8FA2-3C4DB385B62B}" type="presParOf" srcId="{FC48F97F-BAFC-486C-9E95-982597C92C7F}" destId="{C76ED763-481E-4ECF-8DE4-473ECEBA0067}" srcOrd="12" destOrd="0" presId="urn:microsoft.com/office/officeart/2005/8/layout/list1"/>
+    <dgm:cxn modelId="{975194CB-4839-4D01-A9F9-4821C0D8A9C7}" type="presParOf" srcId="{C76ED763-481E-4ECF-8DE4-473ECEBA0067}" destId="{C426A8F6-920E-47B4-992C-B22B084694C1}" srcOrd="0" destOrd="0" presId="urn:microsoft.com/office/officeart/2005/8/layout/list1"/>
+    <dgm:cxn modelId="{55294ECF-3973-4B78-B1DE-602DF92B64F9}" type="presParOf" srcId="{C76ED763-481E-4ECF-8DE4-473ECEBA0067}" destId="{0F569956-D6CE-4FC0-A616-CDDD73C1CF37}" srcOrd="1" destOrd="0" presId="urn:microsoft.com/office/officeart/2005/8/layout/list1"/>
+    <dgm:cxn modelId="{704ACAAC-0BB4-48BF-BA34-938A7C84BE65}" type="presParOf" srcId="{FC48F97F-BAFC-486C-9E95-982597C92C7F}" destId="{5797A105-BE46-4FCD-9AC0-B79194A05372}" srcOrd="13" destOrd="0" presId="urn:microsoft.com/office/officeart/2005/8/layout/list1"/>
+    <dgm:cxn modelId="{60B605ED-8672-45D5-826E-E89C40A93FCC}" type="presParOf" srcId="{FC48F97F-BAFC-486C-9E95-982597C92C7F}" destId="{9CA8C7E0-A033-4140-8F89-D390D6922867}" srcOrd="14" destOrd="0" presId="urn:microsoft.com/office/officeart/2005/8/layout/list1"/>
+  </dgm:cxnLst>
+  <dgm:bg/>
+  <dgm:whole/>
+  <dgm:extLst>
+    <a:ext uri="http://schemas.microsoft.com/office/drawing/2008/diagram">
+      <dsp:dataModelExt xmlns:dsp="http://schemas.microsoft.com/office/drawing/2008/diagram" relId="rId6" minVer="http://schemas.openxmlformats.org/drawingml/2006/diagram"/>
+    </a:ext>
+  </dgm:extLst>
+</dgm:dataModel>
+</file>
+
+<file path=ppt/diagrams/data2.xml><?xml version="1.0" encoding="utf-8"?>
+<dgm:dataModel xmlns:dgm="http://schemas.openxmlformats.org/drawingml/2006/diagram" xmlns:a="http://schemas.openxmlformats.org/drawingml/2006/main">
+  <dgm:ptLst>
+    <dgm:pt modelId="{ED61D1D3-01E2-4E7B-8ACC-C56F3DDB65C0}" type="doc">
+      <dgm:prSet loTypeId="urn:microsoft.com/office/officeart/2005/8/layout/list1" loCatId="list" qsTypeId="urn:microsoft.com/office/officeart/2005/8/quickstyle/simple4" qsCatId="simple" csTypeId="urn:microsoft.com/office/officeart/2005/8/colors/colorful2" csCatId="colorful" phldr="1"/>
+      <dgm:spPr/>
+      <dgm:t>
+        <a:bodyPr/>
+        <a:lstStyle/>
+        <a:p>
+          <a:endParaRPr lang="en-US"/>
+        </a:p>
+      </dgm:t>
+    </dgm:pt>
+    <dgm:pt modelId="{D766AB5B-C979-4174-9061-823D94E086C3}">
+      <dgm:prSet/>
+      <dgm:spPr/>
+      <dgm:t>
+        <a:bodyPr/>
+        <a:lstStyle/>
+        <a:p>
+          <a:r>
+            <a:rPr lang="en-US"/>
+            <a:t>Credentials</a:t>
+          </a:r>
+        </a:p>
+      </dgm:t>
+    </dgm:pt>
+    <dgm:pt modelId="{5ACC5C95-A6DF-48E6-AB55-B05C19BBC290}" type="parTrans" cxnId="{A0B3BD18-4741-4212-A14B-E9ED93C4CCF4}">
+      <dgm:prSet/>
+      <dgm:spPr/>
+      <dgm:t>
+        <a:bodyPr/>
+        <a:lstStyle/>
+        <a:p>
+          <a:endParaRPr lang="en-US"/>
+        </a:p>
+      </dgm:t>
+    </dgm:pt>
+    <dgm:pt modelId="{F2CF0C2D-B5F1-407D-9568-65F91776F047}" type="sibTrans" cxnId="{A0B3BD18-4741-4212-A14B-E9ED93C4CCF4}">
+      <dgm:prSet/>
+      <dgm:spPr/>
+      <dgm:t>
+        <a:bodyPr/>
+        <a:lstStyle/>
+        <a:p>
+          <a:endParaRPr lang="en-US"/>
+        </a:p>
+      </dgm:t>
+    </dgm:pt>
+    <dgm:pt modelId="{55C05AC3-1BCF-484E-BBBB-E501640BE75C}">
+      <dgm:prSet/>
+      <dgm:spPr/>
+      <dgm:t>
+        <a:bodyPr/>
+        <a:lstStyle/>
+        <a:p>
+          <a:r>
+            <a:rPr lang="en-US"/>
+            <a:t>C++, C#, Python*, Smalltalk</a:t>
+          </a:r>
+        </a:p>
+      </dgm:t>
+    </dgm:pt>
+    <dgm:pt modelId="{AD35F87B-2EF8-4AFB-A2D8-7D522821749D}" type="parTrans" cxnId="{CB352820-66C9-40E6-B10F-724215F05D4A}">
+      <dgm:prSet/>
+      <dgm:spPr/>
+      <dgm:t>
+        <a:bodyPr/>
+        <a:lstStyle/>
+        <a:p>
+          <a:endParaRPr lang="en-US"/>
+        </a:p>
+      </dgm:t>
+    </dgm:pt>
+    <dgm:pt modelId="{4C2CA528-124C-487B-926B-FC43B7520207}" type="sibTrans" cxnId="{CB352820-66C9-40E6-B10F-724215F05D4A}">
+      <dgm:prSet/>
+      <dgm:spPr/>
+      <dgm:t>
+        <a:bodyPr/>
+        <a:lstStyle/>
+        <a:p>
+          <a:endParaRPr lang="en-US"/>
+        </a:p>
+      </dgm:t>
+    </dgm:pt>
+    <dgm:pt modelId="{6C328FC2-1A34-42F9-82D3-2F73CE779ED7}">
+      <dgm:prSet/>
+      <dgm:spPr/>
+      <dgm:t>
+        <a:bodyPr/>
+        <a:lstStyle/>
+        <a:p>
+          <a:r>
+            <a:rPr lang="en-US" dirty="0"/>
+            <a:t>Format</a:t>
+          </a:r>
+        </a:p>
+      </dgm:t>
+    </dgm:pt>
+    <dgm:pt modelId="{0D9F12FD-B146-4273-BA50-2A035C7324C8}" type="parTrans" cxnId="{5CAE12E9-CEC7-4CDD-AAB6-F45BB0E167CF}">
+      <dgm:prSet/>
+      <dgm:spPr/>
+      <dgm:t>
+        <a:bodyPr/>
+        <a:lstStyle/>
+        <a:p>
+          <a:endParaRPr lang="en-US"/>
+        </a:p>
+      </dgm:t>
+    </dgm:pt>
+    <dgm:pt modelId="{0A72A100-9881-4303-92A5-702F14DA19EC}" type="sibTrans" cxnId="{5CAE12E9-CEC7-4CDD-AAB6-F45BB0E167CF}">
+      <dgm:prSet/>
+      <dgm:spPr/>
+      <dgm:t>
+        <a:bodyPr/>
+        <a:lstStyle/>
+        <a:p>
+          <a:endParaRPr lang="en-US"/>
+        </a:p>
+      </dgm:t>
+    </dgm:pt>
+    <dgm:pt modelId="{981C81BF-EDF3-41EE-ADA8-A04E4BD91274}">
+      <dgm:prSet/>
+      <dgm:spPr/>
+      <dgm:t>
+        <a:bodyPr/>
+        <a:lstStyle/>
+        <a:p>
+          <a:r>
+            <a:rPr lang="en-US" dirty="0"/>
+            <a:t>9 puzzles &amp; Rust solutions</a:t>
+          </a:r>
+        </a:p>
+      </dgm:t>
+    </dgm:pt>
+    <dgm:pt modelId="{FD94835C-B45B-43FB-B99F-FBE3CA4B8D3E}" type="parTrans" cxnId="{555CCE96-33D9-42C7-92CD-C3BC84722A04}">
+      <dgm:prSet/>
+      <dgm:spPr/>
+      <dgm:t>
+        <a:bodyPr/>
+        <a:lstStyle/>
+        <a:p>
+          <a:endParaRPr lang="en-US"/>
+        </a:p>
+      </dgm:t>
+    </dgm:pt>
+    <dgm:pt modelId="{F002C07E-89CF-4BA2-A269-1BA1E6775A64}" type="sibTrans" cxnId="{555CCE96-33D9-42C7-92CD-C3BC84722A04}">
+      <dgm:prSet/>
+      <dgm:spPr/>
+      <dgm:t>
+        <a:bodyPr/>
+        <a:lstStyle/>
+        <a:p>
+          <a:endParaRPr lang="en-US"/>
+        </a:p>
+      </dgm:t>
+    </dgm:pt>
+    <dgm:pt modelId="{DB7102A7-F2FB-415F-A5C5-79827EE459EC}">
+      <dgm:prSet/>
+      <dgm:spPr/>
+      <dgm:t>
+        <a:bodyPr/>
+        <a:lstStyle/>
+        <a:p>
+          <a:r>
+            <a:rPr lang="en-US"/>
+            <a:t>Inspired by real code</a:t>
+          </a:r>
+        </a:p>
+      </dgm:t>
+    </dgm:pt>
+    <dgm:pt modelId="{0E7EA328-862B-4BCD-91BA-F1DCE1FFBBED}" type="parTrans" cxnId="{E9AA5A3D-F3FC-4797-967E-91B5E6CA8283}">
+      <dgm:prSet/>
+      <dgm:spPr/>
+      <dgm:t>
+        <a:bodyPr/>
+        <a:lstStyle/>
+        <a:p>
+          <a:endParaRPr lang="en-US"/>
+        </a:p>
+      </dgm:t>
+    </dgm:pt>
+    <dgm:pt modelId="{34A77CD0-CA02-4260-AC46-FB00C56B0601}" type="sibTrans" cxnId="{E9AA5A3D-F3FC-4797-967E-91B5E6CA8283}">
+      <dgm:prSet/>
+      <dgm:spPr/>
+      <dgm:t>
+        <a:bodyPr/>
+        <a:lstStyle/>
+        <a:p>
+          <a:endParaRPr lang="en-US"/>
+        </a:p>
+      </dgm:t>
+    </dgm:pt>
+    <dgm:pt modelId="{CDA34ED7-A8BC-42B3-8B93-4E0D4F1F29C2}">
+      <dgm:prSet/>
+      <dgm:spPr/>
+      <dgm:t>
+        <a:bodyPr/>
+        <a:lstStyle/>
+        <a:p>
+          <a:r>
+            <a:rPr lang="en-US"/>
+            <a:t>Discussion welcome</a:t>
+          </a:r>
+        </a:p>
+      </dgm:t>
+    </dgm:pt>
+    <dgm:pt modelId="{EADD37F0-632C-4871-B38E-F33D585F9DE7}" type="parTrans" cxnId="{0CB6E117-F3B7-4287-B6C0-45A4635DD641}">
+      <dgm:prSet/>
+      <dgm:spPr/>
+      <dgm:t>
+        <a:bodyPr/>
+        <a:lstStyle/>
+        <a:p>
+          <a:endParaRPr lang="en-US"/>
+        </a:p>
+      </dgm:t>
+    </dgm:pt>
+    <dgm:pt modelId="{FB4A860B-F118-4BDF-88F2-C459684DCD54}" type="sibTrans" cxnId="{0CB6E117-F3B7-4287-B6C0-45A4635DD641}">
+      <dgm:prSet/>
+      <dgm:spPr/>
+      <dgm:t>
+        <a:bodyPr/>
+        <a:lstStyle/>
+        <a:p>
+          <a:endParaRPr lang="en-US"/>
+        </a:p>
+      </dgm:t>
+    </dgm:pt>
+    <dgm:pt modelId="{44176D0C-69DE-4F95-80D9-4751F7F41ABD}">
+      <dgm:prSet/>
+      <dgm:spPr/>
+      <dgm:t>
+        <a:bodyPr/>
+        <a:lstStyle/>
+        <a:p>
+          <a:r>
+            <a:rPr lang="en-US" dirty="0"/>
+            <a:t>Except: “Define object-oriented.”</a:t>
+          </a:r>
+        </a:p>
+      </dgm:t>
+    </dgm:pt>
+    <dgm:pt modelId="{C4CF17FD-7EAD-4D69-9237-8D98849DC83C}" type="parTrans" cxnId="{9BC683A1-D6B5-4F15-9BE5-CEB805816175}">
+      <dgm:prSet/>
+      <dgm:spPr/>
+      <dgm:t>
+        <a:bodyPr/>
+        <a:lstStyle/>
+        <a:p>
+          <a:endParaRPr lang="en-US"/>
+        </a:p>
+      </dgm:t>
+    </dgm:pt>
+    <dgm:pt modelId="{50DF03CE-40DE-4170-8D97-94B0C0132D64}" type="sibTrans" cxnId="{9BC683A1-D6B5-4F15-9BE5-CEB805816175}">
+      <dgm:prSet/>
+      <dgm:spPr/>
+      <dgm:t>
+        <a:bodyPr/>
+        <a:lstStyle/>
+        <a:p>
+          <a:endParaRPr lang="en-US"/>
+        </a:p>
+      </dgm:t>
+    </dgm:pt>
+    <dgm:pt modelId="{78129AF9-7A81-42CE-A74A-56FC9FFDA4BB}">
+      <dgm:prSet/>
+      <dgm:spPr/>
+      <dgm:t>
+        <a:bodyPr/>
+        <a:lstStyle/>
+        <a:p>
+          <a:r>
+            <a:rPr lang="en-US" dirty="0"/>
+            <a:t>Definitions</a:t>
+          </a:r>
+        </a:p>
+      </dgm:t>
+    </dgm:pt>
+    <dgm:pt modelId="{3EE31908-C7FA-4263-8F7B-4CB750768A18}" type="parTrans" cxnId="{0554D579-42FE-461D-AA05-46DE011C4641}">
+      <dgm:prSet/>
+      <dgm:spPr/>
+      <dgm:t>
+        <a:bodyPr/>
+        <a:lstStyle/>
+        <a:p>
+          <a:endParaRPr lang="en-US"/>
+        </a:p>
+      </dgm:t>
+    </dgm:pt>
+    <dgm:pt modelId="{074839CC-9624-406D-A34B-7082BA3E7FF6}" type="sibTrans" cxnId="{0554D579-42FE-461D-AA05-46DE011C4641}">
+      <dgm:prSet/>
+      <dgm:spPr/>
+      <dgm:t>
+        <a:bodyPr/>
+        <a:lstStyle/>
+        <a:p>
+          <a:endParaRPr lang="en-US"/>
+        </a:p>
+      </dgm:t>
+    </dgm:pt>
+    <dgm:pt modelId="{B3E91143-95B2-48EF-B5B7-386090017827}">
+      <dgm:prSet/>
+      <dgm:spPr/>
+      <dgm:t>
+        <a:bodyPr/>
+        <a:lstStyle/>
+        <a:p>
+          <a:r>
+            <a:rPr lang="en-US" dirty="0"/>
+            <a:t>Interface / Abstract Class ≈ Trait</a:t>
+          </a:r>
+        </a:p>
+      </dgm:t>
+    </dgm:pt>
+    <dgm:pt modelId="{691A4AB4-FE70-4F1B-94E3-167F553E89DF}" type="parTrans" cxnId="{677DD776-53BB-4A3D-A0D1-9A7216C45C37}">
+      <dgm:prSet/>
+      <dgm:spPr/>
+      <dgm:t>
+        <a:bodyPr/>
+        <a:lstStyle/>
+        <a:p>
+          <a:endParaRPr lang="en-US"/>
+        </a:p>
+      </dgm:t>
+    </dgm:pt>
+    <dgm:pt modelId="{D572C989-5E57-4B4C-A661-C061857C7E74}" type="sibTrans" cxnId="{677DD776-53BB-4A3D-A0D1-9A7216C45C37}">
+      <dgm:prSet/>
+      <dgm:spPr/>
+      <dgm:t>
+        <a:bodyPr/>
+        <a:lstStyle/>
+        <a:p>
+          <a:endParaRPr lang="en-US"/>
+        </a:p>
+      </dgm:t>
+    </dgm:pt>
+    <dgm:pt modelId="{5DBB7D7A-3374-4756-92C3-DE8DA9A994CC}">
+      <dgm:prSet/>
+      <dgm:spPr/>
+      <dgm:t>
+        <a:bodyPr/>
+        <a:lstStyle/>
+        <a:p>
+          <a:r>
+            <a:rPr lang="en-US" dirty="0"/>
+            <a:t>	A contract or role. You don’t create one directly.</a:t>
+          </a:r>
+        </a:p>
+      </dgm:t>
+    </dgm:pt>
+    <dgm:pt modelId="{FDEA574A-3F2C-4969-8FFC-4936DA53F709}" type="parTrans" cxnId="{4DF4D390-0F1D-452A-A703-A13B0BCFA714}">
+      <dgm:prSet/>
+      <dgm:spPr/>
+      <dgm:t>
+        <a:bodyPr/>
+        <a:lstStyle/>
+        <a:p>
+          <a:endParaRPr lang="en-US"/>
+        </a:p>
+      </dgm:t>
+    </dgm:pt>
+    <dgm:pt modelId="{7E35DDFE-60D4-4701-BBAF-C93BF767B868}" type="sibTrans" cxnId="{4DF4D390-0F1D-452A-A703-A13B0BCFA714}">
+      <dgm:prSet/>
+      <dgm:spPr/>
+      <dgm:t>
+        <a:bodyPr/>
+        <a:lstStyle/>
+        <a:p>
+          <a:endParaRPr lang="en-US"/>
+        </a:p>
+      </dgm:t>
+    </dgm:pt>
+    <dgm:pt modelId="{46490352-71BD-4BE6-B4A1-D61D4C673918}">
+      <dgm:prSet/>
+      <dgm:spPr/>
+      <dgm:t>
+        <a:bodyPr/>
+        <a:lstStyle/>
+        <a:p>
+          <a:r>
+            <a:rPr lang="en-US" dirty="0"/>
+            <a:t>Concrete Class ≈ Struct / Enum</a:t>
+          </a:r>
+        </a:p>
+      </dgm:t>
+    </dgm:pt>
+    <dgm:pt modelId="{404347C8-9BEC-42EF-90FC-E977F25F83BC}" type="parTrans" cxnId="{4217C40D-117F-4904-8265-54F7B3B05B18}">
+      <dgm:prSet/>
+      <dgm:spPr/>
+      <dgm:t>
+        <a:bodyPr/>
+        <a:lstStyle/>
+        <a:p>
+          <a:endParaRPr lang="en-US"/>
+        </a:p>
+      </dgm:t>
+    </dgm:pt>
+    <dgm:pt modelId="{64EF5EF0-5A37-45AD-88DC-4A4152468819}" type="sibTrans" cxnId="{4217C40D-117F-4904-8265-54F7B3B05B18}">
+      <dgm:prSet/>
+      <dgm:spPr/>
+      <dgm:t>
+        <a:bodyPr/>
+        <a:lstStyle/>
+        <a:p>
+          <a:endParaRPr lang="en-US"/>
+        </a:p>
+      </dgm:t>
+    </dgm:pt>
+    <dgm:pt modelId="{1637EDEE-E920-4745-B3FF-03D47F9D328B}">
+      <dgm:prSet/>
+      <dgm:spPr/>
+      <dgm:t>
+        <a:bodyPr/>
+        <a:lstStyle/>
+        <a:p>
+          <a:r>
+            <a:rPr lang="en-US" dirty="0"/>
+            <a:t>	 A concrete type. You can create values of it.</a:t>
+          </a:r>
+        </a:p>
+      </dgm:t>
+    </dgm:pt>
+    <dgm:pt modelId="{D862AAB4-B444-43DF-9778-0A2A092E5212}" type="parTrans" cxnId="{46FDDBFA-34FC-4D10-AEE0-567DD147A0A0}">
+      <dgm:prSet/>
+      <dgm:spPr/>
+      <dgm:t>
+        <a:bodyPr/>
+        <a:lstStyle/>
+        <a:p>
+          <a:endParaRPr lang="en-US"/>
+        </a:p>
+      </dgm:t>
+    </dgm:pt>
+    <dgm:pt modelId="{DFA5D3AF-3AB6-41A2-B63D-55D1F44DE774}" type="sibTrans" cxnId="{46FDDBFA-34FC-4D10-AEE0-567DD147A0A0}">
+      <dgm:prSet/>
+      <dgm:spPr/>
+      <dgm:t>
+        <a:bodyPr/>
+        <a:lstStyle/>
+        <a:p>
+          <a:endParaRPr lang="en-US"/>
+        </a:p>
+      </dgm:t>
+    </dgm:pt>
+    <dgm:pt modelId="{C035189C-4939-4DC9-9EFE-B91970AEE9C2}" type="pres">
+      <dgm:prSet presAssocID="{ED61D1D3-01E2-4E7B-8ACC-C56F3DDB65C0}" presName="linear" presStyleCnt="0">
+        <dgm:presLayoutVars>
+          <dgm:dir/>
+          <dgm:animLvl val="lvl"/>
+          <dgm:resizeHandles val="exact"/>
+        </dgm:presLayoutVars>
+      </dgm:prSet>
+      <dgm:spPr/>
+    </dgm:pt>
+    <dgm:pt modelId="{AB20513D-8E07-45D2-937A-94F30AA67F12}" type="pres">
+      <dgm:prSet presAssocID="{78129AF9-7A81-42CE-A74A-56FC9FFDA4BB}" presName="parentLin" presStyleCnt="0"/>
+      <dgm:spPr/>
+    </dgm:pt>
+    <dgm:pt modelId="{A720C700-8A30-466A-A2F5-EF5A80512AD0}" type="pres">
+      <dgm:prSet presAssocID="{78129AF9-7A81-42CE-A74A-56FC9FFDA4BB}" presName="parentLeftMargin" presStyleLbl="node1" presStyleIdx="0" presStyleCnt="4"/>
+      <dgm:spPr/>
+    </dgm:pt>
+    <dgm:pt modelId="{DC17AE3D-7610-4734-B7B2-83F44324CE00}" type="pres">
+      <dgm:prSet presAssocID="{78129AF9-7A81-42CE-A74A-56FC9FFDA4BB}" presName="parentText" presStyleLbl="node1" presStyleIdx="0" presStyleCnt="4">
+        <dgm:presLayoutVars>
+          <dgm:chMax val="0"/>
+          <dgm:bulletEnabled val="1"/>
+        </dgm:presLayoutVars>
+      </dgm:prSet>
+      <dgm:spPr/>
+    </dgm:pt>
+    <dgm:pt modelId="{E948C77F-FDC1-4EC9-8464-6598583CE069}" type="pres">
+      <dgm:prSet presAssocID="{78129AF9-7A81-42CE-A74A-56FC9FFDA4BB}" presName="negativeSpace" presStyleCnt="0"/>
+      <dgm:spPr/>
+    </dgm:pt>
+    <dgm:pt modelId="{FE7AE8AE-8186-47B3-AA99-1F3E54EA2221}" type="pres">
+      <dgm:prSet presAssocID="{78129AF9-7A81-42CE-A74A-56FC9FFDA4BB}" presName="childText" presStyleLbl="conFgAcc1" presStyleIdx="0" presStyleCnt="4">
+        <dgm:presLayoutVars>
+          <dgm:bulletEnabled val="1"/>
+        </dgm:presLayoutVars>
+      </dgm:prSet>
+      <dgm:spPr/>
+    </dgm:pt>
+    <dgm:pt modelId="{20FB0953-5D5C-4952-A032-22EDBD7A6DFB}" type="pres">
+      <dgm:prSet presAssocID="{074839CC-9624-406D-A34B-7082BA3E7FF6}" presName="spaceBetweenRectangles" presStyleCnt="0"/>
+      <dgm:spPr/>
+    </dgm:pt>
+    <dgm:pt modelId="{0115671A-31D3-4B9C-92D3-2266161AA511}" type="pres">
+      <dgm:prSet presAssocID="{D766AB5B-C979-4174-9061-823D94E086C3}" presName="parentLin" presStyleCnt="0"/>
+      <dgm:spPr/>
+    </dgm:pt>
+    <dgm:pt modelId="{1649CEA3-A9C5-4145-BD84-B9F730149A53}" type="pres">
+      <dgm:prSet presAssocID="{D766AB5B-C979-4174-9061-823D94E086C3}" presName="parentLeftMargin" presStyleLbl="node1" presStyleIdx="0" presStyleCnt="4"/>
+      <dgm:spPr/>
+    </dgm:pt>
+    <dgm:pt modelId="{E4224F60-4497-49F0-8A2E-41D9725FE66D}" type="pres">
+      <dgm:prSet presAssocID="{D766AB5B-C979-4174-9061-823D94E086C3}" presName="parentText" presStyleLbl="node1" presStyleIdx="1" presStyleCnt="4">
+        <dgm:presLayoutVars>
+          <dgm:chMax val="0"/>
+          <dgm:bulletEnabled val="1"/>
+        </dgm:presLayoutVars>
+      </dgm:prSet>
+      <dgm:spPr/>
+    </dgm:pt>
+    <dgm:pt modelId="{E48F0994-6A6E-4CB4-85FD-35F8E95819F1}" type="pres">
+      <dgm:prSet presAssocID="{D766AB5B-C979-4174-9061-823D94E086C3}" presName="negativeSpace" presStyleCnt="0"/>
+      <dgm:spPr/>
+    </dgm:pt>
+    <dgm:pt modelId="{D1A2C43F-1895-4E58-8C0A-22F41A1CD3E5}" type="pres">
+      <dgm:prSet presAssocID="{D766AB5B-C979-4174-9061-823D94E086C3}" presName="childText" presStyleLbl="conFgAcc1" presStyleIdx="1" presStyleCnt="4">
+        <dgm:presLayoutVars>
+          <dgm:bulletEnabled val="1"/>
+        </dgm:presLayoutVars>
+      </dgm:prSet>
+      <dgm:spPr/>
+    </dgm:pt>
+    <dgm:pt modelId="{BBF67130-EA33-44B5-A99B-5AB40DD47F69}" type="pres">
+      <dgm:prSet presAssocID="{F2CF0C2D-B5F1-407D-9568-65F91776F047}" presName="spaceBetweenRectangles" presStyleCnt="0"/>
+      <dgm:spPr/>
+    </dgm:pt>
+    <dgm:pt modelId="{888A2708-C4BA-4378-9829-E4D3DB14A9E3}" type="pres">
+      <dgm:prSet presAssocID="{6C328FC2-1A34-42F9-82D3-2F73CE779ED7}" presName="parentLin" presStyleCnt="0"/>
+      <dgm:spPr/>
+    </dgm:pt>
+    <dgm:pt modelId="{83166D49-0240-467E-9A1C-BF5208F9F4C6}" type="pres">
+      <dgm:prSet presAssocID="{6C328FC2-1A34-42F9-82D3-2F73CE779ED7}" presName="parentLeftMargin" presStyleLbl="node1" presStyleIdx="1" presStyleCnt="4"/>
+      <dgm:spPr/>
+    </dgm:pt>
+    <dgm:pt modelId="{A8242364-E586-4CC1-B19E-CA34A4E3326F}" type="pres">
+      <dgm:prSet presAssocID="{6C328FC2-1A34-42F9-82D3-2F73CE779ED7}" presName="parentText" presStyleLbl="node1" presStyleIdx="2" presStyleCnt="4">
+        <dgm:presLayoutVars>
+          <dgm:chMax val="0"/>
+          <dgm:bulletEnabled val="1"/>
+        </dgm:presLayoutVars>
+      </dgm:prSet>
+      <dgm:spPr/>
+    </dgm:pt>
+    <dgm:pt modelId="{25CCFDCF-157C-48D4-9ED3-9B2C67DC909B}" type="pres">
+      <dgm:prSet presAssocID="{6C328FC2-1A34-42F9-82D3-2F73CE779ED7}" presName="negativeSpace" presStyleCnt="0"/>
+      <dgm:spPr/>
+    </dgm:pt>
+    <dgm:pt modelId="{C042A0AB-56D7-4051-8CAA-02D8D22FBF34}" type="pres">
+      <dgm:prSet presAssocID="{6C328FC2-1A34-42F9-82D3-2F73CE779ED7}" presName="childText" presStyleLbl="conFgAcc1" presStyleIdx="2" presStyleCnt="4">
+        <dgm:presLayoutVars>
+          <dgm:bulletEnabled val="1"/>
+        </dgm:presLayoutVars>
+      </dgm:prSet>
+      <dgm:spPr/>
+    </dgm:pt>
+    <dgm:pt modelId="{7B2443EB-D7B3-4758-A706-68F854CEEF21}" type="pres">
+      <dgm:prSet presAssocID="{0A72A100-9881-4303-92A5-702F14DA19EC}" presName="spaceBetweenRectangles" presStyleCnt="0"/>
+      <dgm:spPr/>
+    </dgm:pt>
+    <dgm:pt modelId="{BC554B0F-2E42-40D3-843C-337AA36FB237}" type="pres">
+      <dgm:prSet presAssocID="{CDA34ED7-A8BC-42B3-8B93-4E0D4F1F29C2}" presName="parentLin" presStyleCnt="0"/>
+      <dgm:spPr/>
+    </dgm:pt>
+    <dgm:pt modelId="{832EAC89-0380-4E83-8BDA-34DE30069F1F}" type="pres">
+      <dgm:prSet presAssocID="{CDA34ED7-A8BC-42B3-8B93-4E0D4F1F29C2}" presName="parentLeftMargin" presStyleLbl="node1" presStyleIdx="2" presStyleCnt="4"/>
+      <dgm:spPr/>
+    </dgm:pt>
+    <dgm:pt modelId="{E0909B83-00BB-477F-8519-6D88D24AED2F}" type="pres">
+      <dgm:prSet presAssocID="{CDA34ED7-A8BC-42B3-8B93-4E0D4F1F29C2}" presName="parentText" presStyleLbl="node1" presStyleIdx="3" presStyleCnt="4">
+        <dgm:presLayoutVars>
+          <dgm:chMax val="0"/>
+          <dgm:bulletEnabled val="1"/>
+        </dgm:presLayoutVars>
+      </dgm:prSet>
+      <dgm:spPr/>
+    </dgm:pt>
+    <dgm:pt modelId="{90F10557-09BD-4E79-AE08-7A8A172C38DD}" type="pres">
+      <dgm:prSet presAssocID="{CDA34ED7-A8BC-42B3-8B93-4E0D4F1F29C2}" presName="negativeSpace" presStyleCnt="0"/>
+      <dgm:spPr/>
+    </dgm:pt>
+    <dgm:pt modelId="{F1552565-5149-4042-84F4-29E24D064AC6}" type="pres">
+      <dgm:prSet presAssocID="{CDA34ED7-A8BC-42B3-8B93-4E0D4F1F29C2}" presName="childText" presStyleLbl="conFgAcc1" presStyleIdx="3" presStyleCnt="4">
+        <dgm:presLayoutVars>
+          <dgm:bulletEnabled val="1"/>
+        </dgm:presLayoutVars>
+      </dgm:prSet>
+      <dgm:spPr/>
+    </dgm:pt>
+  </dgm:ptLst>
+  <dgm:cxnLst>
+    <dgm:cxn modelId="{768C5202-108D-4468-A46A-1B9BA0A05E55}" type="presOf" srcId="{981C81BF-EDF3-41EE-ADA8-A04E4BD91274}" destId="{C042A0AB-56D7-4051-8CAA-02D8D22FBF34}" srcOrd="0" destOrd="0" presId="urn:microsoft.com/office/officeart/2005/8/layout/list1"/>
+    <dgm:cxn modelId="{4217C40D-117F-4904-8265-54F7B3B05B18}" srcId="{78129AF9-7A81-42CE-A74A-56FC9FFDA4BB}" destId="{46490352-71BD-4BE6-B4A1-D61D4C673918}" srcOrd="1" destOrd="0" parTransId="{404347C8-9BEC-42EF-90FC-E977F25F83BC}" sibTransId="{64EF5EF0-5A37-45AD-88DC-4A4152468819}"/>
+    <dgm:cxn modelId="{7E2AE414-37E7-436F-B03B-93492CBEE7A4}" type="presOf" srcId="{6C328FC2-1A34-42F9-82D3-2F73CE779ED7}" destId="{83166D49-0240-467E-9A1C-BF5208F9F4C6}" srcOrd="0" destOrd="0" presId="urn:microsoft.com/office/officeart/2005/8/layout/list1"/>
+    <dgm:cxn modelId="{0CB6E117-F3B7-4287-B6C0-45A4635DD641}" srcId="{ED61D1D3-01E2-4E7B-8ACC-C56F3DDB65C0}" destId="{CDA34ED7-A8BC-42B3-8B93-4E0D4F1F29C2}" srcOrd="3" destOrd="0" parTransId="{EADD37F0-632C-4871-B38E-F33D585F9DE7}" sibTransId="{FB4A860B-F118-4BDF-88F2-C459684DCD54}"/>
+    <dgm:cxn modelId="{A0B3BD18-4741-4212-A14B-E9ED93C4CCF4}" srcId="{ED61D1D3-01E2-4E7B-8ACC-C56F3DDB65C0}" destId="{D766AB5B-C979-4174-9061-823D94E086C3}" srcOrd="1" destOrd="0" parTransId="{5ACC5C95-A6DF-48E6-AB55-B05C19BBC290}" sibTransId="{F2CF0C2D-B5F1-407D-9568-65F91776F047}"/>
+    <dgm:cxn modelId="{CB352820-66C9-40E6-B10F-724215F05D4A}" srcId="{D766AB5B-C979-4174-9061-823D94E086C3}" destId="{55C05AC3-1BCF-484E-BBBB-E501640BE75C}" srcOrd="0" destOrd="0" parTransId="{AD35F87B-2EF8-4AFB-A2D8-7D522821749D}" sibTransId="{4C2CA528-124C-487B-926B-FC43B7520207}"/>
+    <dgm:cxn modelId="{D83F802B-AC07-4955-A9E4-79B680BE8926}" type="presOf" srcId="{44176D0C-69DE-4F95-80D9-4751F7F41ABD}" destId="{F1552565-5149-4042-84F4-29E24D064AC6}" srcOrd="0" destOrd="0" presId="urn:microsoft.com/office/officeart/2005/8/layout/list1"/>
+    <dgm:cxn modelId="{2741172E-255F-4BA3-A4ED-34CF948FE4E4}" type="presOf" srcId="{D766AB5B-C979-4174-9061-823D94E086C3}" destId="{E4224F60-4497-49F0-8A2E-41D9725FE66D}" srcOrd="1" destOrd="0" presId="urn:microsoft.com/office/officeart/2005/8/layout/list1"/>
+    <dgm:cxn modelId="{3DA7612F-2816-4B83-A25B-3509F166809E}" type="presOf" srcId="{1637EDEE-E920-4745-B3FF-03D47F9D328B}" destId="{FE7AE8AE-8186-47B3-AA99-1F3E54EA2221}" srcOrd="0" destOrd="3" presId="urn:microsoft.com/office/officeart/2005/8/layout/list1"/>
+    <dgm:cxn modelId="{6AF63334-4479-4B3C-923A-B4BB66C01549}" type="presOf" srcId="{CDA34ED7-A8BC-42B3-8B93-4E0D4F1F29C2}" destId="{832EAC89-0380-4E83-8BDA-34DE30069F1F}" srcOrd="0" destOrd="0" presId="urn:microsoft.com/office/officeart/2005/8/layout/list1"/>
+    <dgm:cxn modelId="{56220138-ACC3-4278-BCE6-329775A69182}" type="presOf" srcId="{DB7102A7-F2FB-415F-A5C5-79827EE459EC}" destId="{C042A0AB-56D7-4051-8CAA-02D8D22FBF34}" srcOrd="0" destOrd="1" presId="urn:microsoft.com/office/officeart/2005/8/layout/list1"/>
+    <dgm:cxn modelId="{E9AA5A3D-F3FC-4797-967E-91B5E6CA8283}" srcId="{6C328FC2-1A34-42F9-82D3-2F73CE779ED7}" destId="{DB7102A7-F2FB-415F-A5C5-79827EE459EC}" srcOrd="1" destOrd="0" parTransId="{0E7EA328-862B-4BCD-91BA-F1DCE1FFBBED}" sibTransId="{34A77CD0-CA02-4260-AC46-FB00C56B0601}"/>
+    <dgm:cxn modelId="{EBA30461-D8DF-402C-AEDC-9860F2314259}" type="presOf" srcId="{55C05AC3-1BCF-484E-BBBB-E501640BE75C}" destId="{D1A2C43F-1895-4E58-8C0A-22F41A1CD3E5}" srcOrd="0" destOrd="0" presId="urn:microsoft.com/office/officeart/2005/8/layout/list1"/>
+    <dgm:cxn modelId="{87823154-FFBD-41AB-9B01-292821491687}" type="presOf" srcId="{ED61D1D3-01E2-4E7B-8ACC-C56F3DDB65C0}" destId="{C035189C-4939-4DC9-9EFE-B91970AEE9C2}" srcOrd="0" destOrd="0" presId="urn:microsoft.com/office/officeart/2005/8/layout/list1"/>
+    <dgm:cxn modelId="{677DD776-53BB-4A3D-A0D1-9A7216C45C37}" srcId="{78129AF9-7A81-42CE-A74A-56FC9FFDA4BB}" destId="{B3E91143-95B2-48EF-B5B7-386090017827}" srcOrd="0" destOrd="0" parTransId="{691A4AB4-FE70-4F1B-94E3-167F553E89DF}" sibTransId="{D572C989-5E57-4B4C-A661-C061857C7E74}"/>
+    <dgm:cxn modelId="{8962E558-3F7B-4EF6-86AA-712CB1638CC8}" type="presOf" srcId="{78129AF9-7A81-42CE-A74A-56FC9FFDA4BB}" destId="{A720C700-8A30-466A-A2F5-EF5A80512AD0}" srcOrd="0" destOrd="0" presId="urn:microsoft.com/office/officeart/2005/8/layout/list1"/>
+    <dgm:cxn modelId="{0554D579-42FE-461D-AA05-46DE011C4641}" srcId="{ED61D1D3-01E2-4E7B-8ACC-C56F3DDB65C0}" destId="{78129AF9-7A81-42CE-A74A-56FC9FFDA4BB}" srcOrd="0" destOrd="0" parTransId="{3EE31908-C7FA-4263-8F7B-4CB750768A18}" sibTransId="{074839CC-9624-406D-A34B-7082BA3E7FF6}"/>
+    <dgm:cxn modelId="{ED4D8A83-698E-41A7-852E-2A9525CAEDE5}" type="presOf" srcId="{78129AF9-7A81-42CE-A74A-56FC9FFDA4BB}" destId="{DC17AE3D-7610-4734-B7B2-83F44324CE00}" srcOrd="1" destOrd="0" presId="urn:microsoft.com/office/officeart/2005/8/layout/list1"/>
+    <dgm:cxn modelId="{8857EE8A-6DFC-4BEF-8D7D-45F6A810872F}" type="presOf" srcId="{B3E91143-95B2-48EF-B5B7-386090017827}" destId="{FE7AE8AE-8186-47B3-AA99-1F3E54EA2221}" srcOrd="0" destOrd="0" presId="urn:microsoft.com/office/officeart/2005/8/layout/list1"/>
+    <dgm:cxn modelId="{4DF4D390-0F1D-452A-A703-A13B0BCFA714}" srcId="{B3E91143-95B2-48EF-B5B7-386090017827}" destId="{5DBB7D7A-3374-4756-92C3-DE8DA9A994CC}" srcOrd="0" destOrd="0" parTransId="{FDEA574A-3F2C-4969-8FFC-4936DA53F709}" sibTransId="{7E35DDFE-60D4-4701-BBAF-C93BF767B868}"/>
+    <dgm:cxn modelId="{555CCE96-33D9-42C7-92CD-C3BC84722A04}" srcId="{6C328FC2-1A34-42F9-82D3-2F73CE779ED7}" destId="{981C81BF-EDF3-41EE-ADA8-A04E4BD91274}" srcOrd="0" destOrd="0" parTransId="{FD94835C-B45B-43FB-B99F-FBE3CA4B8D3E}" sibTransId="{F002C07E-89CF-4BA2-A269-1BA1E6775A64}"/>
+    <dgm:cxn modelId="{4AE6659E-1151-4758-AD91-F0FC69A30632}" type="presOf" srcId="{6C328FC2-1A34-42F9-82D3-2F73CE779ED7}" destId="{A8242364-E586-4CC1-B19E-CA34A4E3326F}" srcOrd="1" destOrd="0" presId="urn:microsoft.com/office/officeart/2005/8/layout/list1"/>
+    <dgm:cxn modelId="{EA6B3B9F-F593-4A59-837B-0C0FB35671C5}" type="presOf" srcId="{CDA34ED7-A8BC-42B3-8B93-4E0D4F1F29C2}" destId="{E0909B83-00BB-477F-8519-6D88D24AED2F}" srcOrd="1" destOrd="0" presId="urn:microsoft.com/office/officeart/2005/8/layout/list1"/>
+    <dgm:cxn modelId="{9BC683A1-D6B5-4F15-9BE5-CEB805816175}" srcId="{CDA34ED7-A8BC-42B3-8B93-4E0D4F1F29C2}" destId="{44176D0C-69DE-4F95-80D9-4751F7F41ABD}" srcOrd="0" destOrd="0" parTransId="{C4CF17FD-7EAD-4D69-9237-8D98849DC83C}" sibTransId="{50DF03CE-40DE-4170-8D97-94B0C0132D64}"/>
+    <dgm:cxn modelId="{8FF0AFC8-7EDD-4FB8-BB62-11CB3D5E0FD7}" type="presOf" srcId="{46490352-71BD-4BE6-B4A1-D61D4C673918}" destId="{FE7AE8AE-8186-47B3-AA99-1F3E54EA2221}" srcOrd="0" destOrd="2" presId="urn:microsoft.com/office/officeart/2005/8/layout/list1"/>
+    <dgm:cxn modelId="{9DFA00DF-2509-4AE9-B0A2-134E5FF90F4F}" type="presOf" srcId="{5DBB7D7A-3374-4756-92C3-DE8DA9A994CC}" destId="{FE7AE8AE-8186-47B3-AA99-1F3E54EA2221}" srcOrd="0" destOrd="1" presId="urn:microsoft.com/office/officeart/2005/8/layout/list1"/>
+    <dgm:cxn modelId="{5CAE12E9-CEC7-4CDD-AAB6-F45BB0E167CF}" srcId="{ED61D1D3-01E2-4E7B-8ACC-C56F3DDB65C0}" destId="{6C328FC2-1A34-42F9-82D3-2F73CE779ED7}" srcOrd="2" destOrd="0" parTransId="{0D9F12FD-B146-4273-BA50-2A035C7324C8}" sibTransId="{0A72A100-9881-4303-92A5-702F14DA19EC}"/>
+    <dgm:cxn modelId="{CAEDE0ED-2E34-405D-A288-ED808A556486}" type="presOf" srcId="{D766AB5B-C979-4174-9061-823D94E086C3}" destId="{1649CEA3-A9C5-4145-BD84-B9F730149A53}" srcOrd="0" destOrd="0" presId="urn:microsoft.com/office/officeart/2005/8/layout/list1"/>
+    <dgm:cxn modelId="{46FDDBFA-34FC-4D10-AEE0-567DD147A0A0}" srcId="{46490352-71BD-4BE6-B4A1-D61D4C673918}" destId="{1637EDEE-E920-4745-B3FF-03D47F9D328B}" srcOrd="0" destOrd="0" parTransId="{D862AAB4-B444-43DF-9778-0A2A092E5212}" sibTransId="{DFA5D3AF-3AB6-41A2-B63D-55D1F44DE774}"/>
+    <dgm:cxn modelId="{6A0E8B30-6973-4F55-8847-1C9D2E383B7A}" type="presParOf" srcId="{C035189C-4939-4DC9-9EFE-B91970AEE9C2}" destId="{AB20513D-8E07-45D2-937A-94F30AA67F12}" srcOrd="0" destOrd="0" presId="urn:microsoft.com/office/officeart/2005/8/layout/list1"/>
+    <dgm:cxn modelId="{9B71133A-B3A5-4276-87DA-1460AA9C5798}" type="presParOf" srcId="{AB20513D-8E07-45D2-937A-94F30AA67F12}" destId="{A720C700-8A30-466A-A2F5-EF5A80512AD0}" srcOrd="0" destOrd="0" presId="urn:microsoft.com/office/officeart/2005/8/layout/list1"/>
+    <dgm:cxn modelId="{DC0282AF-462D-4A04-AD5D-132D9AB28FD7}" type="presParOf" srcId="{AB20513D-8E07-45D2-937A-94F30AA67F12}" destId="{DC17AE3D-7610-4734-B7B2-83F44324CE00}" srcOrd="1" destOrd="0" presId="urn:microsoft.com/office/officeart/2005/8/layout/list1"/>
+    <dgm:cxn modelId="{92D8CDB0-1D2A-48EF-B916-5484582007D4}" type="presParOf" srcId="{C035189C-4939-4DC9-9EFE-B91970AEE9C2}" destId="{E948C77F-FDC1-4EC9-8464-6598583CE069}" srcOrd="1" destOrd="0" presId="urn:microsoft.com/office/officeart/2005/8/layout/list1"/>
+    <dgm:cxn modelId="{EB09DE66-FF5E-4FDE-97DB-06EEBE2498FA}" type="presParOf" srcId="{C035189C-4939-4DC9-9EFE-B91970AEE9C2}" destId="{FE7AE8AE-8186-47B3-AA99-1F3E54EA2221}" srcOrd="2" destOrd="0" presId="urn:microsoft.com/office/officeart/2005/8/layout/list1"/>
+    <dgm:cxn modelId="{2EA9C615-06F5-4A52-B6F2-DBA67F2AA6A8}" type="presParOf" srcId="{C035189C-4939-4DC9-9EFE-B91970AEE9C2}" destId="{20FB0953-5D5C-4952-A032-22EDBD7A6DFB}" srcOrd="3" destOrd="0" presId="urn:microsoft.com/office/officeart/2005/8/layout/list1"/>
+    <dgm:cxn modelId="{C234E7C8-AE8E-4F7B-94AC-9135FFF2FAF9}" type="presParOf" srcId="{C035189C-4939-4DC9-9EFE-B91970AEE9C2}" destId="{0115671A-31D3-4B9C-92D3-2266161AA511}" srcOrd="4" destOrd="0" presId="urn:microsoft.com/office/officeart/2005/8/layout/list1"/>
+    <dgm:cxn modelId="{8E768F93-C7E7-469A-B208-3DD3E8A5F9C5}" type="presParOf" srcId="{0115671A-31D3-4B9C-92D3-2266161AA511}" destId="{1649CEA3-A9C5-4145-BD84-B9F730149A53}" srcOrd="0" destOrd="0" presId="urn:microsoft.com/office/officeart/2005/8/layout/list1"/>
+    <dgm:cxn modelId="{64689FE8-87ED-4A2A-BCA0-C4059000FBB8}" type="presParOf" srcId="{0115671A-31D3-4B9C-92D3-2266161AA511}" destId="{E4224F60-4497-49F0-8A2E-41D9725FE66D}" srcOrd="1" destOrd="0" presId="urn:microsoft.com/office/officeart/2005/8/layout/list1"/>
+    <dgm:cxn modelId="{CAED2258-679D-4695-9E24-D3E48DCC47BA}" type="presParOf" srcId="{C035189C-4939-4DC9-9EFE-B91970AEE9C2}" destId="{E48F0994-6A6E-4CB4-85FD-35F8E95819F1}" srcOrd="5" destOrd="0" presId="urn:microsoft.com/office/officeart/2005/8/layout/list1"/>
+    <dgm:cxn modelId="{410E92EE-0048-45EE-A72A-13DF3085148D}" type="presParOf" srcId="{C035189C-4939-4DC9-9EFE-B91970AEE9C2}" destId="{D1A2C43F-1895-4E58-8C0A-22F41A1CD3E5}" srcOrd="6" destOrd="0" presId="urn:microsoft.com/office/officeart/2005/8/layout/list1"/>
+    <dgm:cxn modelId="{CA38EBB0-D1FD-4565-947A-8E3947C39B74}" type="presParOf" srcId="{C035189C-4939-4DC9-9EFE-B91970AEE9C2}" destId="{BBF67130-EA33-44B5-A99B-5AB40DD47F69}" srcOrd="7" destOrd="0" presId="urn:microsoft.com/office/officeart/2005/8/layout/list1"/>
+    <dgm:cxn modelId="{06734835-E8CE-41CD-BE92-340D7F3D319A}" type="presParOf" srcId="{C035189C-4939-4DC9-9EFE-B91970AEE9C2}" destId="{888A2708-C4BA-4378-9829-E4D3DB14A9E3}" srcOrd="8" destOrd="0" presId="urn:microsoft.com/office/officeart/2005/8/layout/list1"/>
+    <dgm:cxn modelId="{A3077AB0-B190-4F4B-9DED-7B6936F76EF5}" type="presParOf" srcId="{888A2708-C4BA-4378-9829-E4D3DB14A9E3}" destId="{83166D49-0240-467E-9A1C-BF5208F9F4C6}" srcOrd="0" destOrd="0" presId="urn:microsoft.com/office/officeart/2005/8/layout/list1"/>
+    <dgm:cxn modelId="{31C1A652-9C2E-4A89-A93D-6C47192CA771}" type="presParOf" srcId="{888A2708-C4BA-4378-9829-E4D3DB14A9E3}" destId="{A8242364-E586-4CC1-B19E-CA34A4E3326F}" srcOrd="1" destOrd="0" presId="urn:microsoft.com/office/officeart/2005/8/layout/list1"/>
+    <dgm:cxn modelId="{6E949765-FB2D-4BD1-9098-66F6E1502055}" type="presParOf" srcId="{C035189C-4939-4DC9-9EFE-B91970AEE9C2}" destId="{25CCFDCF-157C-48D4-9ED3-9B2C67DC909B}" srcOrd="9" destOrd="0" presId="urn:microsoft.com/office/officeart/2005/8/layout/list1"/>
+    <dgm:cxn modelId="{D7BB233B-3EBD-4E67-9FA6-1E239D2E77D5}" type="presParOf" srcId="{C035189C-4939-4DC9-9EFE-B91970AEE9C2}" destId="{C042A0AB-56D7-4051-8CAA-02D8D22FBF34}" srcOrd="10" destOrd="0" presId="urn:microsoft.com/office/officeart/2005/8/layout/list1"/>
+    <dgm:cxn modelId="{FF9A74CD-F362-40EC-8F3D-B5B062B4F35B}" type="presParOf" srcId="{C035189C-4939-4DC9-9EFE-B91970AEE9C2}" destId="{7B2443EB-D7B3-4758-A706-68F854CEEF21}" srcOrd="11" destOrd="0" presId="urn:microsoft.com/office/officeart/2005/8/layout/list1"/>
+    <dgm:cxn modelId="{87D8054A-3568-42A5-A26F-9B4A4EB419EC}" type="presParOf" srcId="{C035189C-4939-4DC9-9EFE-B91970AEE9C2}" destId="{BC554B0F-2E42-40D3-843C-337AA36FB237}" srcOrd="12" destOrd="0" presId="urn:microsoft.com/office/officeart/2005/8/layout/list1"/>
+    <dgm:cxn modelId="{CF227B4B-1533-4D3B-9B6E-BC4B9E1B8538}" type="presParOf" srcId="{BC554B0F-2E42-40D3-843C-337AA36FB237}" destId="{832EAC89-0380-4E83-8BDA-34DE30069F1F}" srcOrd="0" destOrd="0" presId="urn:microsoft.com/office/officeart/2005/8/layout/list1"/>
+    <dgm:cxn modelId="{EF204050-6E3F-4C0E-A1BE-5EB8398C21B0}" type="presParOf" srcId="{BC554B0F-2E42-40D3-843C-337AA36FB237}" destId="{E0909B83-00BB-477F-8519-6D88D24AED2F}" srcOrd="1" destOrd="0" presId="urn:microsoft.com/office/officeart/2005/8/layout/list1"/>
+    <dgm:cxn modelId="{F0CA7A74-3498-449D-B441-01FB358480C4}" type="presParOf" srcId="{C035189C-4939-4DC9-9EFE-B91970AEE9C2}" destId="{90F10557-09BD-4E79-AE08-7A8A172C38DD}" srcOrd="13" destOrd="0" presId="urn:microsoft.com/office/officeart/2005/8/layout/list1"/>
+    <dgm:cxn modelId="{4C01F2BD-CDA6-4D29-B40D-BC8FE820B425}" type="presParOf" srcId="{C035189C-4939-4DC9-9EFE-B91970AEE9C2}" destId="{F1552565-5149-4042-84F4-29E24D064AC6}" srcOrd="14" destOrd="0" presId="urn:microsoft.com/office/officeart/2005/8/layout/list1"/>
+  </dgm:cxnLst>
+  <dgm:bg/>
+  <dgm:whole/>
+  <dgm:extLst>
+    <a:ext uri="http://schemas.microsoft.com/office/drawing/2008/diagram">
+      <dsp:dataModelExt xmlns:dsp="http://schemas.microsoft.com/office/drawing/2008/diagram" relId="rId6" minVer="http://schemas.openxmlformats.org/drawingml/2006/diagram"/>
+    </a:ext>
+  </dgm:extLst>
+</dgm:dataModel>
+</file>
+
+<file path=ppt/diagrams/drawing1.xml><?xml version="1.0" encoding="utf-8"?>
+<dsp:drawing xmlns:dgm="http://schemas.openxmlformats.org/drawingml/2006/diagram" xmlns:dsp="http://schemas.microsoft.com/office/drawing/2008/diagram" xmlns:a="http://schemas.openxmlformats.org/drawingml/2006/main">
+  <dsp:spTree>
+    <dsp:nvGrpSpPr>
+      <dsp:cNvPr id="0" name=""/>
+      <dsp:cNvGrpSpPr/>
+    </dsp:nvGrpSpPr>
+    <dsp:grpSpPr/>
+    <dsp:sp modelId="{1425C4F1-76BE-4343-A86C-B62999DAFA3C}">
+      <dsp:nvSpPr>
+        <dsp:cNvPr id="0" name=""/>
+        <dsp:cNvSpPr/>
+      </dsp:nvSpPr>
+      <dsp:spPr>
+        <a:xfrm>
+          <a:off x="0" y="263277"/>
+          <a:ext cx="6666833" cy="2302650"/>
+        </a:xfrm>
+        <a:prstGeom prst="rect">
+          <a:avLst/>
+        </a:prstGeom>
+        <a:solidFill>
+          <a:schemeClr val="lt1">
+            <a:alpha val="90000"/>
+            <a:hueOff val="0"/>
+            <a:satOff val="0"/>
+            <a:lumOff val="0"/>
+            <a:alphaOff val="0"/>
+          </a:schemeClr>
+        </a:solidFill>
+        <a:ln w="12700" cap="flat" cmpd="sng" algn="ctr">
+          <a:solidFill>
+            <a:schemeClr val="accent5">
+              <a:hueOff val="0"/>
+              <a:satOff val="0"/>
+              <a:lumOff val="0"/>
+              <a:alphaOff val="0"/>
+            </a:schemeClr>
+          </a:solidFill>
+          <a:prstDash val="solid"/>
+          <a:miter lim="800000"/>
+        </a:ln>
+        <a:effectLst/>
+      </dsp:spPr>
+      <dsp:style>
+        <a:lnRef idx="1">
+          <a:scrgbClr r="0" g="0" b="0"/>
+        </a:lnRef>
+        <a:fillRef idx="1">
+          <a:scrgbClr r="0" g="0" b="0"/>
+        </a:fillRef>
+        <a:effectRef idx="0">
+          <a:scrgbClr r="0" g="0" b="0"/>
+        </a:effectRef>
+        <a:fontRef idx="minor"/>
+      </dsp:style>
+      <dsp:txBody>
+        <a:bodyPr spcFirstLastPara="0" vert="horz" wrap="square" lIns="517420" tIns="354076" rIns="517420" bIns="120904" numCol="1" spcCol="1270" anchor="t" anchorCtr="0">
+          <a:noAutofit/>
+        </a:bodyPr>
+        <a:lstStyle/>
+        <a:p>
+          <a:pPr marL="171450" lvl="1" indent="-171450" algn="l" defTabSz="755650">
+            <a:lnSpc>
+              <a:spcPct val="90000"/>
+            </a:lnSpc>
+            <a:spcBef>
+              <a:spcPct val="0"/>
+            </a:spcBef>
+            <a:spcAft>
+              <a:spcPct val="15000"/>
+            </a:spcAft>
+            <a:buChar char="•"/>
+          </a:pPr>
+          <a:r>
+            <a:rPr lang="en-US" sz="1700" kern="1200" dirty="0"/>
+            <a:t>an interface</a:t>
+          </a:r>
+        </a:p>
+        <a:p>
+          <a:pPr marL="342900" lvl="2" indent="-171450" algn="l" defTabSz="755650">
+            <a:lnSpc>
+              <a:spcPct val="90000"/>
+            </a:lnSpc>
+            <a:spcBef>
+              <a:spcPct val="0"/>
+            </a:spcBef>
+            <a:spcAft>
+              <a:spcPct val="15000"/>
+            </a:spcAft>
+            <a:buFont typeface="Arial" panose="020B0604020202020204" pitchFamily="34" charset="0"/>
+            <a:buChar char="•"/>
+          </a:pPr>
+          <a:r>
+            <a:rPr lang="en-US" sz="1700" kern="1200" dirty="0"/>
+            <a:t>If two types implement the same interface, either can be used where interface is required.</a:t>
+          </a:r>
+        </a:p>
+        <a:p>
+          <a:pPr marL="171450" lvl="1" indent="-171450" algn="l" defTabSz="755650">
+            <a:lnSpc>
+              <a:spcPct val="90000"/>
+            </a:lnSpc>
+            <a:spcBef>
+              <a:spcPct val="0"/>
+            </a:spcBef>
+            <a:spcAft>
+              <a:spcPct val="15000"/>
+            </a:spcAft>
+            <a:buChar char="•"/>
+          </a:pPr>
+          <a:r>
+            <a:rPr lang="en-US" sz="1700" kern="1200" dirty="0"/>
+            <a:t>method implementations</a:t>
+          </a:r>
+        </a:p>
+        <a:p>
+          <a:pPr marL="342900" lvl="2" indent="-171450" algn="l" defTabSz="755650">
+            <a:lnSpc>
+              <a:spcPct val="90000"/>
+            </a:lnSpc>
+            <a:spcBef>
+              <a:spcPct val="0"/>
+            </a:spcBef>
+            <a:spcAft>
+              <a:spcPct val="15000"/>
+            </a:spcAft>
+            <a:buChar char="•"/>
+          </a:pPr>
+          <a:r>
+            <a:rPr lang="en-US" sz="1700" kern="1200" dirty="0"/>
+            <a:t>Shared code supplied once, used by many implementing types</a:t>
+          </a:r>
+        </a:p>
+        <a:p>
+          <a:pPr marL="171450" lvl="1" indent="-171450" algn="l" defTabSz="755650">
+            <a:lnSpc>
+              <a:spcPct val="90000"/>
+            </a:lnSpc>
+            <a:spcBef>
+              <a:spcPct val="0"/>
+            </a:spcBef>
+            <a:spcAft>
+              <a:spcPct val="15000"/>
+            </a:spcAft>
+            <a:buChar char="•"/>
+          </a:pPr>
+          <a:r>
+            <a:rPr lang="en-US" sz="1700" kern="1200" dirty="0"/>
+            <a:t>sometimes fields/state </a:t>
+          </a:r>
+        </a:p>
+      </dsp:txBody>
+      <dsp:txXfrm>
+        <a:off x="0" y="263277"/>
+        <a:ext cx="6666833" cy="2302650"/>
+      </dsp:txXfrm>
+    </dsp:sp>
+    <dsp:sp modelId="{A46C64D2-EEB2-4DD2-A65C-70AB3978633D}">
+      <dsp:nvSpPr>
+        <dsp:cNvPr id="0" name=""/>
+        <dsp:cNvSpPr/>
+      </dsp:nvSpPr>
+      <dsp:spPr>
+        <a:xfrm>
+          <a:off x="333341" y="12357"/>
+          <a:ext cx="4666783" cy="501840"/>
+        </a:xfrm>
+        <a:prstGeom prst="roundRect">
+          <a:avLst/>
+        </a:prstGeom>
+        <a:gradFill rotWithShape="0">
+          <a:gsLst>
+            <a:gs pos="0">
+              <a:schemeClr val="accent5">
+                <a:hueOff val="0"/>
+                <a:satOff val="0"/>
+                <a:lumOff val="0"/>
+                <a:alphaOff val="0"/>
+                <a:satMod val="103000"/>
+                <a:lumMod val="102000"/>
+                <a:tint val="94000"/>
+              </a:schemeClr>
+            </a:gs>
+            <a:gs pos="50000">
+              <a:schemeClr val="accent5">
+                <a:hueOff val="0"/>
+                <a:satOff val="0"/>
+                <a:lumOff val="0"/>
+                <a:alphaOff val="0"/>
+                <a:satMod val="110000"/>
+                <a:lumMod val="100000"/>
+                <a:shade val="100000"/>
+              </a:schemeClr>
+            </a:gs>
+            <a:gs pos="100000">
+              <a:schemeClr val="accent5">
+                <a:hueOff val="0"/>
+                <a:satOff val="0"/>
+                <a:lumOff val="0"/>
+                <a:alphaOff val="0"/>
+                <a:lumMod val="99000"/>
+                <a:satMod val="120000"/>
+                <a:shade val="78000"/>
+              </a:schemeClr>
+            </a:gs>
+          </a:gsLst>
+          <a:lin ang="5400000" scaled="0"/>
+        </a:gradFill>
+        <a:ln>
+          <a:noFill/>
+        </a:ln>
+        <a:effectLst/>
+      </dsp:spPr>
+      <dsp:style>
+        <a:lnRef idx="0">
+          <a:scrgbClr r="0" g="0" b="0"/>
+        </a:lnRef>
+        <a:fillRef idx="3">
+          <a:scrgbClr r="0" g="0" b="0"/>
+        </a:fillRef>
+        <a:effectRef idx="2">
+          <a:scrgbClr r="0" g="0" b="0"/>
+        </a:effectRef>
+        <a:fontRef idx="minor">
+          <a:schemeClr val="lt1"/>
+        </a:fontRef>
+      </dsp:style>
+      <dsp:txBody>
+        <a:bodyPr spcFirstLastPara="0" vert="horz" wrap="square" lIns="176393" tIns="0" rIns="176393" bIns="0" numCol="1" spcCol="1270" anchor="ctr" anchorCtr="0">
+          <a:noAutofit/>
+        </a:bodyPr>
+        <a:lstStyle/>
+        <a:p>
+          <a:pPr marL="0" lvl="0" indent="0" algn="l" defTabSz="755650">
+            <a:lnSpc>
+              <a:spcPct val="90000"/>
+            </a:lnSpc>
+            <a:spcBef>
+              <a:spcPct val="0"/>
+            </a:spcBef>
+            <a:spcAft>
+              <a:spcPct val="35000"/>
+            </a:spcAft>
+            <a:buNone/>
+          </a:pPr>
+          <a:r>
+            <a:rPr lang="en-US" sz="1700" kern="1200"/>
+            <a:t>In class-based OO, a subtype can inherit:</a:t>
+          </a:r>
+        </a:p>
+      </dsp:txBody>
+      <dsp:txXfrm>
+        <a:off x="357839" y="36855"/>
+        <a:ext cx="4617787" cy="452844"/>
+      </dsp:txXfrm>
+    </dsp:sp>
+    <dsp:sp modelId="{F5C8A4A8-BE15-484F-9406-7BCE258C17E5}">
+      <dsp:nvSpPr>
+        <dsp:cNvPr id="0" name=""/>
+        <dsp:cNvSpPr/>
+      </dsp:nvSpPr>
+      <dsp:spPr>
+        <a:xfrm>
+          <a:off x="0" y="2908647"/>
+          <a:ext cx="6666833" cy="428400"/>
+        </a:xfrm>
+        <a:prstGeom prst="rect">
+          <a:avLst/>
+        </a:prstGeom>
+        <a:solidFill>
+          <a:schemeClr val="lt1">
+            <a:alpha val="90000"/>
+            <a:hueOff val="0"/>
+            <a:satOff val="0"/>
+            <a:lumOff val="0"/>
+            <a:alphaOff val="0"/>
+          </a:schemeClr>
+        </a:solidFill>
+        <a:ln w="12700" cap="flat" cmpd="sng" algn="ctr">
+          <a:solidFill>
+            <a:schemeClr val="accent5">
+              <a:hueOff val="-4050717"/>
+              <a:satOff val="-275"/>
+              <a:lumOff val="654"/>
+              <a:alphaOff val="0"/>
+            </a:schemeClr>
+          </a:solidFill>
+          <a:prstDash val="solid"/>
+          <a:miter lim="800000"/>
+        </a:ln>
+        <a:effectLst/>
+      </dsp:spPr>
+      <dsp:style>
+        <a:lnRef idx="1">
+          <a:scrgbClr r="0" g="0" b="0"/>
+        </a:lnRef>
+        <a:fillRef idx="1">
+          <a:scrgbClr r="0" g="0" b="0"/>
+        </a:fillRef>
+        <a:effectRef idx="0">
+          <a:scrgbClr r="0" g="0" b="0"/>
+        </a:effectRef>
+        <a:fontRef idx="minor"/>
+      </dsp:style>
+    </dsp:sp>
+    <dsp:sp modelId="{8AA0CD7E-F5A1-44AE-90CB-4EDF724FE801}">
+      <dsp:nvSpPr>
+        <dsp:cNvPr id="0" name=""/>
+        <dsp:cNvSpPr/>
+      </dsp:nvSpPr>
+      <dsp:spPr>
+        <a:xfrm>
+          <a:off x="333341" y="2657727"/>
+          <a:ext cx="4666783" cy="501840"/>
+        </a:xfrm>
+        <a:prstGeom prst="roundRect">
+          <a:avLst/>
+        </a:prstGeom>
+        <a:gradFill rotWithShape="0">
+          <a:gsLst>
+            <a:gs pos="0">
+              <a:schemeClr val="accent5">
+                <a:hueOff val="-4050717"/>
+                <a:satOff val="-275"/>
+                <a:lumOff val="654"/>
+                <a:alphaOff val="0"/>
+                <a:satMod val="103000"/>
+                <a:lumMod val="102000"/>
+                <a:tint val="94000"/>
+              </a:schemeClr>
+            </a:gs>
+            <a:gs pos="50000">
+              <a:schemeClr val="accent5">
+                <a:hueOff val="-4050717"/>
+                <a:satOff val="-275"/>
+                <a:lumOff val="654"/>
+                <a:alphaOff val="0"/>
+                <a:satMod val="110000"/>
+                <a:lumMod val="100000"/>
+                <a:shade val="100000"/>
+              </a:schemeClr>
+            </a:gs>
+            <a:gs pos="100000">
+              <a:schemeClr val="accent5">
+                <a:hueOff val="-4050717"/>
+                <a:satOff val="-275"/>
+                <a:lumOff val="654"/>
+                <a:alphaOff val="0"/>
+                <a:lumMod val="99000"/>
+                <a:satMod val="120000"/>
+                <a:shade val="78000"/>
+              </a:schemeClr>
+            </a:gs>
+          </a:gsLst>
+          <a:lin ang="5400000" scaled="0"/>
+        </a:gradFill>
+        <a:ln>
+          <a:noFill/>
+        </a:ln>
+        <a:effectLst/>
+      </dsp:spPr>
+      <dsp:style>
+        <a:lnRef idx="0">
+          <a:scrgbClr r="0" g="0" b="0"/>
+        </a:lnRef>
+        <a:fillRef idx="3">
+          <a:scrgbClr r="0" g="0" b="0"/>
+        </a:fillRef>
+        <a:effectRef idx="2">
+          <a:scrgbClr r="0" g="0" b="0"/>
+        </a:effectRef>
+        <a:fontRef idx="minor">
+          <a:schemeClr val="lt1"/>
+        </a:fontRef>
+      </dsp:style>
+      <dsp:txBody>
+        <a:bodyPr spcFirstLastPara="0" vert="horz" wrap="square" lIns="176393" tIns="0" rIns="176393" bIns="0" numCol="1" spcCol="1270" anchor="ctr" anchorCtr="0">
+          <a:noAutofit/>
+        </a:bodyPr>
+        <a:lstStyle/>
+        <a:p>
+          <a:pPr marL="0" lvl="0" indent="0" algn="l" defTabSz="755650">
+            <a:lnSpc>
+              <a:spcPct val="90000"/>
+            </a:lnSpc>
+            <a:spcBef>
+              <a:spcPct val="0"/>
+            </a:spcBef>
+            <a:spcAft>
+              <a:spcPct val="35000"/>
+            </a:spcAft>
+            <a:buNone/>
+          </a:pPr>
+          <a:r>
+            <a:rPr lang="en-US" sz="1700" kern="1200"/>
+            <a:t>Rust does </a:t>
+          </a:r>
+          <a:r>
+            <a:rPr lang="en-US" sz="1700" b="1" kern="1200"/>
+            <a:t>not</a:t>
+          </a:r>
+          <a:r>
+            <a:rPr lang="en-US" sz="1700" kern="1200"/>
+            <a:t> have class inheritance</a:t>
+          </a:r>
+        </a:p>
+      </dsp:txBody>
+      <dsp:txXfrm>
+        <a:off x="357839" y="2682225"/>
+        <a:ext cx="4617787" cy="452844"/>
+      </dsp:txXfrm>
+    </dsp:sp>
+    <dsp:sp modelId="{EEEF16EE-977C-425F-85B9-63D7E9C19DF1}">
+      <dsp:nvSpPr>
+        <dsp:cNvPr id="0" name=""/>
+        <dsp:cNvSpPr/>
+      </dsp:nvSpPr>
+      <dsp:spPr>
+        <a:xfrm>
+          <a:off x="0" y="3679767"/>
+          <a:ext cx="6666833" cy="990675"/>
+        </a:xfrm>
+        <a:prstGeom prst="rect">
+          <a:avLst/>
+        </a:prstGeom>
+        <a:solidFill>
+          <a:schemeClr val="lt1">
+            <a:alpha val="90000"/>
+            <a:hueOff val="0"/>
+            <a:satOff val="0"/>
+            <a:lumOff val="0"/>
+            <a:alphaOff val="0"/>
+          </a:schemeClr>
+        </a:solidFill>
+        <a:ln w="12700" cap="flat" cmpd="sng" algn="ctr">
+          <a:solidFill>
+            <a:schemeClr val="accent5">
+              <a:hueOff val="-8101434"/>
+              <a:satOff val="-551"/>
+              <a:lumOff val="1307"/>
+              <a:alphaOff val="0"/>
+            </a:schemeClr>
+          </a:solidFill>
+          <a:prstDash val="solid"/>
+          <a:miter lim="800000"/>
+        </a:ln>
+        <a:effectLst/>
+      </dsp:spPr>
+      <dsp:style>
+        <a:lnRef idx="1">
+          <a:scrgbClr r="0" g="0" b="0"/>
+        </a:lnRef>
+        <a:fillRef idx="1">
+          <a:scrgbClr r="0" g="0" b="0"/>
+        </a:fillRef>
+        <a:effectRef idx="0">
+          <a:scrgbClr r="0" g="0" b="0"/>
+        </a:effectRef>
+        <a:fontRef idx="minor"/>
+      </dsp:style>
+      <dsp:txBody>
+        <a:bodyPr spcFirstLastPara="0" vert="horz" wrap="square" lIns="517420" tIns="354076" rIns="517420" bIns="120904" numCol="1" spcCol="1270" anchor="t" anchorCtr="0">
+          <a:noAutofit/>
+        </a:bodyPr>
+        <a:lstStyle/>
+        <a:p>
+          <a:pPr marL="171450" lvl="1" indent="-171450" algn="l" defTabSz="755650">
+            <a:lnSpc>
+              <a:spcPct val="90000"/>
+            </a:lnSpc>
+            <a:spcBef>
+              <a:spcPct val="0"/>
+            </a:spcBef>
+            <a:spcAft>
+              <a:spcPct val="15000"/>
+            </a:spcAft>
+            <a:buChar char="•"/>
+          </a:pPr>
+          <a:r>
+            <a:rPr lang="en-US" sz="1700" kern="1200"/>
+            <a:t>shared interfaces </a:t>
+          </a:r>
+        </a:p>
+        <a:p>
+          <a:pPr marL="171450" lvl="1" indent="-171450" algn="l" defTabSz="755650">
+            <a:lnSpc>
+              <a:spcPct val="90000"/>
+            </a:lnSpc>
+            <a:spcBef>
+              <a:spcPct val="0"/>
+            </a:spcBef>
+            <a:spcAft>
+              <a:spcPct val="15000"/>
+            </a:spcAft>
+            <a:buChar char="•"/>
+          </a:pPr>
+          <a:r>
+            <a:rPr lang="en-US" sz="1700" kern="1200"/>
+            <a:t>shared behavior </a:t>
+          </a:r>
+        </a:p>
+      </dsp:txBody>
+      <dsp:txXfrm>
+        <a:off x="0" y="3679767"/>
+        <a:ext cx="6666833" cy="990675"/>
+      </dsp:txXfrm>
+    </dsp:sp>
+    <dsp:sp modelId="{10009CDD-02B3-4725-BA4F-B411A2947E2B}">
+      <dsp:nvSpPr>
+        <dsp:cNvPr id="0" name=""/>
+        <dsp:cNvSpPr/>
+      </dsp:nvSpPr>
+      <dsp:spPr>
+        <a:xfrm>
+          <a:off x="333341" y="3428847"/>
+          <a:ext cx="4666783" cy="501840"/>
+        </a:xfrm>
+        <a:prstGeom prst="roundRect">
+          <a:avLst/>
+        </a:prstGeom>
+        <a:gradFill rotWithShape="0">
+          <a:gsLst>
+            <a:gs pos="0">
+              <a:schemeClr val="accent5">
+                <a:hueOff val="-8101434"/>
+                <a:satOff val="-551"/>
+                <a:lumOff val="1307"/>
+                <a:alphaOff val="0"/>
+                <a:satMod val="103000"/>
+                <a:lumMod val="102000"/>
+                <a:tint val="94000"/>
+              </a:schemeClr>
+            </a:gs>
+            <a:gs pos="50000">
+              <a:schemeClr val="accent5">
+                <a:hueOff val="-8101434"/>
+                <a:satOff val="-551"/>
+                <a:lumOff val="1307"/>
+                <a:alphaOff val="0"/>
+                <a:satMod val="110000"/>
+                <a:lumMod val="100000"/>
+                <a:shade val="100000"/>
+              </a:schemeClr>
+            </a:gs>
+            <a:gs pos="100000">
+              <a:schemeClr val="accent5">
+                <a:hueOff val="-8101434"/>
+                <a:satOff val="-551"/>
+                <a:lumOff val="1307"/>
+                <a:alphaOff val="0"/>
+                <a:lumMod val="99000"/>
+                <a:satMod val="120000"/>
+                <a:shade val="78000"/>
+              </a:schemeClr>
+            </a:gs>
+          </a:gsLst>
+          <a:lin ang="5400000" scaled="0"/>
+        </a:gradFill>
+        <a:ln>
+          <a:noFill/>
+        </a:ln>
+        <a:effectLst/>
+      </dsp:spPr>
+      <dsp:style>
+        <a:lnRef idx="0">
+          <a:scrgbClr r="0" g="0" b="0"/>
+        </a:lnRef>
+        <a:fillRef idx="3">
+          <a:scrgbClr r="0" g="0" b="0"/>
+        </a:fillRef>
+        <a:effectRef idx="2">
+          <a:scrgbClr r="0" g="0" b="0"/>
+        </a:effectRef>
+        <a:fontRef idx="minor">
+          <a:schemeClr val="lt1"/>
+        </a:fontRef>
+      </dsp:style>
+      <dsp:txBody>
+        <a:bodyPr spcFirstLastPara="0" vert="horz" wrap="square" lIns="176393" tIns="0" rIns="176393" bIns="0" numCol="1" spcCol="1270" anchor="ctr" anchorCtr="0">
+          <a:noAutofit/>
+        </a:bodyPr>
+        <a:lstStyle/>
+        <a:p>
+          <a:pPr marL="0" lvl="0" indent="0" algn="l" defTabSz="755650">
+            <a:lnSpc>
+              <a:spcPct val="90000"/>
+            </a:lnSpc>
+            <a:spcBef>
+              <a:spcPct val="0"/>
+            </a:spcBef>
+            <a:spcAft>
+              <a:spcPct val="35000"/>
+            </a:spcAft>
+            <a:buNone/>
+          </a:pPr>
+          <a:r>
+            <a:rPr lang="en-US" sz="1700" kern="1200"/>
+            <a:t>But Rust has tools for the first two:</a:t>
+          </a:r>
+        </a:p>
+      </dsp:txBody>
+      <dsp:txXfrm>
+        <a:off x="357839" y="3453345"/>
+        <a:ext cx="4617787" cy="452844"/>
+      </dsp:txXfrm>
+    </dsp:sp>
+    <dsp:sp modelId="{9CA8C7E0-A033-4140-8F89-D390D6922867}">
+      <dsp:nvSpPr>
+        <dsp:cNvPr id="0" name=""/>
+        <dsp:cNvSpPr/>
+      </dsp:nvSpPr>
+      <dsp:spPr>
+        <a:xfrm>
+          <a:off x="0" y="5013162"/>
+          <a:ext cx="6666833" cy="428400"/>
+        </a:xfrm>
+        <a:prstGeom prst="rect">
+          <a:avLst/>
+        </a:prstGeom>
+        <a:solidFill>
+          <a:schemeClr val="lt1">
+            <a:alpha val="90000"/>
+            <a:hueOff val="0"/>
+            <a:satOff val="0"/>
+            <a:lumOff val="0"/>
+            <a:alphaOff val="0"/>
+          </a:schemeClr>
+        </a:solidFill>
+        <a:ln w="12700" cap="flat" cmpd="sng" algn="ctr">
+          <a:solidFill>
+            <a:schemeClr val="accent5">
+              <a:hueOff val="-12152150"/>
+              <a:satOff val="-826"/>
+              <a:lumOff val="1961"/>
+              <a:alphaOff val="0"/>
+            </a:schemeClr>
+          </a:solidFill>
+          <a:prstDash val="solid"/>
+          <a:miter lim="800000"/>
+        </a:ln>
+        <a:effectLst/>
+      </dsp:spPr>
+      <dsp:style>
+        <a:lnRef idx="1">
+          <a:scrgbClr r="0" g="0" b="0"/>
+        </a:lnRef>
+        <a:fillRef idx="1">
+          <a:scrgbClr r="0" g="0" b="0"/>
+        </a:fillRef>
+        <a:effectRef idx="0">
+          <a:scrgbClr r="0" g="0" b="0"/>
+        </a:effectRef>
+        <a:fontRef idx="minor"/>
+      </dsp:style>
+    </dsp:sp>
+    <dsp:sp modelId="{0F569956-D6CE-4FC0-A616-CDDD73C1CF37}">
+      <dsp:nvSpPr>
+        <dsp:cNvPr id="0" name=""/>
+        <dsp:cNvSpPr/>
+      </dsp:nvSpPr>
+      <dsp:spPr>
+        <a:xfrm>
+          <a:off x="333341" y="4762242"/>
+          <a:ext cx="4666783" cy="501840"/>
+        </a:xfrm>
+        <a:prstGeom prst="roundRect">
+          <a:avLst/>
+        </a:prstGeom>
+        <a:gradFill rotWithShape="0">
+          <a:gsLst>
+            <a:gs pos="0">
+              <a:schemeClr val="accent5">
+                <a:hueOff val="-12152150"/>
+                <a:satOff val="-826"/>
+                <a:lumOff val="1961"/>
+                <a:alphaOff val="0"/>
+                <a:satMod val="103000"/>
+                <a:lumMod val="102000"/>
+                <a:tint val="94000"/>
+              </a:schemeClr>
+            </a:gs>
+            <a:gs pos="50000">
+              <a:schemeClr val="accent5">
+                <a:hueOff val="-12152150"/>
+                <a:satOff val="-826"/>
+                <a:lumOff val="1961"/>
+                <a:alphaOff val="0"/>
+                <a:satMod val="110000"/>
+                <a:lumMod val="100000"/>
+                <a:shade val="100000"/>
+              </a:schemeClr>
+            </a:gs>
+            <a:gs pos="100000">
+              <a:schemeClr val="accent5">
+                <a:hueOff val="-12152150"/>
+                <a:satOff val="-826"/>
+                <a:lumOff val="1961"/>
+                <a:alphaOff val="0"/>
+                <a:lumMod val="99000"/>
+                <a:satMod val="120000"/>
+                <a:shade val="78000"/>
+              </a:schemeClr>
+            </a:gs>
+          </a:gsLst>
+          <a:lin ang="5400000" scaled="0"/>
+        </a:gradFill>
+        <a:ln>
+          <a:noFill/>
+        </a:ln>
+        <a:effectLst/>
+      </dsp:spPr>
+      <dsp:style>
+        <a:lnRef idx="0">
+          <a:scrgbClr r="0" g="0" b="0"/>
+        </a:lnRef>
+        <a:fillRef idx="3">
+          <a:scrgbClr r="0" g="0" b="0"/>
+        </a:fillRef>
+        <a:effectRef idx="2">
+          <a:scrgbClr r="0" g="0" b="0"/>
+        </a:effectRef>
+        <a:fontRef idx="minor">
+          <a:schemeClr val="lt1"/>
+        </a:fontRef>
+      </dsp:style>
+      <dsp:txBody>
+        <a:bodyPr spcFirstLastPara="0" vert="horz" wrap="square" lIns="176393" tIns="0" rIns="176393" bIns="0" numCol="1" spcCol="1270" anchor="ctr" anchorCtr="0">
+          <a:noAutofit/>
+        </a:bodyPr>
+        <a:lstStyle/>
+        <a:p>
+          <a:pPr marL="0" lvl="0" indent="0" algn="l" defTabSz="755650">
+            <a:lnSpc>
+              <a:spcPct val="90000"/>
+            </a:lnSpc>
+            <a:spcBef>
+              <a:spcPct val="0"/>
+            </a:spcBef>
+            <a:spcAft>
+              <a:spcPct val="35000"/>
+            </a:spcAft>
+            <a:buNone/>
+          </a:pPr>
+          <a:r>
+            <a:rPr lang="en-US" sz="1700" kern="1200"/>
+            <a:t>This talk is about those tools</a:t>
+          </a:r>
+        </a:p>
+      </dsp:txBody>
+      <dsp:txXfrm>
+        <a:off x="357839" y="4786740"/>
+        <a:ext cx="4617787" cy="452844"/>
+      </dsp:txXfrm>
+    </dsp:sp>
+  </dsp:spTree>
+</dsp:drawing>
+</file>
+
+<file path=ppt/diagrams/drawing2.xml><?xml version="1.0" encoding="utf-8"?>
+<dsp:drawing xmlns:dgm="http://schemas.openxmlformats.org/drawingml/2006/diagram" xmlns:dsp="http://schemas.microsoft.com/office/drawing/2008/diagram" xmlns:a="http://schemas.openxmlformats.org/drawingml/2006/main">
+  <dsp:spTree>
+    <dsp:nvGrpSpPr>
+      <dsp:cNvPr id="0" name=""/>
+      <dsp:cNvGrpSpPr/>
+    </dsp:nvGrpSpPr>
+    <dsp:grpSpPr/>
+    <dsp:sp modelId="{FE7AE8AE-8186-47B3-AA99-1F3E54EA2221}">
+      <dsp:nvSpPr>
+        <dsp:cNvPr id="0" name=""/>
+        <dsp:cNvSpPr/>
+      </dsp:nvSpPr>
+      <dsp:spPr>
+        <a:xfrm>
+          <a:off x="0" y="343602"/>
+          <a:ext cx="6666833" cy="1552950"/>
+        </a:xfrm>
+        <a:prstGeom prst="rect">
+          <a:avLst/>
+        </a:prstGeom>
+        <a:solidFill>
+          <a:schemeClr val="lt1">
+            <a:alpha val="90000"/>
+            <a:hueOff val="0"/>
+            <a:satOff val="0"/>
+            <a:lumOff val="0"/>
+            <a:alphaOff val="0"/>
+          </a:schemeClr>
+        </a:solidFill>
+        <a:ln w="12700" cap="flat" cmpd="sng" algn="ctr">
+          <a:solidFill>
+            <a:schemeClr val="accent2">
+              <a:hueOff val="0"/>
+              <a:satOff val="0"/>
+              <a:lumOff val="0"/>
+              <a:alphaOff val="0"/>
+            </a:schemeClr>
+          </a:solidFill>
+          <a:prstDash val="solid"/>
+          <a:miter lim="800000"/>
+        </a:ln>
+        <a:effectLst/>
+      </dsp:spPr>
+      <dsp:style>
+        <a:lnRef idx="1">
+          <a:scrgbClr r="0" g="0" b="0"/>
+        </a:lnRef>
+        <a:fillRef idx="1">
+          <a:scrgbClr r="0" g="0" b="0"/>
+        </a:fillRef>
+        <a:effectRef idx="0">
+          <a:scrgbClr r="0" g="0" b="0"/>
+        </a:effectRef>
+        <a:fontRef idx="minor"/>
+      </dsp:style>
+      <dsp:txBody>
+        <a:bodyPr spcFirstLastPara="0" vert="horz" wrap="square" lIns="517420" tIns="354076" rIns="517420" bIns="120904" numCol="1" spcCol="1270" anchor="t" anchorCtr="0">
+          <a:noAutofit/>
+        </a:bodyPr>
+        <a:lstStyle/>
+        <a:p>
+          <a:pPr marL="171450" lvl="1" indent="-171450" algn="l" defTabSz="755650">
+            <a:lnSpc>
+              <a:spcPct val="90000"/>
+            </a:lnSpc>
+            <a:spcBef>
+              <a:spcPct val="0"/>
+            </a:spcBef>
+            <a:spcAft>
+              <a:spcPct val="15000"/>
+            </a:spcAft>
+            <a:buChar char="•"/>
+          </a:pPr>
+          <a:r>
+            <a:rPr lang="en-US" sz="1700" kern="1200" dirty="0"/>
+            <a:t>Interface / Abstract Class ≈ Trait</a:t>
+          </a:r>
+        </a:p>
+        <a:p>
+          <a:pPr marL="342900" lvl="2" indent="-171450" algn="l" defTabSz="755650">
+            <a:lnSpc>
+              <a:spcPct val="90000"/>
+            </a:lnSpc>
+            <a:spcBef>
+              <a:spcPct val="0"/>
+            </a:spcBef>
+            <a:spcAft>
+              <a:spcPct val="15000"/>
+            </a:spcAft>
+            <a:buChar char="•"/>
+          </a:pPr>
+          <a:r>
+            <a:rPr lang="en-US" sz="1700" kern="1200" dirty="0"/>
+            <a:t>	A contract or role. You don’t create one directly.</a:t>
+          </a:r>
+        </a:p>
+        <a:p>
+          <a:pPr marL="171450" lvl="1" indent="-171450" algn="l" defTabSz="755650">
+            <a:lnSpc>
+              <a:spcPct val="90000"/>
+            </a:lnSpc>
+            <a:spcBef>
+              <a:spcPct val="0"/>
+            </a:spcBef>
+            <a:spcAft>
+              <a:spcPct val="15000"/>
+            </a:spcAft>
+            <a:buChar char="•"/>
+          </a:pPr>
+          <a:r>
+            <a:rPr lang="en-US" sz="1700" kern="1200" dirty="0"/>
+            <a:t>Concrete Class ≈ Struct / Enum</a:t>
+          </a:r>
+        </a:p>
+        <a:p>
+          <a:pPr marL="342900" lvl="2" indent="-171450" algn="l" defTabSz="755650">
+            <a:lnSpc>
+              <a:spcPct val="90000"/>
+            </a:lnSpc>
+            <a:spcBef>
+              <a:spcPct val="0"/>
+            </a:spcBef>
+            <a:spcAft>
+              <a:spcPct val="15000"/>
+            </a:spcAft>
+            <a:buChar char="•"/>
+          </a:pPr>
+          <a:r>
+            <a:rPr lang="en-US" sz="1700" kern="1200" dirty="0"/>
+            <a:t>	 A concrete type. You can create values of it.</a:t>
+          </a:r>
+        </a:p>
+      </dsp:txBody>
+      <dsp:txXfrm>
+        <a:off x="0" y="343602"/>
+        <a:ext cx="6666833" cy="1552950"/>
+      </dsp:txXfrm>
+    </dsp:sp>
+    <dsp:sp modelId="{DC17AE3D-7610-4734-B7B2-83F44324CE00}">
+      <dsp:nvSpPr>
+        <dsp:cNvPr id="0" name=""/>
+        <dsp:cNvSpPr/>
+      </dsp:nvSpPr>
+      <dsp:spPr>
+        <a:xfrm>
+          <a:off x="333341" y="92682"/>
+          <a:ext cx="4666783" cy="501840"/>
+        </a:xfrm>
+        <a:prstGeom prst="roundRect">
+          <a:avLst/>
+        </a:prstGeom>
+        <a:gradFill rotWithShape="0">
+          <a:gsLst>
+            <a:gs pos="0">
+              <a:schemeClr val="accent2">
+                <a:hueOff val="0"/>
+                <a:satOff val="0"/>
+                <a:lumOff val="0"/>
+                <a:alphaOff val="0"/>
+                <a:satMod val="103000"/>
+                <a:lumMod val="102000"/>
+                <a:tint val="94000"/>
+              </a:schemeClr>
+            </a:gs>
+            <a:gs pos="50000">
+              <a:schemeClr val="accent2">
+                <a:hueOff val="0"/>
+                <a:satOff val="0"/>
+                <a:lumOff val="0"/>
+                <a:alphaOff val="0"/>
+                <a:satMod val="110000"/>
+                <a:lumMod val="100000"/>
+                <a:shade val="100000"/>
+              </a:schemeClr>
+            </a:gs>
+            <a:gs pos="100000">
+              <a:schemeClr val="accent2">
+                <a:hueOff val="0"/>
+                <a:satOff val="0"/>
+                <a:lumOff val="0"/>
+                <a:alphaOff val="0"/>
+                <a:lumMod val="99000"/>
+                <a:satMod val="120000"/>
+                <a:shade val="78000"/>
+              </a:schemeClr>
+            </a:gs>
+          </a:gsLst>
+          <a:lin ang="5400000" scaled="0"/>
+        </a:gradFill>
+        <a:ln>
+          <a:noFill/>
+        </a:ln>
+        <a:effectLst/>
+      </dsp:spPr>
+      <dsp:style>
+        <a:lnRef idx="0">
+          <a:scrgbClr r="0" g="0" b="0"/>
+        </a:lnRef>
+        <a:fillRef idx="3">
+          <a:scrgbClr r="0" g="0" b="0"/>
+        </a:fillRef>
+        <a:effectRef idx="2">
+          <a:scrgbClr r="0" g="0" b="0"/>
+        </a:effectRef>
+        <a:fontRef idx="minor">
+          <a:schemeClr val="lt1"/>
+        </a:fontRef>
+      </dsp:style>
+      <dsp:txBody>
+        <a:bodyPr spcFirstLastPara="0" vert="horz" wrap="square" lIns="176393" tIns="0" rIns="176393" bIns="0" numCol="1" spcCol="1270" anchor="ctr" anchorCtr="0">
+          <a:noAutofit/>
+        </a:bodyPr>
+        <a:lstStyle/>
+        <a:p>
+          <a:pPr marL="0" lvl="0" indent="0" algn="l" defTabSz="755650">
+            <a:lnSpc>
+              <a:spcPct val="90000"/>
+            </a:lnSpc>
+            <a:spcBef>
+              <a:spcPct val="0"/>
+            </a:spcBef>
+            <a:spcAft>
+              <a:spcPct val="35000"/>
+            </a:spcAft>
+            <a:buNone/>
+          </a:pPr>
+          <a:r>
+            <a:rPr lang="en-US" sz="1700" kern="1200" dirty="0"/>
+            <a:t>Definitions</a:t>
+          </a:r>
+        </a:p>
+      </dsp:txBody>
+      <dsp:txXfrm>
+        <a:off x="357839" y="117180"/>
+        <a:ext cx="4617787" cy="452844"/>
+      </dsp:txXfrm>
+    </dsp:sp>
+    <dsp:sp modelId="{D1A2C43F-1895-4E58-8C0A-22F41A1CD3E5}">
+      <dsp:nvSpPr>
+        <dsp:cNvPr id="0" name=""/>
+        <dsp:cNvSpPr/>
+      </dsp:nvSpPr>
+      <dsp:spPr>
+        <a:xfrm>
+          <a:off x="0" y="2239272"/>
+          <a:ext cx="6666833" cy="722925"/>
+        </a:xfrm>
+        <a:prstGeom prst="rect">
+          <a:avLst/>
+        </a:prstGeom>
+        <a:solidFill>
+          <a:schemeClr val="lt1">
+            <a:alpha val="90000"/>
+            <a:hueOff val="0"/>
+            <a:satOff val="0"/>
+            <a:lumOff val="0"/>
+            <a:alphaOff val="0"/>
+          </a:schemeClr>
+        </a:solidFill>
+        <a:ln w="12700" cap="flat" cmpd="sng" algn="ctr">
+          <a:solidFill>
+            <a:schemeClr val="accent2">
+              <a:hueOff val="2147871"/>
+              <a:satOff val="-6164"/>
+              <a:lumOff val="-9870"/>
+              <a:alphaOff val="0"/>
+            </a:schemeClr>
+          </a:solidFill>
+          <a:prstDash val="solid"/>
+          <a:miter lim="800000"/>
+        </a:ln>
+        <a:effectLst/>
+      </dsp:spPr>
+      <dsp:style>
+        <a:lnRef idx="1">
+          <a:scrgbClr r="0" g="0" b="0"/>
+        </a:lnRef>
+        <a:fillRef idx="1">
+          <a:scrgbClr r="0" g="0" b="0"/>
+        </a:fillRef>
+        <a:effectRef idx="0">
+          <a:scrgbClr r="0" g="0" b="0"/>
+        </a:effectRef>
+        <a:fontRef idx="minor"/>
+      </dsp:style>
+      <dsp:txBody>
+        <a:bodyPr spcFirstLastPara="0" vert="horz" wrap="square" lIns="517420" tIns="354076" rIns="517420" bIns="120904" numCol="1" spcCol="1270" anchor="t" anchorCtr="0">
+          <a:noAutofit/>
+        </a:bodyPr>
+        <a:lstStyle/>
+        <a:p>
+          <a:pPr marL="171450" lvl="1" indent="-171450" algn="l" defTabSz="755650">
+            <a:lnSpc>
+              <a:spcPct val="90000"/>
+            </a:lnSpc>
+            <a:spcBef>
+              <a:spcPct val="0"/>
+            </a:spcBef>
+            <a:spcAft>
+              <a:spcPct val="15000"/>
+            </a:spcAft>
+            <a:buChar char="•"/>
+          </a:pPr>
+          <a:r>
+            <a:rPr lang="en-US" sz="1700" kern="1200"/>
+            <a:t>C++, C#, Python*, Smalltalk</a:t>
+          </a:r>
+        </a:p>
+      </dsp:txBody>
+      <dsp:txXfrm>
+        <a:off x="0" y="2239272"/>
+        <a:ext cx="6666833" cy="722925"/>
+      </dsp:txXfrm>
+    </dsp:sp>
+    <dsp:sp modelId="{E4224F60-4497-49F0-8A2E-41D9725FE66D}">
+      <dsp:nvSpPr>
+        <dsp:cNvPr id="0" name=""/>
+        <dsp:cNvSpPr/>
+      </dsp:nvSpPr>
+      <dsp:spPr>
+        <a:xfrm>
+          <a:off x="333341" y="1988352"/>
+          <a:ext cx="4666783" cy="501840"/>
+        </a:xfrm>
+        <a:prstGeom prst="roundRect">
+          <a:avLst/>
+        </a:prstGeom>
+        <a:gradFill rotWithShape="0">
+          <a:gsLst>
+            <a:gs pos="0">
+              <a:schemeClr val="accent2">
+                <a:hueOff val="2147871"/>
+                <a:satOff val="-6164"/>
+                <a:lumOff val="-9870"/>
+                <a:alphaOff val="0"/>
+                <a:satMod val="103000"/>
+                <a:lumMod val="102000"/>
+                <a:tint val="94000"/>
+              </a:schemeClr>
+            </a:gs>
+            <a:gs pos="50000">
+              <a:schemeClr val="accent2">
+                <a:hueOff val="2147871"/>
+                <a:satOff val="-6164"/>
+                <a:lumOff val="-9870"/>
+                <a:alphaOff val="0"/>
+                <a:satMod val="110000"/>
+                <a:lumMod val="100000"/>
+                <a:shade val="100000"/>
+              </a:schemeClr>
+            </a:gs>
+            <a:gs pos="100000">
+              <a:schemeClr val="accent2">
+                <a:hueOff val="2147871"/>
+                <a:satOff val="-6164"/>
+                <a:lumOff val="-9870"/>
+                <a:alphaOff val="0"/>
+                <a:lumMod val="99000"/>
+                <a:satMod val="120000"/>
+                <a:shade val="78000"/>
+              </a:schemeClr>
+            </a:gs>
+          </a:gsLst>
+          <a:lin ang="5400000" scaled="0"/>
+        </a:gradFill>
+        <a:ln>
+          <a:noFill/>
+        </a:ln>
+        <a:effectLst/>
+      </dsp:spPr>
+      <dsp:style>
+        <a:lnRef idx="0">
+          <a:scrgbClr r="0" g="0" b="0"/>
+        </a:lnRef>
+        <a:fillRef idx="3">
+          <a:scrgbClr r="0" g="0" b="0"/>
+        </a:fillRef>
+        <a:effectRef idx="2">
+          <a:scrgbClr r="0" g="0" b="0"/>
+        </a:effectRef>
+        <a:fontRef idx="minor">
+          <a:schemeClr val="lt1"/>
+        </a:fontRef>
+      </dsp:style>
+      <dsp:txBody>
+        <a:bodyPr spcFirstLastPara="0" vert="horz" wrap="square" lIns="176393" tIns="0" rIns="176393" bIns="0" numCol="1" spcCol="1270" anchor="ctr" anchorCtr="0">
+          <a:noAutofit/>
+        </a:bodyPr>
+        <a:lstStyle/>
+        <a:p>
+          <a:pPr marL="0" lvl="0" indent="0" algn="l" defTabSz="755650">
+            <a:lnSpc>
+              <a:spcPct val="90000"/>
+            </a:lnSpc>
+            <a:spcBef>
+              <a:spcPct val="0"/>
+            </a:spcBef>
+            <a:spcAft>
+              <a:spcPct val="35000"/>
+            </a:spcAft>
+            <a:buNone/>
+          </a:pPr>
+          <a:r>
+            <a:rPr lang="en-US" sz="1700" kern="1200"/>
+            <a:t>Credentials</a:t>
+          </a:r>
+        </a:p>
+      </dsp:txBody>
+      <dsp:txXfrm>
+        <a:off x="357839" y="2012850"/>
+        <a:ext cx="4617787" cy="452844"/>
+      </dsp:txXfrm>
+    </dsp:sp>
+    <dsp:sp modelId="{C042A0AB-56D7-4051-8CAA-02D8D22FBF34}">
+      <dsp:nvSpPr>
+        <dsp:cNvPr id="0" name=""/>
+        <dsp:cNvSpPr/>
+      </dsp:nvSpPr>
+      <dsp:spPr>
+        <a:xfrm>
+          <a:off x="0" y="3304917"/>
+          <a:ext cx="6666833" cy="990675"/>
+        </a:xfrm>
+        <a:prstGeom prst="rect">
+          <a:avLst/>
+        </a:prstGeom>
+        <a:solidFill>
+          <a:schemeClr val="lt1">
+            <a:alpha val="90000"/>
+            <a:hueOff val="0"/>
+            <a:satOff val="0"/>
+            <a:lumOff val="0"/>
+            <a:alphaOff val="0"/>
+          </a:schemeClr>
+        </a:solidFill>
+        <a:ln w="12700" cap="flat" cmpd="sng" algn="ctr">
+          <a:solidFill>
+            <a:schemeClr val="accent2">
+              <a:hueOff val="4295743"/>
+              <a:satOff val="-12329"/>
+              <a:lumOff val="-19739"/>
+              <a:alphaOff val="0"/>
+            </a:schemeClr>
+          </a:solidFill>
+          <a:prstDash val="solid"/>
+          <a:miter lim="800000"/>
+        </a:ln>
+        <a:effectLst/>
+      </dsp:spPr>
+      <dsp:style>
+        <a:lnRef idx="1">
+          <a:scrgbClr r="0" g="0" b="0"/>
+        </a:lnRef>
+        <a:fillRef idx="1">
+          <a:scrgbClr r="0" g="0" b="0"/>
+        </a:fillRef>
+        <a:effectRef idx="0">
+          <a:scrgbClr r="0" g="0" b="0"/>
+        </a:effectRef>
+        <a:fontRef idx="minor"/>
+      </dsp:style>
+      <dsp:txBody>
+        <a:bodyPr spcFirstLastPara="0" vert="horz" wrap="square" lIns="517420" tIns="354076" rIns="517420" bIns="120904" numCol="1" spcCol="1270" anchor="t" anchorCtr="0">
+          <a:noAutofit/>
+        </a:bodyPr>
+        <a:lstStyle/>
+        <a:p>
+          <a:pPr marL="171450" lvl="1" indent="-171450" algn="l" defTabSz="755650">
+            <a:lnSpc>
+              <a:spcPct val="90000"/>
+            </a:lnSpc>
+            <a:spcBef>
+              <a:spcPct val="0"/>
+            </a:spcBef>
+            <a:spcAft>
+              <a:spcPct val="15000"/>
+            </a:spcAft>
+            <a:buChar char="•"/>
+          </a:pPr>
+          <a:r>
+            <a:rPr lang="en-US" sz="1700" kern="1200" dirty="0"/>
+            <a:t>9 puzzles &amp; Rust solutions</a:t>
+          </a:r>
+        </a:p>
+        <a:p>
+          <a:pPr marL="171450" lvl="1" indent="-171450" algn="l" defTabSz="755650">
+            <a:lnSpc>
+              <a:spcPct val="90000"/>
+            </a:lnSpc>
+            <a:spcBef>
+              <a:spcPct val="0"/>
+            </a:spcBef>
+            <a:spcAft>
+              <a:spcPct val="15000"/>
+            </a:spcAft>
+            <a:buChar char="•"/>
+          </a:pPr>
+          <a:r>
+            <a:rPr lang="en-US" sz="1700" kern="1200"/>
+            <a:t>Inspired by real code</a:t>
+          </a:r>
+        </a:p>
+      </dsp:txBody>
+      <dsp:txXfrm>
+        <a:off x="0" y="3304917"/>
+        <a:ext cx="6666833" cy="990675"/>
+      </dsp:txXfrm>
+    </dsp:sp>
+    <dsp:sp modelId="{A8242364-E586-4CC1-B19E-CA34A4E3326F}">
+      <dsp:nvSpPr>
+        <dsp:cNvPr id="0" name=""/>
+        <dsp:cNvSpPr/>
+      </dsp:nvSpPr>
+      <dsp:spPr>
+        <a:xfrm>
+          <a:off x="333341" y="3053997"/>
+          <a:ext cx="4666783" cy="501840"/>
+        </a:xfrm>
+        <a:prstGeom prst="roundRect">
+          <a:avLst/>
+        </a:prstGeom>
+        <a:gradFill rotWithShape="0">
+          <a:gsLst>
+            <a:gs pos="0">
+              <a:schemeClr val="accent2">
+                <a:hueOff val="4295743"/>
+                <a:satOff val="-12329"/>
+                <a:lumOff val="-19739"/>
+                <a:alphaOff val="0"/>
+                <a:satMod val="103000"/>
+                <a:lumMod val="102000"/>
+                <a:tint val="94000"/>
+              </a:schemeClr>
+            </a:gs>
+            <a:gs pos="50000">
+              <a:schemeClr val="accent2">
+                <a:hueOff val="4295743"/>
+                <a:satOff val="-12329"/>
+                <a:lumOff val="-19739"/>
+                <a:alphaOff val="0"/>
+                <a:satMod val="110000"/>
+                <a:lumMod val="100000"/>
+                <a:shade val="100000"/>
+              </a:schemeClr>
+            </a:gs>
+            <a:gs pos="100000">
+              <a:schemeClr val="accent2">
+                <a:hueOff val="4295743"/>
+                <a:satOff val="-12329"/>
+                <a:lumOff val="-19739"/>
+                <a:alphaOff val="0"/>
+                <a:lumMod val="99000"/>
+                <a:satMod val="120000"/>
+                <a:shade val="78000"/>
+              </a:schemeClr>
+            </a:gs>
+          </a:gsLst>
+          <a:lin ang="5400000" scaled="0"/>
+        </a:gradFill>
+        <a:ln>
+          <a:noFill/>
+        </a:ln>
+        <a:effectLst/>
+      </dsp:spPr>
+      <dsp:style>
+        <a:lnRef idx="0">
+          <a:scrgbClr r="0" g="0" b="0"/>
+        </a:lnRef>
+        <a:fillRef idx="3">
+          <a:scrgbClr r="0" g="0" b="0"/>
+        </a:fillRef>
+        <a:effectRef idx="2">
+          <a:scrgbClr r="0" g="0" b="0"/>
+        </a:effectRef>
+        <a:fontRef idx="minor">
+          <a:schemeClr val="lt1"/>
+        </a:fontRef>
+      </dsp:style>
+      <dsp:txBody>
+        <a:bodyPr spcFirstLastPara="0" vert="horz" wrap="square" lIns="176393" tIns="0" rIns="176393" bIns="0" numCol="1" spcCol="1270" anchor="ctr" anchorCtr="0">
+          <a:noAutofit/>
+        </a:bodyPr>
+        <a:lstStyle/>
+        <a:p>
+          <a:pPr marL="0" lvl="0" indent="0" algn="l" defTabSz="755650">
+            <a:lnSpc>
+              <a:spcPct val="90000"/>
+            </a:lnSpc>
+            <a:spcBef>
+              <a:spcPct val="0"/>
+            </a:spcBef>
+            <a:spcAft>
+              <a:spcPct val="35000"/>
+            </a:spcAft>
+            <a:buNone/>
+          </a:pPr>
+          <a:r>
+            <a:rPr lang="en-US" sz="1700" kern="1200" dirty="0"/>
+            <a:t>Format</a:t>
+          </a:r>
+        </a:p>
+      </dsp:txBody>
+      <dsp:txXfrm>
+        <a:off x="357839" y="3078495"/>
+        <a:ext cx="4617787" cy="452844"/>
+      </dsp:txXfrm>
+    </dsp:sp>
+    <dsp:sp modelId="{F1552565-5149-4042-84F4-29E24D064AC6}">
+      <dsp:nvSpPr>
+        <dsp:cNvPr id="0" name=""/>
+        <dsp:cNvSpPr/>
+      </dsp:nvSpPr>
+      <dsp:spPr>
+        <a:xfrm>
+          <a:off x="0" y="4638312"/>
+          <a:ext cx="6666833" cy="722925"/>
+        </a:xfrm>
+        <a:prstGeom prst="rect">
+          <a:avLst/>
+        </a:prstGeom>
+        <a:solidFill>
+          <a:schemeClr val="lt1">
+            <a:alpha val="90000"/>
+            <a:hueOff val="0"/>
+            <a:satOff val="0"/>
+            <a:lumOff val="0"/>
+            <a:alphaOff val="0"/>
+          </a:schemeClr>
+        </a:solidFill>
+        <a:ln w="12700" cap="flat" cmpd="sng" algn="ctr">
+          <a:solidFill>
+            <a:schemeClr val="accent2">
+              <a:hueOff val="6443614"/>
+              <a:satOff val="-18493"/>
+              <a:lumOff val="-29609"/>
+              <a:alphaOff val="0"/>
+            </a:schemeClr>
+          </a:solidFill>
+          <a:prstDash val="solid"/>
+          <a:miter lim="800000"/>
+        </a:ln>
+        <a:effectLst/>
+      </dsp:spPr>
+      <dsp:style>
+        <a:lnRef idx="1">
+          <a:scrgbClr r="0" g="0" b="0"/>
+        </a:lnRef>
+        <a:fillRef idx="1">
+          <a:scrgbClr r="0" g="0" b="0"/>
+        </a:fillRef>
+        <a:effectRef idx="0">
+          <a:scrgbClr r="0" g="0" b="0"/>
+        </a:effectRef>
+        <a:fontRef idx="minor"/>
+      </dsp:style>
+      <dsp:txBody>
+        <a:bodyPr spcFirstLastPara="0" vert="horz" wrap="square" lIns="517420" tIns="354076" rIns="517420" bIns="120904" numCol="1" spcCol="1270" anchor="t" anchorCtr="0">
+          <a:noAutofit/>
+        </a:bodyPr>
+        <a:lstStyle/>
+        <a:p>
+          <a:pPr marL="171450" lvl="1" indent="-171450" algn="l" defTabSz="755650">
+            <a:lnSpc>
+              <a:spcPct val="90000"/>
+            </a:lnSpc>
+            <a:spcBef>
+              <a:spcPct val="0"/>
+            </a:spcBef>
+            <a:spcAft>
+              <a:spcPct val="15000"/>
+            </a:spcAft>
+            <a:buChar char="•"/>
+          </a:pPr>
+          <a:r>
+            <a:rPr lang="en-US" sz="1700" kern="1200" dirty="0"/>
+            <a:t>Except: “Define object-oriented.”</a:t>
+          </a:r>
+        </a:p>
+      </dsp:txBody>
+      <dsp:txXfrm>
+        <a:off x="0" y="4638312"/>
+        <a:ext cx="6666833" cy="722925"/>
+      </dsp:txXfrm>
+    </dsp:sp>
+    <dsp:sp modelId="{E0909B83-00BB-477F-8519-6D88D24AED2F}">
+      <dsp:nvSpPr>
+        <dsp:cNvPr id="0" name=""/>
+        <dsp:cNvSpPr/>
+      </dsp:nvSpPr>
+      <dsp:spPr>
+        <a:xfrm>
+          <a:off x="333341" y="4387392"/>
+          <a:ext cx="4666783" cy="501840"/>
+        </a:xfrm>
+        <a:prstGeom prst="roundRect">
+          <a:avLst/>
+        </a:prstGeom>
+        <a:gradFill rotWithShape="0">
+          <a:gsLst>
+            <a:gs pos="0">
+              <a:schemeClr val="accent2">
+                <a:hueOff val="6443614"/>
+                <a:satOff val="-18493"/>
+                <a:lumOff val="-29609"/>
+                <a:alphaOff val="0"/>
+                <a:satMod val="103000"/>
+                <a:lumMod val="102000"/>
+                <a:tint val="94000"/>
+              </a:schemeClr>
+            </a:gs>
+            <a:gs pos="50000">
+              <a:schemeClr val="accent2">
+                <a:hueOff val="6443614"/>
+                <a:satOff val="-18493"/>
+                <a:lumOff val="-29609"/>
+                <a:alphaOff val="0"/>
+                <a:satMod val="110000"/>
+                <a:lumMod val="100000"/>
+                <a:shade val="100000"/>
+              </a:schemeClr>
+            </a:gs>
+            <a:gs pos="100000">
+              <a:schemeClr val="accent2">
+                <a:hueOff val="6443614"/>
+                <a:satOff val="-18493"/>
+                <a:lumOff val="-29609"/>
+                <a:alphaOff val="0"/>
+                <a:lumMod val="99000"/>
+                <a:satMod val="120000"/>
+                <a:shade val="78000"/>
+              </a:schemeClr>
+            </a:gs>
+          </a:gsLst>
+          <a:lin ang="5400000" scaled="0"/>
+        </a:gradFill>
+        <a:ln>
+          <a:noFill/>
+        </a:ln>
+        <a:effectLst/>
+      </dsp:spPr>
+      <dsp:style>
+        <a:lnRef idx="0">
+          <a:scrgbClr r="0" g="0" b="0"/>
+        </a:lnRef>
+        <a:fillRef idx="3">
+          <a:scrgbClr r="0" g="0" b="0"/>
+        </a:fillRef>
+        <a:effectRef idx="2">
+          <a:scrgbClr r="0" g="0" b="0"/>
+        </a:effectRef>
+        <a:fontRef idx="minor">
+          <a:schemeClr val="lt1"/>
+        </a:fontRef>
+      </dsp:style>
+      <dsp:txBody>
+        <a:bodyPr spcFirstLastPara="0" vert="horz" wrap="square" lIns="176393" tIns="0" rIns="176393" bIns="0" numCol="1" spcCol="1270" anchor="ctr" anchorCtr="0">
+          <a:noAutofit/>
+        </a:bodyPr>
+        <a:lstStyle/>
+        <a:p>
+          <a:pPr marL="0" lvl="0" indent="0" algn="l" defTabSz="755650">
+            <a:lnSpc>
+              <a:spcPct val="90000"/>
+            </a:lnSpc>
+            <a:spcBef>
+              <a:spcPct val="0"/>
+            </a:spcBef>
+            <a:spcAft>
+              <a:spcPct val="35000"/>
+            </a:spcAft>
+            <a:buNone/>
+          </a:pPr>
+          <a:r>
+            <a:rPr lang="en-US" sz="1700" kern="1200"/>
+            <a:t>Discussion welcome</a:t>
+          </a:r>
+        </a:p>
+      </dsp:txBody>
+      <dsp:txXfrm>
+        <a:off x="357839" y="4411890"/>
+        <a:ext cx="4617787" cy="452844"/>
+      </dsp:txXfrm>
+    </dsp:sp>
+  </dsp:spTree>
+</dsp:drawing>
+</file>
+
+<file path=ppt/diagrams/layout1.xml><?xml version="1.0" encoding="utf-8"?>
+<dgm:layoutDef xmlns:dgm="http://schemas.openxmlformats.org/drawingml/2006/diagram" xmlns:a="http://schemas.openxmlformats.org/drawingml/2006/main" uniqueId="urn:microsoft.com/office/officeart/2005/8/layout/list1">
+  <dgm:title val=""/>
+  <dgm:desc val=""/>
+  <dgm:catLst>
+    <dgm:cat type="list" pri="4000"/>
+  </dgm:catLst>
+  <dgm:sampData>
+    <dgm:dataModel>
+      <dgm:ptLst>
+        <dgm:pt modelId="0" type="doc"/>
+        <dgm:pt modelId="1">
+          <dgm:prSet phldr="1"/>
+        </dgm:pt>
+        <dgm:pt modelId="2">
+          <dgm:prSet phldr="1"/>
+        </dgm:pt>
+        <dgm:pt modelId="3">
+          <dgm:prSet phldr="1"/>
+        </dgm:pt>
+      </dgm:ptLst>
+      <dgm:cxnLst>
+        <dgm:cxn modelId="4" srcId="0" destId="1" srcOrd="0" destOrd="0"/>
+        <dgm:cxn modelId="5" srcId="0" destId="2" srcOrd="1" destOrd="0"/>
+        <dgm:cxn modelId="6" srcId="0" destId="3" srcOrd="2" destOrd="0"/>
+      </dgm:cxnLst>
+      <dgm:bg/>
+      <dgm:whole/>
+    </dgm:dataModel>
+  </dgm:sampData>
+  <dgm:styleData>
+    <dgm:dataModel>
+      <dgm:ptLst>
+        <dgm:pt modelId="0" type="doc"/>
+        <dgm:pt modelId="1"/>
+        <dgm:pt modelId="2"/>
+      </dgm:ptLst>
+      <dgm:cxnLst>
+        <dgm:cxn modelId="4" srcId="0" destId="1" srcOrd="0" destOrd="0"/>
+        <dgm:cxn modelId="5" srcId="0" destId="2" srcOrd="1" destOrd="0"/>
+      </dgm:cxnLst>
+      <dgm:bg/>
+      <dgm:whole/>
+    </dgm:dataModel>
+  </dgm:styleData>
+  <dgm:clrData>
+    <dgm:dataModel>
+      <dgm:ptLst>
+        <dgm:pt modelId="0" type="doc"/>
+        <dgm:pt modelId="1"/>
+        <dgm:pt modelId="2"/>
+        <dgm:pt modelId="3"/>
+        <dgm:pt modelId="4"/>
+      </dgm:ptLst>
+      <dgm:cxnLst>
+        <dgm:cxn modelId="5" srcId="0" destId="1" srcOrd="0" destOrd="0"/>
+        <dgm:cxn modelId="6" srcId="0" destId="2" srcOrd="1" destOrd="0"/>
+        <dgm:cxn modelId="7" srcId="0" destId="3" srcOrd="2" destOrd="0"/>
+        <dgm:cxn modelId="8" srcId="0" destId="4" srcOrd="3" destOrd="0"/>
+      </dgm:cxnLst>
+      <dgm:bg/>
+      <dgm:whole/>
+    </dgm:dataModel>
+  </dgm:clrData>
+  <dgm:layoutNode name="linear">
+    <dgm:varLst>
+      <dgm:dir/>
+      <dgm:animLvl val="lvl"/>
+      <dgm:resizeHandles val="exact"/>
+    </dgm:varLst>
+    <dgm:choose name="Name0">
+      <dgm:if name="Name1" func="var" arg="dir" op="equ" val="norm">
+        <dgm:alg type="lin">
+          <dgm:param type="linDir" val="fromT"/>
+          <dgm:param type="vertAlign" val="mid"/>
+          <dgm:param type="horzAlign" val="l"/>
+          <dgm:param type="nodeHorzAlign" val="l"/>
+        </dgm:alg>
+      </dgm:if>
+      <dgm:else name="Name2">
+        <dgm:alg type="lin">
+          <dgm:param type="linDir" val="fromT"/>
+          <dgm:param type="vertAlign" val="mid"/>
+          <dgm:param type="horzAlign" val="r"/>
+          <dgm:param type="nodeHorzAlign" val="r"/>
+        </dgm:alg>
+      </dgm:else>
+    </dgm:choose>
+    <dgm:shape xmlns:r="http://schemas.openxmlformats.org/officeDocument/2006/relationships" r:blip="">
+      <dgm:adjLst/>
+    </dgm:shape>
+    <dgm:presOf/>
+    <dgm:constrLst>
+      <dgm:constr type="w" for="ch" forName="parentLin" refType="w"/>
+      <dgm:constr type="h" for="ch" forName="parentLin" val="INF"/>
+      <dgm:constr type="w" for="des" forName="parentLeftMargin" refType="w" fact="0.05"/>
+      <dgm:constr type="w" for="des" forName="parentText" refType="w" fact="0.7"/>
+      <dgm:constr type="h" for="des" forName="parentText" refType="primFontSz" refFor="des" refForName="parentText" fact="0.82"/>
+      <dgm:constr type="h" for="ch" forName="negativeSpace" refType="primFontSz" refFor="des" refForName="parentText" fact="-0.41"/>
+      <dgm:constr type="h" for="ch" forName="negativeSpace" refType="h" refFor="des" refForName="parentText" op="lte" fact="-0.82"/>
+      <dgm:constr type="h" for="ch" forName="negativeSpace" refType="h" refFor="des" refForName="parentText" op="gte" fact="-0.82"/>
+      <dgm:constr type="w" for="ch" forName="childText" refType="w"/>
+      <dgm:constr type="h" for="ch" forName="childText" refType="primFontSz" refFor="des" refForName="parentText" fact="0.7"/>
+      <dgm:constr type="primFontSz" for="des" forName="parentText" val="65"/>
+      <dgm:constr type="primFontSz" for="ch" forName="childText" refType="primFontSz" refFor="des" refForName="parentText"/>
+      <dgm:constr type="tMarg" for="ch" forName="childText" refType="primFontSz" refFor="des" refForName="parentText" fact="1.64"/>
+      <dgm:constr type="tMarg" for="ch" forName="childText" refType="h" refFor="des" refForName="parentText" op="lte" fact="3.28"/>
+      <dgm:constr type="tMarg" for="ch" forName="childText" refType="h" refFor="des" refForName="parentText" op="gte" fact="3.28"/>
+      <dgm:constr type="lMarg" for="ch" forName="childText" refType="w" fact="0.22"/>
+      <dgm:constr type="rMarg" for="ch" forName="childText" refType="lMarg" refFor="ch" refForName="childText"/>
+      <dgm:constr type="lMarg" for="des" forName="parentText" refType="w" fact="0.075"/>
+      <dgm:constr type="rMarg" for="des" forName="parentText" refType="lMarg" refFor="des" refForName="parentText"/>
+      <dgm:constr type="h" for="ch" forName="spaceBetweenRectangles" refType="primFontSz" refFor="des" refForName="parentText" fact="0.15"/>
+    </dgm:constrLst>
+    <dgm:ruleLst>
+      <dgm:rule type="primFontSz" for="des" forName="parentText" val="5" fact="NaN" max="NaN"/>
+    </dgm:ruleLst>
+    <dgm:forEach name="Name3" axis="ch" ptType="node">
+      <dgm:layoutNode name="parentLin">
+        <dgm:choose name="Name4">
+          <dgm:if name="Name5" func="var" arg="dir" op="equ" val="norm">
+            <dgm:alg type="lin">
+              <dgm:param type="linDir" val="fromL"/>
+              <dgm:param type="horzAlign" val="l"/>
+              <dgm:param type="nodeHorzAlign" val="l"/>
+            </dgm:alg>
+          </dgm:if>
+          <dgm:else name="Name6">
+            <dgm:alg type="lin">
+              <dgm:param type="linDir" val="fromR"/>
+              <dgm:param type="horzAlign" val="r"/>
+              <dgm:param type="nodeHorzAlign" val="r"/>
+            </dgm:alg>
+          </dgm:else>
+        </dgm:choose>
+        <dgm:shape xmlns:r="http://schemas.openxmlformats.org/officeDocument/2006/relationships" r:blip="">
+          <dgm:adjLst/>
+        </dgm:shape>
+        <dgm:presOf/>
+        <dgm:constrLst/>
+        <dgm:ruleLst/>
+        <dgm:layoutNode name="parentLeftMargin">
+          <dgm:alg type="sp"/>
+          <dgm:shape xmlns:r="http://schemas.openxmlformats.org/officeDocument/2006/relationships" type="rect" r:blip="" hideGeom="1">
+            <dgm:adjLst/>
+          </dgm:shape>
+          <dgm:presOf axis="self"/>
+          <dgm:constrLst>
+            <dgm:constr type="h"/>
+          </dgm:constrLst>
+          <dgm:ruleLst/>
+        </dgm:layoutNode>
+        <dgm:layoutNode name="parentText" styleLbl="node1">
+          <dgm:varLst>
+            <dgm:chMax val="0"/>
+            <dgm:bulletEnabled val="1"/>
+          </dgm:varLst>
+          <dgm:choose name="Name7">
+            <dgm:if name="Name8" func="var" arg="dir" op="equ" val="norm">
+              <dgm:alg type="tx">
+                <dgm:param type="parTxLTRAlign" val="l"/>
+                <dgm:param type="parTxRTLAlign" val="l"/>
+              </dgm:alg>
+            </dgm:if>
+            <dgm:else name="Name9">
+              <dgm:alg type="tx">
+                <dgm:param type="parTxLTRAlign" val="r"/>
+                <dgm:param type="parTxRTLAlign" val="r"/>
+              </dgm:alg>
+            </dgm:else>
+          </dgm:choose>
+          <dgm:shape xmlns:r="http://schemas.openxmlformats.org/officeDocument/2006/relationships" type="roundRect" r:blip="">
+            <dgm:adjLst/>
+          </dgm:shape>
+          <dgm:presOf axis="self" ptType="node"/>
+          <dgm:constrLst>
+            <dgm:constr type="tMarg"/>
+            <dgm:constr type="bMarg"/>
+          </dgm:constrLst>
+          <dgm:ruleLst/>
+        </dgm:layoutNode>
+      </dgm:layoutNode>
+      <dgm:layoutNode name="negativeSpace">
+        <dgm:alg type="sp"/>
+        <dgm:shape xmlns:r="http://schemas.openxmlformats.org/officeDocument/2006/relationships" r:blip="">
+          <dgm:adjLst/>
+        </dgm:shape>
+        <dgm:presOf/>
+        <dgm:constrLst/>
+        <dgm:ruleLst/>
+      </dgm:layoutNode>
+      <dgm:layoutNode name="childText" styleLbl="conFgAcc1">
+        <dgm:varLst>
+          <dgm:bulletEnabled val="1"/>
+        </dgm:varLst>
+        <dgm:alg type="tx">
+          <dgm:param type="stBulletLvl" val="1"/>
+        </dgm:alg>
+        <dgm:shape xmlns:r="http://schemas.openxmlformats.org/officeDocument/2006/relationships" type="rect" r:blip="" zOrderOff="-2">
+          <dgm:adjLst/>
+        </dgm:shape>
+        <dgm:presOf axis="des" ptType="node"/>
+        <dgm:constrLst>
+          <dgm:constr type="secFontSz" refType="primFontSz"/>
+        </dgm:constrLst>
+        <dgm:ruleLst>
+          <dgm:rule type="h" val="INF" fact="NaN" max="NaN"/>
+        </dgm:ruleLst>
+      </dgm:layoutNode>
+      <dgm:forEach name="Name10" axis="followSib" ptType="sibTrans" cnt="1">
+        <dgm:layoutNode name="spaceBetweenRectangles">
+          <dgm:alg type="sp"/>
+          <dgm:shape xmlns:r="http://schemas.openxmlformats.org/officeDocument/2006/relationships" r:blip="">
+            <dgm:adjLst/>
+          </dgm:shape>
+          <dgm:presOf/>
+          <dgm:constrLst/>
+          <dgm:ruleLst/>
+        </dgm:layoutNode>
+      </dgm:forEach>
+    </dgm:forEach>
+  </dgm:layoutNode>
+</dgm:layoutDef>
+</file>
+
+<file path=ppt/diagrams/layout2.xml><?xml version="1.0" encoding="utf-8"?>
+<dgm:layoutDef xmlns:dgm="http://schemas.openxmlformats.org/drawingml/2006/diagram" xmlns:a="http://schemas.openxmlformats.org/drawingml/2006/main" uniqueId="urn:microsoft.com/office/officeart/2005/8/layout/list1">
+  <dgm:title val=""/>
+  <dgm:desc val=""/>
+  <dgm:catLst>
+    <dgm:cat type="list" pri="4000"/>
+  </dgm:catLst>
+  <dgm:sampData>
+    <dgm:dataModel>
+      <dgm:ptLst>
+        <dgm:pt modelId="0" type="doc"/>
+        <dgm:pt modelId="1">
+          <dgm:prSet phldr="1"/>
+        </dgm:pt>
+        <dgm:pt modelId="2">
+          <dgm:prSet phldr="1"/>
+        </dgm:pt>
+        <dgm:pt modelId="3">
+          <dgm:prSet phldr="1"/>
+        </dgm:pt>
+      </dgm:ptLst>
+      <dgm:cxnLst>
+        <dgm:cxn modelId="4" srcId="0" destId="1" srcOrd="0" destOrd="0"/>
+        <dgm:cxn modelId="5" srcId="0" destId="2" srcOrd="1" destOrd="0"/>
+        <dgm:cxn modelId="6" srcId="0" destId="3" srcOrd="2" destOrd="0"/>
+      </dgm:cxnLst>
+      <dgm:bg/>
+      <dgm:whole/>
+    </dgm:dataModel>
+  </dgm:sampData>
+  <dgm:styleData>
+    <dgm:dataModel>
+      <dgm:ptLst>
+        <dgm:pt modelId="0" type="doc"/>
+        <dgm:pt modelId="1"/>
+        <dgm:pt modelId="2"/>
+      </dgm:ptLst>
+      <dgm:cxnLst>
+        <dgm:cxn modelId="4" srcId="0" destId="1" srcOrd="0" destOrd="0"/>
+        <dgm:cxn modelId="5" srcId="0" destId="2" srcOrd="1" destOrd="0"/>
+      </dgm:cxnLst>
+      <dgm:bg/>
+      <dgm:whole/>
+    </dgm:dataModel>
+  </dgm:styleData>
+  <dgm:clrData>
+    <dgm:dataModel>
+      <dgm:ptLst>
+        <dgm:pt modelId="0" type="doc"/>
+        <dgm:pt modelId="1"/>
+        <dgm:pt modelId="2"/>
+        <dgm:pt modelId="3"/>
+        <dgm:pt modelId="4"/>
+      </dgm:ptLst>
+      <dgm:cxnLst>
+        <dgm:cxn modelId="5" srcId="0" destId="1" srcOrd="0" destOrd="0"/>
+        <dgm:cxn modelId="6" srcId="0" destId="2" srcOrd="1" destOrd="0"/>
+        <dgm:cxn modelId="7" srcId="0" destId="3" srcOrd="2" destOrd="0"/>
+        <dgm:cxn modelId="8" srcId="0" destId="4" srcOrd="3" destOrd="0"/>
+      </dgm:cxnLst>
+      <dgm:bg/>
+      <dgm:whole/>
+    </dgm:dataModel>
+  </dgm:clrData>
+  <dgm:layoutNode name="linear">
+    <dgm:varLst>
+      <dgm:dir/>
+      <dgm:animLvl val="lvl"/>
+      <dgm:resizeHandles val="exact"/>
+    </dgm:varLst>
+    <dgm:choose name="Name0">
+      <dgm:if name="Name1" func="var" arg="dir" op="equ" val="norm">
+        <dgm:alg type="lin">
+          <dgm:param type="linDir" val="fromT"/>
+          <dgm:param type="vertAlign" val="mid"/>
+          <dgm:param type="horzAlign" val="l"/>
+          <dgm:param type="nodeHorzAlign" val="l"/>
+        </dgm:alg>
+      </dgm:if>
+      <dgm:else name="Name2">
+        <dgm:alg type="lin">
+          <dgm:param type="linDir" val="fromT"/>
+          <dgm:param type="vertAlign" val="mid"/>
+          <dgm:param type="horzAlign" val="r"/>
+          <dgm:param type="nodeHorzAlign" val="r"/>
+        </dgm:alg>
+      </dgm:else>
+    </dgm:choose>
+    <dgm:shape xmlns:r="http://schemas.openxmlformats.org/officeDocument/2006/relationships" r:blip="">
+      <dgm:adjLst/>
+    </dgm:shape>
+    <dgm:presOf/>
+    <dgm:constrLst>
+      <dgm:constr type="w" for="ch" forName="parentLin" refType="w"/>
+      <dgm:constr type="h" for="ch" forName="parentLin" val="INF"/>
+      <dgm:constr type="w" for="des" forName="parentLeftMargin" refType="w" fact="0.05"/>
+      <dgm:constr type="w" for="des" forName="parentText" refType="w" fact="0.7"/>
+      <dgm:constr type="h" for="des" forName="parentText" refType="primFontSz" refFor="des" refForName="parentText" fact="0.82"/>
+      <dgm:constr type="h" for="ch" forName="negativeSpace" refType="primFontSz" refFor="des" refForName="parentText" fact="-0.41"/>
+      <dgm:constr type="h" for="ch" forName="negativeSpace" refType="h" refFor="des" refForName="parentText" op="lte" fact="-0.82"/>
+      <dgm:constr type="h" for="ch" forName="negativeSpace" refType="h" refFor="des" refForName="parentText" op="gte" fact="-0.82"/>
+      <dgm:constr type="w" for="ch" forName="childText" refType="w"/>
+      <dgm:constr type="h" for="ch" forName="childText" refType="primFontSz" refFor="des" refForName="parentText" fact="0.7"/>
+      <dgm:constr type="primFontSz" for="des" forName="parentText" val="65"/>
+      <dgm:constr type="primFontSz" for="ch" forName="childText" refType="primFontSz" refFor="des" refForName="parentText"/>
+      <dgm:constr type="tMarg" for="ch" forName="childText" refType="primFontSz" refFor="des" refForName="parentText" fact="1.64"/>
+      <dgm:constr type="tMarg" for="ch" forName="childText" refType="h" refFor="des" refForName="parentText" op="lte" fact="3.28"/>
+      <dgm:constr type="tMarg" for="ch" forName="childText" refType="h" refFor="des" refForName="parentText" op="gte" fact="3.28"/>
+      <dgm:constr type="lMarg" for="ch" forName="childText" refType="w" fact="0.22"/>
+      <dgm:constr type="rMarg" for="ch" forName="childText" refType="lMarg" refFor="ch" refForName="childText"/>
+      <dgm:constr type="lMarg" for="des" forName="parentText" refType="w" fact="0.075"/>
+      <dgm:constr type="rMarg" for="des" forName="parentText" refType="lMarg" refFor="des" refForName="parentText"/>
+      <dgm:constr type="h" for="ch" forName="spaceBetweenRectangles" refType="primFontSz" refFor="des" refForName="parentText" fact="0.15"/>
+    </dgm:constrLst>
+    <dgm:ruleLst>
+      <dgm:rule type="primFontSz" for="des" forName="parentText" val="5" fact="NaN" max="NaN"/>
+    </dgm:ruleLst>
+    <dgm:forEach name="Name3" axis="ch" ptType="node">
+      <dgm:layoutNode name="parentLin">
+        <dgm:choose name="Name4">
+          <dgm:if name="Name5" func="var" arg="dir" op="equ" val="norm">
+            <dgm:alg type="lin">
+              <dgm:param type="linDir" val="fromL"/>
+              <dgm:param type="horzAlign" val="l"/>
+              <dgm:param type="nodeHorzAlign" val="l"/>
+            </dgm:alg>
+          </dgm:if>
+          <dgm:else name="Name6">
+            <dgm:alg type="lin">
+              <dgm:param type="linDir" val="fromR"/>
+              <dgm:param type="horzAlign" val="r"/>
+              <dgm:param type="nodeHorzAlign" val="r"/>
+            </dgm:alg>
+          </dgm:else>
+        </dgm:choose>
+        <dgm:shape xmlns:r="http://schemas.openxmlformats.org/officeDocument/2006/relationships" r:blip="">
+          <dgm:adjLst/>
+        </dgm:shape>
+        <dgm:presOf/>
+        <dgm:constrLst/>
+        <dgm:ruleLst/>
+        <dgm:layoutNode name="parentLeftMargin">
+          <dgm:alg type="sp"/>
+          <dgm:shape xmlns:r="http://schemas.openxmlformats.org/officeDocument/2006/relationships" type="rect" r:blip="" hideGeom="1">
+            <dgm:adjLst/>
+          </dgm:shape>
+          <dgm:presOf axis="self"/>
+          <dgm:constrLst>
+            <dgm:constr type="h"/>
+          </dgm:constrLst>
+          <dgm:ruleLst/>
+        </dgm:layoutNode>
+        <dgm:layoutNode name="parentText" styleLbl="node1">
+          <dgm:varLst>
+            <dgm:chMax val="0"/>
+            <dgm:bulletEnabled val="1"/>
+          </dgm:varLst>
+          <dgm:choose name="Name7">
+            <dgm:if name="Name8" func="var" arg="dir" op="equ" val="norm">
+              <dgm:alg type="tx">
+                <dgm:param type="parTxLTRAlign" val="l"/>
+                <dgm:param type="parTxRTLAlign" val="l"/>
+              </dgm:alg>
+            </dgm:if>
+            <dgm:else name="Name9">
+              <dgm:alg type="tx">
+                <dgm:param type="parTxLTRAlign" val="r"/>
+                <dgm:param type="parTxRTLAlign" val="r"/>
+              </dgm:alg>
+            </dgm:else>
+          </dgm:choose>
+          <dgm:shape xmlns:r="http://schemas.openxmlformats.org/officeDocument/2006/relationships" type="roundRect" r:blip="">
+            <dgm:adjLst/>
+          </dgm:shape>
+          <dgm:presOf axis="self" ptType="node"/>
+          <dgm:constrLst>
+            <dgm:constr type="tMarg"/>
+            <dgm:constr type="bMarg"/>
+          </dgm:constrLst>
+          <dgm:ruleLst/>
+        </dgm:layoutNode>
+      </dgm:layoutNode>
+      <dgm:layoutNode name="negativeSpace">
+        <dgm:alg type="sp"/>
+        <dgm:shape xmlns:r="http://schemas.openxmlformats.org/officeDocument/2006/relationships" r:blip="">
+          <dgm:adjLst/>
+        </dgm:shape>
+        <dgm:presOf/>
+        <dgm:constrLst/>
+        <dgm:ruleLst/>
+      </dgm:layoutNode>
+      <dgm:layoutNode name="childText" styleLbl="conFgAcc1">
+        <dgm:varLst>
+          <dgm:bulletEnabled val="1"/>
+        </dgm:varLst>
+        <dgm:alg type="tx">
+          <dgm:param type="stBulletLvl" val="1"/>
+        </dgm:alg>
+        <dgm:shape xmlns:r="http://schemas.openxmlformats.org/officeDocument/2006/relationships" type="rect" r:blip="" zOrderOff="-2">
+          <dgm:adjLst/>
+        </dgm:shape>
+        <dgm:presOf axis="des" ptType="node"/>
+        <dgm:constrLst>
+          <dgm:constr type="secFontSz" refType="primFontSz"/>
+        </dgm:constrLst>
+        <dgm:ruleLst>
+          <dgm:rule type="h" val="INF" fact="NaN" max="NaN"/>
+        </dgm:ruleLst>
+      </dgm:layoutNode>
+      <dgm:forEach name="Name10" axis="followSib" ptType="sibTrans" cnt="1">
+        <dgm:layoutNode name="spaceBetweenRectangles">
+          <dgm:alg type="sp"/>
+          <dgm:shape xmlns:r="http://schemas.openxmlformats.org/officeDocument/2006/relationships" r:blip="">
+            <dgm:adjLst/>
+          </dgm:shape>
+          <dgm:presOf/>
+          <dgm:constrLst/>
+          <dgm:ruleLst/>
+        </dgm:layoutNode>
+      </dgm:forEach>
+    </dgm:forEach>
+  </dgm:layoutNode>
+</dgm:layoutDef>
+</file>
+
+<file path=ppt/diagrams/quickStyle1.xml><?xml version="1.0" encoding="utf-8"?>
+<dgm:styleDef xmlns:dgm="http://schemas.openxmlformats.org/drawingml/2006/diagram" xmlns:a="http://schemas.openxmlformats.org/drawingml/2006/main" uniqueId="urn:microsoft.com/office/officeart/2005/8/quickstyle/simple4">
+  <dgm:title val=""/>
+  <dgm:desc val=""/>
+  <dgm:catLst>
+    <dgm:cat type="simple" pri="10400"/>
+  </dgm:catLst>
+  <dgm:scene3d>
+    <a:camera prst="orthographicFront"/>
+    <a:lightRig rig="threePt" dir="t"/>
+  </dgm:scene3d>
+  <dgm:styleLbl name="node0">
+    <dgm:scene3d>
+      <a:camera prst="orthographicFront"/>
+      <a:lightRig rig="threePt" dir="t"/>
+    </dgm:scene3d>
+    <dgm:sp3d/>
+    <dgm:txPr/>
+    <dgm:style>
+      <a:lnRef idx="0">
+        <a:scrgbClr r="0" g="0" b="0"/>
+      </a:lnRef>
+      <a:fillRef idx="3">
+        <a:scrgbClr r="0" g="0" b="0"/>
+      </a:fillRef>
+      <a:effectRef idx="2">
+        <a:scrgbClr r="0" g="0" b="0"/>
+      </a:effectRef>
+      <a:fontRef idx="minor">
+        <a:schemeClr val="lt1"/>
+      </a:fontRef>
+    </dgm:style>
+  </dgm:styleLbl>
+  <dgm:styleLbl name="lnNode1">
+    <dgm:scene3d>
+      <a:camera prst="orthographicFront"/>
+      <a:lightRig rig="threePt" dir="t"/>
+    </dgm:scene3d>
+    <dgm:sp3d/>
+    <dgm:txPr/>
+    <dgm:style>
+      <a:lnRef idx="1">
+        <a:scrgbClr r="0" g="0" b="0"/>
+      </a:lnRef>
+      <a:fillRef idx="3">
+        <a:scrgbClr r="0" g="0" b="0"/>
+      </a:fillRef>
+      <a:effectRef idx="2">
+        <a:scrgbClr r="0" g="0" b="0"/>
+      </a:effectRef>
+      <a:fontRef idx="minor">
+        <a:schemeClr val="lt1"/>
+      </a:fontRef>
+    </dgm:style>
+  </dgm:styleLbl>
+  <dgm:styleLbl name="vennNode1">
+    <dgm:scene3d>
+      <a:camera prst="orthographicFront"/>
+      <a:lightRig rig="threePt" dir="t"/>
+    </dgm:scene3d>
+    <dgm:sp3d/>
+    <dgm:txPr/>
+    <dgm:style>
+      <a:lnRef idx="0">
+        <a:scrgbClr r="0" g="0" b="0"/>
+      </a:lnRef>
+      <a:fillRef idx="3">
+        <a:scrgbClr r="0" g="0" b="0"/>
+      </a:fillRef>
+      <a:effectRef idx="0">
+        <a:scrgbClr r="0" g="0" b="0"/>
+      </a:effectRef>
+      <a:fontRef idx="minor">
+        <a:schemeClr val="tx1"/>
+      </a:fontRef>
+    </dgm:style>
+  </dgm:styleLbl>
+  <dgm:styleLbl name="alignNode1">
+    <dgm:scene3d>
+      <a:camera prst="orthographicFront"/>
+      <a:lightRig rig="threePt" dir="t"/>
+    </dgm:scene3d>
+    <dgm:sp3d/>
+    <dgm:txPr/>
+    <dgm:style>
+      <a:lnRef idx="1">
+        <a:scrgbClr r="0" g="0" b="0"/>
+      </a:lnRef>
+      <a:fillRef idx="3">
+        <a:scrgbClr r="0" g="0" b="0"/>
+      </a:fillRef>
+      <a:effectRef idx="2">
+        <a:scrgbClr r="0" g="0" b="0"/>
+      </a:effectRef>
+      <a:fontRef idx="minor">
+        <a:schemeClr val="lt1"/>
+      </a:fontRef>
+    </dgm:style>
+  </dgm:styleLbl>
+  <dgm:styleLbl name="node1">
+    <dgm:scene3d>
+      <a:camera prst="orthographicFront"/>
+      <a:lightRig rig="threePt" dir="t"/>
+    </dgm:scene3d>
+    <dgm:sp3d/>
+    <dgm:txPr/>
+    <dgm:style>
+      <a:lnRef idx="0">
+        <a:scrgbClr r="0" g="0" b="0"/>
+      </a:lnRef>
+      <a:fillRef idx="3">
+        <a:scrgbClr r="0" g="0" b="0"/>
+      </a:fillRef>
+      <a:effectRef idx="2">
+        <a:scrgbClr r="0" g="0" b="0"/>
+      </a:effectRef>
+      <a:fontRef idx="minor">
+        <a:schemeClr val="lt1"/>
+      </a:fontRef>
+    </dgm:style>
+  </dgm:styleLbl>
+  <dgm:styleLbl name="node2">
+    <dgm:scene3d>
+      <a:camera prst="orthographicFront"/>
+      <a:lightRig rig="threePt" dir="t"/>
+    </dgm:scene3d>
+    <dgm:sp3d/>
+    <dgm:txPr/>
+    <dgm:style>
+      <a:lnRef idx="0">
+        <a:scrgbClr r="0" g="0" b="0"/>
+      </a:lnRef>
+      <a:fillRef idx="3">
+        <a:scrgbClr r="0" g="0" b="0"/>
+      </a:fillRef>
+      <a:effectRef idx="2">
+        <a:scrgbClr r="0" g="0" b="0"/>
+      </a:effectRef>
+      <a:fontRef idx="minor">
+        <a:schemeClr val="lt1"/>
+      </a:fontRef>
+    </dgm:style>
+  </dgm:styleLbl>
+  <dgm:styleLbl name="node3">
+    <dgm:scene3d>
+      <a:camera prst="orthographicFront"/>
+      <a:lightRig rig="threePt" dir="t"/>
+    </dgm:scene3d>
+    <dgm:sp3d/>
+    <dgm:txPr/>
+    <dgm:style>
+      <a:lnRef idx="0">
+        <a:scrgbClr r="0" g="0" b="0"/>
+      </a:lnRef>
+      <a:fillRef idx="3">
+        <a:scrgbClr r="0" g="0" b="0"/>
+      </a:fillRef>
+      <a:effectRef idx="2">
+        <a:scrgbClr r="0" g="0" b="0"/>
+      </a:effectRef>
+      <a:fontRef idx="minor">
+        <a:schemeClr val="lt1"/>
+      </a:fontRef>
+    </dgm:style>
+  </dgm:styleLbl>
+  <dgm:styleLbl name="node4">
+    <dgm:scene3d>
+      <a:camera prst="orthographicFront"/>
+      <a:lightRig rig="threePt" dir="t"/>
+    </dgm:scene3d>
+    <dgm:sp3d/>
+    <dgm:txPr/>
+    <dgm:style>
+      <a:lnRef idx="0">
+        <a:scrgbClr r="0" g="0" b="0"/>
+      </a:lnRef>
+      <a:fillRef idx="3">
+        <a:scrgbClr r="0" g="0" b="0"/>
+      </a:fillRef>
+      <a:effectRef idx="2">
+        <a:scrgbClr r="0" g="0" b="0"/>
+      </a:effectRef>
+      <a:fontRef idx="minor">
+        <a:schemeClr val="lt1"/>
+      </a:fontRef>
+    </dgm:style>
+  </dgm:styleLbl>
+  <dgm:styleLbl name="fgImgPlace1">
+    <dgm:scene3d>
+      <a:camera prst="orthographicFront"/>
+      <a:lightRig rig="threePt" dir="t"/>
+    </dgm:scene3d>
+    <dgm:sp3d/>
+    <dgm:txPr/>
+    <dgm:style>
+      <a:lnRef idx="0">
+        <a:scrgbClr r="0" g="0" b="0"/>
+      </a:lnRef>
+      <a:fillRef idx="1">
+        <a:scrgbClr r="0" g="0" b="0"/>
+      </a:fillRef>
+      <a:effectRef idx="2">
+        <a:scrgbClr r="0" g="0" b="0"/>
+      </a:effectRef>
+      <a:fontRef idx="minor"/>
+    </dgm:style>
+  </dgm:styleLbl>
+  <dgm:styleLbl name="alignImgPlace1">
+    <dgm:scene3d>
+      <a:camera prst="orthographicFront"/>
+      <a:lightRig rig="threePt" dir="t"/>
+    </dgm:scene3d>
+    <dgm:sp3d/>
+    <dgm:txPr/>
+    <dgm:style>
+      <a:lnRef idx="0">
+        <a:scrgbClr r="0" g="0" b="0"/>
+      </a:lnRef>
+      <a:fillRef idx="1">
+        <a:scrgbClr r="0" g="0" b="0"/>
+      </a:fillRef>
+      <a:effectRef idx="2">
+        <a:scrgbClr r="0" g="0" b="0"/>
+      </a:effectRef>
+      <a:fontRef idx="minor"/>
+    </dgm:style>
+  </dgm:styleLbl>
+  <dgm:styleLbl name="bgImgPlace1">
+    <dgm:scene3d>
+      <a:camera prst="orthographicFront"/>
+      <a:lightRig rig="threePt" dir="t"/>
+    </dgm:scene3d>
+    <dgm:sp3d/>
+    <dgm:txPr/>
+    <dgm:style>
+      <a:lnRef idx="0">
+        <a:scrgbClr r="0" g="0" b="0"/>
+      </a:lnRef>
+      <a:fillRef idx="1">
+        <a:scrgbClr r="0" g="0" b="0"/>
+      </a:fillRef>
+      <a:effectRef idx="2">
+        <a:scrgbClr r="0" g="0" b="0"/>
+      </a:effectRef>
+      <a:fontRef idx="minor"/>
+    </dgm:style>
+  </dgm:styleLbl>
+  <dgm:styleLbl name="sibTrans2D1">
+    <dgm:scene3d>
+      <a:camera prst="orthographicFront"/>
+      <a:lightRig rig="threePt" dir="t"/>
+    </dgm:scene3d>
+    <dgm:sp3d/>
+    <dgm:txPr/>
+    <dgm:style>
+      <a:lnRef idx="0">
+        <a:scrgbClr r="0" g="0" b="0"/>
+      </a:lnRef>
+      <a:fillRef idx="3">
+        <a:scrgbClr r="0" g="0" b="0"/>
+      </a:fillRef>
+      <a:effectRef idx="2">
+        <a:scrgbClr r="0" g="0" b="0"/>
+      </a:effectRef>
+      <a:fontRef idx="minor">
+        <a:schemeClr val="lt1"/>
+      </a:fontRef>
+    </dgm:style>
+  </dgm:styleLbl>
+  <dgm:styleLbl name="fgSibTrans2D1">
+    <dgm:scene3d>
+      <a:camera prst="orthographicFront"/>
+      <a:lightRig rig="threePt" dir="t"/>
+    </dgm:scene3d>
+    <dgm:sp3d/>
+    <dgm:txPr/>
+    <dgm:style>
+      <a:lnRef idx="0">
+        <a:scrgbClr r="0" g="0" b="0"/>
+      </a:lnRef>
+      <a:fillRef idx="3">
+        <a:scrgbClr r="0" g="0" b="0"/>
+      </a:fillRef>
+      <a:effectRef idx="2">
+        <a:scrgbClr r="0" g="0" b="0"/>
+      </a:effectRef>
+      <a:fontRef idx="minor">
+        <a:schemeClr val="lt1"/>
+      </a:fontRef>
+    </dgm:style>
+  </dgm:styleLbl>
+  <dgm:styleLbl name="bgSibTrans2D1">
+    <dgm:scene3d>
+      <a:camera prst="orthographicFront"/>
+      <a:lightRig rig="threePt" dir="t"/>
+    </dgm:scene3d>
+    <dgm:sp3d/>
+    <dgm:txPr/>
+    <dgm:style>
+      <a:lnRef idx="0">
+        <a:scrgbClr r="0" g="0" b="0"/>
+      </a:lnRef>
+      <a:fillRef idx="3">
+        <a:scrgbClr r="0" g="0" b="0"/>
+      </a:fillRef>
+      <a:effectRef idx="2">
+        <a:scrgbClr r="0" g="0" b="0"/>
+      </a:effectRef>
+      <a:fontRef idx="minor">
+        <a:schemeClr val="lt1"/>
+      </a:fontRef>
+    </dgm:style>
+  </dgm:styleLbl>
+  <dgm:styleLbl name="sibTrans1D1">
+    <dgm:scene3d>
+      <a:camera prst="orthographicFront"/>
+      <a:lightRig rig="threePt" dir="t"/>
+    </dgm:scene3d>
+    <dgm:sp3d/>
+    <dgm:txPr/>
+    <dgm:style>
+      <a:lnRef idx="1">
+        <a:scrgbClr r="0" g="0" b="0"/>
+      </a:lnRef>
+      <a:fillRef idx="0">
+        <a:scrgbClr r="0" g="0" b="0"/>
+      </a:fillRef>
+      <a:effectRef idx="0">
+        <a:scrgbClr r="0" g="0" b="0"/>
+      </a:effectRef>
+      <a:fontRef idx="minor"/>
+    </dgm:style>
+  </dgm:styleLbl>
+  <dgm:styleLbl name="callout">
+    <dgm:scene3d>
+      <a:camera prst="orthographicFront"/>
+      <a:lightRig rig="threePt" dir="t"/>
+    </dgm:scene3d>
+    <dgm:sp3d/>
+    <dgm:txPr/>
+    <dgm:style>
+      <a:lnRef idx="2">
+        <a:scrgbClr r="0" g="0" b="0"/>
+      </a:lnRef>
+      <a:fillRef idx="1">
+        <a:scrgbClr r="0" g="0" b="0"/>
+      </a:fillRef>
+      <a:effectRef idx="1">
+        <a:scrgbClr r="0" g="0" b="0"/>
+      </a:effectRef>
+      <a:fontRef idx="minor"/>
+    </dgm:style>
+  </dgm:styleLbl>
+  <dgm:styleLbl name="asst0">
+    <dgm:scene3d>
+      <a:camera prst="orthographicFront"/>
+      <a:lightRig rig="threePt" dir="t"/>
+    </dgm:scene3d>
+    <dgm:sp3d/>
+    <dgm:txPr/>
+    <dgm:style>
+      <a:lnRef idx="0">
+        <a:scrgbClr r="0" g="0" b="0"/>
+      </a:lnRef>
+      <a:fillRef idx="3">
+        <a:scrgbClr r="0" g="0" b="0"/>
+      </a:fillRef>
+      <a:effectRef idx="2">
+        <a:scrgbClr r="0" g="0" b="0"/>
+      </a:effectRef>
+      <a:fontRef idx="minor">
+        <a:schemeClr val="lt1"/>
+      </a:fontRef>
+    </dgm:style>
+  </dgm:styleLbl>
+  <dgm:styleLbl name="asst1">
+    <dgm:scene3d>
+      <a:camera prst="orthographicFront"/>
+      <a:lightRig rig="threePt" dir="t"/>
+    </dgm:scene3d>
+    <dgm:sp3d/>
+    <dgm:txPr/>
+    <dgm:style>
+      <a:lnRef idx="0">
+        <a:scrgbClr r="0" g="0" b="0"/>
+      </a:lnRef>
+      <a:fillRef idx="3">
+        <a:scrgbClr r="0" g="0" b="0"/>
+      </a:fillRef>
+      <a:effectRef idx="2">
+        <a:scrgbClr r="0" g="0" b="0"/>
+      </a:effectRef>
+      <a:fontRef idx="minor">
+        <a:schemeClr val="lt1"/>
+      </a:fontRef>
+    </dgm:style>
+  </dgm:styleLbl>
+  <dgm:styleLbl name="asst2">
+    <dgm:scene3d>
+      <a:camera prst="orthographicFront"/>
+      <a:lightRig rig="threePt" dir="t"/>
+    </dgm:scene3d>
+    <dgm:sp3d/>
+    <dgm:txPr/>
+    <dgm:style>
+      <a:lnRef idx="0">
+        <a:scrgbClr r="0" g="0" b="0"/>
+      </a:lnRef>
+      <a:fillRef idx="3">
+        <a:scrgbClr r="0" g="0" b="0"/>
+      </a:fillRef>
+      <a:effectRef idx="2">
+        <a:scrgbClr r="0" g="0" b="0"/>
+      </a:effectRef>
+      <a:fontRef idx="minor">
+        <a:schemeClr val="lt1"/>
+      </a:fontRef>
+    </dgm:style>
+  </dgm:styleLbl>
+  <dgm:styleLbl name="asst3">
+    <dgm:scene3d>
+      <a:camera prst="orthographicFront"/>
+      <a:lightRig rig="threePt" dir="t"/>
+    </dgm:scene3d>
+    <dgm:sp3d/>
+    <dgm:txPr/>
+    <dgm:style>
+      <a:lnRef idx="0">
+        <a:scrgbClr r="0" g="0" b="0"/>
+      </a:lnRef>
+      <a:fillRef idx="3">
+        <a:scrgbClr r="0" g="0" b="0"/>
+      </a:fillRef>
+      <a:effectRef idx="2">
+        <a:scrgbClr r="0" g="0" b="0"/>
+      </a:effectRef>
+      <a:fontRef idx="minor">
+        <a:schemeClr val="lt1"/>
+      </a:fontRef>
+    </dgm:style>
+  </dgm:styleLbl>
+  <dgm:styleLbl name="asst4">
+    <dgm:scene3d>
+      <a:camera prst="orthographicFront"/>
+      <a:lightRig rig="threePt" dir="t"/>
+    </dgm:scene3d>
+    <dgm:sp3d/>
+    <dgm:txPr/>
+    <dgm:style>
+      <a:lnRef idx="0">
+        <a:scrgbClr r="0" g="0" b="0"/>
+      </a:lnRef>
+      <a:fillRef idx="3">
+        <a:scrgbClr r="0" g="0" b="0"/>
+      </a:fillRef>
+      <a:effectRef idx="2">
+        <a:scrgbClr r="0" g="0" b="0"/>
+      </a:effectRef>
+      <a:fontRef idx="minor">
+        <a:schemeClr val="lt1"/>
+      </a:fontRef>
+    </dgm:style>
+  </dgm:styleLbl>
+  <dgm:styleLbl name="parChTrans2D1">
+    <dgm:scene3d>
+      <a:camera prst="orthographicFront"/>
+      <a:lightRig rig="threePt" dir="t"/>
+    </dgm:scene3d>
+    <dgm:sp3d/>
+    <dgm:txPr/>
+    <dgm:style>
+      <a:lnRef idx="0">
+        <a:scrgbClr r="0" g="0" b="0"/>
+      </a:lnRef>
+      <a:fillRef idx="3">
+        <a:scrgbClr r="0" g="0" b="0"/>
+      </a:fillRef>
+      <a:effectRef idx="2">
+        <a:scrgbClr r="0" g="0" b="0"/>
+      </a:effectRef>
+      <a:fontRef idx="minor">
+        <a:schemeClr val="lt1"/>
+      </a:fontRef>
+    </dgm:style>
+  </dgm:styleLbl>
+  <dgm:styleLbl name="parChTrans2D2">
+    <dgm:scene3d>
+      <a:camera prst="orthographicFront"/>
+      <a:lightRig rig="threePt" dir="t"/>
+    </dgm:scene3d>
+    <dgm:sp3d/>
+    <dgm:txPr/>
+    <dgm:style>
+      <a:lnRef idx="0">
+        <a:scrgbClr r="0" g="0" b="0"/>
+      </a:lnRef>
+      <a:fillRef idx="3">
+        <a:scrgbClr r="0" g="0" b="0"/>
+      </a:fillRef>
+      <a:effectRef idx="2">
+        <a:scrgbClr r="0" g="0" b="0"/>
+      </a:effectRef>
+      <a:fontRef idx="minor">
+        <a:schemeClr val="lt1"/>
+      </a:fontRef>
+    </dgm:style>
+  </dgm:styleLbl>
+  <dgm:styleLbl name="parChTrans2D3">
+    <dgm:scene3d>
+      <a:camera prst="orthographicFront"/>
+      <a:lightRig rig="threePt" dir="t"/>
+    </dgm:scene3d>
+    <dgm:sp3d/>
+    <dgm:txPr/>
+    <dgm:style>
+      <a:lnRef idx="1">
+        <a:scrgbClr r="0" g="0" b="0"/>
+      </a:lnRef>
+      <a:fillRef idx="3">
+        <a:scrgbClr r="0" g="0" b="0"/>
+      </a:fillRef>
+      <a:effectRef idx="2">
+        <a:scrgbClr r="0" g="0" b="0"/>
+      </a:effectRef>
+      <a:fontRef idx="minor">
+        <a:schemeClr val="lt1"/>
+      </a:fontRef>
+    </dgm:style>
+  </dgm:styleLbl>
+  <dgm:styleLbl name="parChTrans2D4">
+    <dgm:scene3d>
+      <a:camera prst="orthographicFront"/>
+      <a:lightRig rig="threePt" dir="t"/>
+    </dgm:scene3d>
+    <dgm:sp3d/>
+    <dgm:txPr/>
+    <dgm:style>
+      <a:lnRef idx="1">
+        <a:scrgbClr r="0" g="0" b="0"/>
+      </a:lnRef>
+      <a:fillRef idx="3">
+        <a:scrgbClr r="0" g="0" b="0"/>
+      </a:fillRef>
+      <a:effectRef idx="2">
+        <a:scrgbClr r="0" g="0" b="0"/>
+      </a:effectRef>
+      <a:fontRef idx="minor">
+        <a:schemeClr val="lt1"/>
+      </a:fontRef>
+    </dgm:style>
+  </dgm:styleLbl>
+  <dgm:styleLbl name="parChTrans1D1">
+    <dgm:scene3d>
+      <a:camera prst="orthographicFront"/>
+      <a:lightRig rig="threePt" dir="t"/>
+    </dgm:scene3d>
+    <dgm:sp3d/>
+    <dgm:txPr/>
+    <dgm:style>
+      <a:lnRef idx="1">
+        <a:scrgbClr r="0" g="0" b="0"/>
+      </a:lnRef>
+      <a:fillRef idx="0">
+        <a:scrgbClr r="0" g="0" b="0"/>
+      </a:fillRef>
+      <a:effectRef idx="0">
+        <a:scrgbClr r="0" g="0" b="0"/>
+      </a:effectRef>
+      <a:fontRef idx="minor"/>
+    </dgm:style>
+  </dgm:styleLbl>
+  <dgm:styleLbl name="parChTrans1D2">
+    <dgm:scene3d>
+      <a:camera prst="orthographicFront"/>
+      <a:lightRig rig="threePt" dir="t"/>
+    </dgm:scene3d>
+    <dgm:sp3d/>
+    <dgm:txPr/>
+    <dgm:style>
+      <a:lnRef idx="1">
+        <a:scrgbClr r="0" g="0" b="0"/>
+      </a:lnRef>
+      <a:fillRef idx="0">
+        <a:scrgbClr r="0" g="0" b="0"/>
+      </a:fillRef>
+      <a:effectRef idx="0">
+        <a:scrgbClr r="0" g="0" b="0"/>
+      </a:effectRef>
+      <a:fontRef idx="minor"/>
+    </dgm:style>
+  </dgm:styleLbl>
+  <dgm:styleLbl name="parChTrans1D3">
+    <dgm:scene3d>
+      <a:camera prst="orthographicFront"/>
+      <a:lightRig rig="threePt" dir="t"/>
+    </dgm:scene3d>
+    <dgm:sp3d/>
+    <dgm:txPr/>
+    <dgm:style>
+      <a:lnRef idx="1">
+        <a:scrgbClr r="0" g="0" b="0"/>
+      </a:lnRef>
+      <a:fillRef idx="0">
+        <a:scrgbClr r="0" g="0" b="0"/>
+      </a:fillRef>
+      <a:effectRef idx="0">
+        <a:scrgbClr r="0" g="0" b="0"/>
+      </a:effectRef>
+      <a:fontRef idx="minor"/>
+    </dgm:style>
+  </dgm:styleLbl>
+  <dgm:styleLbl name="parChTrans1D4">
+    <dgm:scene3d>
+      <a:camera prst="orthographicFront"/>
+      <a:lightRig rig="threePt" dir="t"/>
+    </dgm:scene3d>
+    <dgm:sp3d/>
+    <dgm:txPr/>
+    <dgm:style>
+      <a:lnRef idx="1">
+        <a:scrgbClr r="0" g="0" b="0"/>
+      </a:lnRef>
+      <a:fillRef idx="0">
+        <a:scrgbClr r="0" g="0" b="0"/>
+      </a:fillRef>
+      <a:effectRef idx="0">
+        <a:scrgbClr r="0" g="0" b="0"/>
+      </a:effectRef>
+      <a:fontRef idx="minor"/>
+    </dgm:style>
+  </dgm:styleLbl>
+  <dgm:styleLbl name="fgAcc1">
+    <dgm:scene3d>
+      <a:camera prst="orthographicFront"/>
+      <a:lightRig rig="threePt" dir="t"/>
+    </dgm:scene3d>
+    <dgm:sp3d/>
+    <dgm:txPr/>
+    <dgm:style>
+      <a:lnRef idx="1">
+        <a:scrgbClr r="0" g="0" b="0"/>
+      </a:lnRef>
+      <a:fillRef idx="1">
+        <a:scrgbClr r="0" g="0" b="0"/>
+      </a:fillRef>
+      <a:effectRef idx="0">
+        <a:scrgbClr r="0" g="0" b="0"/>
+      </a:effectRef>
+      <a:fontRef idx="minor"/>
+    </dgm:style>
+  </dgm:styleLbl>
+  <dgm:styleLbl name="conFgAcc1">
+    <dgm:scene3d>
+      <a:camera prst="orthographicFront"/>
+      <a:lightRig rig="threePt" dir="t"/>
+    </dgm:scene3d>
+    <dgm:sp3d/>
+    <dgm:txPr/>
+    <dgm:style>
+      <a:lnRef idx="1">
+        <a:scrgbClr r="0" g="0" b="0"/>
+      </a:lnRef>
+      <a:fillRef idx="1">
+        <a:scrgbClr r="0" g="0" b="0"/>
+      </a:fillRef>
+      <a:effectRef idx="0">
+        <a:scrgbClr r="0" g="0" b="0"/>
+      </a:effectRef>
+      <a:fontRef idx="minor"/>
+    </dgm:style>
+  </dgm:styleLbl>
+  <dgm:styleLbl name="alignAcc1">
+    <dgm:scene3d>
+      <a:camera prst="orthographicFront"/>
+      <a:lightRig rig="threePt" dir="t"/>
+    </dgm:scene3d>
+    <dgm:sp3d/>
+    <dgm:txPr/>
+    <dgm:style>
+      <a:lnRef idx="1">
+        <a:scrgbClr r="0" g="0" b="0"/>
+      </a:lnRef>
+      <a:fillRef idx="1">
+        <a:scrgbClr r="0" g="0" b="0"/>
+      </a:fillRef>
+      <a:effectRef idx="0">
+        <a:scrgbClr r="0" g="0" b="0"/>
+      </a:effectRef>
+      <a:fontRef idx="minor"/>
+    </dgm:style>
+  </dgm:styleLbl>
+  <dgm:styleLbl name="trAlignAcc1">
+    <dgm:scene3d>
+      <a:camera prst="orthographicFront"/>
+      <a:lightRig rig="threePt" dir="t"/>
+    </dgm:scene3d>
+    <dgm:sp3d/>
+    <dgm:txPr/>
+    <dgm:style>
+      <a:lnRef idx="1">
+        <a:scrgbClr r="0" g="0" b="0"/>
+      </a:lnRef>
+      <a:fillRef idx="1">
+        <a:scrgbClr r="0" g="0" b="0"/>
+      </a:fillRef>
+      <a:effectRef idx="0">
+        <a:scrgbClr r="0" g="0" b="0"/>
+      </a:effectRef>
+      <a:fontRef idx="minor"/>
+    </dgm:style>
+  </dgm:styleLbl>
+  <dgm:styleLbl name="bgAcc1">
+    <dgm:scene3d>
+      <a:camera prst="orthographicFront"/>
+      <a:lightRig rig="threePt" dir="t"/>
+    </dgm:scene3d>
+    <dgm:sp3d/>
+    <dgm:txPr/>
+    <dgm:style>
+      <a:lnRef idx="1">
+        <a:scrgbClr r="0" g="0" b="0"/>
+      </a:lnRef>
+      <a:fillRef idx="1">
+        <a:scrgbClr r="0" g="0" b="0"/>
+      </a:fillRef>
+      <a:effectRef idx="0">
+        <a:scrgbClr r="0" g="0" b="0"/>
+      </a:effectRef>
+      <a:fontRef idx="minor"/>
+    </dgm:style>
+  </dgm:styleLbl>
+  <dgm:styleLbl name="solidFgAcc1">
+    <dgm:scene3d>
+      <a:camera prst="orthographicFront"/>
+      <a:lightRig rig="threePt" dir="t"/>
+    </dgm:scene3d>
+    <dgm:sp3d/>
+    <dgm:txPr/>
+    <dgm:style>
+      <a:lnRef idx="1">
+        <a:scrgbClr r="0" g="0" b="0"/>
+      </a:lnRef>
+      <a:fillRef idx="1">
+        <a:scrgbClr r="0" g="0" b="0"/>
+      </a:fillRef>
+      <a:effectRef idx="0">
+        <a:scrgbClr r="0" g="0" b="0"/>
+      </a:effectRef>
+      <a:fontRef idx="minor"/>
+    </dgm:style>
+  </dgm:styleLbl>
+  <dgm:styleLbl name="solidAlignAcc1">
+    <dgm:scene3d>
+      <a:camera prst="orthographicFront"/>
+      <a:lightRig rig="threePt" dir="t"/>
+    </dgm:scene3d>
+    <dgm:sp3d/>
+    <dgm:txPr/>
+    <dgm:style>
+      <a:lnRef idx="1">
+        <a:scrgbClr r="0" g="0" b="0"/>
+      </a:lnRef>
+      <a:fillRef idx="1">
+        <a:scrgbClr r="0" g="0" b="0"/>
+      </a:fillRef>
+      <a:effectRef idx="0">
+        <a:scrgbClr r="0" g="0" b="0"/>
+      </a:effectRef>
+      <a:fontRef idx="minor"/>
+    </dgm:style>
+  </dgm:styleLbl>
+  <dgm:styleLbl name="solidBgAcc1">
+    <dgm:scene3d>
+      <a:camera prst="orthographicFront"/>
+      <a:lightRig rig="threePt" dir="t"/>
+    </dgm:scene3d>
+    <dgm:sp3d/>
+    <dgm:txPr/>
+    <dgm:style>
+      <a:lnRef idx="1">
+        <a:scrgbClr r="0" g="0" b="0"/>
+      </a:lnRef>
+      <a:fillRef idx="1">
+        <a:scrgbClr r="0" g="0" b="0"/>
+      </a:fillRef>
+      <a:effectRef idx="0">
+        <a:scrgbClr r="0" g="0" b="0"/>
+      </a:effectRef>
+      <a:fontRef idx="minor"/>
+    </dgm:style>
+  </dgm:styleLbl>
+  <dgm:styleLbl name="fgAccFollowNode1">
+    <dgm:scene3d>
+      <a:camera prst="orthographicFront"/>
+      <a:lightRig rig="threePt" dir="t"/>
+    </dgm:scene3d>
+    <dgm:sp3d/>
+    <dgm:txPr/>
+    <dgm:style>
+      <a:lnRef idx="1">
+        <a:scrgbClr r="0" g="0" b="0"/>
+      </a:lnRef>
+      <a:fillRef idx="1">
+        <a:scrgbClr r="0" g="0" b="0"/>
+      </a:fillRef>
+      <a:effectRef idx="0">
+        <a:scrgbClr r="0" g="0" b="0"/>
+      </a:effectRef>
+      <a:fontRef idx="minor"/>
+    </dgm:style>
+  </dgm:styleLbl>
+  <dgm:styleLbl name="alignAccFollowNode1">
+    <dgm:scene3d>
+      <a:camera prst="orthographicFront"/>
+      <a:lightRig rig="threePt" dir="t"/>
+    </dgm:scene3d>
+    <dgm:sp3d/>
+    <dgm:txPr/>
+    <dgm:style>
+      <a:lnRef idx="1">
+        <a:scrgbClr r="0" g="0" b="0"/>
+      </a:lnRef>
+      <a:fillRef idx="1">
+        <a:scrgbClr r="0" g="0" b="0"/>
+      </a:fillRef>
+      <a:effectRef idx="0">
+        <a:scrgbClr r="0" g="0" b="0"/>
+      </a:effectRef>
+      <a:fontRef idx="minor"/>
+    </dgm:style>
+  </dgm:styleLbl>
+  <dgm:styleLbl name="bgAccFollowNode1">
+    <dgm:scene3d>
+      <a:camera prst="orthographicFront"/>
+      <a:lightRig rig="threePt" dir="t"/>
+    </dgm:scene3d>
+    <dgm:sp3d/>
+    <dgm:txPr/>
+    <dgm:style>
+      <a:lnRef idx="1">
+        <a:scrgbClr r="0" g="0" b="0"/>
+      </a:lnRef>
+      <a:fillRef idx="1">
+        <a:scrgbClr r="0" g="0" b="0"/>
+      </a:fillRef>
+      <a:effectRef idx="0">
+        <a:scrgbClr r="0" g="0" b="0"/>
+      </a:effectRef>
+      <a:fontRef idx="minor"/>
+    </dgm:style>
+  </dgm:styleLbl>
+  <dgm:styleLbl name="fgAcc0">
+    <dgm:scene3d>
+      <a:camera prst="orthographicFront"/>
+      <a:lightRig rig="threePt" dir="t"/>
+    </dgm:scene3d>
+    <dgm:sp3d/>
+    <dgm:txPr/>
+    <dgm:style>
+      <a:lnRef idx="1">
+        <a:scrgbClr r="0" g="0" b="0"/>
+      </a:lnRef>
+      <a:fillRef idx="1">
+        <a:scrgbClr r="0" g="0" b="0"/>
+      </a:fillRef>
+      <a:effectRef idx="0">
+        <a:scrgbClr r="0" g="0" b="0"/>
+      </a:effectRef>
+      <a:fontRef idx="minor"/>
+    </dgm:style>
+  </dgm:styleLbl>
+  <dgm:styleLbl name="fgAcc2">
+    <dgm:scene3d>
+      <a:camera prst="orthographicFront"/>
+      <a:lightRig rig="threePt" dir="t"/>
+    </dgm:scene3d>
+    <dgm:sp3d/>
+    <dgm:txPr/>
+    <dgm:style>
+      <a:lnRef idx="1">
+        <a:scrgbClr r="0" g="0" b="0"/>
+      </a:lnRef>
+      <a:fillRef idx="1">
+        <a:scrgbClr r="0" g="0" b="0"/>
+      </a:fillRef>
+      <a:effectRef idx="0">
+        <a:scrgbClr r="0" g="0" b="0"/>
+      </a:effectRef>
+      <a:fontRef idx="minor"/>
+    </dgm:style>
+  </dgm:styleLbl>
+  <dgm:styleLbl name="fgAcc3">
+    <dgm:scene3d>
+      <a:camera prst="orthographicFront"/>
+      <a:lightRig rig="threePt" dir="t"/>
+    </dgm:scene3d>
+    <dgm:sp3d/>
+    <dgm:txPr/>
+    <dgm:style>
+      <a:lnRef idx="1">
+        <a:scrgbClr r="0" g="0" b="0"/>
+      </a:lnRef>
+      <a:fillRef idx="1">
+        <a:scrgbClr r="0" g="0" b="0"/>
+      </a:fillRef>
+      <a:effectRef idx="0">
+        <a:scrgbClr r="0" g="0" b="0"/>
+      </a:effectRef>
+      <a:fontRef idx="minor"/>
+    </dgm:style>
+  </dgm:styleLbl>
+  <dgm:styleLbl name="fgAcc4">
+    <dgm:scene3d>
+      <a:camera prst="orthographicFront"/>
+      <a:lightRig rig="threePt" dir="t"/>
+    </dgm:scene3d>
+    <dgm:sp3d/>
+    <dgm:txPr/>
+    <dgm:style>
+      <a:lnRef idx="1">
+        <a:scrgbClr r="0" g="0" b="0"/>
+      </a:lnRef>
+      <a:fillRef idx="1">
+        <a:scrgbClr r="0" g="0" b="0"/>
+      </a:fillRef>
+      <a:effectRef idx="0">
+        <a:scrgbClr r="0" g="0" b="0"/>
+      </a:effectRef>
+      <a:fontRef idx="minor"/>
+    </dgm:style>
+  </dgm:styleLbl>
+  <dgm:styleLbl name="bgShp">
+    <dgm:scene3d>
+      <a:camera prst="orthographicFront"/>
+      <a:lightRig rig="threePt" dir="t"/>
+    </dgm:scene3d>
+    <dgm:sp3d/>
+    <dgm:txPr/>
+    <dgm:style>
+      <a:lnRef idx="0">
+        <a:scrgbClr r="0" g="0" b="0"/>
+      </a:lnRef>
+      <a:fillRef idx="1">
+        <a:scrgbClr r="0" g="0" b="0"/>
+      </a:fillRef>
+      <a:effectRef idx="2">
+        <a:scrgbClr r="0" g="0" b="0"/>
+      </a:effectRef>
+      <a:fontRef idx="minor"/>
+    </dgm:style>
+  </dgm:styleLbl>
+  <dgm:styleLbl name="dkBgShp">
+    <dgm:scene3d>
+      <a:camera prst="orthographicFront"/>
+      <a:lightRig rig="threePt" dir="t"/>
+    </dgm:scene3d>
+    <dgm:sp3d/>
+    <dgm:txPr/>
+    <dgm:style>
+      <a:lnRef idx="0">
+        <a:scrgbClr r="0" g="0" b="0"/>
+      </a:lnRef>
+      <a:fillRef idx="1">
+        <a:scrgbClr r="0" g="0" b="0"/>
+      </a:fillRef>
+      <a:effectRef idx="2">
+        <a:scrgbClr r="0" g="0" b="0"/>
+      </a:effectRef>
+      <a:fontRef idx="minor"/>
+    </dgm:style>
+  </dgm:styleLbl>
+  <dgm:styleLbl name="trBgShp">
+    <dgm:scene3d>
+      <a:camera prst="orthographicFront"/>
+      <a:lightRig rig="threePt" dir="t"/>
+    </dgm:scene3d>
+    <dgm:sp3d/>
+    <dgm:txPr/>
+    <dgm:style>
+      <a:lnRef idx="0">
+        <a:scrgbClr r="0" g="0" b="0"/>
+      </a:lnRef>
+      <a:fillRef idx="1">
+        <a:scrgbClr r="0" g="0" b="0"/>
+      </a:fillRef>
+      <a:effectRef idx="0">
+        <a:scrgbClr r="0" g="0" b="0"/>
+      </a:effectRef>
+      <a:fontRef idx="minor"/>
+    </dgm:style>
+  </dgm:styleLbl>
+  <dgm:styleLbl name="fgShp">
+    <dgm:scene3d>
+      <a:camera prst="orthographicFront"/>
+      <a:lightRig rig="threePt" dir="t"/>
+    </dgm:scene3d>
+    <dgm:sp3d/>
+    <dgm:txPr/>
+    <dgm:style>
+      <a:lnRef idx="0">
+        <a:scrgbClr r="0" g="0" b="0"/>
+      </a:lnRef>
+      <a:fillRef idx="3">
+        <a:scrgbClr r="0" g="0" b="0"/>
+      </a:fillRef>
+      <a:effectRef idx="2">
+        <a:scrgbClr r="0" g="0" b="0"/>
+      </a:effectRef>
+      <a:fontRef idx="minor"/>
+    </dgm:style>
+  </dgm:styleLbl>
+  <dgm:styleLbl name="revTx">
+    <dgm:scene3d>
+      <a:camera prst="orthographicFront"/>
+      <a:lightRig rig="threePt" dir="t"/>
+    </dgm:scene3d>
+    <dgm:sp3d/>
+    <dgm:txPr/>
+    <dgm:style>
+      <a:lnRef idx="0">
+        <a:scrgbClr r="0" g="0" b="0"/>
+      </a:lnRef>
+      <a:fillRef idx="0">
+        <a:scrgbClr r="0" g="0" b="0"/>
+      </a:fillRef>
+      <a:effectRef idx="0">
+        <a:scrgbClr r="0" g="0" b="0"/>
+      </a:effectRef>
+      <a:fontRef idx="minor"/>
+    </dgm:style>
+  </dgm:styleLbl>
+</dgm:styleDef>
+</file>
+
+<file path=ppt/diagrams/quickStyle2.xml><?xml version="1.0" encoding="utf-8"?>
+<dgm:styleDef xmlns:dgm="http://schemas.openxmlformats.org/drawingml/2006/diagram" xmlns:a="http://schemas.openxmlformats.org/drawingml/2006/main" uniqueId="urn:microsoft.com/office/officeart/2005/8/quickstyle/simple4">
+  <dgm:title val=""/>
+  <dgm:desc val=""/>
+  <dgm:catLst>
+    <dgm:cat type="simple" pri="10400"/>
+  </dgm:catLst>
+  <dgm:scene3d>
+    <a:camera prst="orthographicFront"/>
+    <a:lightRig rig="threePt" dir="t"/>
+  </dgm:scene3d>
+  <dgm:styleLbl name="node0">
+    <dgm:scene3d>
+      <a:camera prst="orthographicFront"/>
+      <a:lightRig rig="threePt" dir="t"/>
+    </dgm:scene3d>
+    <dgm:sp3d/>
+    <dgm:txPr/>
+    <dgm:style>
+      <a:lnRef idx="0">
+        <a:scrgbClr r="0" g="0" b="0"/>
+      </a:lnRef>
+      <a:fillRef idx="3">
+        <a:scrgbClr r="0" g="0" b="0"/>
+      </a:fillRef>
+      <a:effectRef idx="2">
+        <a:scrgbClr r="0" g="0" b="0"/>
+      </a:effectRef>
+      <a:fontRef idx="minor">
+        <a:schemeClr val="lt1"/>
+      </a:fontRef>
+    </dgm:style>
+  </dgm:styleLbl>
+  <dgm:styleLbl name="lnNode1">
+    <dgm:scene3d>
+      <a:camera prst="orthographicFront"/>
+      <a:lightRig rig="threePt" dir="t"/>
+    </dgm:scene3d>
+    <dgm:sp3d/>
+    <dgm:txPr/>
+    <dgm:style>
+      <a:lnRef idx="1">
+        <a:scrgbClr r="0" g="0" b="0"/>
+      </a:lnRef>
+      <a:fillRef idx="3">
+        <a:scrgbClr r="0" g="0" b="0"/>
+      </a:fillRef>
+      <a:effectRef idx="2">
+        <a:scrgbClr r="0" g="0" b="0"/>
+      </a:effectRef>
+      <a:fontRef idx="minor">
+        <a:schemeClr val="lt1"/>
+      </a:fontRef>
+    </dgm:style>
+  </dgm:styleLbl>
+  <dgm:styleLbl name="vennNode1">
+    <dgm:scene3d>
+      <a:camera prst="orthographicFront"/>
+      <a:lightRig rig="threePt" dir="t"/>
+    </dgm:scene3d>
+    <dgm:sp3d/>
+    <dgm:txPr/>
+    <dgm:style>
+      <a:lnRef idx="0">
+        <a:scrgbClr r="0" g="0" b="0"/>
+      </a:lnRef>
+      <a:fillRef idx="3">
+        <a:scrgbClr r="0" g="0" b="0"/>
+      </a:fillRef>
+      <a:effectRef idx="0">
+        <a:scrgbClr r="0" g="0" b="0"/>
+      </a:effectRef>
+      <a:fontRef idx="minor">
+        <a:schemeClr val="tx1"/>
+      </a:fontRef>
+    </dgm:style>
+  </dgm:styleLbl>
+  <dgm:styleLbl name="alignNode1">
+    <dgm:scene3d>
+      <a:camera prst="orthographicFront"/>
+      <a:lightRig rig="threePt" dir="t"/>
+    </dgm:scene3d>
+    <dgm:sp3d/>
+    <dgm:txPr/>
+    <dgm:style>
+      <a:lnRef idx="1">
+        <a:scrgbClr r="0" g="0" b="0"/>
+      </a:lnRef>
+      <a:fillRef idx="3">
+        <a:scrgbClr r="0" g="0" b="0"/>
+      </a:fillRef>
+      <a:effectRef idx="2">
+        <a:scrgbClr r="0" g="0" b="0"/>
+      </a:effectRef>
+      <a:fontRef idx="minor">
+        <a:schemeClr val="lt1"/>
+      </a:fontRef>
+    </dgm:style>
+  </dgm:styleLbl>
+  <dgm:styleLbl name="node1">
+    <dgm:scene3d>
+      <a:camera prst="orthographicFront"/>
+      <a:lightRig rig="threePt" dir="t"/>
+    </dgm:scene3d>
+    <dgm:sp3d/>
+    <dgm:txPr/>
+    <dgm:style>
+      <a:lnRef idx="0">
+        <a:scrgbClr r="0" g="0" b="0"/>
+      </a:lnRef>
+      <a:fillRef idx="3">
+        <a:scrgbClr r="0" g="0" b="0"/>
+      </a:fillRef>
+      <a:effectRef idx="2">
+        <a:scrgbClr r="0" g="0" b="0"/>
+      </a:effectRef>
+      <a:fontRef idx="minor">
+        <a:schemeClr val="lt1"/>
+      </a:fontRef>
+    </dgm:style>
+  </dgm:styleLbl>
+  <dgm:styleLbl name="node2">
+    <dgm:scene3d>
+      <a:camera prst="orthographicFront"/>
+      <a:lightRig rig="threePt" dir="t"/>
+    </dgm:scene3d>
+    <dgm:sp3d/>
+    <dgm:txPr/>
+    <dgm:style>
+      <a:lnRef idx="0">
+        <a:scrgbClr r="0" g="0" b="0"/>
+      </a:lnRef>
+      <a:fillRef idx="3">
+        <a:scrgbClr r="0" g="0" b="0"/>
+      </a:fillRef>
+      <a:effectRef idx="2">
+        <a:scrgbClr r="0" g="0" b="0"/>
+      </a:effectRef>
+      <a:fontRef idx="minor">
+        <a:schemeClr val="lt1"/>
+      </a:fontRef>
+    </dgm:style>
+  </dgm:styleLbl>
+  <dgm:styleLbl name="node3">
+    <dgm:scene3d>
+      <a:camera prst="orthographicFront"/>
+      <a:lightRig rig="threePt" dir="t"/>
+    </dgm:scene3d>
+    <dgm:sp3d/>
+    <dgm:txPr/>
+    <dgm:style>
+      <a:lnRef idx="0">
+        <a:scrgbClr r="0" g="0" b="0"/>
+      </a:lnRef>
+      <a:fillRef idx="3">
+        <a:scrgbClr r="0" g="0" b="0"/>
+      </a:fillRef>
+      <a:effectRef idx="2">
+        <a:scrgbClr r="0" g="0" b="0"/>
+      </a:effectRef>
+      <a:fontRef idx="minor">
+        <a:schemeClr val="lt1"/>
+      </a:fontRef>
+    </dgm:style>
+  </dgm:styleLbl>
+  <dgm:styleLbl name="node4">
+    <dgm:scene3d>
+      <a:camera prst="orthographicFront"/>
+      <a:lightRig rig="threePt" dir="t"/>
+    </dgm:scene3d>
+    <dgm:sp3d/>
+    <dgm:txPr/>
+    <dgm:style>
+      <a:lnRef idx="0">
+        <a:scrgbClr r="0" g="0" b="0"/>
+      </a:lnRef>
+      <a:fillRef idx="3">
+        <a:scrgbClr r="0" g="0" b="0"/>
+      </a:fillRef>
+      <a:effectRef idx="2">
+        <a:scrgbClr r="0" g="0" b="0"/>
+      </a:effectRef>
+      <a:fontRef idx="minor">
+        <a:schemeClr val="lt1"/>
+      </a:fontRef>
+    </dgm:style>
+  </dgm:styleLbl>
+  <dgm:styleLbl name="fgImgPlace1">
+    <dgm:scene3d>
+      <a:camera prst="orthographicFront"/>
+      <a:lightRig rig="threePt" dir="t"/>
+    </dgm:scene3d>
+    <dgm:sp3d/>
+    <dgm:txPr/>
+    <dgm:style>
+      <a:lnRef idx="0">
+        <a:scrgbClr r="0" g="0" b="0"/>
+      </a:lnRef>
+      <a:fillRef idx="1">
+        <a:scrgbClr r="0" g="0" b="0"/>
+      </a:fillRef>
+      <a:effectRef idx="2">
+        <a:scrgbClr r="0" g="0" b="0"/>
+      </a:effectRef>
+      <a:fontRef idx="minor"/>
+    </dgm:style>
+  </dgm:styleLbl>
+  <dgm:styleLbl name="alignImgPlace1">
+    <dgm:scene3d>
+      <a:camera prst="orthographicFront"/>
+      <a:lightRig rig="threePt" dir="t"/>
+    </dgm:scene3d>
+    <dgm:sp3d/>
+    <dgm:txPr/>
+    <dgm:style>
+      <a:lnRef idx="0">
+        <a:scrgbClr r="0" g="0" b="0"/>
+      </a:lnRef>
+      <a:fillRef idx="1">
+        <a:scrgbClr r="0" g="0" b="0"/>
+      </a:fillRef>
+      <a:effectRef idx="2">
+        <a:scrgbClr r="0" g="0" b="0"/>
+      </a:effectRef>
+      <a:fontRef idx="minor"/>
+    </dgm:style>
+  </dgm:styleLbl>
+  <dgm:styleLbl name="bgImgPlace1">
+    <dgm:scene3d>
+      <a:camera prst="orthographicFront"/>
+      <a:lightRig rig="threePt" dir="t"/>
+    </dgm:scene3d>
+    <dgm:sp3d/>
+    <dgm:txPr/>
+    <dgm:style>
+      <a:lnRef idx="0">
+        <a:scrgbClr r="0" g="0" b="0"/>
+      </a:lnRef>
+      <a:fillRef idx="1">
+        <a:scrgbClr r="0" g="0" b="0"/>
+      </a:fillRef>
+      <a:effectRef idx="2">
+        <a:scrgbClr r="0" g="0" b="0"/>
+      </a:effectRef>
+      <a:fontRef idx="minor"/>
+    </dgm:style>
+  </dgm:styleLbl>
+  <dgm:styleLbl name="sibTrans2D1">
+    <dgm:scene3d>
+      <a:camera prst="orthographicFront"/>
+      <a:lightRig rig="threePt" dir="t"/>
+    </dgm:scene3d>
+    <dgm:sp3d/>
+    <dgm:txPr/>
+    <dgm:style>
+      <a:lnRef idx="0">
+        <a:scrgbClr r="0" g="0" b="0"/>
+      </a:lnRef>
+      <a:fillRef idx="3">
+        <a:scrgbClr r="0" g="0" b="0"/>
+      </a:fillRef>
+      <a:effectRef idx="2">
+        <a:scrgbClr r="0" g="0" b="0"/>
+      </a:effectRef>
+      <a:fontRef idx="minor">
+        <a:schemeClr val="lt1"/>
+      </a:fontRef>
+    </dgm:style>
+  </dgm:styleLbl>
+  <dgm:styleLbl name="fgSibTrans2D1">
+    <dgm:scene3d>
+      <a:camera prst="orthographicFront"/>
+      <a:lightRig rig="threePt" dir="t"/>
+    </dgm:scene3d>
+    <dgm:sp3d/>
+    <dgm:txPr/>
+    <dgm:style>
+      <a:lnRef idx="0">
+        <a:scrgbClr r="0" g="0" b="0"/>
+      </a:lnRef>
+      <a:fillRef idx="3">
+        <a:scrgbClr r="0" g="0" b="0"/>
+      </a:fillRef>
+      <a:effectRef idx="2">
+        <a:scrgbClr r="0" g="0" b="0"/>
+      </a:effectRef>
+      <a:fontRef idx="minor">
+        <a:schemeClr val="lt1"/>
+      </a:fontRef>
+    </dgm:style>
+  </dgm:styleLbl>
+  <dgm:styleLbl name="bgSibTrans2D1">
+    <dgm:scene3d>
+      <a:camera prst="orthographicFront"/>
+      <a:lightRig rig="threePt" dir="t"/>
+    </dgm:scene3d>
+    <dgm:sp3d/>
+    <dgm:txPr/>
+    <dgm:style>
+      <a:lnRef idx="0">
+        <a:scrgbClr r="0" g="0" b="0"/>
+      </a:lnRef>
+      <a:fillRef idx="3">
+        <a:scrgbClr r="0" g="0" b="0"/>
+      </a:fillRef>
+      <a:effectRef idx="2">
+        <a:scrgbClr r="0" g="0" b="0"/>
+      </a:effectRef>
+      <a:fontRef idx="minor">
+        <a:schemeClr val="lt1"/>
+      </a:fontRef>
+    </dgm:style>
+  </dgm:styleLbl>
+  <dgm:styleLbl name="sibTrans1D1">
+    <dgm:scene3d>
+      <a:camera prst="orthographicFront"/>
+      <a:lightRig rig="threePt" dir="t"/>
+    </dgm:scene3d>
+    <dgm:sp3d/>
+    <dgm:txPr/>
+    <dgm:style>
+      <a:lnRef idx="1">
+        <a:scrgbClr r="0" g="0" b="0"/>
+      </a:lnRef>
+      <a:fillRef idx="0">
+        <a:scrgbClr r="0" g="0" b="0"/>
+      </a:fillRef>
+      <a:effectRef idx="0">
+        <a:scrgbClr r="0" g="0" b="0"/>
+      </a:effectRef>
+      <a:fontRef idx="minor"/>
+    </dgm:style>
+  </dgm:styleLbl>
+  <dgm:styleLbl name="callout">
+    <dgm:scene3d>
+      <a:camera prst="orthographicFront"/>
+      <a:lightRig rig="threePt" dir="t"/>
+    </dgm:scene3d>
+    <dgm:sp3d/>
+    <dgm:txPr/>
+    <dgm:style>
+      <a:lnRef idx="2">
+        <a:scrgbClr r="0" g="0" b="0"/>
+      </a:lnRef>
+      <a:fillRef idx="1">
+        <a:scrgbClr r="0" g="0" b="0"/>
+      </a:fillRef>
+      <a:effectRef idx="1">
+        <a:scrgbClr r="0" g="0" b="0"/>
+      </a:effectRef>
+      <a:fontRef idx="minor"/>
+    </dgm:style>
+  </dgm:styleLbl>
+  <dgm:styleLbl name="asst0">
+    <dgm:scene3d>
+      <a:camera prst="orthographicFront"/>
+      <a:lightRig rig="threePt" dir="t"/>
+    </dgm:scene3d>
+    <dgm:sp3d/>
+    <dgm:txPr/>
+    <dgm:style>
+      <a:lnRef idx="0">
+        <a:scrgbClr r="0" g="0" b="0"/>
+      </a:lnRef>
+      <a:fillRef idx="3">
+        <a:scrgbClr r="0" g="0" b="0"/>
+      </a:fillRef>
+      <a:effectRef idx="2">
+        <a:scrgbClr r="0" g="0" b="0"/>
+      </a:effectRef>
+      <a:fontRef idx="minor">
+        <a:schemeClr val="lt1"/>
+      </a:fontRef>
+    </dgm:style>
+  </dgm:styleLbl>
+  <dgm:styleLbl name="asst1">
+    <dgm:scene3d>
+      <a:camera prst="orthographicFront"/>
+      <a:lightRig rig="threePt" dir="t"/>
+    </dgm:scene3d>
+    <dgm:sp3d/>
+    <dgm:txPr/>
+    <dgm:style>
+      <a:lnRef idx="0">
+        <a:scrgbClr r="0" g="0" b="0"/>
+      </a:lnRef>
+      <a:fillRef idx="3">
+        <a:scrgbClr r="0" g="0" b="0"/>
+      </a:fillRef>
+      <a:effectRef idx="2">
+        <a:scrgbClr r="0" g="0" b="0"/>
+      </a:effectRef>
+      <a:fontRef idx="minor">
+        <a:schemeClr val="lt1"/>
+      </a:fontRef>
+    </dgm:style>
+  </dgm:styleLbl>
+  <dgm:styleLbl name="asst2">
+    <dgm:scene3d>
+      <a:camera prst="orthographicFront"/>
+      <a:lightRig rig="threePt" dir="t"/>
+    </dgm:scene3d>
+    <dgm:sp3d/>
+    <dgm:txPr/>
+    <dgm:style>
+      <a:lnRef idx="0">
+        <a:scrgbClr r="0" g="0" b="0"/>
+      </a:lnRef>
+      <a:fillRef idx="3">
+        <a:scrgbClr r="0" g="0" b="0"/>
+      </a:fillRef>
+      <a:effectRef idx="2">
+        <a:scrgbClr r="0" g="0" b="0"/>
+      </a:effectRef>
+      <a:fontRef idx="minor">
+        <a:schemeClr val="lt1"/>
+      </a:fontRef>
+    </dgm:style>
+  </dgm:styleLbl>
+  <dgm:styleLbl name="asst3">
+    <dgm:scene3d>
+      <a:camera prst="orthographicFront"/>
+      <a:lightRig rig="threePt" dir="t"/>
+    </dgm:scene3d>
+    <dgm:sp3d/>
+    <dgm:txPr/>
+    <dgm:style>
+      <a:lnRef idx="0">
+        <a:scrgbClr r="0" g="0" b="0"/>
+      </a:lnRef>
+      <a:fillRef idx="3">
+        <a:scrgbClr r="0" g="0" b="0"/>
+      </a:fillRef>
+      <a:effectRef idx="2">
+        <a:scrgbClr r="0" g="0" b="0"/>
+      </a:effectRef>
+      <a:fontRef idx="minor">
+        <a:schemeClr val="lt1"/>
+      </a:fontRef>
+    </dgm:style>
+  </dgm:styleLbl>
+  <dgm:styleLbl name="asst4">
+    <dgm:scene3d>
+      <a:camera prst="orthographicFront"/>
+      <a:lightRig rig="threePt" dir="t"/>
+    </dgm:scene3d>
+    <dgm:sp3d/>
+    <dgm:txPr/>
+    <dgm:style>
+      <a:lnRef idx="0">
+        <a:scrgbClr r="0" g="0" b="0"/>
+      </a:lnRef>
+      <a:fillRef idx="3">
+        <a:scrgbClr r="0" g="0" b="0"/>
+      </a:fillRef>
+      <a:effectRef idx="2">
+        <a:scrgbClr r="0" g="0" b="0"/>
+      </a:effectRef>
+      <a:fontRef idx="minor">
+        <a:schemeClr val="lt1"/>
+      </a:fontRef>
+    </dgm:style>
+  </dgm:styleLbl>
+  <dgm:styleLbl name="parChTrans2D1">
+    <dgm:scene3d>
+      <a:camera prst="orthographicFront"/>
+      <a:lightRig rig="threePt" dir="t"/>
+    </dgm:scene3d>
+    <dgm:sp3d/>
+    <dgm:txPr/>
+    <dgm:style>
+      <a:lnRef idx="0">
+        <a:scrgbClr r="0" g="0" b="0"/>
+      </a:lnRef>
+      <a:fillRef idx="3">
+        <a:scrgbClr r="0" g="0" b="0"/>
+      </a:fillRef>
+      <a:effectRef idx="2">
+        <a:scrgbClr r="0" g="0" b="0"/>
+      </a:effectRef>
+      <a:fontRef idx="minor">
+        <a:schemeClr val="lt1"/>
+      </a:fontRef>
+    </dgm:style>
+  </dgm:styleLbl>
+  <dgm:styleLbl name="parChTrans2D2">
+    <dgm:scene3d>
+      <a:camera prst="orthographicFront"/>
+      <a:lightRig rig="threePt" dir="t"/>
+    </dgm:scene3d>
+    <dgm:sp3d/>
+    <dgm:txPr/>
+    <dgm:style>
+      <a:lnRef idx="0">
+        <a:scrgbClr r="0" g="0" b="0"/>
+      </a:lnRef>
+      <a:fillRef idx="3">
+        <a:scrgbClr r="0" g="0" b="0"/>
+      </a:fillRef>
+      <a:effectRef idx="2">
+        <a:scrgbClr r="0" g="0" b="0"/>
+      </a:effectRef>
+      <a:fontRef idx="minor">
+        <a:schemeClr val="lt1"/>
+      </a:fontRef>
+    </dgm:style>
+  </dgm:styleLbl>
+  <dgm:styleLbl name="parChTrans2D3">
+    <dgm:scene3d>
+      <a:camera prst="orthographicFront"/>
+      <a:lightRig rig="threePt" dir="t"/>
+    </dgm:scene3d>
+    <dgm:sp3d/>
+    <dgm:txPr/>
+    <dgm:style>
+      <a:lnRef idx="1">
+        <a:scrgbClr r="0" g="0" b="0"/>
+      </a:lnRef>
+      <a:fillRef idx="3">
+        <a:scrgbClr r="0" g="0" b="0"/>
+      </a:fillRef>
+      <a:effectRef idx="2">
+        <a:scrgbClr r="0" g="0" b="0"/>
+      </a:effectRef>
+      <a:fontRef idx="minor">
+        <a:schemeClr val="lt1"/>
+      </a:fontRef>
+    </dgm:style>
+  </dgm:styleLbl>
+  <dgm:styleLbl name="parChTrans2D4">
+    <dgm:scene3d>
+      <a:camera prst="orthographicFront"/>
+      <a:lightRig rig="threePt" dir="t"/>
+    </dgm:scene3d>
+    <dgm:sp3d/>
+    <dgm:txPr/>
+    <dgm:style>
+      <a:lnRef idx="1">
+        <a:scrgbClr r="0" g="0" b="0"/>
+      </a:lnRef>
+      <a:fillRef idx="3">
+        <a:scrgbClr r="0" g="0" b="0"/>
+      </a:fillRef>
+      <a:effectRef idx="2">
+        <a:scrgbClr r="0" g="0" b="0"/>
+      </a:effectRef>
+      <a:fontRef idx="minor">
+        <a:schemeClr val="lt1"/>
+      </a:fontRef>
+    </dgm:style>
+  </dgm:styleLbl>
+  <dgm:styleLbl name="parChTrans1D1">
+    <dgm:scene3d>
+      <a:camera prst="orthographicFront"/>
+      <a:lightRig rig="threePt" dir="t"/>
+    </dgm:scene3d>
+    <dgm:sp3d/>
+    <dgm:txPr/>
+    <dgm:style>
+      <a:lnRef idx="1">
+        <a:scrgbClr r="0" g="0" b="0"/>
+      </a:lnRef>
+      <a:fillRef idx="0">
+        <a:scrgbClr r="0" g="0" b="0"/>
+      </a:fillRef>
+      <a:effectRef idx="0">
+        <a:scrgbClr r="0" g="0" b="0"/>
+      </a:effectRef>
+      <a:fontRef idx="minor"/>
+    </dgm:style>
+  </dgm:styleLbl>
+  <dgm:styleLbl name="parChTrans1D2">
+    <dgm:scene3d>
+      <a:camera prst="orthographicFront"/>
+      <a:lightRig rig="threePt" dir="t"/>
+    </dgm:scene3d>
+    <dgm:sp3d/>
+    <dgm:txPr/>
+    <dgm:style>
+      <a:lnRef idx="1">
+        <a:scrgbClr r="0" g="0" b="0"/>
+      </a:lnRef>
+      <a:fillRef idx="0">
+        <a:scrgbClr r="0" g="0" b="0"/>
+      </a:fillRef>
+      <a:effectRef idx="0">
+        <a:scrgbClr r="0" g="0" b="0"/>
+      </a:effectRef>
+      <a:fontRef idx="minor"/>
+    </dgm:style>
+  </dgm:styleLbl>
+  <dgm:styleLbl name="parChTrans1D3">
+    <dgm:scene3d>
+      <a:camera prst="orthographicFront"/>
+      <a:lightRig rig="threePt" dir="t"/>
+    </dgm:scene3d>
+    <dgm:sp3d/>
+    <dgm:txPr/>
+    <dgm:style>
+      <a:lnRef idx="1">
+        <a:scrgbClr r="0" g="0" b="0"/>
+      </a:lnRef>
+      <a:fillRef idx="0">
+        <a:scrgbClr r="0" g="0" b="0"/>
+      </a:fillRef>
+      <a:effectRef idx="0">
+        <a:scrgbClr r="0" g="0" b="0"/>
+      </a:effectRef>
+      <a:fontRef idx="minor"/>
+    </dgm:style>
+  </dgm:styleLbl>
+  <dgm:styleLbl name="parChTrans1D4">
+    <dgm:scene3d>
+      <a:camera prst="orthographicFront"/>
+      <a:lightRig rig="threePt" dir="t"/>
+    </dgm:scene3d>
+    <dgm:sp3d/>
+    <dgm:txPr/>
+    <dgm:style>
+      <a:lnRef idx="1">
+        <a:scrgbClr r="0" g="0" b="0"/>
+      </a:lnRef>
+      <a:fillRef idx="0">
+        <a:scrgbClr r="0" g="0" b="0"/>
+      </a:fillRef>
+      <a:effectRef idx="0">
+        <a:scrgbClr r="0" g="0" b="0"/>
+      </a:effectRef>
+      <a:fontRef idx="minor"/>
+    </dgm:style>
+  </dgm:styleLbl>
+  <dgm:styleLbl name="fgAcc1">
+    <dgm:scene3d>
+      <a:camera prst="orthographicFront"/>
+      <a:lightRig rig="threePt" dir="t"/>
+    </dgm:scene3d>
+    <dgm:sp3d/>
+    <dgm:txPr/>
+    <dgm:style>
+      <a:lnRef idx="1">
+        <a:scrgbClr r="0" g="0" b="0"/>
+      </a:lnRef>
+      <a:fillRef idx="1">
+        <a:scrgbClr r="0" g="0" b="0"/>
+      </a:fillRef>
+      <a:effectRef idx="0">
+        <a:scrgbClr r="0" g="0" b="0"/>
+      </a:effectRef>
+      <a:fontRef idx="minor"/>
+    </dgm:style>
+  </dgm:styleLbl>
+  <dgm:styleLbl name="conFgAcc1">
+    <dgm:scene3d>
+      <a:camera prst="orthographicFront"/>
+      <a:lightRig rig="threePt" dir="t"/>
+    </dgm:scene3d>
+    <dgm:sp3d/>
+    <dgm:txPr/>
+    <dgm:style>
+      <a:lnRef idx="1">
+        <a:scrgbClr r="0" g="0" b="0"/>
+      </a:lnRef>
+      <a:fillRef idx="1">
+        <a:scrgbClr r="0" g="0" b="0"/>
+      </a:fillRef>
+      <a:effectRef idx="0">
+        <a:scrgbClr r="0" g="0" b="0"/>
+      </a:effectRef>
+      <a:fontRef idx="minor"/>
+    </dgm:style>
+  </dgm:styleLbl>
+  <dgm:styleLbl name="alignAcc1">
+    <dgm:scene3d>
+      <a:camera prst="orthographicFront"/>
+      <a:lightRig rig="threePt" dir="t"/>
+    </dgm:scene3d>
+    <dgm:sp3d/>
+    <dgm:txPr/>
+    <dgm:style>
+      <a:lnRef idx="1">
+        <a:scrgbClr r="0" g="0" b="0"/>
+      </a:lnRef>
+      <a:fillRef idx="1">
+        <a:scrgbClr r="0" g="0" b="0"/>
+      </a:fillRef>
+      <a:effectRef idx="0">
+        <a:scrgbClr r="0" g="0" b="0"/>
+      </a:effectRef>
+      <a:fontRef idx="minor"/>
+    </dgm:style>
+  </dgm:styleLbl>
+  <dgm:styleLbl name="trAlignAcc1">
+    <dgm:scene3d>
+      <a:camera prst="orthographicFront"/>
+      <a:lightRig rig="threePt" dir="t"/>
+    </dgm:scene3d>
+    <dgm:sp3d/>
+    <dgm:txPr/>
+    <dgm:style>
+      <a:lnRef idx="1">
+        <a:scrgbClr r="0" g="0" b="0"/>
+      </a:lnRef>
+      <a:fillRef idx="1">
+        <a:scrgbClr r="0" g="0" b="0"/>
+      </a:fillRef>
+      <a:effectRef idx="0">
+        <a:scrgbClr r="0" g="0" b="0"/>
+      </a:effectRef>
+      <a:fontRef idx="minor"/>
+    </dgm:style>
+  </dgm:styleLbl>
+  <dgm:styleLbl name="bgAcc1">
+    <dgm:scene3d>
+      <a:camera prst="orthographicFront"/>
+      <a:lightRig rig="threePt" dir="t"/>
+    </dgm:scene3d>
+    <dgm:sp3d/>
+    <dgm:txPr/>
+    <dgm:style>
+      <a:lnRef idx="1">
+        <a:scrgbClr r="0" g="0" b="0"/>
+      </a:lnRef>
+      <a:fillRef idx="1">
+        <a:scrgbClr r="0" g="0" b="0"/>
+      </a:fillRef>
+      <a:effectRef idx="0">
+        <a:scrgbClr r="0" g="0" b="0"/>
+      </a:effectRef>
+      <a:fontRef idx="minor"/>
+    </dgm:style>
+  </dgm:styleLbl>
+  <dgm:styleLbl name="solidFgAcc1">
+    <dgm:scene3d>
+      <a:camera prst="orthographicFront"/>
+      <a:lightRig rig="threePt" dir="t"/>
+    </dgm:scene3d>
+    <dgm:sp3d/>
+    <dgm:txPr/>
+    <dgm:style>
+      <a:lnRef idx="1">
+        <a:scrgbClr r="0" g="0" b="0"/>
+      </a:lnRef>
+      <a:fillRef idx="1">
+        <a:scrgbClr r="0" g="0" b="0"/>
+      </a:fillRef>
+      <a:effectRef idx="0">
+        <a:scrgbClr r="0" g="0" b="0"/>
+      </a:effectRef>
+      <a:fontRef idx="minor"/>
+    </dgm:style>
+  </dgm:styleLbl>
+  <dgm:styleLbl name="solidAlignAcc1">
+    <dgm:scene3d>
+      <a:camera prst="orthographicFront"/>
+      <a:lightRig rig="threePt" dir="t"/>
+    </dgm:scene3d>
+    <dgm:sp3d/>
+    <dgm:txPr/>
+    <dgm:style>
+      <a:lnRef idx="1">
+        <a:scrgbClr r="0" g="0" b="0"/>
+      </a:lnRef>
+      <a:fillRef idx="1">
+        <a:scrgbClr r="0" g="0" b="0"/>
+      </a:fillRef>
+      <a:effectRef idx="0">
+        <a:scrgbClr r="0" g="0" b="0"/>
+      </a:effectRef>
+      <a:fontRef idx="minor"/>
+    </dgm:style>
+  </dgm:styleLbl>
+  <dgm:styleLbl name="solidBgAcc1">
+    <dgm:scene3d>
+      <a:camera prst="orthographicFront"/>
+      <a:lightRig rig="threePt" dir="t"/>
+    </dgm:scene3d>
+    <dgm:sp3d/>
+    <dgm:txPr/>
+    <dgm:style>
+      <a:lnRef idx="1">
+        <a:scrgbClr r="0" g="0" b="0"/>
+      </a:lnRef>
+      <a:fillRef idx="1">
+        <a:scrgbClr r="0" g="0" b="0"/>
+      </a:fillRef>
+      <a:effectRef idx="0">
+        <a:scrgbClr r="0" g="0" b="0"/>
+      </a:effectRef>
+      <a:fontRef idx="minor"/>
+    </dgm:style>
+  </dgm:styleLbl>
+  <dgm:styleLbl name="fgAccFollowNode1">
+    <dgm:scene3d>
+      <a:camera prst="orthographicFront"/>
+      <a:lightRig rig="threePt" dir="t"/>
+    </dgm:scene3d>
+    <dgm:sp3d/>
+    <dgm:txPr/>
+    <dgm:style>
+      <a:lnRef idx="1">
+        <a:scrgbClr r="0" g="0" b="0"/>
+      </a:lnRef>
+      <a:fillRef idx="1">
+        <a:scrgbClr r="0" g="0" b="0"/>
+      </a:fillRef>
+      <a:effectRef idx="0">
+        <a:scrgbClr r="0" g="0" b="0"/>
+      </a:effectRef>
+      <a:fontRef idx="minor"/>
+    </dgm:style>
+  </dgm:styleLbl>
+  <dgm:styleLbl name="alignAccFollowNode1">
+    <dgm:scene3d>
+      <a:camera prst="orthographicFront"/>
+      <a:lightRig rig="threePt" dir="t"/>
+    </dgm:scene3d>
+    <dgm:sp3d/>
+    <dgm:txPr/>
+    <dgm:style>
+      <a:lnRef idx="1">
+        <a:scrgbClr r="0" g="0" b="0"/>
+      </a:lnRef>
+      <a:fillRef idx="1">
+        <a:scrgbClr r="0" g="0" b="0"/>
+      </a:fillRef>
+      <a:effectRef idx="0">
+        <a:scrgbClr r="0" g="0" b="0"/>
+      </a:effectRef>
+      <a:fontRef idx="minor"/>
+    </dgm:style>
+  </dgm:styleLbl>
+  <dgm:styleLbl name="bgAccFollowNode1">
+    <dgm:scene3d>
+      <a:camera prst="orthographicFront"/>
+      <a:lightRig rig="threePt" dir="t"/>
+    </dgm:scene3d>
+    <dgm:sp3d/>
+    <dgm:txPr/>
+    <dgm:style>
+      <a:lnRef idx="1">
+        <a:scrgbClr r="0" g="0" b="0"/>
+      </a:lnRef>
+      <a:fillRef idx="1">
+        <a:scrgbClr r="0" g="0" b="0"/>
+      </a:fillRef>
+      <a:effectRef idx="0">
+        <a:scrgbClr r="0" g="0" b="0"/>
+      </a:effectRef>
+      <a:fontRef idx="minor"/>
+    </dgm:style>
+  </dgm:styleLbl>
+  <dgm:styleLbl name="fgAcc0">
+    <dgm:scene3d>
+      <a:camera prst="orthographicFront"/>
+      <a:lightRig rig="threePt" dir="t"/>
+    </dgm:scene3d>
+    <dgm:sp3d/>
+    <dgm:txPr/>
+    <dgm:style>
+      <a:lnRef idx="1">
+        <a:scrgbClr r="0" g="0" b="0"/>
+      </a:lnRef>
+      <a:fillRef idx="1">
+        <a:scrgbClr r="0" g="0" b="0"/>
+      </a:fillRef>
+      <a:effectRef idx="0">
+        <a:scrgbClr r="0" g="0" b="0"/>
+      </a:effectRef>
+      <a:fontRef idx="minor"/>
+    </dgm:style>
+  </dgm:styleLbl>
+  <dgm:styleLbl name="fgAcc2">
+    <dgm:scene3d>
+      <a:camera prst="orthographicFront"/>
+      <a:lightRig rig="threePt" dir="t"/>
+    </dgm:scene3d>
+    <dgm:sp3d/>
+    <dgm:txPr/>
+    <dgm:style>
+      <a:lnRef idx="1">
+        <a:scrgbClr r="0" g="0" b="0"/>
+      </a:lnRef>
+      <a:fillRef idx="1">
+        <a:scrgbClr r="0" g="0" b="0"/>
+      </a:fillRef>
+      <a:effectRef idx="0">
+        <a:scrgbClr r="0" g="0" b="0"/>
+      </a:effectRef>
+      <a:fontRef idx="minor"/>
+    </dgm:style>
+  </dgm:styleLbl>
+  <dgm:styleLbl name="fgAcc3">
+    <dgm:scene3d>
+      <a:camera prst="orthographicFront"/>
+      <a:lightRig rig="threePt" dir="t"/>
+    </dgm:scene3d>
+    <dgm:sp3d/>
+    <dgm:txPr/>
+    <dgm:style>
+      <a:lnRef idx="1">
+        <a:scrgbClr r="0" g="0" b="0"/>
+      </a:lnRef>
+      <a:fillRef idx="1">
+        <a:scrgbClr r="0" g="0" b="0"/>
+      </a:fillRef>
+      <a:effectRef idx="0">
+        <a:scrgbClr r="0" g="0" b="0"/>
+      </a:effectRef>
+      <a:fontRef idx="minor"/>
+    </dgm:style>
+  </dgm:styleLbl>
+  <dgm:styleLbl name="fgAcc4">
+    <dgm:scene3d>
+      <a:camera prst="orthographicFront"/>
+      <a:lightRig rig="threePt" dir="t"/>
+    </dgm:scene3d>
+    <dgm:sp3d/>
+    <dgm:txPr/>
+    <dgm:style>
+      <a:lnRef idx="1">
+        <a:scrgbClr r="0" g="0" b="0"/>
+      </a:lnRef>
+      <a:fillRef idx="1">
+        <a:scrgbClr r="0" g="0" b="0"/>
+      </a:fillRef>
+      <a:effectRef idx="0">
+        <a:scrgbClr r="0" g="0" b="0"/>
+      </a:effectRef>
+      <a:fontRef idx="minor"/>
+    </dgm:style>
+  </dgm:styleLbl>
+  <dgm:styleLbl name="bgShp">
+    <dgm:scene3d>
+      <a:camera prst="orthographicFront"/>
+      <a:lightRig rig="threePt" dir="t"/>
+    </dgm:scene3d>
+    <dgm:sp3d/>
+    <dgm:txPr/>
+    <dgm:style>
+      <a:lnRef idx="0">
+        <a:scrgbClr r="0" g="0" b="0"/>
+      </a:lnRef>
+      <a:fillRef idx="1">
+        <a:scrgbClr r="0" g="0" b="0"/>
+      </a:fillRef>
+      <a:effectRef idx="2">
+        <a:scrgbClr r="0" g="0" b="0"/>
+      </a:effectRef>
+      <a:fontRef idx="minor"/>
+    </dgm:style>
+  </dgm:styleLbl>
+  <dgm:styleLbl name="dkBgShp">
+    <dgm:scene3d>
+      <a:camera prst="orthographicFront"/>
+      <a:lightRig rig="threePt" dir="t"/>
+    </dgm:scene3d>
+    <dgm:sp3d/>
+    <dgm:txPr/>
+    <dgm:style>
+      <a:lnRef idx="0">
+        <a:scrgbClr r="0" g="0" b="0"/>
+      </a:lnRef>
+      <a:fillRef idx="1">
+        <a:scrgbClr r="0" g="0" b="0"/>
+      </a:fillRef>
+      <a:effectRef idx="2">
+        <a:scrgbClr r="0" g="0" b="0"/>
+      </a:effectRef>
+      <a:fontRef idx="minor"/>
+    </dgm:style>
+  </dgm:styleLbl>
+  <dgm:styleLbl name="trBgShp">
+    <dgm:scene3d>
+      <a:camera prst="orthographicFront"/>
+      <a:lightRig rig="threePt" dir="t"/>
+    </dgm:scene3d>
+    <dgm:sp3d/>
+    <dgm:txPr/>
+    <dgm:style>
+      <a:lnRef idx="0">
+        <a:scrgbClr r="0" g="0" b="0"/>
+      </a:lnRef>
+      <a:fillRef idx="1">
+        <a:scrgbClr r="0" g="0" b="0"/>
+      </a:fillRef>
+      <a:effectRef idx="0">
+        <a:scrgbClr r="0" g="0" b="0"/>
+      </a:effectRef>
+      <a:fontRef idx="minor"/>
+    </dgm:style>
+  </dgm:styleLbl>
+  <dgm:styleLbl name="fgShp">
+    <dgm:scene3d>
+      <a:camera prst="orthographicFront"/>
+      <a:lightRig rig="threePt" dir="t"/>
+    </dgm:scene3d>
+    <dgm:sp3d/>
+    <dgm:txPr/>
+    <dgm:style>
+      <a:lnRef idx="0">
+        <a:scrgbClr r="0" g="0" b="0"/>
+      </a:lnRef>
+      <a:fillRef idx="3">
+        <a:scrgbClr r="0" g="0" b="0"/>
+      </a:fillRef>
+      <a:effectRef idx="2">
+        <a:scrgbClr r="0" g="0" b="0"/>
+      </a:effectRef>
+      <a:fontRef idx="minor"/>
+    </dgm:style>
+  </dgm:styleLbl>
+  <dgm:styleLbl name="revTx">
+    <dgm:scene3d>
+      <a:camera prst="orthographicFront"/>
+      <a:lightRig rig="threePt" dir="t"/>
+    </dgm:scene3d>
+    <dgm:sp3d/>
+    <dgm:txPr/>
+    <dgm:style>
+      <a:lnRef idx="0">
+        <a:scrgbClr r="0" g="0" b="0"/>
+      </a:lnRef>
+      <a:fillRef idx="0">
+        <a:scrgbClr r="0" g="0" b="0"/>
+      </a:fillRef>
+      <a:effectRef idx="0">
+        <a:scrgbClr r="0" g="0" b="0"/>
+      </a:effectRef>
+      <a:fontRef idx="minor"/>
+    </dgm:style>
+  </dgm:styleLbl>
+</dgm:styleDef>
 </file>
 
 <file path=ppt/slideLayouts/slideLayout1.xml><?xml version="1.0" encoding="utf-8"?>
@@ -255,7 +7162,7 @@
           <a:p>
             <a:fld id="{8558E3C9-D613-4CEE-BBBF-192C1F40DF69}" type="datetimeFigureOut">
               <a:rPr lang="en-US" smtClean="0"/>
-              <a:t>5/19/2026</a:t>
+              <a:t>5/20/2026</a:t>
             </a:fld>
             <a:endParaRPr lang="en-US"/>
           </a:p>
@@ -453,7 +7360,7 @@
           <a:p>
             <a:fld id="{8558E3C9-D613-4CEE-BBBF-192C1F40DF69}" type="datetimeFigureOut">
               <a:rPr lang="en-US" smtClean="0"/>
-              <a:t>5/19/2026</a:t>
+              <a:t>5/20/2026</a:t>
             </a:fld>
             <a:endParaRPr lang="en-US"/>
           </a:p>
@@ -661,7 +7568,7 @@
           <a:p>
             <a:fld id="{8558E3C9-D613-4CEE-BBBF-192C1F40DF69}" type="datetimeFigureOut">
               <a:rPr lang="en-US" smtClean="0"/>
-              <a:t>5/19/2026</a:t>
+              <a:t>5/20/2026</a:t>
             </a:fld>
             <a:endParaRPr lang="en-US"/>
           </a:p>
@@ -859,7 +7766,7 @@
           <a:p>
             <a:fld id="{8558E3C9-D613-4CEE-BBBF-192C1F40DF69}" type="datetimeFigureOut">
               <a:rPr lang="en-US" smtClean="0"/>
-              <a:t>5/19/2026</a:t>
+              <a:t>5/20/2026</a:t>
             </a:fld>
             <a:endParaRPr lang="en-US"/>
           </a:p>
@@ -1134,7 +8041,7 @@
           <a:p>
             <a:fld id="{8558E3C9-D613-4CEE-BBBF-192C1F40DF69}" type="datetimeFigureOut">
               <a:rPr lang="en-US" smtClean="0"/>
-              <a:t>5/19/2026</a:t>
+              <a:t>5/20/2026</a:t>
             </a:fld>
             <a:endParaRPr lang="en-US"/>
           </a:p>
@@ -1399,7 +8306,7 @@
           <a:p>
             <a:fld id="{8558E3C9-D613-4CEE-BBBF-192C1F40DF69}" type="datetimeFigureOut">
               <a:rPr lang="en-US" smtClean="0"/>
-              <a:t>5/19/2026</a:t>
+              <a:t>5/20/2026</a:t>
             </a:fld>
             <a:endParaRPr lang="en-US"/>
           </a:p>
@@ -1811,7 +8718,7 @@
           <a:p>
             <a:fld id="{8558E3C9-D613-4CEE-BBBF-192C1F40DF69}" type="datetimeFigureOut">
               <a:rPr lang="en-US" smtClean="0"/>
-              <a:t>5/19/2026</a:t>
+              <a:t>5/20/2026</a:t>
             </a:fld>
             <a:endParaRPr lang="en-US"/>
           </a:p>
@@ -1952,7 +8859,7 @@
           <a:p>
             <a:fld id="{8558E3C9-D613-4CEE-BBBF-192C1F40DF69}" type="datetimeFigureOut">
               <a:rPr lang="en-US" smtClean="0"/>
-              <a:t>5/19/2026</a:t>
+              <a:t>5/20/2026</a:t>
             </a:fld>
             <a:endParaRPr lang="en-US"/>
           </a:p>
@@ -2065,7 +8972,7 @@
           <a:p>
             <a:fld id="{8558E3C9-D613-4CEE-BBBF-192C1F40DF69}" type="datetimeFigureOut">
               <a:rPr lang="en-US" smtClean="0"/>
-              <a:t>5/19/2026</a:t>
+              <a:t>5/20/2026</a:t>
             </a:fld>
             <a:endParaRPr lang="en-US"/>
           </a:p>
@@ -2376,7 +9283,7 @@
           <a:p>
             <a:fld id="{8558E3C9-D613-4CEE-BBBF-192C1F40DF69}" type="datetimeFigureOut">
               <a:rPr lang="en-US" smtClean="0"/>
-              <a:t>5/19/2026</a:t>
+              <a:t>5/20/2026</a:t>
             </a:fld>
             <a:endParaRPr lang="en-US"/>
           </a:p>
@@ -2664,7 +9571,7 @@
           <a:p>
             <a:fld id="{8558E3C9-D613-4CEE-BBBF-192C1F40DF69}" type="datetimeFigureOut">
               <a:rPr lang="en-US" smtClean="0"/>
-              <a:t>5/19/2026</a:t>
+              <a:t>5/20/2026</a:t>
             </a:fld>
             <a:endParaRPr lang="en-US"/>
           </a:p>
@@ -2905,7 +9812,7 @@
           <a:p>
             <a:fld id="{8558E3C9-D613-4CEE-BBBF-192C1F40DF69}" type="datetimeFigureOut">
               <a:rPr lang="en-US" smtClean="0"/>
-              <a:t>5/19/2026</a:t>
+              <a:t>5/20/2026</a:t>
             </a:fld>
             <a:endParaRPr lang="en-US"/>
           </a:p>
@@ -3442,6 +10349,14 @@
 <file path=ppt/slides/slide2.xml><?xml version="1.0" encoding="utf-8"?>
 <p:sld xmlns:a="http://schemas.openxmlformats.org/drawingml/2006/main" xmlns:r="http://schemas.openxmlformats.org/officeDocument/2006/relationships" xmlns:p="http://schemas.openxmlformats.org/presentationml/2006/main">
   <p:cSld>
+    <p:bg>
+      <p:bgPr>
+        <a:solidFill>
+          <a:schemeClr val="bg1"/>
+        </a:solidFill>
+        <a:effectLst/>
+      </p:bgPr>
+    </p:bg>
     <p:spTree>
       <p:nvGrpSpPr>
         <p:cNvPr id="1" name=""/>
@@ -3456,6 +10371,1207 @@
           <a:chExt cx="0" cy="0"/>
         </a:xfrm>
       </p:grpSpPr>
+      <p:sp useBgFill="1">
+        <p:nvSpPr>
+          <p:cNvPr id="9" name="Rectangle 8">
+            <a:extLst>
+              <a:ext uri="{FF2B5EF4-FFF2-40B4-BE49-F238E27FC236}">
+                <a16:creationId xmlns:a16="http://schemas.microsoft.com/office/drawing/2014/main" id="{BACC6370-2D7E-4714-9D71-7542949D7D5D}"/>
+              </a:ext>
+              <a:ext uri="{C183D7F6-B498-43B3-948B-1728B52AA6E4}">
+                <adec:decorative xmlns:adec="http://schemas.microsoft.com/office/drawing/2017/decorative" val="1"/>
+              </a:ext>
+            </a:extLst>
+          </p:cNvPr>
+          <p:cNvSpPr>
+            <a:spLocks noGrp="1" noRot="1" noChangeAspect="1" noMove="1" noResize="1" noEditPoints="1" noAdjustHandles="1" noChangeArrowheads="1" noChangeShapeType="1" noTextEdit="1"/>
+          </p:cNvSpPr>
+          <p:nvPr>
+            <p:extLst>
+              <p:ext uri="{386F3935-93C4-4BCD-93E2-E3B085C9AB24}">
+                <p16:designElem xmlns:p16="http://schemas.microsoft.com/office/powerpoint/2015/main" val="1"/>
+              </p:ext>
+            </p:extLst>
+          </p:nvPr>
+        </p:nvSpPr>
+        <p:spPr>
+          <a:xfrm>
+            <a:off x="0" y="0"/>
+            <a:ext cx="12192000" cy="6858000"/>
+          </a:xfrm>
+          <a:prstGeom prst="rect">
+            <a:avLst/>
+          </a:prstGeom>
+          <a:ln w="12700" cap="flat" cmpd="sng" algn="ctr">
+            <a:noFill/>
+            <a:prstDash val="solid"/>
+            <a:miter lim="800000"/>
+          </a:ln>
+          <a:effectLst/>
+          <a:extLst>
+            <a:ext uri="{91240B29-F687-4F45-9708-019B960494DF}">
+              <a14:hiddenLine xmlns:a14="http://schemas.microsoft.com/office/drawing/2010/main" w="12700" cap="flat" cmpd="sng" algn="ctr">
+                <a:solidFill>
+                  <a:schemeClr val="accent1">
+                    <a:shade val="50000"/>
+                  </a:schemeClr>
+                </a:solidFill>
+                <a:prstDash val="solid"/>
+                <a:miter lim="800000"/>
+              </a14:hiddenLine>
+            </a:ext>
+          </a:extLst>
+        </p:spPr>
+        <p:style>
+          <a:lnRef idx="2">
+            <a:schemeClr val="accent1">
+              <a:shade val="50000"/>
+            </a:schemeClr>
+          </a:lnRef>
+          <a:fillRef idx="1">
+            <a:schemeClr val="accent1"/>
+          </a:fillRef>
+          <a:effectRef idx="0">
+            <a:schemeClr val="accent1"/>
+          </a:effectRef>
+          <a:fontRef idx="minor">
+            <a:schemeClr val="lt1"/>
+          </a:fontRef>
+        </p:style>
+        <p:txBody>
+          <a:bodyPr rtlCol="0" anchor="ctr"/>
+          <a:lstStyle/>
+          <a:p>
+            <a:pPr algn="ctr"/>
+            <a:endParaRPr lang="en-US"/>
+          </a:p>
+        </p:txBody>
+      </p:sp>
+      <p:sp>
+        <p:nvSpPr>
+          <p:cNvPr id="11" name="Rectangle 10">
+            <a:extLst>
+              <a:ext uri="{FF2B5EF4-FFF2-40B4-BE49-F238E27FC236}">
+                <a16:creationId xmlns:a16="http://schemas.microsoft.com/office/drawing/2014/main" id="{256B2C21-A230-48C0-8DF1-C46611373C44}"/>
+              </a:ext>
+              <a:ext uri="{C183D7F6-B498-43B3-948B-1728B52AA6E4}">
+                <adec:decorative xmlns:adec="http://schemas.microsoft.com/office/drawing/2017/decorative" val="1"/>
+              </a:ext>
+            </a:extLst>
+          </p:cNvPr>
+          <p:cNvSpPr>
+            <a:spLocks noGrp="1" noRot="1" noChangeAspect="1" noMove="1" noResize="1" noEditPoints="1" noAdjustHandles="1" noChangeArrowheads="1" noChangeShapeType="1" noTextEdit="1"/>
+          </p:cNvSpPr>
+          <p:nvPr>
+            <p:extLst>
+              <p:ext uri="{386F3935-93C4-4BCD-93E2-E3B085C9AB24}">
+                <p16:designElem xmlns:p16="http://schemas.microsoft.com/office/powerpoint/2015/main" val="1"/>
+              </p:ext>
+            </p:extLst>
+          </p:nvPr>
+        </p:nvSpPr>
+        <p:spPr>
+          <a:xfrm rot="5400000" flipH="1">
+            <a:off x="-1410084" y="1410082"/>
+            <a:ext cx="6858000" cy="4037836"/>
+          </a:xfrm>
+          <a:prstGeom prst="rect">
+            <a:avLst/>
+          </a:prstGeom>
+          <a:gradFill>
+            <a:gsLst>
+              <a:gs pos="8000">
+                <a:srgbClr val="000000"/>
+              </a:gs>
+              <a:gs pos="100000">
+                <a:schemeClr val="accent1">
+                  <a:lumMod val="75000"/>
+                </a:schemeClr>
+              </a:gs>
+            </a:gsLst>
+            <a:lin ang="3000000" scaled="0"/>
+          </a:gradFill>
+          <a:ln>
+            <a:noFill/>
+          </a:ln>
+        </p:spPr>
+        <p:style>
+          <a:lnRef idx="2">
+            <a:schemeClr val="accent1">
+              <a:shade val="50000"/>
+            </a:schemeClr>
+          </a:lnRef>
+          <a:fillRef idx="1">
+            <a:schemeClr val="accent1"/>
+          </a:fillRef>
+          <a:effectRef idx="0">
+            <a:schemeClr val="accent1"/>
+          </a:effectRef>
+          <a:fontRef idx="minor">
+            <a:schemeClr val="lt1"/>
+          </a:fontRef>
+        </p:style>
+        <p:txBody>
+          <a:bodyPr rtlCol="0" anchor="ctr"/>
+          <a:lstStyle/>
+          <a:p>
+            <a:pPr algn="ctr"/>
+            <a:endParaRPr lang="en-US"/>
+          </a:p>
+        </p:txBody>
+      </p:sp>
+      <p:sp>
+        <p:nvSpPr>
+          <p:cNvPr id="13" name="Rectangle 12">
+            <a:extLst>
+              <a:ext uri="{FF2B5EF4-FFF2-40B4-BE49-F238E27FC236}">
+                <a16:creationId xmlns:a16="http://schemas.microsoft.com/office/drawing/2014/main" id="{3847E18C-932D-4C95-AABA-FEC7C9499AD7}"/>
+              </a:ext>
+              <a:ext uri="{C183D7F6-B498-43B3-948B-1728B52AA6E4}">
+                <adec:decorative xmlns:adec="http://schemas.microsoft.com/office/drawing/2017/decorative" val="1"/>
+              </a:ext>
+            </a:extLst>
+          </p:cNvPr>
+          <p:cNvSpPr>
+            <a:spLocks noGrp="1" noRot="1" noChangeAspect="1" noMove="1" noResize="1" noEditPoints="1" noAdjustHandles="1" noChangeArrowheads="1" noChangeShapeType="1" noTextEdit="1"/>
+          </p:cNvSpPr>
+          <p:nvPr>
+            <p:extLst>
+              <p:ext uri="{386F3935-93C4-4BCD-93E2-E3B085C9AB24}">
+                <p16:designElem xmlns:p16="http://schemas.microsoft.com/office/powerpoint/2015/main" val="1"/>
+              </p:ext>
+            </p:extLst>
+          </p:nvPr>
+        </p:nvSpPr>
+        <p:spPr>
+          <a:xfrm rot="5400000" flipH="1">
+            <a:off x="-1410085" y="1420219"/>
+            <a:ext cx="6857999" cy="4037839"/>
+          </a:xfrm>
+          <a:prstGeom prst="rect">
+            <a:avLst/>
+          </a:prstGeom>
+          <a:gradFill>
+            <a:gsLst>
+              <a:gs pos="0">
+                <a:srgbClr val="000000">
+                  <a:alpha val="0"/>
+                </a:srgbClr>
+              </a:gs>
+              <a:gs pos="99000">
+                <a:schemeClr val="accent1">
+                  <a:alpha val="46000"/>
+                </a:schemeClr>
+              </a:gs>
+            </a:gsLst>
+            <a:lin ang="1800000" scaled="0"/>
+          </a:gradFill>
+          <a:ln>
+            <a:noFill/>
+          </a:ln>
+        </p:spPr>
+        <p:style>
+          <a:lnRef idx="2">
+            <a:schemeClr val="accent1">
+              <a:shade val="50000"/>
+            </a:schemeClr>
+          </a:lnRef>
+          <a:fillRef idx="1">
+            <a:schemeClr val="accent1"/>
+          </a:fillRef>
+          <a:effectRef idx="0">
+            <a:schemeClr val="accent1"/>
+          </a:effectRef>
+          <a:fontRef idx="minor">
+            <a:schemeClr val="lt1"/>
+          </a:fontRef>
+        </p:style>
+        <p:txBody>
+          <a:bodyPr rtlCol="0" anchor="ctr"/>
+          <a:lstStyle/>
+          <a:p>
+            <a:pPr algn="ctr"/>
+            <a:endParaRPr lang="en-US"/>
+          </a:p>
+        </p:txBody>
+      </p:sp>
+      <p:sp>
+        <p:nvSpPr>
+          <p:cNvPr id="15" name="Rectangle 14">
+            <a:extLst>
+              <a:ext uri="{FF2B5EF4-FFF2-40B4-BE49-F238E27FC236}">
+                <a16:creationId xmlns:a16="http://schemas.microsoft.com/office/drawing/2014/main" id="{3150CB11-0C61-439E-910F-5787759E72A0}"/>
+              </a:ext>
+              <a:ext uri="{C183D7F6-B498-43B3-948B-1728B52AA6E4}">
+                <adec:decorative xmlns:adec="http://schemas.microsoft.com/office/drawing/2017/decorative" val="1"/>
+              </a:ext>
+            </a:extLst>
+          </p:cNvPr>
+          <p:cNvSpPr>
+            <a:spLocks noGrp="1" noRot="1" noChangeAspect="1" noMove="1" noResize="1" noEditPoints="1" noAdjustHandles="1" noChangeArrowheads="1" noChangeShapeType="1" noTextEdit="1"/>
+          </p:cNvSpPr>
+          <p:nvPr>
+            <p:extLst>
+              <p:ext uri="{386F3935-93C4-4BCD-93E2-E3B085C9AB24}">
+                <p16:designElem xmlns:p16="http://schemas.microsoft.com/office/powerpoint/2015/main" val="1"/>
+              </p:ext>
+            </p:extLst>
+          </p:nvPr>
+        </p:nvSpPr>
+        <p:spPr>
+          <a:xfrm rot="5400000" flipH="1">
+            <a:off x="767923" y="3588085"/>
+            <a:ext cx="2501979" cy="4037841"/>
+          </a:xfrm>
+          <a:prstGeom prst="rect">
+            <a:avLst/>
+          </a:prstGeom>
+          <a:gradFill>
+            <a:gsLst>
+              <a:gs pos="2000">
+                <a:schemeClr val="accent1">
+                  <a:alpha val="29000"/>
+                </a:schemeClr>
+              </a:gs>
+              <a:gs pos="100000">
+                <a:srgbClr val="000000">
+                  <a:alpha val="30000"/>
+                </a:srgbClr>
+              </a:gs>
+            </a:gsLst>
+            <a:lin ang="7800000" scaled="0"/>
+          </a:gradFill>
+          <a:ln>
+            <a:noFill/>
+          </a:ln>
+        </p:spPr>
+        <p:style>
+          <a:lnRef idx="2">
+            <a:schemeClr val="accent1">
+              <a:shade val="50000"/>
+            </a:schemeClr>
+          </a:lnRef>
+          <a:fillRef idx="1">
+            <a:schemeClr val="accent1"/>
+          </a:fillRef>
+          <a:effectRef idx="0">
+            <a:schemeClr val="accent1"/>
+          </a:effectRef>
+          <a:fontRef idx="minor">
+            <a:schemeClr val="lt1"/>
+          </a:fontRef>
+        </p:style>
+        <p:txBody>
+          <a:bodyPr rtlCol="0" anchor="ctr"/>
+          <a:lstStyle/>
+          <a:p>
+            <a:pPr algn="ctr"/>
+            <a:endParaRPr lang="en-US" dirty="0"/>
+          </a:p>
+        </p:txBody>
+      </p:sp>
+      <p:sp>
+        <p:nvSpPr>
+          <p:cNvPr id="17" name="Freeform: Shape 16">
+            <a:extLst>
+              <a:ext uri="{FF2B5EF4-FFF2-40B4-BE49-F238E27FC236}">
+                <a16:creationId xmlns:a16="http://schemas.microsoft.com/office/drawing/2014/main" id="{43F8A58B-5155-44CE-A5FF-7647B47D0A7A}"/>
+              </a:ext>
+              <a:ext uri="{C183D7F6-B498-43B3-948B-1728B52AA6E4}">
+                <adec:decorative xmlns:adec="http://schemas.microsoft.com/office/drawing/2017/decorative" val="1"/>
+              </a:ext>
+            </a:extLst>
+          </p:cNvPr>
+          <p:cNvSpPr>
+            <a:spLocks noGrp="1" noRot="1" noChangeAspect="1" noMove="1" noResize="1" noEditPoints="1" noAdjustHandles="1" noChangeArrowheads="1" noChangeShapeType="1" noTextEdit="1"/>
+          </p:cNvSpPr>
+          <p:nvPr>
+            <p:extLst>
+              <p:ext uri="{386F3935-93C4-4BCD-93E2-E3B085C9AB24}">
+                <p16:designElem xmlns:p16="http://schemas.microsoft.com/office/powerpoint/2015/main" val="1"/>
+              </p:ext>
+            </p:extLst>
+          </p:nvPr>
+        </p:nvSpPr>
+        <p:spPr>
+          <a:xfrm rot="20635413">
+            <a:off x="-501737" y="969718"/>
+            <a:ext cx="3900357" cy="4178958"/>
+          </a:xfrm>
+          <a:custGeom>
+            <a:avLst/>
+            <a:gdLst>
+              <a:gd name="connsiteX0" fmla="*/ 2432225 w 3900357"/>
+              <a:gd name="connsiteY0" fmla="*/ 93939 h 4178958"/>
+              <a:gd name="connsiteX1" fmla="*/ 3900357 w 3900357"/>
+              <a:gd name="connsiteY1" fmla="*/ 2089479 h 4178958"/>
+              <a:gd name="connsiteX2" fmla="*/ 1810878 w 3900357"/>
+              <a:gd name="connsiteY2" fmla="*/ 4178958 h 4178958"/>
+              <a:gd name="connsiteX3" fmla="*/ 78249 w 3900357"/>
+              <a:gd name="connsiteY3" fmla="*/ 3257727 h 4178958"/>
+              <a:gd name="connsiteX4" fmla="*/ 0 w 3900357"/>
+              <a:gd name="connsiteY4" fmla="*/ 3128923 h 4178958"/>
+              <a:gd name="connsiteX5" fmla="*/ 831324 w 3900357"/>
+              <a:gd name="connsiteY5" fmla="*/ 244281 h 4178958"/>
+              <a:gd name="connsiteX6" fmla="*/ 997559 w 3900357"/>
+              <a:gd name="connsiteY6" fmla="*/ 164202 h 4178958"/>
+              <a:gd name="connsiteX7" fmla="*/ 1810878 w 3900357"/>
+              <a:gd name="connsiteY7" fmla="*/ 0 h 4178958"/>
+              <a:gd name="connsiteX8" fmla="*/ 2432225 w 3900357"/>
+              <a:gd name="connsiteY8" fmla="*/ 93939 h 4178958"/>
+            </a:gdLst>
+            <a:ahLst/>
+            <a:cxnLst>
+              <a:cxn ang="0">
+                <a:pos x="connsiteX0" y="connsiteY0"/>
+              </a:cxn>
+              <a:cxn ang="0">
+                <a:pos x="connsiteX1" y="connsiteY1"/>
+              </a:cxn>
+              <a:cxn ang="0">
+                <a:pos x="connsiteX2" y="connsiteY2"/>
+              </a:cxn>
+              <a:cxn ang="0">
+                <a:pos x="connsiteX3" y="connsiteY3"/>
+              </a:cxn>
+              <a:cxn ang="0">
+                <a:pos x="connsiteX4" y="connsiteY4"/>
+              </a:cxn>
+              <a:cxn ang="0">
+                <a:pos x="connsiteX5" y="connsiteY5"/>
+              </a:cxn>
+              <a:cxn ang="0">
+                <a:pos x="connsiteX6" y="connsiteY6"/>
+              </a:cxn>
+              <a:cxn ang="0">
+                <a:pos x="connsiteX7" y="connsiteY7"/>
+              </a:cxn>
+              <a:cxn ang="0">
+                <a:pos x="connsiteX8" y="connsiteY8"/>
+              </a:cxn>
+            </a:cxnLst>
+            <a:rect l="l" t="t" r="r" b="b"/>
+            <a:pathLst>
+              <a:path w="3900357" h="4178958">
+                <a:moveTo>
+                  <a:pt x="2432225" y="93939"/>
+                </a:moveTo>
+                <a:cubicBezTo>
+                  <a:pt x="3282786" y="358491"/>
+                  <a:pt x="3900357" y="1151865"/>
+                  <a:pt x="3900357" y="2089479"/>
+                </a:cubicBezTo>
+                <a:cubicBezTo>
+                  <a:pt x="3900357" y="3243466"/>
+                  <a:pt x="2964865" y="4178958"/>
+                  <a:pt x="1810878" y="4178958"/>
+                </a:cubicBezTo>
+                <a:cubicBezTo>
+                  <a:pt x="1089636" y="4178958"/>
+                  <a:pt x="453744" y="3813531"/>
+                  <a:pt x="78249" y="3257727"/>
+                </a:cubicBezTo>
+                <a:lnTo>
+                  <a:pt x="0" y="3128923"/>
+                </a:lnTo>
+                <a:lnTo>
+                  <a:pt x="831324" y="244281"/>
+                </a:lnTo>
+                <a:lnTo>
+                  <a:pt x="997559" y="164202"/>
+                </a:lnTo>
+                <a:cubicBezTo>
+                  <a:pt x="1247540" y="58468"/>
+                  <a:pt x="1522381" y="0"/>
+                  <a:pt x="1810878" y="0"/>
+                </a:cubicBezTo>
+                <a:cubicBezTo>
+                  <a:pt x="2027251" y="0"/>
+                  <a:pt x="2235942" y="32888"/>
+                  <a:pt x="2432225" y="93939"/>
+                </a:cubicBezTo>
+                <a:close/>
+              </a:path>
+            </a:pathLst>
+          </a:custGeom>
+          <a:gradFill>
+            <a:gsLst>
+              <a:gs pos="29000">
+                <a:srgbClr val="000000">
+                  <a:alpha val="0"/>
+                </a:srgbClr>
+              </a:gs>
+              <a:gs pos="100000">
+                <a:schemeClr val="accent1">
+                  <a:alpha val="43000"/>
+                </a:schemeClr>
+              </a:gs>
+            </a:gsLst>
+            <a:lin ang="1800000" scaled="0"/>
+          </a:gradFill>
+          <a:ln>
+            <a:noFill/>
+          </a:ln>
+        </p:spPr>
+        <p:style>
+          <a:lnRef idx="2">
+            <a:schemeClr val="accent1">
+              <a:shade val="50000"/>
+            </a:schemeClr>
+          </a:lnRef>
+          <a:fillRef idx="1">
+            <a:schemeClr val="accent1"/>
+          </a:fillRef>
+          <a:effectRef idx="0">
+            <a:schemeClr val="accent1"/>
+          </a:effectRef>
+          <a:fontRef idx="minor">
+            <a:schemeClr val="lt1"/>
+          </a:fontRef>
+        </p:style>
+        <p:txBody>
+          <a:bodyPr wrap="square" rtlCol="0" anchor="ctr">
+            <a:noAutofit/>
+          </a:bodyPr>
+          <a:lstStyle/>
+          <a:p>
+            <a:pPr algn="ctr"/>
+            <a:endParaRPr lang="en-US" dirty="0"/>
+          </a:p>
+        </p:txBody>
+      </p:sp>
+      <p:sp>
+        <p:nvSpPr>
+          <p:cNvPr id="19" name="Rectangle 18">
+            <a:extLst>
+              <a:ext uri="{FF2B5EF4-FFF2-40B4-BE49-F238E27FC236}">
+                <a16:creationId xmlns:a16="http://schemas.microsoft.com/office/drawing/2014/main" id="{443F2ACA-E6D6-4028-82DD-F03C262D5DE6}"/>
+              </a:ext>
+              <a:ext uri="{C183D7F6-B498-43B3-948B-1728B52AA6E4}">
+                <adec:decorative xmlns:adec="http://schemas.microsoft.com/office/drawing/2017/decorative" val="1"/>
+              </a:ext>
+            </a:extLst>
+          </p:cNvPr>
+          <p:cNvSpPr>
+            <a:spLocks noGrp="1" noRot="1" noChangeAspect="1" noMove="1" noResize="1" noEditPoints="1" noAdjustHandles="1" noChangeArrowheads="1" noChangeShapeType="1" noTextEdit="1"/>
+          </p:cNvSpPr>
+          <p:nvPr>
+            <p:extLst>
+              <p:ext uri="{386F3935-93C4-4BCD-93E2-E3B085C9AB24}">
+                <p16:designElem xmlns:p16="http://schemas.microsoft.com/office/powerpoint/2015/main" val="1"/>
+              </p:ext>
+            </p:extLst>
+          </p:nvPr>
+        </p:nvSpPr>
+        <p:spPr>
+          <a:xfrm rot="5400000" flipH="1">
+            <a:off x="-1410095" y="1410079"/>
+            <a:ext cx="6858003" cy="4037835"/>
+          </a:xfrm>
+          <a:prstGeom prst="rect">
+            <a:avLst/>
+          </a:prstGeom>
+          <a:gradFill>
+            <a:gsLst>
+              <a:gs pos="0">
+                <a:srgbClr val="000000">
+                  <a:alpha val="0"/>
+                </a:srgbClr>
+              </a:gs>
+              <a:gs pos="99000">
+                <a:schemeClr val="accent1">
+                  <a:lumMod val="60000"/>
+                  <a:lumOff val="40000"/>
+                  <a:alpha val="11000"/>
+                </a:schemeClr>
+              </a:gs>
+            </a:gsLst>
+            <a:lin ang="7200000" scaled="0"/>
+          </a:gradFill>
+          <a:ln>
+            <a:noFill/>
+          </a:ln>
+        </p:spPr>
+        <p:style>
+          <a:lnRef idx="2">
+            <a:schemeClr val="accent1">
+              <a:shade val="50000"/>
+            </a:schemeClr>
+          </a:lnRef>
+          <a:fillRef idx="1">
+            <a:schemeClr val="accent1"/>
+          </a:fillRef>
+          <a:effectRef idx="0">
+            <a:schemeClr val="accent1"/>
+          </a:effectRef>
+          <a:fontRef idx="minor">
+            <a:schemeClr val="lt1"/>
+          </a:fontRef>
+        </p:style>
+        <p:txBody>
+          <a:bodyPr rtlCol="0" anchor="ctr"/>
+          <a:lstStyle/>
+          <a:p>
+            <a:pPr algn="ctr"/>
+            <a:endParaRPr lang="en-US"/>
+          </a:p>
+        </p:txBody>
+      </p:sp>
+      <p:sp>
+        <p:nvSpPr>
+          <p:cNvPr id="2" name="Title 1">
+            <a:extLst>
+              <a:ext uri="{FF2B5EF4-FFF2-40B4-BE49-F238E27FC236}">
+                <a16:creationId xmlns:a16="http://schemas.microsoft.com/office/drawing/2014/main" id="{C954C1A1-7E35-3463-34B1-42060817C8CC}"/>
+              </a:ext>
+            </a:extLst>
+          </p:cNvPr>
+          <p:cNvSpPr>
+            <a:spLocks noGrp="1"/>
+          </p:cNvSpPr>
+          <p:nvPr>
+            <p:ph type="title"/>
+          </p:nvPr>
+        </p:nvSpPr>
+        <p:spPr>
+          <a:xfrm>
+            <a:off x="586478" y="1683756"/>
+            <a:ext cx="3115265" cy="2396359"/>
+          </a:xfrm>
+        </p:spPr>
+        <p:txBody>
+          <a:bodyPr anchor="b">
+            <a:normAutofit/>
+          </a:bodyPr>
+          <a:lstStyle/>
+          <a:p>
+            <a:pPr algn="r"/>
+            <a:r>
+              <a:rPr lang="en-US" sz="3700">
+                <a:solidFill>
+                  <a:srgbClr val="FFFFFF"/>
+                </a:solidFill>
+              </a:rPr>
+              <a:t>What Do We Mean by “Inheritance”?</a:t>
+            </a:r>
+          </a:p>
+        </p:txBody>
+      </p:sp>
+      <p:graphicFrame>
+        <p:nvGraphicFramePr>
+          <p:cNvPr id="5" name="Content Placeholder 2">
+            <a:extLst>
+              <a:ext uri="{FF2B5EF4-FFF2-40B4-BE49-F238E27FC236}">
+                <a16:creationId xmlns:a16="http://schemas.microsoft.com/office/drawing/2014/main" id="{3DFD1BDA-B9F8-337C-99EB-3F7D13751482}"/>
+              </a:ext>
+            </a:extLst>
+          </p:cNvPr>
+          <p:cNvGraphicFramePr>
+            <a:graphicFrameLocks noGrp="1"/>
+          </p:cNvGraphicFramePr>
+          <p:nvPr>
+            <p:ph idx="1"/>
+            <p:extLst>
+              <p:ext uri="{D42A27DB-BD31-4B8C-83A1-F6EECF244321}">
+                <p14:modId xmlns:p14="http://schemas.microsoft.com/office/powerpoint/2010/main" val="171340933"/>
+              </p:ext>
+            </p:extLst>
+          </p:nvPr>
+        </p:nvGraphicFramePr>
+        <p:xfrm>
+          <a:off x="4905052" y="750440"/>
+          <a:ext cx="6666833" cy="5453920"/>
+        </p:xfrm>
+        <a:graphic>
+          <a:graphicData uri="http://schemas.openxmlformats.org/drawingml/2006/diagram">
+            <dgm:relIds xmlns:dgm="http://schemas.openxmlformats.org/drawingml/2006/diagram" xmlns:r="http://schemas.openxmlformats.org/officeDocument/2006/relationships" r:dm="rId2" r:lo="rId3" r:qs="rId4" r:cs="rId5"/>
+          </a:graphicData>
+        </a:graphic>
+      </p:graphicFrame>
+    </p:spTree>
+    <p:extLst>
+      <p:ext uri="{BB962C8B-B14F-4D97-AF65-F5344CB8AC3E}">
+        <p14:creationId xmlns:p14="http://schemas.microsoft.com/office/powerpoint/2010/main" val="609920282"/>
+      </p:ext>
+    </p:extLst>
+  </p:cSld>
+  <p:clrMapOvr>
+    <a:masterClrMapping/>
+  </p:clrMapOvr>
+</p:sld>
+</file>
+
+<file path=ppt/slides/slide3.xml><?xml version="1.0" encoding="utf-8"?>
+<p:sld xmlns:a="http://schemas.openxmlformats.org/drawingml/2006/main" xmlns:r="http://schemas.openxmlformats.org/officeDocument/2006/relationships" xmlns:p="http://schemas.openxmlformats.org/presentationml/2006/main">
+  <p:cSld>
+    <p:bg>
+      <p:bgPr>
+        <a:solidFill>
+          <a:schemeClr val="bg1"/>
+        </a:solidFill>
+        <a:effectLst/>
+      </p:bgPr>
+    </p:bg>
+    <p:spTree>
+      <p:nvGrpSpPr>
+        <p:cNvPr id="1" name=""/>
+        <p:cNvGrpSpPr/>
+        <p:nvPr/>
+      </p:nvGrpSpPr>
+      <p:grpSpPr>
+        <a:xfrm>
+          <a:off x="0" y="0"/>
+          <a:ext cx="0" cy="0"/>
+          <a:chOff x="0" y="0"/>
+          <a:chExt cx="0" cy="0"/>
+        </a:xfrm>
+      </p:grpSpPr>
+      <p:sp useBgFill="1">
+        <p:nvSpPr>
+          <p:cNvPr id="21" name="Rectangle 20">
+            <a:extLst>
+              <a:ext uri="{FF2B5EF4-FFF2-40B4-BE49-F238E27FC236}">
+                <a16:creationId xmlns:a16="http://schemas.microsoft.com/office/drawing/2014/main" id="{BACC6370-2D7E-4714-9D71-7542949D7D5D}"/>
+              </a:ext>
+              <a:ext uri="{C183D7F6-B498-43B3-948B-1728B52AA6E4}">
+                <adec:decorative xmlns:adec="http://schemas.microsoft.com/office/drawing/2017/decorative" val="1"/>
+              </a:ext>
+            </a:extLst>
+          </p:cNvPr>
+          <p:cNvSpPr>
+            <a:spLocks noGrp="1" noRot="1" noChangeAspect="1" noMove="1" noResize="1" noEditPoints="1" noAdjustHandles="1" noChangeArrowheads="1" noChangeShapeType="1" noTextEdit="1"/>
+          </p:cNvSpPr>
+          <p:nvPr>
+            <p:extLst>
+              <p:ext uri="{386F3935-93C4-4BCD-93E2-E3B085C9AB24}">
+                <p16:designElem xmlns:p16="http://schemas.microsoft.com/office/powerpoint/2015/main" val="1"/>
+              </p:ext>
+            </p:extLst>
+          </p:nvPr>
+        </p:nvSpPr>
+        <p:spPr>
+          <a:xfrm>
+            <a:off x="0" y="0"/>
+            <a:ext cx="12192000" cy="6858000"/>
+          </a:xfrm>
+          <a:prstGeom prst="rect">
+            <a:avLst/>
+          </a:prstGeom>
+          <a:ln w="12700" cap="flat" cmpd="sng" algn="ctr">
+            <a:noFill/>
+            <a:prstDash val="solid"/>
+            <a:miter lim="800000"/>
+          </a:ln>
+          <a:effectLst/>
+          <a:extLst>
+            <a:ext uri="{91240B29-F687-4F45-9708-019B960494DF}">
+              <a14:hiddenLine xmlns:a14="http://schemas.microsoft.com/office/drawing/2010/main" w="12700" cap="flat" cmpd="sng" algn="ctr">
+                <a:solidFill>
+                  <a:schemeClr val="accent1">
+                    <a:shade val="50000"/>
+                  </a:schemeClr>
+                </a:solidFill>
+                <a:prstDash val="solid"/>
+                <a:miter lim="800000"/>
+              </a14:hiddenLine>
+            </a:ext>
+          </a:extLst>
+        </p:spPr>
+        <p:style>
+          <a:lnRef idx="2">
+            <a:schemeClr val="accent1">
+              <a:shade val="50000"/>
+            </a:schemeClr>
+          </a:lnRef>
+          <a:fillRef idx="1">
+            <a:schemeClr val="accent1"/>
+          </a:fillRef>
+          <a:effectRef idx="0">
+            <a:schemeClr val="accent1"/>
+          </a:effectRef>
+          <a:fontRef idx="minor">
+            <a:schemeClr val="lt1"/>
+          </a:fontRef>
+        </p:style>
+        <p:txBody>
+          <a:bodyPr rtlCol="0" anchor="ctr"/>
+          <a:lstStyle/>
+          <a:p>
+            <a:pPr algn="ctr"/>
+            <a:endParaRPr lang="en-US"/>
+          </a:p>
+        </p:txBody>
+      </p:sp>
+      <p:sp>
+        <p:nvSpPr>
+          <p:cNvPr id="22" name="Rectangle 21">
+            <a:extLst>
+              <a:ext uri="{FF2B5EF4-FFF2-40B4-BE49-F238E27FC236}">
+                <a16:creationId xmlns:a16="http://schemas.microsoft.com/office/drawing/2014/main" id="{256B2C21-A230-48C0-8DF1-C46611373C44}"/>
+              </a:ext>
+              <a:ext uri="{C183D7F6-B498-43B3-948B-1728B52AA6E4}">
+                <adec:decorative xmlns:adec="http://schemas.microsoft.com/office/drawing/2017/decorative" val="1"/>
+              </a:ext>
+            </a:extLst>
+          </p:cNvPr>
+          <p:cNvSpPr>
+            <a:spLocks noGrp="1" noRot="1" noChangeAspect="1" noMove="1" noResize="1" noEditPoints="1" noAdjustHandles="1" noChangeArrowheads="1" noChangeShapeType="1" noTextEdit="1"/>
+          </p:cNvSpPr>
+          <p:nvPr>
+            <p:extLst>
+              <p:ext uri="{386F3935-93C4-4BCD-93E2-E3B085C9AB24}">
+                <p16:designElem xmlns:p16="http://schemas.microsoft.com/office/powerpoint/2015/main" val="1"/>
+              </p:ext>
+            </p:extLst>
+          </p:nvPr>
+        </p:nvSpPr>
+        <p:spPr>
+          <a:xfrm rot="5400000" flipH="1">
+            <a:off x="-1410084" y="1410082"/>
+            <a:ext cx="6858000" cy="4037836"/>
+          </a:xfrm>
+          <a:prstGeom prst="rect">
+            <a:avLst/>
+          </a:prstGeom>
+          <a:gradFill>
+            <a:gsLst>
+              <a:gs pos="8000">
+                <a:srgbClr val="000000"/>
+              </a:gs>
+              <a:gs pos="100000">
+                <a:schemeClr val="accent1">
+                  <a:lumMod val="75000"/>
+                </a:schemeClr>
+              </a:gs>
+            </a:gsLst>
+            <a:lin ang="3000000" scaled="0"/>
+          </a:gradFill>
+          <a:ln>
+            <a:noFill/>
+          </a:ln>
+        </p:spPr>
+        <p:style>
+          <a:lnRef idx="2">
+            <a:schemeClr val="accent1">
+              <a:shade val="50000"/>
+            </a:schemeClr>
+          </a:lnRef>
+          <a:fillRef idx="1">
+            <a:schemeClr val="accent1"/>
+          </a:fillRef>
+          <a:effectRef idx="0">
+            <a:schemeClr val="accent1"/>
+          </a:effectRef>
+          <a:fontRef idx="minor">
+            <a:schemeClr val="lt1"/>
+          </a:fontRef>
+        </p:style>
+        <p:txBody>
+          <a:bodyPr rtlCol="0" anchor="ctr"/>
+          <a:lstStyle/>
+          <a:p>
+            <a:pPr algn="ctr"/>
+            <a:endParaRPr lang="en-US"/>
+          </a:p>
+        </p:txBody>
+      </p:sp>
+      <p:sp>
+        <p:nvSpPr>
+          <p:cNvPr id="23" name="Rectangle 22">
+            <a:extLst>
+              <a:ext uri="{FF2B5EF4-FFF2-40B4-BE49-F238E27FC236}">
+                <a16:creationId xmlns:a16="http://schemas.microsoft.com/office/drawing/2014/main" id="{3847E18C-932D-4C95-AABA-FEC7C9499AD7}"/>
+              </a:ext>
+              <a:ext uri="{C183D7F6-B498-43B3-948B-1728B52AA6E4}">
+                <adec:decorative xmlns:adec="http://schemas.microsoft.com/office/drawing/2017/decorative" val="1"/>
+              </a:ext>
+            </a:extLst>
+          </p:cNvPr>
+          <p:cNvSpPr>
+            <a:spLocks noGrp="1" noRot="1" noChangeAspect="1" noMove="1" noResize="1" noEditPoints="1" noAdjustHandles="1" noChangeArrowheads="1" noChangeShapeType="1" noTextEdit="1"/>
+          </p:cNvSpPr>
+          <p:nvPr>
+            <p:extLst>
+              <p:ext uri="{386F3935-93C4-4BCD-93E2-E3B085C9AB24}">
+                <p16:designElem xmlns:p16="http://schemas.microsoft.com/office/powerpoint/2015/main" val="1"/>
+              </p:ext>
+            </p:extLst>
+          </p:nvPr>
+        </p:nvSpPr>
+        <p:spPr>
+          <a:xfrm rot="5400000" flipH="1">
+            <a:off x="-1410085" y="1420219"/>
+            <a:ext cx="6857999" cy="4037839"/>
+          </a:xfrm>
+          <a:prstGeom prst="rect">
+            <a:avLst/>
+          </a:prstGeom>
+          <a:gradFill>
+            <a:gsLst>
+              <a:gs pos="0">
+                <a:srgbClr val="000000">
+                  <a:alpha val="0"/>
+                </a:srgbClr>
+              </a:gs>
+              <a:gs pos="99000">
+                <a:schemeClr val="accent1">
+                  <a:alpha val="46000"/>
+                </a:schemeClr>
+              </a:gs>
+            </a:gsLst>
+            <a:lin ang="1800000" scaled="0"/>
+          </a:gradFill>
+          <a:ln>
+            <a:noFill/>
+          </a:ln>
+        </p:spPr>
+        <p:style>
+          <a:lnRef idx="2">
+            <a:schemeClr val="accent1">
+              <a:shade val="50000"/>
+            </a:schemeClr>
+          </a:lnRef>
+          <a:fillRef idx="1">
+            <a:schemeClr val="accent1"/>
+          </a:fillRef>
+          <a:effectRef idx="0">
+            <a:schemeClr val="accent1"/>
+          </a:effectRef>
+          <a:fontRef idx="minor">
+            <a:schemeClr val="lt1"/>
+          </a:fontRef>
+        </p:style>
+        <p:txBody>
+          <a:bodyPr rtlCol="0" anchor="ctr"/>
+          <a:lstStyle/>
+          <a:p>
+            <a:pPr algn="ctr"/>
+            <a:endParaRPr lang="en-US"/>
+          </a:p>
+        </p:txBody>
+      </p:sp>
+      <p:sp>
+        <p:nvSpPr>
+          <p:cNvPr id="24" name="Rectangle 23">
+            <a:extLst>
+              <a:ext uri="{FF2B5EF4-FFF2-40B4-BE49-F238E27FC236}">
+                <a16:creationId xmlns:a16="http://schemas.microsoft.com/office/drawing/2014/main" id="{3150CB11-0C61-439E-910F-5787759E72A0}"/>
+              </a:ext>
+              <a:ext uri="{C183D7F6-B498-43B3-948B-1728B52AA6E4}">
+                <adec:decorative xmlns:adec="http://schemas.microsoft.com/office/drawing/2017/decorative" val="1"/>
+              </a:ext>
+            </a:extLst>
+          </p:cNvPr>
+          <p:cNvSpPr>
+            <a:spLocks noGrp="1" noRot="1" noChangeAspect="1" noMove="1" noResize="1" noEditPoints="1" noAdjustHandles="1" noChangeArrowheads="1" noChangeShapeType="1" noTextEdit="1"/>
+          </p:cNvSpPr>
+          <p:nvPr>
+            <p:extLst>
+              <p:ext uri="{386F3935-93C4-4BCD-93E2-E3B085C9AB24}">
+                <p16:designElem xmlns:p16="http://schemas.microsoft.com/office/powerpoint/2015/main" val="1"/>
+              </p:ext>
+            </p:extLst>
+          </p:nvPr>
+        </p:nvSpPr>
+        <p:spPr>
+          <a:xfrm rot="5400000" flipH="1">
+            <a:off x="767923" y="3588085"/>
+            <a:ext cx="2501979" cy="4037841"/>
+          </a:xfrm>
+          <a:prstGeom prst="rect">
+            <a:avLst/>
+          </a:prstGeom>
+          <a:gradFill>
+            <a:gsLst>
+              <a:gs pos="2000">
+                <a:schemeClr val="accent1">
+                  <a:alpha val="29000"/>
+                </a:schemeClr>
+              </a:gs>
+              <a:gs pos="100000">
+                <a:srgbClr val="000000">
+                  <a:alpha val="30000"/>
+                </a:srgbClr>
+              </a:gs>
+            </a:gsLst>
+            <a:lin ang="7800000" scaled="0"/>
+          </a:gradFill>
+          <a:ln>
+            <a:noFill/>
+          </a:ln>
+        </p:spPr>
+        <p:style>
+          <a:lnRef idx="2">
+            <a:schemeClr val="accent1">
+              <a:shade val="50000"/>
+            </a:schemeClr>
+          </a:lnRef>
+          <a:fillRef idx="1">
+            <a:schemeClr val="accent1"/>
+          </a:fillRef>
+          <a:effectRef idx="0">
+            <a:schemeClr val="accent1"/>
+          </a:effectRef>
+          <a:fontRef idx="minor">
+            <a:schemeClr val="lt1"/>
+          </a:fontRef>
+        </p:style>
+        <p:txBody>
+          <a:bodyPr rtlCol="0" anchor="ctr"/>
+          <a:lstStyle/>
+          <a:p>
+            <a:pPr algn="ctr"/>
+            <a:endParaRPr lang="en-US" dirty="0"/>
+          </a:p>
+        </p:txBody>
+      </p:sp>
+      <p:sp>
+        <p:nvSpPr>
+          <p:cNvPr id="25" name="Freeform: Shape 24">
+            <a:extLst>
+              <a:ext uri="{FF2B5EF4-FFF2-40B4-BE49-F238E27FC236}">
+                <a16:creationId xmlns:a16="http://schemas.microsoft.com/office/drawing/2014/main" id="{43F8A58B-5155-44CE-A5FF-7647B47D0A7A}"/>
+              </a:ext>
+              <a:ext uri="{C183D7F6-B498-43B3-948B-1728B52AA6E4}">
+                <adec:decorative xmlns:adec="http://schemas.microsoft.com/office/drawing/2017/decorative" val="1"/>
+              </a:ext>
+            </a:extLst>
+          </p:cNvPr>
+          <p:cNvSpPr>
+            <a:spLocks noGrp="1" noRot="1" noChangeAspect="1" noMove="1" noResize="1" noEditPoints="1" noAdjustHandles="1" noChangeArrowheads="1" noChangeShapeType="1" noTextEdit="1"/>
+          </p:cNvSpPr>
+          <p:nvPr>
+            <p:extLst>
+              <p:ext uri="{386F3935-93C4-4BCD-93E2-E3B085C9AB24}">
+                <p16:designElem xmlns:p16="http://schemas.microsoft.com/office/powerpoint/2015/main" val="1"/>
+              </p:ext>
+            </p:extLst>
+          </p:nvPr>
+        </p:nvSpPr>
+        <p:spPr>
+          <a:xfrm rot="20635413">
+            <a:off x="-501737" y="969718"/>
+            <a:ext cx="3900357" cy="4178958"/>
+          </a:xfrm>
+          <a:custGeom>
+            <a:avLst/>
+            <a:gdLst>
+              <a:gd name="connsiteX0" fmla="*/ 2432225 w 3900357"/>
+              <a:gd name="connsiteY0" fmla="*/ 93939 h 4178958"/>
+              <a:gd name="connsiteX1" fmla="*/ 3900357 w 3900357"/>
+              <a:gd name="connsiteY1" fmla="*/ 2089479 h 4178958"/>
+              <a:gd name="connsiteX2" fmla="*/ 1810878 w 3900357"/>
+              <a:gd name="connsiteY2" fmla="*/ 4178958 h 4178958"/>
+              <a:gd name="connsiteX3" fmla="*/ 78249 w 3900357"/>
+              <a:gd name="connsiteY3" fmla="*/ 3257727 h 4178958"/>
+              <a:gd name="connsiteX4" fmla="*/ 0 w 3900357"/>
+              <a:gd name="connsiteY4" fmla="*/ 3128923 h 4178958"/>
+              <a:gd name="connsiteX5" fmla="*/ 831324 w 3900357"/>
+              <a:gd name="connsiteY5" fmla="*/ 244281 h 4178958"/>
+              <a:gd name="connsiteX6" fmla="*/ 997559 w 3900357"/>
+              <a:gd name="connsiteY6" fmla="*/ 164202 h 4178958"/>
+              <a:gd name="connsiteX7" fmla="*/ 1810878 w 3900357"/>
+              <a:gd name="connsiteY7" fmla="*/ 0 h 4178958"/>
+              <a:gd name="connsiteX8" fmla="*/ 2432225 w 3900357"/>
+              <a:gd name="connsiteY8" fmla="*/ 93939 h 4178958"/>
+            </a:gdLst>
+            <a:ahLst/>
+            <a:cxnLst>
+              <a:cxn ang="0">
+                <a:pos x="connsiteX0" y="connsiteY0"/>
+              </a:cxn>
+              <a:cxn ang="0">
+                <a:pos x="connsiteX1" y="connsiteY1"/>
+              </a:cxn>
+              <a:cxn ang="0">
+                <a:pos x="connsiteX2" y="connsiteY2"/>
+              </a:cxn>
+              <a:cxn ang="0">
+                <a:pos x="connsiteX3" y="connsiteY3"/>
+              </a:cxn>
+              <a:cxn ang="0">
+                <a:pos x="connsiteX4" y="connsiteY4"/>
+              </a:cxn>
+              <a:cxn ang="0">
+                <a:pos x="connsiteX5" y="connsiteY5"/>
+              </a:cxn>
+              <a:cxn ang="0">
+                <a:pos x="connsiteX6" y="connsiteY6"/>
+              </a:cxn>
+              <a:cxn ang="0">
+                <a:pos x="connsiteX7" y="connsiteY7"/>
+              </a:cxn>
+              <a:cxn ang="0">
+                <a:pos x="connsiteX8" y="connsiteY8"/>
+              </a:cxn>
+            </a:cxnLst>
+            <a:rect l="l" t="t" r="r" b="b"/>
+            <a:pathLst>
+              <a:path w="3900357" h="4178958">
+                <a:moveTo>
+                  <a:pt x="2432225" y="93939"/>
+                </a:moveTo>
+                <a:cubicBezTo>
+                  <a:pt x="3282786" y="358491"/>
+                  <a:pt x="3900357" y="1151865"/>
+                  <a:pt x="3900357" y="2089479"/>
+                </a:cubicBezTo>
+                <a:cubicBezTo>
+                  <a:pt x="3900357" y="3243466"/>
+                  <a:pt x="2964865" y="4178958"/>
+                  <a:pt x="1810878" y="4178958"/>
+                </a:cubicBezTo>
+                <a:cubicBezTo>
+                  <a:pt x="1089636" y="4178958"/>
+                  <a:pt x="453744" y="3813531"/>
+                  <a:pt x="78249" y="3257727"/>
+                </a:cubicBezTo>
+                <a:lnTo>
+                  <a:pt x="0" y="3128923"/>
+                </a:lnTo>
+                <a:lnTo>
+                  <a:pt x="831324" y="244281"/>
+                </a:lnTo>
+                <a:lnTo>
+                  <a:pt x="997559" y="164202"/>
+                </a:lnTo>
+                <a:cubicBezTo>
+                  <a:pt x="1247540" y="58468"/>
+                  <a:pt x="1522381" y="0"/>
+                  <a:pt x="1810878" y="0"/>
+                </a:cubicBezTo>
+                <a:cubicBezTo>
+                  <a:pt x="2027251" y="0"/>
+                  <a:pt x="2235942" y="32888"/>
+                  <a:pt x="2432225" y="93939"/>
+                </a:cubicBezTo>
+                <a:close/>
+              </a:path>
+            </a:pathLst>
+          </a:custGeom>
+          <a:gradFill>
+            <a:gsLst>
+              <a:gs pos="29000">
+                <a:srgbClr val="000000">
+                  <a:alpha val="0"/>
+                </a:srgbClr>
+              </a:gs>
+              <a:gs pos="100000">
+                <a:schemeClr val="accent1">
+                  <a:alpha val="43000"/>
+                </a:schemeClr>
+              </a:gs>
+            </a:gsLst>
+            <a:lin ang="1800000" scaled="0"/>
+          </a:gradFill>
+          <a:ln>
+            <a:noFill/>
+          </a:ln>
+        </p:spPr>
+        <p:style>
+          <a:lnRef idx="2">
+            <a:schemeClr val="accent1">
+              <a:shade val="50000"/>
+            </a:schemeClr>
+          </a:lnRef>
+          <a:fillRef idx="1">
+            <a:schemeClr val="accent1"/>
+          </a:fillRef>
+          <a:effectRef idx="0">
+            <a:schemeClr val="accent1"/>
+          </a:effectRef>
+          <a:fontRef idx="minor">
+            <a:schemeClr val="lt1"/>
+          </a:fontRef>
+        </p:style>
+        <p:txBody>
+          <a:bodyPr wrap="square" rtlCol="0" anchor="ctr">
+            <a:noAutofit/>
+          </a:bodyPr>
+          <a:lstStyle/>
+          <a:p>
+            <a:pPr algn="ctr"/>
+            <a:endParaRPr lang="en-US" dirty="0"/>
+          </a:p>
+        </p:txBody>
+      </p:sp>
+      <p:sp>
+        <p:nvSpPr>
+          <p:cNvPr id="26" name="Rectangle 25">
+            <a:extLst>
+              <a:ext uri="{FF2B5EF4-FFF2-40B4-BE49-F238E27FC236}">
+                <a16:creationId xmlns:a16="http://schemas.microsoft.com/office/drawing/2014/main" id="{443F2ACA-E6D6-4028-82DD-F03C262D5DE6}"/>
+              </a:ext>
+              <a:ext uri="{C183D7F6-B498-43B3-948B-1728B52AA6E4}">
+                <adec:decorative xmlns:adec="http://schemas.microsoft.com/office/drawing/2017/decorative" val="1"/>
+              </a:ext>
+            </a:extLst>
+          </p:cNvPr>
+          <p:cNvSpPr>
+            <a:spLocks noGrp="1" noRot="1" noChangeAspect="1" noMove="1" noResize="1" noEditPoints="1" noAdjustHandles="1" noChangeArrowheads="1" noChangeShapeType="1" noTextEdit="1"/>
+          </p:cNvSpPr>
+          <p:nvPr>
+            <p:extLst>
+              <p:ext uri="{386F3935-93C4-4BCD-93E2-E3B085C9AB24}">
+                <p16:designElem xmlns:p16="http://schemas.microsoft.com/office/powerpoint/2015/main" val="1"/>
+              </p:ext>
+            </p:extLst>
+          </p:nvPr>
+        </p:nvSpPr>
+        <p:spPr>
+          <a:xfrm rot="5400000" flipH="1">
+            <a:off x="-1410095" y="1410079"/>
+            <a:ext cx="6858003" cy="4037835"/>
+          </a:xfrm>
+          <a:prstGeom prst="rect">
+            <a:avLst/>
+          </a:prstGeom>
+          <a:gradFill>
+            <a:gsLst>
+              <a:gs pos="0">
+                <a:srgbClr val="000000">
+                  <a:alpha val="0"/>
+                </a:srgbClr>
+              </a:gs>
+              <a:gs pos="99000">
+                <a:schemeClr val="accent1">
+                  <a:lumMod val="60000"/>
+                  <a:lumOff val="40000"/>
+                  <a:alpha val="11000"/>
+                </a:schemeClr>
+              </a:gs>
+            </a:gsLst>
+            <a:lin ang="7200000" scaled="0"/>
+          </a:gradFill>
+          <a:ln>
+            <a:noFill/>
+          </a:ln>
+        </p:spPr>
+        <p:style>
+          <a:lnRef idx="2">
+            <a:schemeClr val="accent1">
+              <a:shade val="50000"/>
+            </a:schemeClr>
+          </a:lnRef>
+          <a:fillRef idx="1">
+            <a:schemeClr val="accent1"/>
+          </a:fillRef>
+          <a:effectRef idx="0">
+            <a:schemeClr val="accent1"/>
+          </a:effectRef>
+          <a:fontRef idx="minor">
+            <a:schemeClr val="lt1"/>
+          </a:fontRef>
+        </p:style>
+        <p:txBody>
+          <a:bodyPr rtlCol="0" anchor="ctr"/>
+          <a:lstStyle/>
+          <a:p>
+            <a:pPr algn="ctr"/>
+            <a:endParaRPr lang="en-US"/>
+          </a:p>
+        </p:txBody>
+      </p:sp>
       <p:sp>
         <p:nvSpPr>
           <p:cNvPr id="2" name="Title 1">
@@ -3472,118 +11588,61 @@
             <p:ph type="title"/>
           </p:nvPr>
         </p:nvSpPr>
-        <p:spPr/>
+        <p:spPr>
+          <a:xfrm>
+            <a:off x="586478" y="1683756"/>
+            <a:ext cx="3115265" cy="2396359"/>
+          </a:xfrm>
+        </p:spPr>
         <p:txBody>
-          <a:bodyPr/>
+          <a:bodyPr anchor="b">
+            <a:normAutofit/>
+          </a:bodyPr>
           <a:lstStyle/>
           <a:p>
-            <a:pPr algn="ctr"/>
+            <a:pPr algn="r"/>
             <a:r>
-              <a:rPr lang="en-US" dirty="0"/>
+              <a:rPr lang="en-US" sz="4000">
+                <a:solidFill>
+                  <a:srgbClr val="FFFFFF"/>
+                </a:solidFill>
+              </a:rPr>
               <a:t>Introduction</a:t>
             </a:r>
           </a:p>
         </p:txBody>
       </p:sp>
-      <p:sp>
-        <p:nvSpPr>
-          <p:cNvPr id="3" name="Content Placeholder 2">
+      <p:graphicFrame>
+        <p:nvGraphicFramePr>
+          <p:cNvPr id="27" name="Content Placeholder 2">
             <a:extLst>
               <a:ext uri="{FF2B5EF4-FFF2-40B4-BE49-F238E27FC236}">
-                <a16:creationId xmlns:a16="http://schemas.microsoft.com/office/drawing/2014/main" id="{B1CBE78B-2493-C37F-4EB5-71E816AF6934}"/>
+                <a16:creationId xmlns:a16="http://schemas.microsoft.com/office/drawing/2014/main" id="{54C25898-B35E-4621-F93E-AEF3C89A9C4A}"/>
               </a:ext>
             </a:extLst>
           </p:cNvPr>
-          <p:cNvSpPr>
-            <a:spLocks noGrp="1"/>
-          </p:cNvSpPr>
+          <p:cNvGraphicFramePr>
+            <a:graphicFrameLocks noGrp="1"/>
+          </p:cNvGraphicFramePr>
           <p:nvPr>
             <p:ph idx="1"/>
+            <p:extLst>
+              <p:ext uri="{D42A27DB-BD31-4B8C-83A1-F6EECF244321}">
+                <p14:modId xmlns:p14="http://schemas.microsoft.com/office/powerpoint/2010/main" val="3717445096"/>
+              </p:ext>
+            </p:extLst>
           </p:nvPr>
-        </p:nvSpPr>
-        <p:spPr/>
-        <p:txBody>
-          <a:bodyPr/>
-          <a:lstStyle/>
-          <a:p>
-            <a:r>
-              <a:rPr lang="en-US" dirty="0"/>
-              <a:t>Rust has </a:t>
-            </a:r>
-            <a:r>
-              <a:rPr lang="en-US" b="1" dirty="0"/>
-              <a:t>objects</a:t>
-            </a:r>
-            <a:r>
-              <a:rPr lang="en-US" dirty="0"/>
-              <a:t>, but not class </a:t>
-            </a:r>
-            <a:r>
-              <a:rPr lang="en-US" b="1" dirty="0"/>
-              <a:t>inheritance</a:t>
-            </a:r>
-          </a:p>
-          <a:p>
-            <a:r>
-              <a:rPr lang="en-US" dirty="0"/>
-              <a:t>Defining “object-oriented” is controversial</a:t>
-            </a:r>
-          </a:p>
-          <a:p>
-            <a:pPr lvl="1"/>
-            <a:r>
-              <a:rPr lang="en-US" dirty="0"/>
-              <a:t>Skip that debate</a:t>
-            </a:r>
-          </a:p>
-          <a:p>
-            <a:pPr lvl="1"/>
-            <a:r>
-              <a:rPr lang="en-US" dirty="0"/>
-              <a:t>How do we share behavior across related types?</a:t>
-            </a:r>
-          </a:p>
-          <a:p>
-            <a:pPr lvl="1"/>
-            <a:r>
-              <a:rPr lang="en-US" dirty="0"/>
-              <a:t>How can different types share the same role?</a:t>
-            </a:r>
-          </a:p>
-          <a:p>
-            <a:r>
-              <a:rPr lang="en-US" dirty="0"/>
-              <a:t>Credentials: C++, C#, Python*, Smalltalk</a:t>
-            </a:r>
-          </a:p>
-          <a:p>
-            <a:r>
-              <a:rPr lang="en-US" dirty="0"/>
-              <a:t>Format: 9 puzzles &amp; Rust solutions</a:t>
-            </a:r>
-          </a:p>
-          <a:p>
-            <a:pPr lvl="1"/>
-            <a:r>
-              <a:rPr lang="en-US" dirty="0"/>
-              <a:t>inspired by real code</a:t>
-            </a:r>
-          </a:p>
-          <a:p>
-            <a:pPr lvl="1"/>
-            <a:r>
-              <a:rPr lang="en-US" dirty="0"/>
-              <a:t>discussion welcome</a:t>
-            </a:r>
-          </a:p>
-          <a:p>
-            <a:pPr marL="0" indent="0">
-              <a:buNone/>
-            </a:pPr>
-            <a:endParaRPr lang="en-US" dirty="0"/>
-          </a:p>
-        </p:txBody>
-      </p:sp>
+        </p:nvGraphicFramePr>
+        <p:xfrm>
+          <a:off x="4905052" y="750440"/>
+          <a:ext cx="6666833" cy="5453920"/>
+        </p:xfrm>
+        <a:graphic>
+          <a:graphicData uri="http://schemas.openxmlformats.org/drawingml/2006/diagram">
+            <dgm:relIds xmlns:dgm="http://schemas.openxmlformats.org/drawingml/2006/diagram" xmlns:r="http://schemas.openxmlformats.org/officeDocument/2006/relationships" r:dm="rId2" r:lo="rId3" r:qs="rId4" r:cs="rId5"/>
+          </a:graphicData>
+        </a:graphic>
+      </p:graphicFrame>
     </p:spTree>
     <p:extLst>
       <p:ext uri="{BB962C8B-B14F-4D97-AF65-F5344CB8AC3E}">
